--- a/templates/레이아웃.pptx
+++ b/templates/레이아웃.pptx
@@ -5,7 +5,7 @@
     <p:sldMasterId id="2147483660" r:id="rId1"/>
   </p:sldMasterIdLst>
   <p:notesMasterIdLst>
-    <p:notesMasterId r:id="rId12"/>
+    <p:notesMasterId r:id="rId13"/>
   </p:notesMasterIdLst>
   <p:sldIdLst>
     <p:sldId id="262" r:id="rId2"/>
@@ -13,11 +13,12 @@
     <p:sldId id="507" r:id="rId4"/>
     <p:sldId id="270" r:id="rId5"/>
     <p:sldId id="271" r:id="rId6"/>
-    <p:sldId id="304" r:id="rId7"/>
-    <p:sldId id="328" r:id="rId8"/>
-    <p:sldId id="506" r:id="rId9"/>
-    <p:sldId id="305" r:id="rId10"/>
-    <p:sldId id="312" r:id="rId11"/>
+    <p:sldId id="303" r:id="rId7"/>
+    <p:sldId id="304" r:id="rId8"/>
+    <p:sldId id="328" r:id="rId9"/>
+    <p:sldId id="506" r:id="rId10"/>
+    <p:sldId id="305" r:id="rId11"/>
+    <p:sldId id="312" r:id="rId12"/>
   </p:sldIdLst>
   <p:sldSz cx="9906000" cy="6858000" type="A4"/>
   <p:notesSz cx="6797675" cy="9926638"/>
@@ -220,7 +221,7 @@
           <a:p>
             <a:fld id="{E7FB0CBE-BEF5-4768-88B7-C8D33A226F82}" type="datetimeFigureOut">
               <a:rPr lang="ko-KR" altLang="en-US" smtClean="0"/>
-              <a:t>2026-07-21</a:t>
+              <a:t>2026-07-22</a:t>
             </a:fld>
             <a:endParaRPr lang="ko-KR" altLang="en-US"/>
           </a:p>
@@ -702,7 +703,7 @@
           <a:p>
             <a:fld id="{62E3A85F-5A81-4A2C-ADB7-CB9A7B252CB6}" type="datetimeFigureOut">
               <a:rPr lang="ko-KR" altLang="en-US" smtClean="0"/>
-              <a:t>2026-07-21</a:t>
+              <a:t>2026-07-22</a:t>
             </a:fld>
             <a:endParaRPr lang="ko-KR" altLang="en-US"/>
           </a:p>
@@ -872,7 +873,7 @@
           <a:p>
             <a:fld id="{62E3A85F-5A81-4A2C-ADB7-CB9A7B252CB6}" type="datetimeFigureOut">
               <a:rPr lang="ko-KR" altLang="en-US" smtClean="0"/>
-              <a:t>2026-07-21</a:t>
+              <a:t>2026-07-22</a:t>
             </a:fld>
             <a:endParaRPr lang="ko-KR" altLang="en-US"/>
           </a:p>
@@ -1052,7 +1053,7 @@
           <a:p>
             <a:fld id="{62E3A85F-5A81-4A2C-ADB7-CB9A7B252CB6}" type="datetimeFigureOut">
               <a:rPr lang="ko-KR" altLang="en-US" smtClean="0"/>
-              <a:t>2026-07-21</a:t>
+              <a:t>2026-07-22</a:t>
             </a:fld>
             <a:endParaRPr lang="ko-KR" altLang="en-US"/>
           </a:p>
@@ -1640,7 +1641,7 @@
           <a:p>
             <a:fld id="{62E3A85F-5A81-4A2C-ADB7-CB9A7B252CB6}" type="datetimeFigureOut">
               <a:rPr lang="ko-KR" altLang="en-US" smtClean="0"/>
-              <a:t>2026-07-21</a:t>
+              <a:t>2026-07-22</a:t>
             </a:fld>
             <a:endParaRPr lang="ko-KR" altLang="en-US"/>
           </a:p>
@@ -1884,7 +1885,7 @@
           <a:p>
             <a:fld id="{62E3A85F-5A81-4A2C-ADB7-CB9A7B252CB6}" type="datetimeFigureOut">
               <a:rPr lang="ko-KR" altLang="en-US" smtClean="0"/>
-              <a:t>2026-07-21</a:t>
+              <a:t>2026-07-22</a:t>
             </a:fld>
             <a:endParaRPr lang="ko-KR" altLang="en-US"/>
           </a:p>
@@ -2116,7 +2117,7 @@
           <a:p>
             <a:fld id="{62E3A85F-5A81-4A2C-ADB7-CB9A7B252CB6}" type="datetimeFigureOut">
               <a:rPr lang="ko-KR" altLang="en-US" smtClean="0"/>
-              <a:t>2026-07-21</a:t>
+              <a:t>2026-07-22</a:t>
             </a:fld>
             <a:endParaRPr lang="ko-KR" altLang="en-US"/>
           </a:p>
@@ -2483,7 +2484,7 @@
           <a:p>
             <a:fld id="{62E3A85F-5A81-4A2C-ADB7-CB9A7B252CB6}" type="datetimeFigureOut">
               <a:rPr lang="ko-KR" altLang="en-US" smtClean="0"/>
-              <a:t>2026-07-21</a:t>
+              <a:t>2026-07-22</a:t>
             </a:fld>
             <a:endParaRPr lang="ko-KR" altLang="en-US"/>
           </a:p>
@@ -2601,7 +2602,7 @@
           <a:p>
             <a:fld id="{62E3A85F-5A81-4A2C-ADB7-CB9A7B252CB6}" type="datetimeFigureOut">
               <a:rPr lang="ko-KR" altLang="en-US" smtClean="0"/>
-              <a:t>2026-07-21</a:t>
+              <a:t>2026-07-22</a:t>
             </a:fld>
             <a:endParaRPr lang="ko-KR" altLang="en-US"/>
           </a:p>
@@ -2696,7 +2697,7 @@
           <a:p>
             <a:fld id="{62E3A85F-5A81-4A2C-ADB7-CB9A7B252CB6}" type="datetimeFigureOut">
               <a:rPr lang="ko-KR" altLang="en-US" smtClean="0"/>
-              <a:t>2026-07-21</a:t>
+              <a:t>2026-07-22</a:t>
             </a:fld>
             <a:endParaRPr lang="ko-KR" altLang="en-US"/>
           </a:p>
@@ -2973,7 +2974,7 @@
           <a:p>
             <a:fld id="{62E3A85F-5A81-4A2C-ADB7-CB9A7B252CB6}" type="datetimeFigureOut">
               <a:rPr lang="ko-KR" altLang="en-US" smtClean="0"/>
-              <a:t>2026-07-21</a:t>
+              <a:t>2026-07-22</a:t>
             </a:fld>
             <a:endParaRPr lang="ko-KR" altLang="en-US"/>
           </a:p>
@@ -3230,7 +3231,7 @@
           <a:p>
             <a:fld id="{62E3A85F-5A81-4A2C-ADB7-CB9A7B252CB6}" type="datetimeFigureOut">
               <a:rPr lang="ko-KR" altLang="en-US" smtClean="0"/>
-              <a:t>2026-07-21</a:t>
+              <a:t>2026-07-22</a:t>
             </a:fld>
             <a:endParaRPr lang="ko-KR" altLang="en-US"/>
           </a:p>
@@ -3443,7 +3444,7 @@
           <a:p>
             <a:fld id="{62E3A85F-5A81-4A2C-ADB7-CB9A7B252CB6}" type="datetimeFigureOut">
               <a:rPr lang="ko-KR" altLang="en-US" smtClean="0"/>
-              <a:t>2026-07-21</a:t>
+              <a:t>2026-07-22</a:t>
             </a:fld>
             <a:endParaRPr lang="ko-KR" altLang="en-US"/>
           </a:p>
@@ -4666,6 +4667,460 @@
           <a:chExt cx="0" cy="0"/>
         </a:xfrm>
       </p:grpSpPr>
+      <p:sp>
+        <p:nvSpPr>
+          <p:cNvPr id="4" name="텍스트 개체 틀 3"/>
+          <p:cNvSpPr>
+            <a:spLocks noGrp="1"/>
+          </p:cNvSpPr>
+          <p:nvPr>
+            <p:ph type="body" sz="quarter" idx="10"/>
+          </p:nvPr>
+        </p:nvSpPr>
+        <p:spPr/>
+        <p:txBody>
+          <a:bodyPr/>
+          <a:lstStyle/>
+          <a:p>
+            <a:pPr lvl="0">
+              <a:defRPr/>
+            </a:pPr>
+            <a:r>
+              <a:rPr lang="ko-KR" altLang="en-US" dirty="0">
+                <a:latin typeface="피플폰트 Bold" panose="020B0600000101010101" pitchFamily="50" charset="-127"/>
+                <a:ea typeface="피플폰트 Bold" panose="020B0600000101010101" pitchFamily="50" charset="-127"/>
+              </a:rPr>
+              <a:t>제목</a:t>
+            </a:r>
+          </a:p>
+        </p:txBody>
+      </p:sp>
+      <p:sp>
+        <p:nvSpPr>
+          <p:cNvPr id="2" name="텍스트 개체 틀 4">
+            <a:extLst>
+              <a:ext uri="{FF2B5EF4-FFF2-40B4-BE49-F238E27FC236}">
+                <a16:creationId xmlns:a16="http://schemas.microsoft.com/office/drawing/2014/main" id="{10D206EE-4599-9CC4-A08C-CA49006EA536}"/>
+              </a:ext>
+            </a:extLst>
+          </p:cNvPr>
+          <p:cNvSpPr>
+            <a:spLocks noGrp="1"/>
+          </p:cNvSpPr>
+          <p:nvPr>
+            <p:ph type="body" sz="quarter" idx="11"/>
+          </p:nvPr>
+        </p:nvSpPr>
+        <p:spPr/>
+        <p:txBody>
+          <a:bodyPr/>
+          <a:lstStyle/>
+          <a:p>
+            <a:r>
+              <a:rPr lang="ko-KR" altLang="en-US" dirty="0">
+                <a:latin typeface="피플폰트 Bold" panose="020B0600000101010101" pitchFamily="50" charset="-127"/>
+                <a:ea typeface="피플폰트 Bold" panose="020B0600000101010101" pitchFamily="50" charset="-127"/>
+              </a:rPr>
+              <a:t>소제목</a:t>
+            </a:r>
+          </a:p>
+        </p:txBody>
+      </p:sp>
+      <p:sp>
+        <p:nvSpPr>
+          <p:cNvPr id="18" name="텍스트 개체 틀 2">
+            <a:extLst>
+              <a:ext uri="{FF2B5EF4-FFF2-40B4-BE49-F238E27FC236}">
+                <a16:creationId xmlns:a16="http://schemas.microsoft.com/office/drawing/2014/main" id="{E2A2AC6F-E152-4C5D-9AAC-4E8A0AA8A9CE}"/>
+              </a:ext>
+            </a:extLst>
+          </p:cNvPr>
+          <p:cNvSpPr txBox="1">
+            <a:spLocks/>
+          </p:cNvSpPr>
+          <p:nvPr/>
+        </p:nvSpPr>
+        <p:spPr>
+          <a:xfrm>
+            <a:off x="393698" y="823870"/>
+            <a:ext cx="9118602" cy="489117"/>
+          </a:xfrm>
+          <a:prstGeom prst="rect">
+            <a:avLst/>
+          </a:prstGeom>
+        </p:spPr>
+        <p:txBody>
+          <a:bodyPr vert="horz" lIns="91440" tIns="45720" rIns="91440" bIns="45720" rtlCol="0">
+            <a:noAutofit/>
+          </a:bodyPr>
+          <a:lstStyle>
+            <a:lvl1pPr marL="228600" indent="-228600" algn="l" defTabSz="914400" rtl="0" eaLnBrk="1" latinLnBrk="1" hangingPunct="1">
+              <a:lnSpc>
+                <a:spcPct val="90000"/>
+              </a:lnSpc>
+              <a:spcBef>
+                <a:spcPts val="1000"/>
+              </a:spcBef>
+              <a:buFont typeface="Arial" panose="020B0604020202020204" pitchFamily="34" charset="0"/>
+              <a:buChar char="•"/>
+              <a:defRPr sz="2800" kern="1200">
+                <a:solidFill>
+                  <a:schemeClr val="tx1"/>
+                </a:solidFill>
+                <a:latin typeface="+mn-lt"/>
+                <a:ea typeface="+mn-ea"/>
+                <a:cs typeface="+mn-cs"/>
+              </a:defRPr>
+            </a:lvl1pPr>
+            <a:lvl2pPr marL="685800" indent="-228600" algn="l" defTabSz="914400" rtl="0" eaLnBrk="1" latinLnBrk="1" hangingPunct="1">
+              <a:lnSpc>
+                <a:spcPct val="90000"/>
+              </a:lnSpc>
+              <a:spcBef>
+                <a:spcPts val="500"/>
+              </a:spcBef>
+              <a:buFont typeface="Arial" panose="020B0604020202020204" pitchFamily="34" charset="0"/>
+              <a:buChar char="•"/>
+              <a:defRPr sz="2400" kern="1200">
+                <a:solidFill>
+                  <a:schemeClr val="tx1"/>
+                </a:solidFill>
+                <a:latin typeface="+mn-lt"/>
+                <a:ea typeface="+mn-ea"/>
+                <a:cs typeface="+mn-cs"/>
+              </a:defRPr>
+            </a:lvl2pPr>
+            <a:lvl3pPr marL="1143000" indent="-228600" algn="l" defTabSz="914400" rtl="0" eaLnBrk="1" latinLnBrk="1" hangingPunct="1">
+              <a:lnSpc>
+                <a:spcPct val="90000"/>
+              </a:lnSpc>
+              <a:spcBef>
+                <a:spcPts val="500"/>
+              </a:spcBef>
+              <a:buFont typeface="Arial" panose="020B0604020202020204" pitchFamily="34" charset="0"/>
+              <a:buChar char="•"/>
+              <a:defRPr sz="2000" kern="1200">
+                <a:solidFill>
+                  <a:schemeClr val="tx1"/>
+                </a:solidFill>
+                <a:latin typeface="+mn-lt"/>
+                <a:ea typeface="+mn-ea"/>
+                <a:cs typeface="+mn-cs"/>
+              </a:defRPr>
+            </a:lvl3pPr>
+            <a:lvl4pPr marL="1600200" indent="-228600" algn="l" defTabSz="914400" rtl="0" eaLnBrk="1" latinLnBrk="1" hangingPunct="1">
+              <a:lnSpc>
+                <a:spcPct val="90000"/>
+              </a:lnSpc>
+              <a:spcBef>
+                <a:spcPts val="500"/>
+              </a:spcBef>
+              <a:buFont typeface="Arial" panose="020B0604020202020204" pitchFamily="34" charset="0"/>
+              <a:buChar char="•"/>
+              <a:defRPr sz="1800" kern="1200">
+                <a:solidFill>
+                  <a:schemeClr val="tx1"/>
+                </a:solidFill>
+                <a:latin typeface="+mn-lt"/>
+                <a:ea typeface="+mn-ea"/>
+                <a:cs typeface="+mn-cs"/>
+              </a:defRPr>
+            </a:lvl4pPr>
+            <a:lvl5pPr marL="2057400" indent="-228600" algn="l" defTabSz="914400" rtl="0" eaLnBrk="1" latinLnBrk="1" hangingPunct="1">
+              <a:lnSpc>
+                <a:spcPct val="90000"/>
+              </a:lnSpc>
+              <a:spcBef>
+                <a:spcPts val="500"/>
+              </a:spcBef>
+              <a:buFont typeface="Arial" panose="020B0604020202020204" pitchFamily="34" charset="0"/>
+              <a:buChar char="•"/>
+              <a:defRPr sz="1800" kern="1200">
+                <a:solidFill>
+                  <a:schemeClr val="tx1"/>
+                </a:solidFill>
+                <a:latin typeface="+mn-lt"/>
+                <a:ea typeface="+mn-ea"/>
+                <a:cs typeface="+mn-cs"/>
+              </a:defRPr>
+            </a:lvl5pPr>
+            <a:lvl6pPr marL="2514600" indent="-228600" algn="l" defTabSz="914400" rtl="0" eaLnBrk="1" latinLnBrk="1" hangingPunct="1">
+              <a:lnSpc>
+                <a:spcPct val="90000"/>
+              </a:lnSpc>
+              <a:spcBef>
+                <a:spcPts val="500"/>
+              </a:spcBef>
+              <a:buFont typeface="Arial" panose="020B0604020202020204" pitchFamily="34" charset="0"/>
+              <a:buChar char="•"/>
+              <a:defRPr sz="1800" kern="1200">
+                <a:solidFill>
+                  <a:schemeClr val="tx1"/>
+                </a:solidFill>
+                <a:latin typeface="+mn-lt"/>
+                <a:ea typeface="+mn-ea"/>
+                <a:cs typeface="+mn-cs"/>
+              </a:defRPr>
+            </a:lvl6pPr>
+            <a:lvl7pPr marL="2971800" indent="-228600" algn="l" defTabSz="914400" rtl="0" eaLnBrk="1" latinLnBrk="1" hangingPunct="1">
+              <a:lnSpc>
+                <a:spcPct val="90000"/>
+              </a:lnSpc>
+              <a:spcBef>
+                <a:spcPts val="500"/>
+              </a:spcBef>
+              <a:buFont typeface="Arial" panose="020B0604020202020204" pitchFamily="34" charset="0"/>
+              <a:buChar char="•"/>
+              <a:defRPr sz="1800" kern="1200">
+                <a:solidFill>
+                  <a:schemeClr val="tx1"/>
+                </a:solidFill>
+                <a:latin typeface="+mn-lt"/>
+                <a:ea typeface="+mn-ea"/>
+                <a:cs typeface="+mn-cs"/>
+              </a:defRPr>
+            </a:lvl7pPr>
+            <a:lvl8pPr marL="3429000" indent="-228600" algn="l" defTabSz="914400" rtl="0" eaLnBrk="1" latinLnBrk="1" hangingPunct="1">
+              <a:lnSpc>
+                <a:spcPct val="90000"/>
+              </a:lnSpc>
+              <a:spcBef>
+                <a:spcPts val="500"/>
+              </a:spcBef>
+              <a:buFont typeface="Arial" panose="020B0604020202020204" pitchFamily="34" charset="0"/>
+              <a:buChar char="•"/>
+              <a:defRPr sz="1800" kern="1200">
+                <a:solidFill>
+                  <a:schemeClr val="tx1"/>
+                </a:solidFill>
+                <a:latin typeface="+mn-lt"/>
+                <a:ea typeface="+mn-ea"/>
+                <a:cs typeface="+mn-cs"/>
+              </a:defRPr>
+            </a:lvl8pPr>
+            <a:lvl9pPr marL="3886200" indent="-228600" algn="l" defTabSz="914400" rtl="0" eaLnBrk="1" latinLnBrk="1" hangingPunct="1">
+              <a:lnSpc>
+                <a:spcPct val="90000"/>
+              </a:lnSpc>
+              <a:spcBef>
+                <a:spcPts val="500"/>
+              </a:spcBef>
+              <a:buFont typeface="Arial" panose="020B0604020202020204" pitchFamily="34" charset="0"/>
+              <a:buChar char="•"/>
+              <a:defRPr sz="1800" kern="1200">
+                <a:solidFill>
+                  <a:schemeClr val="tx1"/>
+                </a:solidFill>
+                <a:latin typeface="+mn-lt"/>
+                <a:ea typeface="+mn-ea"/>
+                <a:cs typeface="+mn-cs"/>
+              </a:defRPr>
+            </a:lvl9pPr>
+          </a:lstStyle>
+          <a:p>
+            <a:pPr marL="0" lvl="0" indent="0">
+              <a:lnSpc>
+                <a:spcPct val="130000"/>
+              </a:lnSpc>
+              <a:spcBef>
+                <a:spcPts val="0"/>
+              </a:spcBef>
+              <a:buNone/>
+              <a:defRPr/>
+            </a:pPr>
+            <a:r>
+              <a:rPr lang="ko-KR" altLang="en-US" sz="1000" dirty="0">
+                <a:latin typeface="피플폰트 Bold" panose="020B0600000101010101" pitchFamily="50" charset="-127"/>
+                <a:ea typeface="피플폰트 Bold" panose="020B0600000101010101" pitchFamily="50" charset="-127"/>
+              </a:rPr>
+              <a:t>페이지 요약</a:t>
+            </a:r>
+          </a:p>
+        </p:txBody>
+      </p:sp>
+      <p:sp>
+        <p:nvSpPr>
+          <p:cNvPr id="11" name="슬라이드 번호 개체 틀 1">
+            <a:extLst>
+              <a:ext uri="{FF2B5EF4-FFF2-40B4-BE49-F238E27FC236}">
+                <a16:creationId xmlns:a16="http://schemas.microsoft.com/office/drawing/2014/main" id="{7C2A9A1C-92B7-4856-B43A-49BFF81DD5F8}"/>
+              </a:ext>
+            </a:extLst>
+          </p:cNvPr>
+          <p:cNvSpPr txBox="1">
+            <a:spLocks/>
+          </p:cNvSpPr>
+          <p:nvPr/>
+        </p:nvSpPr>
+        <p:spPr>
+          <a:xfrm>
+            <a:off x="6567488" y="6576219"/>
+            <a:ext cx="3097212" cy="227169"/>
+          </a:xfrm>
+          <a:prstGeom prst="rect">
+            <a:avLst/>
+          </a:prstGeom>
+        </p:spPr>
+        <p:txBody>
+          <a:bodyPr vert="horz" lIns="91440" tIns="45720" rIns="0" bIns="45720" rtlCol="0" anchor="ctr"/>
+          <a:lstStyle>
+            <a:defPPr>
+              <a:defRPr lang="en-US"/>
+            </a:defPPr>
+            <a:lvl1pPr marL="0" algn="r" defTabSz="457200" rtl="0" eaLnBrk="1" latinLnBrk="0" hangingPunct="1">
+              <a:defRPr sz="800" kern="1200">
+                <a:solidFill>
+                  <a:schemeClr val="tx1">
+                    <a:tint val="75000"/>
+                  </a:schemeClr>
+                </a:solidFill>
+                <a:latin typeface="+mn-ea"/>
+                <a:ea typeface="+mn-ea"/>
+                <a:cs typeface="+mn-cs"/>
+              </a:defRPr>
+            </a:lvl1pPr>
+            <a:lvl2pPr marL="457200" algn="l" defTabSz="457200" rtl="0" eaLnBrk="1" latinLnBrk="0" hangingPunct="1">
+              <a:defRPr sz="1800" kern="1200">
+                <a:solidFill>
+                  <a:schemeClr val="tx1"/>
+                </a:solidFill>
+                <a:latin typeface="+mn-lt"/>
+                <a:ea typeface="+mn-ea"/>
+                <a:cs typeface="+mn-cs"/>
+              </a:defRPr>
+            </a:lvl2pPr>
+            <a:lvl3pPr marL="914400" algn="l" defTabSz="457200" rtl="0" eaLnBrk="1" latinLnBrk="0" hangingPunct="1">
+              <a:defRPr sz="1800" kern="1200">
+                <a:solidFill>
+                  <a:schemeClr val="tx1"/>
+                </a:solidFill>
+                <a:latin typeface="+mn-lt"/>
+                <a:ea typeface="+mn-ea"/>
+                <a:cs typeface="+mn-cs"/>
+              </a:defRPr>
+            </a:lvl3pPr>
+            <a:lvl4pPr marL="1371600" algn="l" defTabSz="457200" rtl="0" eaLnBrk="1" latinLnBrk="0" hangingPunct="1">
+              <a:defRPr sz="1800" kern="1200">
+                <a:solidFill>
+                  <a:schemeClr val="tx1"/>
+                </a:solidFill>
+                <a:latin typeface="+mn-lt"/>
+                <a:ea typeface="+mn-ea"/>
+                <a:cs typeface="+mn-cs"/>
+              </a:defRPr>
+            </a:lvl4pPr>
+            <a:lvl5pPr marL="1828800" algn="l" defTabSz="457200" rtl="0" eaLnBrk="1" latinLnBrk="0" hangingPunct="1">
+              <a:defRPr sz="1800" kern="1200">
+                <a:solidFill>
+                  <a:schemeClr val="tx1"/>
+                </a:solidFill>
+                <a:latin typeface="+mn-lt"/>
+                <a:ea typeface="+mn-ea"/>
+                <a:cs typeface="+mn-cs"/>
+              </a:defRPr>
+            </a:lvl5pPr>
+            <a:lvl6pPr marL="2286000" algn="l" defTabSz="457200" rtl="0" eaLnBrk="1" latinLnBrk="0" hangingPunct="1">
+              <a:defRPr sz="1800" kern="1200">
+                <a:solidFill>
+                  <a:schemeClr val="tx1"/>
+                </a:solidFill>
+                <a:latin typeface="+mn-lt"/>
+                <a:ea typeface="+mn-ea"/>
+                <a:cs typeface="+mn-cs"/>
+              </a:defRPr>
+            </a:lvl6pPr>
+            <a:lvl7pPr marL="2743200" algn="l" defTabSz="457200" rtl="0" eaLnBrk="1" latinLnBrk="0" hangingPunct="1">
+              <a:defRPr sz="1800" kern="1200">
+                <a:solidFill>
+                  <a:schemeClr val="tx1"/>
+                </a:solidFill>
+                <a:latin typeface="+mn-lt"/>
+                <a:ea typeface="+mn-ea"/>
+                <a:cs typeface="+mn-cs"/>
+              </a:defRPr>
+            </a:lvl7pPr>
+            <a:lvl8pPr marL="3200400" algn="l" defTabSz="457200" rtl="0" eaLnBrk="1" latinLnBrk="0" hangingPunct="1">
+              <a:defRPr sz="1800" kern="1200">
+                <a:solidFill>
+                  <a:schemeClr val="tx1"/>
+                </a:solidFill>
+                <a:latin typeface="+mn-lt"/>
+                <a:ea typeface="+mn-ea"/>
+                <a:cs typeface="+mn-cs"/>
+              </a:defRPr>
+            </a:lvl8pPr>
+            <a:lvl9pPr marL="3657600" algn="l" defTabSz="457200" rtl="0" eaLnBrk="1" latinLnBrk="0" hangingPunct="1">
+              <a:defRPr sz="1800" kern="1200">
+                <a:solidFill>
+                  <a:schemeClr val="tx1"/>
+                </a:solidFill>
+                <a:latin typeface="+mn-lt"/>
+                <a:ea typeface="+mn-ea"/>
+                <a:cs typeface="+mn-cs"/>
+              </a:defRPr>
+            </a:lvl9pPr>
+          </a:lstStyle>
+          <a:p>
+            <a:pPr>
+              <a:defRPr/>
+            </a:pPr>
+            <a:r>
+              <a:rPr lang="ko-KR" altLang="en-US" dirty="0">
+                <a:latin typeface="피플폰트 Light" panose="020B0600000101010101" pitchFamily="50" charset="-127"/>
+                <a:ea typeface="피플폰트 Light" panose="020B0600000101010101" pitchFamily="50" charset="-127"/>
+              </a:rPr>
+              <a:t>사업명｜</a:t>
+            </a:r>
+            <a:r>
+              <a:rPr lang="en-US" altLang="ko-KR" dirty="0">
+                <a:latin typeface="피플폰트 Light" panose="020B0600000101010101" pitchFamily="50" charset="-127"/>
+                <a:ea typeface="피플폰트 Light" panose="020B0600000101010101" pitchFamily="50" charset="-127"/>
+              </a:rPr>
+              <a:t>  </a:t>
+            </a:r>
+            <a:fld id="{F3A57096-21A8-44ED-AF94-8A259496D2BE}" type="slidenum">
+              <a:rPr lang="en-US" altLang="en-US" smtClean="0">
+                <a:latin typeface="피플폰트 Light" panose="020B0600000101010101" pitchFamily="50" charset="-127"/>
+                <a:ea typeface="피플폰트 Light" panose="020B0600000101010101" pitchFamily="50" charset="-127"/>
+              </a:rPr>
+              <a:pPr>
+                <a:defRPr/>
+              </a:pPr>
+              <a:t>10</a:t>
+            </a:fld>
+            <a:endParaRPr lang="en-US" altLang="en-US" dirty="0">
+              <a:latin typeface="피플폰트 Light" panose="020B0600000101010101" pitchFamily="50" charset="-127"/>
+              <a:ea typeface="피플폰트 Light" panose="020B0600000101010101" pitchFamily="50" charset="-127"/>
+            </a:endParaRPr>
+          </a:p>
+        </p:txBody>
+      </p:sp>
+    </p:spTree>
+  </p:cSld>
+  <p:clrMapOvr>
+    <a:masterClrMapping/>
+  </p:clrMapOvr>
+  <p:transition/>
+</p:sld>
+</file>
+
+<file path=ppt/slides/slide11.xml><?xml version="1.0" encoding="utf-8"?>
+<p:sld xmlns:a="http://schemas.openxmlformats.org/drawingml/2006/main" xmlns:r="http://schemas.openxmlformats.org/officeDocument/2006/relationships" xmlns:p="http://schemas.openxmlformats.org/presentationml/2006/main">
+  <p:cSld>
+    <p:spTree>
+      <p:nvGrpSpPr>
+        <p:cNvPr id="1" name=""/>
+        <p:cNvGrpSpPr/>
+        <p:nvPr/>
+      </p:nvGrpSpPr>
+      <p:grpSpPr>
+        <a:xfrm>
+          <a:off x="0" y="0"/>
+          <a:ext cx="0" cy="0"/>
+          <a:chOff x="0" y="0"/>
+          <a:chExt cx="0" cy="0"/>
+        </a:xfrm>
+      </p:grpSpPr>
       <p:pic>
         <p:nvPicPr>
           <p:cNvPr id="14" name="그림 13">
@@ -11187,6 +11642,2300 @@
           <a:chExt cx="0" cy="0"/>
         </a:xfrm>
       </p:grpSpPr>
+      <p:sp>
+        <p:nvSpPr>
+          <p:cNvPr id="9" name="텍스트 개체 틀 2">
+            <a:extLst>
+              <a:ext uri="{FF2B5EF4-FFF2-40B4-BE49-F238E27FC236}">
+                <a16:creationId xmlns:a16="http://schemas.microsoft.com/office/drawing/2014/main" id="{1FA3035A-768E-443A-806C-3941A656FFC4}"/>
+              </a:ext>
+            </a:extLst>
+          </p:cNvPr>
+          <p:cNvSpPr txBox="1">
+            <a:spLocks/>
+          </p:cNvSpPr>
+          <p:nvPr/>
+        </p:nvSpPr>
+        <p:spPr>
+          <a:xfrm>
+            <a:off x="393700" y="926999"/>
+            <a:ext cx="7912100" cy="349711"/>
+          </a:xfrm>
+          <a:prstGeom prst="rect">
+            <a:avLst/>
+          </a:prstGeom>
+        </p:spPr>
+        <p:txBody>
+          <a:bodyPr vert="horz" wrap="square" lIns="0" tIns="0" rIns="0" bIns="0" rtlCol="0" anchor="ctr">
+            <a:spAutoFit/>
+          </a:bodyPr>
+          <a:lstStyle>
+            <a:lvl1pPr marL="0" indent="0" algn="l" defTabSz="914400" rtl="0" eaLnBrk="1" latinLnBrk="1" hangingPunct="1">
+              <a:lnSpc>
+                <a:spcPct val="90000"/>
+              </a:lnSpc>
+              <a:spcBef>
+                <a:spcPts val="1000"/>
+              </a:spcBef>
+              <a:buFont typeface="Arial" panose="020B0604020202020204" pitchFamily="34" charset="0"/>
+              <a:buNone/>
+              <a:defRPr sz="1200" kern="1200">
+                <a:solidFill>
+                  <a:schemeClr val="tx1"/>
+                </a:solidFill>
+                <a:latin typeface="AppleSDGothicNeoM00" panose="02000503000000000000" pitchFamily="2" charset="-127"/>
+                <a:ea typeface="AppleSDGothicNeoM00" panose="02000503000000000000" pitchFamily="2" charset="-127"/>
+                <a:cs typeface="+mn-cs"/>
+              </a:defRPr>
+            </a:lvl1pPr>
+            <a:lvl2pPr marL="685800" indent="-228600" algn="l" defTabSz="914400" rtl="0" eaLnBrk="1" latinLnBrk="1" hangingPunct="1">
+              <a:lnSpc>
+                <a:spcPct val="90000"/>
+              </a:lnSpc>
+              <a:spcBef>
+                <a:spcPts val="500"/>
+              </a:spcBef>
+              <a:buFont typeface="Arial" panose="020B0604020202020204" pitchFamily="34" charset="0"/>
+              <a:buChar char="•"/>
+              <a:defRPr sz="2400" kern="1200">
+                <a:solidFill>
+                  <a:schemeClr val="tx1"/>
+                </a:solidFill>
+                <a:latin typeface="+mn-lt"/>
+                <a:ea typeface="+mn-ea"/>
+                <a:cs typeface="+mn-cs"/>
+              </a:defRPr>
+            </a:lvl2pPr>
+            <a:lvl3pPr marL="1143000" indent="-228600" algn="l" defTabSz="914400" rtl="0" eaLnBrk="1" latinLnBrk="1" hangingPunct="1">
+              <a:lnSpc>
+                <a:spcPct val="90000"/>
+              </a:lnSpc>
+              <a:spcBef>
+                <a:spcPts val="500"/>
+              </a:spcBef>
+              <a:buFont typeface="Arial" panose="020B0604020202020204" pitchFamily="34" charset="0"/>
+              <a:buChar char="•"/>
+              <a:defRPr sz="2000" kern="1200">
+                <a:solidFill>
+                  <a:schemeClr val="tx1"/>
+                </a:solidFill>
+                <a:latin typeface="+mn-lt"/>
+                <a:ea typeface="+mn-ea"/>
+                <a:cs typeface="+mn-cs"/>
+              </a:defRPr>
+            </a:lvl3pPr>
+            <a:lvl4pPr marL="1600200" indent="-228600" algn="l" defTabSz="914400" rtl="0" eaLnBrk="1" latinLnBrk="1" hangingPunct="1">
+              <a:lnSpc>
+                <a:spcPct val="90000"/>
+              </a:lnSpc>
+              <a:spcBef>
+                <a:spcPts val="500"/>
+              </a:spcBef>
+              <a:buFont typeface="Arial" panose="020B0604020202020204" pitchFamily="34" charset="0"/>
+              <a:buChar char="•"/>
+              <a:defRPr sz="1800" kern="1200">
+                <a:solidFill>
+                  <a:schemeClr val="tx1"/>
+                </a:solidFill>
+                <a:latin typeface="+mn-lt"/>
+                <a:ea typeface="+mn-ea"/>
+                <a:cs typeface="+mn-cs"/>
+              </a:defRPr>
+            </a:lvl4pPr>
+            <a:lvl5pPr marL="2057400" indent="-228600" algn="l" defTabSz="914400" rtl="0" eaLnBrk="1" latinLnBrk="1" hangingPunct="1">
+              <a:lnSpc>
+                <a:spcPct val="90000"/>
+              </a:lnSpc>
+              <a:spcBef>
+                <a:spcPts val="500"/>
+              </a:spcBef>
+              <a:buFont typeface="Arial" panose="020B0604020202020204" pitchFamily="34" charset="0"/>
+              <a:buChar char="•"/>
+              <a:defRPr sz="1800" kern="1200">
+                <a:solidFill>
+                  <a:schemeClr val="tx1"/>
+                </a:solidFill>
+                <a:latin typeface="+mn-lt"/>
+                <a:ea typeface="+mn-ea"/>
+                <a:cs typeface="+mn-cs"/>
+              </a:defRPr>
+            </a:lvl5pPr>
+            <a:lvl6pPr marL="2514600" indent="-228600" algn="l" defTabSz="914400" rtl="0" eaLnBrk="1" latinLnBrk="1" hangingPunct="1">
+              <a:lnSpc>
+                <a:spcPct val="90000"/>
+              </a:lnSpc>
+              <a:spcBef>
+                <a:spcPts val="500"/>
+              </a:spcBef>
+              <a:buFont typeface="Arial" panose="020B0604020202020204" pitchFamily="34" charset="0"/>
+              <a:buChar char="•"/>
+              <a:defRPr sz="1800" kern="1200">
+                <a:solidFill>
+                  <a:schemeClr val="tx1"/>
+                </a:solidFill>
+                <a:latin typeface="+mn-lt"/>
+                <a:ea typeface="+mn-ea"/>
+                <a:cs typeface="+mn-cs"/>
+              </a:defRPr>
+            </a:lvl6pPr>
+            <a:lvl7pPr marL="2971800" indent="-228600" algn="l" defTabSz="914400" rtl="0" eaLnBrk="1" latinLnBrk="1" hangingPunct="1">
+              <a:lnSpc>
+                <a:spcPct val="90000"/>
+              </a:lnSpc>
+              <a:spcBef>
+                <a:spcPts val="500"/>
+              </a:spcBef>
+              <a:buFont typeface="Arial" panose="020B0604020202020204" pitchFamily="34" charset="0"/>
+              <a:buChar char="•"/>
+              <a:defRPr sz="1800" kern="1200">
+                <a:solidFill>
+                  <a:schemeClr val="tx1"/>
+                </a:solidFill>
+                <a:latin typeface="+mn-lt"/>
+                <a:ea typeface="+mn-ea"/>
+                <a:cs typeface="+mn-cs"/>
+              </a:defRPr>
+            </a:lvl7pPr>
+            <a:lvl8pPr marL="3429000" indent="-228600" algn="l" defTabSz="914400" rtl="0" eaLnBrk="1" latinLnBrk="1" hangingPunct="1">
+              <a:lnSpc>
+                <a:spcPct val="90000"/>
+              </a:lnSpc>
+              <a:spcBef>
+                <a:spcPts val="500"/>
+              </a:spcBef>
+              <a:buFont typeface="Arial" panose="020B0604020202020204" pitchFamily="34" charset="0"/>
+              <a:buChar char="•"/>
+              <a:defRPr sz="1800" kern="1200">
+                <a:solidFill>
+                  <a:schemeClr val="tx1"/>
+                </a:solidFill>
+                <a:latin typeface="+mn-lt"/>
+                <a:ea typeface="+mn-ea"/>
+                <a:cs typeface="+mn-cs"/>
+              </a:defRPr>
+            </a:lvl8pPr>
+            <a:lvl9pPr marL="3886200" indent="-228600" algn="l" defTabSz="914400" rtl="0" eaLnBrk="1" latinLnBrk="1" hangingPunct="1">
+              <a:lnSpc>
+                <a:spcPct val="90000"/>
+              </a:lnSpc>
+              <a:spcBef>
+                <a:spcPts val="500"/>
+              </a:spcBef>
+              <a:buFont typeface="Arial" panose="020B0604020202020204" pitchFamily="34" charset="0"/>
+              <a:buChar char="•"/>
+              <a:defRPr sz="1800" kern="1200">
+                <a:solidFill>
+                  <a:schemeClr val="tx1"/>
+                </a:solidFill>
+                <a:latin typeface="+mn-lt"/>
+                <a:ea typeface="+mn-ea"/>
+                <a:cs typeface="+mn-cs"/>
+              </a:defRPr>
+            </a:lvl9pPr>
+          </a:lstStyle>
+          <a:p>
+            <a:pPr>
+              <a:lnSpc>
+                <a:spcPct val="130000"/>
+              </a:lnSpc>
+              <a:spcBef>
+                <a:spcPts val="0"/>
+              </a:spcBef>
+            </a:pPr>
+            <a:r>
+              <a:rPr lang="ko-KR" altLang="en-US" sz="900" dirty="0">
+                <a:latin typeface="피플폰트 Bold" panose="020B0600000101010101" pitchFamily="50" charset="-127"/>
+                <a:ea typeface="피플폰트 Bold" panose="020B0600000101010101" pitchFamily="50" charset="-127"/>
+              </a:rPr>
+              <a:t>본건 사모사채는 </a:t>
+            </a:r>
+            <a:r>
+              <a:rPr lang="en-US" altLang="ko-KR" sz="900" dirty="0">
+                <a:latin typeface="피플폰트 Bold" panose="020B0600000101010101" pitchFamily="50" charset="-127"/>
+                <a:ea typeface="피플폰트 Bold" panose="020B0600000101010101" pitchFamily="50" charset="-127"/>
+              </a:rPr>
+              <a:t>(</a:t>
+            </a:r>
+            <a:r>
+              <a:rPr lang="ko-KR" altLang="en-US" sz="900" dirty="0">
+                <a:latin typeface="피플폰트 Bold" panose="020B0600000101010101" pitchFamily="50" charset="-127"/>
+                <a:ea typeface="피플폰트 Bold" panose="020B0600000101010101" pitchFamily="50" charset="-127"/>
+              </a:rPr>
+              <a:t>기초자산 이름</a:t>
+            </a:r>
+            <a:r>
+              <a:rPr lang="en-US" altLang="ko-KR" sz="900" dirty="0">
+                <a:latin typeface="피플폰트 Bold" panose="020B0600000101010101" pitchFamily="50" charset="-127"/>
+                <a:ea typeface="피플폰트 Bold" panose="020B0600000101010101" pitchFamily="50" charset="-127"/>
+              </a:rPr>
+              <a:t>)</a:t>
+            </a:r>
+            <a:r>
+              <a:rPr lang="ko-KR" altLang="en-US" sz="900" dirty="0">
+                <a:latin typeface="피플폰트 Bold" panose="020B0600000101010101" pitchFamily="50" charset="-127"/>
+                <a:ea typeface="피플폰트 Bold" panose="020B0600000101010101" pitchFamily="50" charset="-127"/>
+              </a:rPr>
+              <a:t>기초자산으로 발행하는 사모사채입니다</a:t>
+            </a:r>
+            <a:r>
+              <a:rPr lang="en-US" altLang="ko-KR" sz="900" dirty="0">
+                <a:latin typeface="피플폰트 Bold" panose="020B0600000101010101" pitchFamily="50" charset="-127"/>
+                <a:ea typeface="피플폰트 Bold" panose="020B0600000101010101" pitchFamily="50" charset="-127"/>
+              </a:rPr>
+              <a:t>. </a:t>
+            </a:r>
+          </a:p>
+          <a:p>
+            <a:pPr>
+              <a:lnSpc>
+                <a:spcPct val="130000"/>
+              </a:lnSpc>
+              <a:spcBef>
+                <a:spcPts val="0"/>
+              </a:spcBef>
+            </a:pPr>
+            <a:endParaRPr lang="en-US" altLang="ko-KR" sz="900" dirty="0">
+              <a:latin typeface="피플폰트 Bold" panose="020B0600000101010101" pitchFamily="50" charset="-127"/>
+              <a:ea typeface="피플폰트 Bold" panose="020B0600000101010101" pitchFamily="50" charset="-127"/>
+            </a:endParaRPr>
+          </a:p>
+        </p:txBody>
+      </p:sp>
+      <p:sp>
+        <p:nvSpPr>
+          <p:cNvPr id="4" name="텍스트 개체 틀 3"/>
+          <p:cNvSpPr>
+            <a:spLocks noGrp="1"/>
+          </p:cNvSpPr>
+          <p:nvPr>
+            <p:ph type="body" sz="quarter" idx="10"/>
+          </p:nvPr>
+        </p:nvSpPr>
+        <p:spPr/>
+        <p:txBody>
+          <a:bodyPr/>
+          <a:lstStyle/>
+          <a:p>
+            <a:pPr lvl="0">
+              <a:defRPr/>
+            </a:pPr>
+            <a:r>
+              <a:rPr lang="en-US" altLang="ko-KR" dirty="0">
+                <a:latin typeface="피플폰트 Bold" panose="020B0600000101010101" pitchFamily="50" charset="-127"/>
+                <a:ea typeface="피플폰트 Bold" panose="020B0600000101010101" pitchFamily="50" charset="-127"/>
+              </a:rPr>
+              <a:t>01  </a:t>
+            </a:r>
+            <a:r>
+              <a:rPr lang="ko-KR" altLang="en-US" dirty="0">
+                <a:latin typeface="피플폰트 Bold" panose="020B0600000101010101" pitchFamily="50" charset="-127"/>
+                <a:ea typeface="피플폰트 Bold" panose="020B0600000101010101" pitchFamily="50" charset="-127"/>
+              </a:rPr>
+              <a:t>사모사채 개요</a:t>
+            </a:r>
+          </a:p>
+        </p:txBody>
+      </p:sp>
+      <p:graphicFrame>
+        <p:nvGraphicFramePr>
+          <p:cNvPr id="16" name="표 16"/>
+          <p:cNvGraphicFramePr>
+            <a:graphicFrameLocks noGrp="1"/>
+          </p:cNvGraphicFramePr>
+          <p:nvPr>
+            <p:extLst>
+              <p:ext uri="{D42A27DB-BD31-4B8C-83A1-F6EECF244321}">
+                <p14:modId xmlns:p14="http://schemas.microsoft.com/office/powerpoint/2010/main" val="168901842"/>
+              </p:ext>
+            </p:extLst>
+          </p:nvPr>
+        </p:nvGraphicFramePr>
+        <p:xfrm>
+          <a:off x="304801" y="1447800"/>
+          <a:ext cx="9296400" cy="5012274"/>
+        </p:xfrm>
+        <a:graphic>
+          <a:graphicData uri="http://schemas.openxmlformats.org/drawingml/2006/table">
+            <a:tbl>
+              <a:tblPr firstRow="1" bandRow="1">
+                <a:tableStyleId>{5C22544A-7EE6-4342-B048-85BDC9FD1C3A}</a:tableStyleId>
+              </a:tblPr>
+              <a:tblGrid>
+                <a:gridCol w="1888237">
+                  <a:extLst>
+                    <a:ext uri="{9D8B030D-6E8A-4147-A177-3AD203B41FA5}">
+                      <a16:colId xmlns:a16="http://schemas.microsoft.com/office/drawing/2014/main" val="20000"/>
+                    </a:ext>
+                  </a:extLst>
+                </a:gridCol>
+                <a:gridCol w="7408163">
+                  <a:extLst>
+                    <a:ext uri="{9D8B030D-6E8A-4147-A177-3AD203B41FA5}">
+                      <a16:colId xmlns:a16="http://schemas.microsoft.com/office/drawing/2014/main" val="20001"/>
+                    </a:ext>
+                  </a:extLst>
+                </a:gridCol>
+              </a:tblGrid>
+              <a:tr h="553370">
+                <a:tc>
+                  <a:txBody>
+                    <a:bodyPr/>
+                    <a:lstStyle/>
+                    <a:p>
+                      <a:pPr marL="0" algn="ctr" defTabSz="914400" rtl="0" eaLnBrk="1" latinLnBrk="1" hangingPunct="1">
+                        <a:lnSpc>
+                          <a:spcPct val="115000"/>
+                        </a:lnSpc>
+                        <a:spcAft>
+                          <a:spcPts val="0"/>
+                        </a:spcAft>
+                        <a:defRPr/>
+                      </a:pPr>
+                      <a:r>
+                        <a:rPr lang="ko-KR" altLang="en-US" sz="1050" b="0" kern="1200" dirty="0">
+                          <a:solidFill>
+                            <a:schemeClr val="tx1"/>
+                          </a:solidFill>
+                          <a:latin typeface="피플폰트 Bold" panose="020B0600000101010101" pitchFamily="50" charset="-127"/>
+                          <a:ea typeface="피플폰트 Bold" panose="020B0600000101010101" pitchFamily="50" charset="-127"/>
+                          <a:cs typeface="+mn-cs"/>
+                        </a:rPr>
+                        <a:t>사모사채명</a:t>
+                      </a:r>
+                    </a:p>
+                  </a:txBody>
+                  <a:tcPr marL="51192" marR="51192" marT="7110" marB="0" anchor="ctr">
+                    <a:lnL w="12700" cmpd="sng">
+                      <a:noFill/>
+                    </a:lnL>
+                    <a:lnR w="12700" cmpd="sng">
+                      <a:noFill/>
+                    </a:lnR>
+                    <a:lnT w="6350" cap="flat" cmpd="sng" algn="ctr">
+                      <a:solidFill>
+                        <a:schemeClr val="bg1">
+                          <a:lumMod val="65000"/>
+                        </a:schemeClr>
+                      </a:solidFill>
+                      <a:prstDash val="solid"/>
+                      <a:round/>
+                      <a:headEnd w="med" len="med"/>
+                      <a:tailEnd w="med" len="med"/>
+                    </a:lnT>
+                    <a:lnB w="6350" cap="flat" cmpd="sng" algn="ctr">
+                      <a:solidFill>
+                        <a:schemeClr val="bg1">
+                          <a:lumMod val="65000"/>
+                        </a:schemeClr>
+                      </a:solidFill>
+                      <a:prstDash val="solid"/>
+                      <a:round/>
+                      <a:headEnd w="med" len="med"/>
+                      <a:tailEnd w="med" len="med"/>
+                    </a:lnB>
+                    <a:lnTlToBr w="12700" cmpd="sng">
+                      <a:noFill/>
+                      <a:prstDash val="solid"/>
+                    </a:lnTlToBr>
+                    <a:lnBlToTr w="12700" cmpd="sng">
+                      <a:noFill/>
+                      <a:prstDash val="solid"/>
+                    </a:lnBlToTr>
+                    <a:solidFill>
+                      <a:schemeClr val="bg1">
+                        <a:lumMod val="95000"/>
+                      </a:schemeClr>
+                    </a:solidFill>
+                  </a:tcPr>
+                </a:tc>
+                <a:tc>
+                  <a:txBody>
+                    <a:bodyPr/>
+                    <a:lstStyle/>
+                    <a:p>
+                      <a:pPr marL="0" lvl="0" indent="-342900" algn="l" defTabSz="914400" rtl="0" eaLnBrk="1" latinLnBrk="1" hangingPunct="1">
+                        <a:lnSpc>
+                          <a:spcPct val="115000"/>
+                        </a:lnSpc>
+                        <a:spcAft>
+                          <a:spcPts val="0"/>
+                        </a:spcAft>
+                        <a:buFont typeface="Arial" panose="020B0604020202020204" pitchFamily="34" charset="0"/>
+                        <a:buChar char="•"/>
+                        <a:tabLst>
+                          <a:tab pos="457200" algn="l"/>
+                        </a:tabLst>
+                        <a:defRPr/>
+                      </a:pPr>
+                      <a:r>
+                        <a:rPr lang="en-US" sz="1050" b="0" kern="1200" dirty="0">
+                          <a:solidFill>
+                            <a:schemeClr val="tx1"/>
+                          </a:solidFill>
+                          <a:latin typeface="피플폰트 Bold" panose="020B0600000101010101" pitchFamily="50" charset="-127"/>
+                          <a:ea typeface="피플폰트 Bold" panose="020B0600000101010101" pitchFamily="50" charset="-127"/>
+                          <a:cs typeface="+mn-cs"/>
+                        </a:rPr>
+                        <a:t>TBD(</a:t>
+                      </a:r>
+                      <a:r>
+                        <a:rPr lang="ko-KR" altLang="en-US" sz="1050" b="0" kern="1200" dirty="0">
+                          <a:solidFill>
+                            <a:schemeClr val="tx1"/>
+                          </a:solidFill>
+                          <a:latin typeface="피플폰트 Bold" panose="020B0600000101010101" pitchFamily="50" charset="-127"/>
+                          <a:ea typeface="피플폰트 Bold" panose="020B0600000101010101" pitchFamily="50" charset="-127"/>
+                          <a:cs typeface="+mn-cs"/>
+                        </a:rPr>
+                        <a:t>신규 유동화</a:t>
+                      </a:r>
+                      <a:r>
+                        <a:rPr lang="en-US" sz="1050" b="0" kern="1200" dirty="0">
+                          <a:solidFill>
+                            <a:schemeClr val="tx1"/>
+                          </a:solidFill>
+                          <a:latin typeface="피플폰트 Bold" panose="020B0600000101010101" pitchFamily="50" charset="-127"/>
+                          <a:ea typeface="피플폰트 Bold" panose="020B0600000101010101" pitchFamily="50" charset="-127"/>
+                          <a:cs typeface="+mn-cs"/>
+                        </a:rPr>
+                        <a:t> SPC) </a:t>
+                      </a:r>
+                      <a:r>
+                        <a:rPr lang="ko-KR" altLang="en-US" sz="1050" b="0" kern="1200" dirty="0">
+                          <a:solidFill>
+                            <a:schemeClr val="tx1"/>
+                          </a:solidFill>
+                          <a:latin typeface="피플폰트 Bold" panose="020B0600000101010101" pitchFamily="50" charset="-127"/>
+                          <a:ea typeface="피플폰트 Bold" panose="020B0600000101010101" pitchFamily="50" charset="-127"/>
+                          <a:cs typeface="+mn-cs"/>
+                        </a:rPr>
+                        <a:t>제</a:t>
+                      </a:r>
+                      <a:r>
+                        <a:rPr lang="en-US" sz="1050" b="0" kern="1200" dirty="0">
+                          <a:solidFill>
+                            <a:schemeClr val="tx1"/>
+                          </a:solidFill>
+                          <a:latin typeface="피플폰트 Bold" panose="020B0600000101010101" pitchFamily="50" charset="-127"/>
+                          <a:ea typeface="피플폰트 Bold" panose="020B0600000101010101" pitchFamily="50" charset="-127"/>
+                          <a:cs typeface="+mn-cs"/>
+                        </a:rPr>
+                        <a:t>1</a:t>
+                      </a:r>
+                      <a:r>
+                        <a:rPr lang="ko-KR" altLang="en-US" sz="1050" b="0" kern="1200" dirty="0">
+                          <a:solidFill>
+                            <a:schemeClr val="tx1"/>
+                          </a:solidFill>
+                          <a:latin typeface="피플폰트 Bold" panose="020B0600000101010101" pitchFamily="50" charset="-127"/>
+                          <a:ea typeface="피플폰트 Bold" panose="020B0600000101010101" pitchFamily="50" charset="-127"/>
+                          <a:cs typeface="+mn-cs"/>
+                        </a:rPr>
+                        <a:t>회 무기명식 무보증 사모사채</a:t>
+                      </a:r>
+                    </a:p>
+                  </a:txBody>
+                  <a:tcPr marL="51192" marR="51192" marT="7110" marB="0" anchor="ctr">
+                    <a:lnL w="12700" cmpd="sng">
+                      <a:noFill/>
+                    </a:lnL>
+                    <a:lnR w="12700" cmpd="sng">
+                      <a:noFill/>
+                    </a:lnR>
+                    <a:lnT w="6350" cap="flat" cmpd="sng" algn="ctr">
+                      <a:solidFill>
+                        <a:schemeClr val="bg1">
+                          <a:lumMod val="65000"/>
+                        </a:schemeClr>
+                      </a:solidFill>
+                      <a:prstDash val="solid"/>
+                      <a:round/>
+                      <a:headEnd w="med" len="med"/>
+                      <a:tailEnd w="med" len="med"/>
+                    </a:lnT>
+                    <a:lnB w="6350" cap="flat" cmpd="sng" algn="ctr">
+                      <a:solidFill>
+                        <a:schemeClr val="bg1">
+                          <a:lumMod val="65000"/>
+                        </a:schemeClr>
+                      </a:solidFill>
+                      <a:prstDash val="solid"/>
+                      <a:round/>
+                      <a:headEnd w="med" len="med"/>
+                      <a:tailEnd w="med" len="med"/>
+                    </a:lnB>
+                    <a:lnTlToBr w="12700" cmpd="sng">
+                      <a:noFill/>
+                      <a:prstDash val="solid"/>
+                    </a:lnTlToBr>
+                    <a:lnBlToTr w="12700" cmpd="sng">
+                      <a:noFill/>
+                      <a:prstDash val="solid"/>
+                    </a:lnBlToTr>
+                    <a:solidFill>
+                      <a:schemeClr val="bg1"/>
+                    </a:solidFill>
+                  </a:tcPr>
+                </a:tc>
+                <a:extLst>
+                  <a:ext uri="{0D108BD9-81ED-4DB2-BD59-A6C34878D82A}">
+                    <a16:rowId xmlns:a16="http://schemas.microsoft.com/office/drawing/2014/main" val="10000"/>
+                  </a:ext>
+                </a:extLst>
+              </a:tr>
+              <a:tr h="553370">
+                <a:tc>
+                  <a:txBody>
+                    <a:bodyPr/>
+                    <a:lstStyle/>
+                    <a:p>
+                      <a:pPr marL="0" algn="ctr" defTabSz="914400" rtl="0" eaLnBrk="1" latinLnBrk="1" hangingPunct="1">
+                        <a:lnSpc>
+                          <a:spcPct val="115000"/>
+                        </a:lnSpc>
+                        <a:spcAft>
+                          <a:spcPts val="0"/>
+                        </a:spcAft>
+                        <a:defRPr/>
+                      </a:pPr>
+                      <a:r>
+                        <a:rPr lang="ko-KR" altLang="en-US" sz="1050" b="0" kern="1200" dirty="0">
+                          <a:solidFill>
+                            <a:schemeClr val="tx1"/>
+                          </a:solidFill>
+                          <a:latin typeface="피플폰트 Bold" panose="020B0600000101010101" pitchFamily="50" charset="-127"/>
+                          <a:ea typeface="피플폰트 Bold" panose="020B0600000101010101" pitchFamily="50" charset="-127"/>
+                          <a:cs typeface="+mn-cs"/>
+                        </a:rPr>
+                        <a:t>사채 유형</a:t>
+                      </a:r>
+                    </a:p>
+                  </a:txBody>
+                  <a:tcPr marL="51192" marR="51192" marT="7110" marB="0" anchor="ctr">
+                    <a:lnL w="12700" cmpd="sng">
+                      <a:noFill/>
+                    </a:lnL>
+                    <a:lnR w="12700" cmpd="sng">
+                      <a:noFill/>
+                    </a:lnR>
+                    <a:lnT w="6350" cap="flat" cmpd="sng" algn="ctr">
+                      <a:solidFill>
+                        <a:schemeClr val="bg1">
+                          <a:lumMod val="65000"/>
+                        </a:schemeClr>
+                      </a:solidFill>
+                      <a:prstDash val="solid"/>
+                      <a:round/>
+                      <a:headEnd w="med" len="med"/>
+                      <a:tailEnd w="med" len="med"/>
+                    </a:lnT>
+                    <a:lnB w="6350" cap="flat" cmpd="sng" algn="ctr">
+                      <a:solidFill>
+                        <a:schemeClr val="bg1">
+                          <a:lumMod val="65000"/>
+                        </a:schemeClr>
+                      </a:solidFill>
+                      <a:prstDash val="solid"/>
+                      <a:round/>
+                      <a:headEnd w="med" len="med"/>
+                      <a:tailEnd w="med" len="med"/>
+                    </a:lnB>
+                    <a:lnTlToBr w="12700" cmpd="sng">
+                      <a:noFill/>
+                      <a:prstDash val="solid"/>
+                    </a:lnTlToBr>
+                    <a:lnBlToTr w="12700" cmpd="sng">
+                      <a:noFill/>
+                      <a:prstDash val="solid"/>
+                    </a:lnBlToTr>
+                    <a:solidFill>
+                      <a:schemeClr val="bg1">
+                        <a:lumMod val="95000"/>
+                      </a:schemeClr>
+                    </a:solidFill>
+                  </a:tcPr>
+                </a:tc>
+                <a:tc>
+                  <a:txBody>
+                    <a:bodyPr/>
+                    <a:lstStyle/>
+                    <a:p>
+                      <a:pPr marL="0" lvl="0" indent="-342900" algn="l" defTabSz="914400" rtl="0" eaLnBrk="1" latinLnBrk="1" hangingPunct="1">
+                        <a:lnSpc>
+                          <a:spcPct val="115000"/>
+                        </a:lnSpc>
+                        <a:spcAft>
+                          <a:spcPts val="0"/>
+                        </a:spcAft>
+                        <a:buFont typeface="Arial" panose="020B0604020202020204" pitchFamily="34" charset="0"/>
+                        <a:buChar char="•"/>
+                        <a:tabLst>
+                          <a:tab pos="457200" algn="l"/>
+                        </a:tabLst>
+                        <a:defRPr/>
+                      </a:pPr>
+                      <a:r>
+                        <a:rPr lang="ko-KR" altLang="en-US" sz="1050" b="0" kern="1200" dirty="0">
+                          <a:solidFill>
+                            <a:schemeClr val="tx1"/>
+                          </a:solidFill>
+                          <a:latin typeface="피플폰트 Bold" panose="020B0600000101010101" pitchFamily="50" charset="-127"/>
+                          <a:ea typeface="피플폰트 Bold" panose="020B0600000101010101" pitchFamily="50" charset="-127"/>
+                          <a:cs typeface="+mn-cs"/>
+                        </a:rPr>
+                        <a:t>국내 전자등록 또는 실물 발행</a:t>
+                      </a:r>
+                      <a:r>
+                        <a:rPr lang="en-US" sz="1050" b="0" kern="1200" dirty="0">
+                          <a:solidFill>
+                            <a:schemeClr val="tx1"/>
+                          </a:solidFill>
+                          <a:latin typeface="피플폰트 Bold" panose="020B0600000101010101" pitchFamily="50" charset="-127"/>
+                          <a:ea typeface="피플폰트 Bold" panose="020B0600000101010101" pitchFamily="50" charset="-127"/>
+                          <a:cs typeface="+mn-cs"/>
+                        </a:rPr>
+                        <a:t>, </a:t>
+                      </a:r>
+                      <a:r>
+                        <a:rPr lang="ko-KR" altLang="en-US" sz="1050" b="0" kern="1200" dirty="0">
+                          <a:solidFill>
+                            <a:schemeClr val="tx1"/>
+                          </a:solidFill>
+                          <a:latin typeface="피플폰트 Bold" panose="020B0600000101010101" pitchFamily="50" charset="-127"/>
+                          <a:ea typeface="피플폰트 Bold" panose="020B0600000101010101" pitchFamily="50" charset="-127"/>
+                          <a:cs typeface="+mn-cs"/>
+                        </a:rPr>
+                        <a:t>무기명식 무보증 사모사채</a:t>
+                      </a:r>
+                    </a:p>
+                  </a:txBody>
+                  <a:tcPr marL="51192" marR="51192" marT="7110" marB="0" anchor="ctr">
+                    <a:lnL w="12700" cmpd="sng">
+                      <a:noFill/>
+                    </a:lnL>
+                    <a:lnR w="12700" cmpd="sng">
+                      <a:noFill/>
+                    </a:lnR>
+                    <a:lnT w="6350" cap="flat" cmpd="sng" algn="ctr">
+                      <a:solidFill>
+                        <a:schemeClr val="bg1">
+                          <a:lumMod val="65000"/>
+                        </a:schemeClr>
+                      </a:solidFill>
+                      <a:prstDash val="solid"/>
+                      <a:round/>
+                      <a:headEnd w="med" len="med"/>
+                      <a:tailEnd w="med" len="med"/>
+                    </a:lnT>
+                    <a:lnB w="6350" cap="flat" cmpd="sng" algn="ctr">
+                      <a:solidFill>
+                        <a:schemeClr val="bg1">
+                          <a:lumMod val="65000"/>
+                        </a:schemeClr>
+                      </a:solidFill>
+                      <a:prstDash val="solid"/>
+                      <a:round/>
+                      <a:headEnd w="med" len="med"/>
+                      <a:tailEnd w="med" len="med"/>
+                    </a:lnB>
+                    <a:lnTlToBr w="12700" cmpd="sng">
+                      <a:noFill/>
+                      <a:prstDash val="solid"/>
+                    </a:lnTlToBr>
+                    <a:lnBlToTr w="12700" cmpd="sng">
+                      <a:noFill/>
+                      <a:prstDash val="solid"/>
+                    </a:lnBlToTr>
+                    <a:solidFill>
+                      <a:schemeClr val="bg1"/>
+                    </a:solidFill>
+                  </a:tcPr>
+                </a:tc>
+                <a:extLst>
+                  <a:ext uri="{0D108BD9-81ED-4DB2-BD59-A6C34878D82A}">
+                    <a16:rowId xmlns:a16="http://schemas.microsoft.com/office/drawing/2014/main" val="10001"/>
+                  </a:ext>
+                </a:extLst>
+              </a:tr>
+              <a:tr h="553370">
+                <a:tc>
+                  <a:txBody>
+                    <a:bodyPr/>
+                    <a:lstStyle/>
+                    <a:p>
+                      <a:pPr marL="0" algn="ctr" defTabSz="914400" rtl="0" eaLnBrk="1" latinLnBrk="1" hangingPunct="1">
+                        <a:lnSpc>
+                          <a:spcPct val="115000"/>
+                        </a:lnSpc>
+                        <a:spcAft>
+                          <a:spcPts val="0"/>
+                        </a:spcAft>
+                        <a:defRPr/>
+                      </a:pPr>
+                      <a:r>
+                        <a:rPr lang="ko-KR" altLang="en-US" sz="1050" b="0" kern="1200" dirty="0">
+                          <a:solidFill>
+                            <a:schemeClr val="tx1"/>
+                          </a:solidFill>
+                          <a:latin typeface="피플폰트 Bold" panose="020B0600000101010101" pitchFamily="50" charset="-127"/>
+                          <a:ea typeface="피플폰트 Bold" panose="020B0600000101010101" pitchFamily="50" charset="-127"/>
+                          <a:cs typeface="+mn-cs"/>
+                        </a:rPr>
+                        <a:t>발행인</a:t>
+                      </a:r>
+                    </a:p>
+                  </a:txBody>
+                  <a:tcPr marL="51192" marR="51192" marT="7110" marB="0" anchor="ctr">
+                    <a:lnL w="12700" cmpd="sng">
+                      <a:noFill/>
+                    </a:lnL>
+                    <a:lnR w="12700" cmpd="sng">
+                      <a:noFill/>
+                    </a:lnR>
+                    <a:lnT w="6350" cap="flat" cmpd="sng" algn="ctr">
+                      <a:solidFill>
+                        <a:schemeClr val="bg1">
+                          <a:lumMod val="65000"/>
+                        </a:schemeClr>
+                      </a:solidFill>
+                      <a:prstDash val="solid"/>
+                      <a:round/>
+                      <a:headEnd w="med" len="med"/>
+                      <a:tailEnd w="med" len="med"/>
+                    </a:lnT>
+                    <a:lnB w="6350" cap="flat" cmpd="sng" algn="ctr">
+                      <a:solidFill>
+                        <a:schemeClr val="bg1">
+                          <a:lumMod val="65000"/>
+                        </a:schemeClr>
+                      </a:solidFill>
+                      <a:prstDash val="solid"/>
+                      <a:round/>
+                      <a:headEnd w="med" len="med"/>
+                      <a:tailEnd w="med" len="med"/>
+                    </a:lnB>
+                    <a:lnTlToBr w="12700" cmpd="sng">
+                      <a:noFill/>
+                      <a:prstDash val="solid"/>
+                    </a:lnTlToBr>
+                    <a:lnBlToTr w="12700" cmpd="sng">
+                      <a:noFill/>
+                      <a:prstDash val="solid"/>
+                    </a:lnBlToTr>
+                    <a:solidFill>
+                      <a:schemeClr val="bg1">
+                        <a:lumMod val="95000"/>
+                      </a:schemeClr>
+                    </a:solidFill>
+                  </a:tcPr>
+                </a:tc>
+                <a:tc>
+                  <a:txBody>
+                    <a:bodyPr/>
+                    <a:lstStyle/>
+                    <a:p>
+                      <a:pPr marL="0" lvl="0" indent="-342900" algn="l" defTabSz="914400" rtl="0" eaLnBrk="1" latinLnBrk="1" hangingPunct="1">
+                        <a:lnSpc>
+                          <a:spcPct val="115000"/>
+                        </a:lnSpc>
+                        <a:spcAft>
+                          <a:spcPts val="0"/>
+                        </a:spcAft>
+                        <a:buFont typeface="Arial" panose="020B0604020202020204" pitchFamily="34" charset="0"/>
+                        <a:buChar char="•"/>
+                        <a:tabLst>
+                          <a:tab pos="457200" algn="l"/>
+                        </a:tabLst>
+                        <a:defRPr/>
+                      </a:pPr>
+                      <a:r>
+                        <a:rPr lang="en-US" sz="1050" b="0" kern="1200" dirty="0">
+                          <a:solidFill>
+                            <a:schemeClr val="tx1"/>
+                          </a:solidFill>
+                          <a:latin typeface="피플폰트 Bold" panose="020B0600000101010101" pitchFamily="50" charset="-127"/>
+                          <a:ea typeface="피플폰트 Bold" panose="020B0600000101010101" pitchFamily="50" charset="-127"/>
+                          <a:cs typeface="+mn-cs"/>
+                        </a:rPr>
+                        <a:t>TBD(</a:t>
+                      </a:r>
+                      <a:r>
+                        <a:rPr lang="ko-KR" altLang="en-US" sz="1050" b="0" kern="1200" dirty="0">
+                          <a:solidFill>
+                            <a:schemeClr val="tx1"/>
+                          </a:solidFill>
+                          <a:latin typeface="피플폰트 Bold" panose="020B0600000101010101" pitchFamily="50" charset="-127"/>
+                          <a:ea typeface="피플폰트 Bold" panose="020B0600000101010101" pitchFamily="50" charset="-127"/>
+                          <a:cs typeface="+mn-cs"/>
+                        </a:rPr>
+                        <a:t>신규 유동화</a:t>
+                      </a:r>
+                      <a:r>
+                        <a:rPr lang="en-US" sz="1050" b="0" kern="1200" dirty="0">
+                          <a:solidFill>
+                            <a:schemeClr val="tx1"/>
+                          </a:solidFill>
+                          <a:latin typeface="피플폰트 Bold" panose="020B0600000101010101" pitchFamily="50" charset="-127"/>
+                          <a:ea typeface="피플폰트 Bold" panose="020B0600000101010101" pitchFamily="50" charset="-127"/>
+                          <a:cs typeface="+mn-cs"/>
+                        </a:rPr>
+                        <a:t> SPC)</a:t>
+                      </a:r>
+                      <a:endParaRPr lang="ko-KR" altLang="en-US" sz="1050" b="0" kern="1200" dirty="0">
+                        <a:solidFill>
+                          <a:schemeClr val="tx1"/>
+                        </a:solidFill>
+                        <a:latin typeface="피플폰트 Bold" panose="020B0600000101010101" pitchFamily="50" charset="-127"/>
+                        <a:ea typeface="피플폰트 Bold" panose="020B0600000101010101" pitchFamily="50" charset="-127"/>
+                        <a:cs typeface="+mn-cs"/>
+                      </a:endParaRPr>
+                    </a:p>
+                  </a:txBody>
+                  <a:tcPr marL="51192" marR="51192" marT="7110" marB="0" anchor="ctr">
+                    <a:lnL w="12700" cmpd="sng">
+                      <a:noFill/>
+                    </a:lnL>
+                    <a:lnR w="12700" cmpd="sng">
+                      <a:noFill/>
+                    </a:lnR>
+                    <a:lnT w="6350" cap="flat" cmpd="sng" algn="ctr">
+                      <a:solidFill>
+                        <a:schemeClr val="bg1">
+                          <a:lumMod val="65000"/>
+                        </a:schemeClr>
+                      </a:solidFill>
+                      <a:prstDash val="solid"/>
+                      <a:round/>
+                      <a:headEnd w="med" len="med"/>
+                      <a:tailEnd w="med" len="med"/>
+                    </a:lnT>
+                    <a:lnB w="6350" cap="flat" cmpd="sng" algn="ctr">
+                      <a:solidFill>
+                        <a:schemeClr val="bg1">
+                          <a:lumMod val="65000"/>
+                        </a:schemeClr>
+                      </a:solidFill>
+                      <a:prstDash val="solid"/>
+                      <a:round/>
+                      <a:headEnd w="med" len="med"/>
+                      <a:tailEnd w="med" len="med"/>
+                    </a:lnB>
+                    <a:lnTlToBr w="12700" cmpd="sng">
+                      <a:noFill/>
+                      <a:prstDash val="solid"/>
+                    </a:lnTlToBr>
+                    <a:lnBlToTr w="12700" cmpd="sng">
+                      <a:noFill/>
+                      <a:prstDash val="solid"/>
+                    </a:lnBlToTr>
+                    <a:solidFill>
+                      <a:schemeClr val="bg1"/>
+                    </a:solidFill>
+                  </a:tcPr>
+                </a:tc>
+                <a:extLst>
+                  <a:ext uri="{0D108BD9-81ED-4DB2-BD59-A6C34878D82A}">
+                    <a16:rowId xmlns:a16="http://schemas.microsoft.com/office/drawing/2014/main" val="10002"/>
+                  </a:ext>
+                </a:extLst>
+              </a:tr>
+              <a:tr h="553370">
+                <a:tc>
+                  <a:txBody>
+                    <a:bodyPr/>
+                    <a:lstStyle/>
+                    <a:p>
+                      <a:pPr marL="0" algn="ctr" defTabSz="914400" rtl="0" eaLnBrk="1" latinLnBrk="1" hangingPunct="1">
+                        <a:lnSpc>
+                          <a:spcPct val="115000"/>
+                        </a:lnSpc>
+                        <a:spcAft>
+                          <a:spcPts val="0"/>
+                        </a:spcAft>
+                        <a:defRPr/>
+                      </a:pPr>
+                      <a:r>
+                        <a:rPr lang="ko-KR" altLang="en-US" sz="1050" b="0" kern="1200" dirty="0">
+                          <a:solidFill>
+                            <a:schemeClr val="tx1"/>
+                          </a:solidFill>
+                          <a:latin typeface="피플폰트 Bold" panose="020B0600000101010101" pitchFamily="50" charset="-127"/>
+                          <a:ea typeface="피플폰트 Bold" panose="020B0600000101010101" pitchFamily="50" charset="-127"/>
+                          <a:cs typeface="+mn-cs"/>
+                        </a:rPr>
+                        <a:t>기초자산</a:t>
+                      </a:r>
+                    </a:p>
+                  </a:txBody>
+                  <a:tcPr marL="51192" marR="51192" marT="7110" marB="0" anchor="ctr">
+                    <a:lnL w="12700" cmpd="sng">
+                      <a:noFill/>
+                    </a:lnL>
+                    <a:lnR w="12700" cmpd="sng">
+                      <a:noFill/>
+                    </a:lnR>
+                    <a:lnT w="6350" cap="flat" cmpd="sng" algn="ctr">
+                      <a:solidFill>
+                        <a:schemeClr val="bg1">
+                          <a:lumMod val="65000"/>
+                        </a:schemeClr>
+                      </a:solidFill>
+                      <a:prstDash val="solid"/>
+                      <a:round/>
+                      <a:headEnd w="med" len="med"/>
+                      <a:tailEnd w="med" len="med"/>
+                    </a:lnT>
+                    <a:lnB w="6350" cap="flat" cmpd="sng" algn="ctr">
+                      <a:solidFill>
+                        <a:schemeClr val="bg1">
+                          <a:lumMod val="65000"/>
+                        </a:schemeClr>
+                      </a:solidFill>
+                      <a:prstDash val="solid"/>
+                      <a:round/>
+                      <a:headEnd w="med" len="med"/>
+                      <a:tailEnd w="med" len="med"/>
+                    </a:lnB>
+                    <a:lnTlToBr w="12700" cmpd="sng">
+                      <a:noFill/>
+                      <a:prstDash val="solid"/>
+                    </a:lnTlToBr>
+                    <a:lnBlToTr w="12700" cmpd="sng">
+                      <a:noFill/>
+                      <a:prstDash val="solid"/>
+                    </a:lnBlToTr>
+                    <a:solidFill>
+                      <a:schemeClr val="bg1">
+                        <a:lumMod val="95000"/>
+                      </a:schemeClr>
+                    </a:solidFill>
+                  </a:tcPr>
+                </a:tc>
+                <a:tc>
+                  <a:txBody>
+                    <a:bodyPr/>
+                    <a:lstStyle/>
+                    <a:p>
+                      <a:pPr marL="0" lvl="0" indent="-342900" algn="l" defTabSz="914400" rtl="0" eaLnBrk="1" latinLnBrk="1" hangingPunct="1">
+                        <a:lnSpc>
+                          <a:spcPct val="115000"/>
+                        </a:lnSpc>
+                        <a:spcAft>
+                          <a:spcPts val="0"/>
+                        </a:spcAft>
+                        <a:buFont typeface="Arial" panose="020B0604020202020204" pitchFamily="34" charset="0"/>
+                        <a:buChar char="•"/>
+                        <a:tabLst>
+                          <a:tab pos="457200" algn="l"/>
+                        </a:tabLst>
+                        <a:defRPr/>
+                      </a:pPr>
+                      <a:r>
+                        <a:rPr lang="ko-KR" altLang="en-US" sz="1050" b="0" kern="1200" dirty="0">
+                          <a:solidFill>
+                            <a:schemeClr val="tx1"/>
+                          </a:solidFill>
+                          <a:latin typeface="피플폰트 Bold" panose="020B0600000101010101" pitchFamily="50" charset="-127"/>
+                          <a:ea typeface="피플폰트 Bold" panose="020B0600000101010101" pitchFamily="50" charset="-127"/>
+                          <a:cs typeface="+mn-cs"/>
+                        </a:rPr>
+                        <a:t>이름</a:t>
+                      </a:r>
+                    </a:p>
+                  </a:txBody>
+                  <a:tcPr marL="51192" marR="51192" marT="7110" marB="0" anchor="ctr">
+                    <a:lnL w="12700" cmpd="sng">
+                      <a:noFill/>
+                    </a:lnL>
+                    <a:lnR w="12700" cmpd="sng">
+                      <a:noFill/>
+                    </a:lnR>
+                    <a:lnT w="6350" cap="flat" cmpd="sng" algn="ctr">
+                      <a:solidFill>
+                        <a:schemeClr val="bg1">
+                          <a:lumMod val="65000"/>
+                        </a:schemeClr>
+                      </a:solidFill>
+                      <a:prstDash val="solid"/>
+                      <a:round/>
+                      <a:headEnd w="med" len="med"/>
+                      <a:tailEnd w="med" len="med"/>
+                    </a:lnT>
+                    <a:lnB w="6350" cap="flat" cmpd="sng" algn="ctr">
+                      <a:solidFill>
+                        <a:schemeClr val="bg1">
+                          <a:lumMod val="65000"/>
+                        </a:schemeClr>
+                      </a:solidFill>
+                      <a:prstDash val="solid"/>
+                      <a:round/>
+                      <a:headEnd w="med" len="med"/>
+                      <a:tailEnd w="med" len="med"/>
+                    </a:lnB>
+                    <a:lnTlToBr w="12700" cmpd="sng">
+                      <a:noFill/>
+                      <a:prstDash val="solid"/>
+                    </a:lnTlToBr>
+                    <a:lnBlToTr w="12700" cmpd="sng">
+                      <a:noFill/>
+                      <a:prstDash val="solid"/>
+                    </a:lnBlToTr>
+                    <a:solidFill>
+                      <a:schemeClr val="bg1"/>
+                    </a:solidFill>
+                  </a:tcPr>
+                </a:tc>
+                <a:extLst>
+                  <a:ext uri="{0D108BD9-81ED-4DB2-BD59-A6C34878D82A}">
+                    <a16:rowId xmlns:a16="http://schemas.microsoft.com/office/drawing/2014/main" val="10003"/>
+                  </a:ext>
+                </a:extLst>
+              </a:tr>
+              <a:tr h="553370">
+                <a:tc>
+                  <a:txBody>
+                    <a:bodyPr/>
+                    <a:lstStyle/>
+                    <a:p>
+                      <a:pPr marL="0" algn="ctr" defTabSz="914400" rtl="0" eaLnBrk="1" latinLnBrk="1" hangingPunct="1">
+                        <a:lnSpc>
+                          <a:spcPct val="115000"/>
+                        </a:lnSpc>
+                        <a:spcAft>
+                          <a:spcPts val="0"/>
+                        </a:spcAft>
+                        <a:defRPr/>
+                      </a:pPr>
+                      <a:r>
+                        <a:rPr lang="ko-KR" altLang="en-US" sz="1050" b="0" kern="1200" dirty="0">
+                          <a:solidFill>
+                            <a:schemeClr val="tx1"/>
+                          </a:solidFill>
+                          <a:latin typeface="피플폰트 Bold" panose="020B0600000101010101" pitchFamily="50" charset="-127"/>
+                          <a:ea typeface="피플폰트 Bold" panose="020B0600000101010101" pitchFamily="50" charset="-127"/>
+                          <a:cs typeface="+mn-cs"/>
+                        </a:rPr>
+                        <a:t>발행금액</a:t>
+                      </a:r>
+                    </a:p>
+                  </a:txBody>
+                  <a:tcPr marL="51192" marR="51192" marT="7110" marB="0" anchor="ctr">
+                    <a:lnL w="12700" cmpd="sng">
+                      <a:noFill/>
+                    </a:lnL>
+                    <a:lnR w="12700" cmpd="sng">
+                      <a:noFill/>
+                    </a:lnR>
+                    <a:lnT w="6350" cap="flat" cmpd="sng" algn="ctr">
+                      <a:solidFill>
+                        <a:schemeClr val="bg1">
+                          <a:lumMod val="65000"/>
+                        </a:schemeClr>
+                      </a:solidFill>
+                      <a:prstDash val="solid"/>
+                      <a:round/>
+                      <a:headEnd w="med" len="med"/>
+                      <a:tailEnd w="med" len="med"/>
+                    </a:lnT>
+                    <a:lnB w="6350" cap="flat" cmpd="sng" algn="ctr">
+                      <a:solidFill>
+                        <a:schemeClr val="bg1">
+                          <a:lumMod val="65000"/>
+                        </a:schemeClr>
+                      </a:solidFill>
+                      <a:prstDash val="solid"/>
+                      <a:round/>
+                      <a:headEnd w="med" len="med"/>
+                      <a:tailEnd w="med" len="med"/>
+                    </a:lnB>
+                    <a:lnTlToBr w="12700" cmpd="sng">
+                      <a:noFill/>
+                      <a:prstDash val="solid"/>
+                    </a:lnTlToBr>
+                    <a:lnBlToTr w="12700" cmpd="sng">
+                      <a:noFill/>
+                      <a:prstDash val="solid"/>
+                    </a:lnBlToTr>
+                    <a:solidFill>
+                      <a:schemeClr val="bg1">
+                        <a:lumMod val="95000"/>
+                      </a:schemeClr>
+                    </a:solidFill>
+                  </a:tcPr>
+                </a:tc>
+                <a:tc>
+                  <a:txBody>
+                    <a:bodyPr/>
+                    <a:lstStyle/>
+                    <a:p>
+                      <a:pPr marL="0" lvl="0" indent="-342900" algn="l" defTabSz="914400" rtl="0" eaLnBrk="1" latinLnBrk="1" hangingPunct="1">
+                        <a:lnSpc>
+                          <a:spcPct val="115000"/>
+                        </a:lnSpc>
+                        <a:spcAft>
+                          <a:spcPts val="0"/>
+                        </a:spcAft>
+                        <a:buFont typeface="Arial" panose="020B0604020202020204" pitchFamily="34" charset="0"/>
+                        <a:buChar char="•"/>
+                        <a:tabLst>
+                          <a:tab pos="457200" algn="l"/>
+                        </a:tabLst>
+                        <a:defRPr/>
+                      </a:pPr>
+                      <a:r>
+                        <a:rPr lang="en-US" altLang="ko-KR" sz="1050" b="0" kern="1200" dirty="0">
+                          <a:solidFill>
+                            <a:schemeClr val="tx1"/>
+                          </a:solidFill>
+                          <a:latin typeface="피플폰트 Bold" panose="020B0600000101010101" pitchFamily="50" charset="-127"/>
+                          <a:ea typeface="피플폰트 Bold" panose="020B0600000101010101" pitchFamily="50" charset="-127"/>
+                          <a:cs typeface="+mn-cs"/>
+                        </a:rPr>
+                        <a:t>000</a:t>
+                      </a:r>
+                      <a:r>
+                        <a:rPr lang="ko-KR" altLang="en-US" sz="1050" b="0" kern="1200" dirty="0">
+                          <a:solidFill>
+                            <a:schemeClr val="tx1"/>
+                          </a:solidFill>
+                          <a:latin typeface="피플폰트 Bold" panose="020B0600000101010101" pitchFamily="50" charset="-127"/>
+                          <a:ea typeface="피플폰트 Bold" panose="020B0600000101010101" pitchFamily="50" charset="-127"/>
+                          <a:cs typeface="+mn-cs"/>
+                        </a:rPr>
+                        <a:t>억원</a:t>
+                      </a:r>
+                      <a:r>
+                        <a:rPr lang="en-US" sz="1050" b="0" kern="1200" dirty="0">
+                          <a:solidFill>
+                            <a:schemeClr val="tx1"/>
+                          </a:solidFill>
+                          <a:latin typeface="피플폰트 Bold" panose="020B0600000101010101" pitchFamily="50" charset="-127"/>
+                          <a:ea typeface="피플폰트 Bold" panose="020B0600000101010101" pitchFamily="50" charset="-127"/>
+                          <a:cs typeface="+mn-cs"/>
+                        </a:rPr>
+                        <a:t> (</a:t>
+                      </a:r>
+                      <a:r>
+                        <a:rPr lang="ko-KR" altLang="en-US" sz="1050" b="0" kern="1200" dirty="0">
+                          <a:solidFill>
+                            <a:schemeClr val="tx1"/>
+                          </a:solidFill>
+                          <a:latin typeface="피플폰트 Bold" panose="020B0600000101010101" pitchFamily="50" charset="-127"/>
+                          <a:ea typeface="피플폰트 Bold" panose="020B0600000101010101" pitchFamily="50" charset="-127"/>
+                          <a:cs typeface="+mn-cs"/>
+                        </a:rPr>
+                        <a:t>₩ </a:t>
+                      </a:r>
+                      <a:r>
+                        <a:rPr lang="en-US" altLang="ko-KR" sz="1050" b="0" kern="1200" dirty="0">
+                          <a:solidFill>
+                            <a:schemeClr val="tx1"/>
+                          </a:solidFill>
+                          <a:latin typeface="피플폰트 Bold" panose="020B0600000101010101" pitchFamily="50" charset="-127"/>
+                          <a:ea typeface="피플폰트 Bold" panose="020B0600000101010101" pitchFamily="50" charset="-127"/>
+                          <a:cs typeface="+mn-cs"/>
+                        </a:rPr>
+                        <a:t>00,000,000,000</a:t>
+                      </a:r>
+                      <a:r>
+                        <a:rPr lang="en-US" sz="1050" b="0" kern="1200" dirty="0">
+                          <a:solidFill>
+                            <a:schemeClr val="tx1"/>
+                          </a:solidFill>
+                          <a:latin typeface="피플폰트 Bold" panose="020B0600000101010101" pitchFamily="50" charset="-127"/>
+                          <a:ea typeface="피플폰트 Bold" panose="020B0600000101010101" pitchFamily="50" charset="-127"/>
+                          <a:cs typeface="+mn-cs"/>
+                        </a:rPr>
+                        <a:t> )</a:t>
+                      </a:r>
+                      <a:endParaRPr lang="ko-KR" altLang="en-US" sz="1050" b="0" kern="1200" dirty="0">
+                        <a:solidFill>
+                          <a:schemeClr val="tx1"/>
+                        </a:solidFill>
+                        <a:latin typeface="피플폰트 Bold" panose="020B0600000101010101" pitchFamily="50" charset="-127"/>
+                        <a:ea typeface="피플폰트 Bold" panose="020B0600000101010101" pitchFamily="50" charset="-127"/>
+                        <a:cs typeface="+mn-cs"/>
+                      </a:endParaRPr>
+                    </a:p>
+                  </a:txBody>
+                  <a:tcPr marL="51192" marR="51192" marT="7110" marB="0" anchor="ctr">
+                    <a:lnL w="12700" cmpd="sng">
+                      <a:noFill/>
+                    </a:lnL>
+                    <a:lnR w="12700" cmpd="sng">
+                      <a:noFill/>
+                    </a:lnR>
+                    <a:lnT w="6350" cap="flat" cmpd="sng" algn="ctr">
+                      <a:solidFill>
+                        <a:schemeClr val="bg1">
+                          <a:lumMod val="65000"/>
+                        </a:schemeClr>
+                      </a:solidFill>
+                      <a:prstDash val="solid"/>
+                      <a:round/>
+                      <a:headEnd w="med" len="med"/>
+                      <a:tailEnd w="med" len="med"/>
+                    </a:lnT>
+                    <a:lnB w="6350" cap="flat" cmpd="sng" algn="ctr">
+                      <a:solidFill>
+                        <a:schemeClr val="bg1">
+                          <a:lumMod val="65000"/>
+                        </a:schemeClr>
+                      </a:solidFill>
+                      <a:prstDash val="solid"/>
+                      <a:round/>
+                      <a:headEnd w="med" len="med"/>
+                      <a:tailEnd w="med" len="med"/>
+                    </a:lnB>
+                    <a:lnTlToBr w="12700" cmpd="sng">
+                      <a:noFill/>
+                      <a:prstDash val="solid"/>
+                    </a:lnTlToBr>
+                    <a:lnBlToTr w="12700" cmpd="sng">
+                      <a:noFill/>
+                      <a:prstDash val="solid"/>
+                    </a:lnBlToTr>
+                    <a:solidFill>
+                      <a:schemeClr val="bg1"/>
+                    </a:solidFill>
+                  </a:tcPr>
+                </a:tc>
+                <a:extLst>
+                  <a:ext uri="{0D108BD9-81ED-4DB2-BD59-A6C34878D82A}">
+                    <a16:rowId xmlns:a16="http://schemas.microsoft.com/office/drawing/2014/main" val="10004"/>
+                  </a:ext>
+                </a:extLst>
+              </a:tr>
+              <a:tr h="553370">
+                <a:tc>
+                  <a:txBody>
+                    <a:bodyPr/>
+                    <a:lstStyle/>
+                    <a:p>
+                      <a:pPr marL="0" algn="ctr" defTabSz="914400" rtl="0" eaLnBrk="1" latinLnBrk="1" hangingPunct="1">
+                        <a:lnSpc>
+                          <a:spcPct val="115000"/>
+                        </a:lnSpc>
+                        <a:spcAft>
+                          <a:spcPts val="0"/>
+                        </a:spcAft>
+                        <a:defRPr/>
+                      </a:pPr>
+                      <a:r>
+                        <a:rPr lang="ko-KR" altLang="en-US" sz="1050" b="0" kern="1200" dirty="0">
+                          <a:solidFill>
+                            <a:schemeClr val="tx1"/>
+                          </a:solidFill>
+                          <a:latin typeface="피플폰트 Bold" panose="020B0600000101010101" pitchFamily="50" charset="-127"/>
+                          <a:ea typeface="피플폰트 Bold" panose="020B0600000101010101" pitchFamily="50" charset="-127"/>
+                          <a:cs typeface="+mn-cs"/>
+                        </a:rPr>
+                        <a:t>발행일</a:t>
+                      </a:r>
+                    </a:p>
+                  </a:txBody>
+                  <a:tcPr marL="51192" marR="51192" marT="7110" marB="0" anchor="ctr">
+                    <a:lnL w="12700" cmpd="sng">
+                      <a:noFill/>
+                    </a:lnL>
+                    <a:lnR w="12700" cmpd="sng">
+                      <a:noFill/>
+                    </a:lnR>
+                    <a:lnT w="6350" cap="flat" cmpd="sng" algn="ctr">
+                      <a:solidFill>
+                        <a:schemeClr val="bg1">
+                          <a:lumMod val="65000"/>
+                        </a:schemeClr>
+                      </a:solidFill>
+                      <a:prstDash val="solid"/>
+                      <a:round/>
+                      <a:headEnd w="med" len="med"/>
+                      <a:tailEnd w="med" len="med"/>
+                    </a:lnT>
+                    <a:lnB w="6350" cap="flat" cmpd="sng" algn="ctr">
+                      <a:solidFill>
+                        <a:schemeClr val="bg1">
+                          <a:lumMod val="65000"/>
+                        </a:schemeClr>
+                      </a:solidFill>
+                      <a:prstDash val="solid"/>
+                      <a:round/>
+                      <a:headEnd w="med" len="med"/>
+                      <a:tailEnd w="med" len="med"/>
+                    </a:lnB>
+                    <a:lnTlToBr w="12700" cmpd="sng">
+                      <a:noFill/>
+                      <a:prstDash val="solid"/>
+                    </a:lnTlToBr>
+                    <a:lnBlToTr w="12700" cmpd="sng">
+                      <a:noFill/>
+                      <a:prstDash val="solid"/>
+                    </a:lnBlToTr>
+                    <a:solidFill>
+                      <a:schemeClr val="bg1">
+                        <a:lumMod val="95000"/>
+                      </a:schemeClr>
+                    </a:solidFill>
+                  </a:tcPr>
+                </a:tc>
+                <a:tc>
+                  <a:txBody>
+                    <a:bodyPr/>
+                    <a:lstStyle/>
+                    <a:p>
+                      <a:pPr marL="0" lvl="0" indent="-342900" algn="l" defTabSz="914400" rtl="0" eaLnBrk="1" latinLnBrk="1" hangingPunct="1">
+                        <a:lnSpc>
+                          <a:spcPct val="115000"/>
+                        </a:lnSpc>
+                        <a:spcAft>
+                          <a:spcPts val="0"/>
+                        </a:spcAft>
+                        <a:buFont typeface="Arial" panose="020B0604020202020204" pitchFamily="34" charset="0"/>
+                        <a:buChar char="•"/>
+                        <a:tabLst>
+                          <a:tab pos="457200" algn="l"/>
+                        </a:tabLst>
+                        <a:defRPr/>
+                      </a:pPr>
+                      <a:r>
+                        <a:rPr lang="en-US" sz="1050" b="0" kern="1200" dirty="0">
+                          <a:solidFill>
+                            <a:schemeClr val="tx1"/>
+                          </a:solidFill>
+                          <a:latin typeface="피플폰트 Bold" panose="020B0600000101010101" pitchFamily="50" charset="-127"/>
+                          <a:ea typeface="피플폰트 Bold" panose="020B0600000101010101" pitchFamily="50" charset="-127"/>
+                          <a:cs typeface="+mn-cs"/>
+                        </a:rPr>
+                        <a:t>20xx</a:t>
+                      </a:r>
+                      <a:r>
+                        <a:rPr lang="ko-KR" altLang="en-US" sz="1050" b="0" kern="1200" dirty="0">
+                          <a:solidFill>
+                            <a:schemeClr val="tx1"/>
+                          </a:solidFill>
+                          <a:latin typeface="피플폰트 Bold" panose="020B0600000101010101" pitchFamily="50" charset="-127"/>
+                          <a:ea typeface="피플폰트 Bold" panose="020B0600000101010101" pitchFamily="50" charset="-127"/>
+                          <a:cs typeface="+mn-cs"/>
+                        </a:rPr>
+                        <a:t>년 </a:t>
+                      </a:r>
+                      <a:r>
+                        <a:rPr lang="en-US" altLang="ko-KR" sz="1050" b="0" kern="1200" dirty="0">
+                          <a:solidFill>
+                            <a:schemeClr val="tx1"/>
+                          </a:solidFill>
+                          <a:latin typeface="피플폰트 Bold" panose="020B0600000101010101" pitchFamily="50" charset="-127"/>
+                          <a:ea typeface="피플폰트 Bold" panose="020B0600000101010101" pitchFamily="50" charset="-127"/>
+                          <a:cs typeface="+mn-cs"/>
+                        </a:rPr>
+                        <a:t>xx</a:t>
+                      </a:r>
+                      <a:r>
+                        <a:rPr lang="ko-KR" altLang="en-US" sz="1050" b="0" kern="1200" dirty="0">
+                          <a:solidFill>
+                            <a:schemeClr val="tx1"/>
+                          </a:solidFill>
+                          <a:latin typeface="피플폰트 Bold" panose="020B0600000101010101" pitchFamily="50" charset="-127"/>
+                          <a:ea typeface="피플폰트 Bold" panose="020B0600000101010101" pitchFamily="50" charset="-127"/>
+                          <a:cs typeface="+mn-cs"/>
+                        </a:rPr>
+                        <a:t>월</a:t>
+                      </a:r>
+                      <a:r>
+                        <a:rPr lang="en-US" altLang="ko-KR" sz="1050" b="0" kern="1200" dirty="0">
+                          <a:solidFill>
+                            <a:schemeClr val="tx1"/>
+                          </a:solidFill>
+                          <a:latin typeface="피플폰트 Bold" panose="020B0600000101010101" pitchFamily="50" charset="-127"/>
+                          <a:ea typeface="피플폰트 Bold" panose="020B0600000101010101" pitchFamily="50" charset="-127"/>
+                          <a:cs typeface="+mn-cs"/>
+                        </a:rPr>
+                        <a:t> (</a:t>
+                      </a:r>
+                      <a:r>
+                        <a:rPr lang="ko-KR" altLang="en-US" sz="1050" b="0" kern="1200" dirty="0">
+                          <a:solidFill>
+                            <a:schemeClr val="tx1"/>
+                          </a:solidFill>
+                          <a:latin typeface="피플폰트 Bold" panose="020B0600000101010101" pitchFamily="50" charset="-127"/>
+                          <a:ea typeface="피플폰트 Bold" panose="020B0600000101010101" pitchFamily="50" charset="-127"/>
+                          <a:cs typeface="+mn-cs"/>
+                        </a:rPr>
+                        <a:t>예정</a:t>
+                      </a:r>
+                      <a:r>
+                        <a:rPr lang="en-US" altLang="ko-KR" sz="1050" b="0" kern="1200" dirty="0">
+                          <a:solidFill>
+                            <a:schemeClr val="tx1"/>
+                          </a:solidFill>
+                          <a:latin typeface="피플폰트 Bold" panose="020B0600000101010101" pitchFamily="50" charset="-127"/>
+                          <a:ea typeface="피플폰트 Bold" panose="020B0600000101010101" pitchFamily="50" charset="-127"/>
+                          <a:cs typeface="+mn-cs"/>
+                        </a:rPr>
+                        <a:t>)</a:t>
+                      </a:r>
+                      <a:endParaRPr lang="ko-KR" altLang="en-US" sz="1050" b="0" kern="1200" dirty="0">
+                        <a:solidFill>
+                          <a:schemeClr val="tx1"/>
+                        </a:solidFill>
+                        <a:latin typeface="피플폰트 Bold" panose="020B0600000101010101" pitchFamily="50" charset="-127"/>
+                        <a:ea typeface="피플폰트 Bold" panose="020B0600000101010101" pitchFamily="50" charset="-127"/>
+                        <a:cs typeface="+mn-cs"/>
+                      </a:endParaRPr>
+                    </a:p>
+                  </a:txBody>
+                  <a:tcPr marL="51192" marR="51192" marT="7110" marB="0" anchor="ctr">
+                    <a:lnL w="12700" cmpd="sng">
+                      <a:noFill/>
+                    </a:lnL>
+                    <a:lnR w="12700" cmpd="sng">
+                      <a:noFill/>
+                    </a:lnR>
+                    <a:lnT w="6350" cap="flat" cmpd="sng" algn="ctr">
+                      <a:solidFill>
+                        <a:schemeClr val="bg1">
+                          <a:lumMod val="65000"/>
+                        </a:schemeClr>
+                      </a:solidFill>
+                      <a:prstDash val="solid"/>
+                      <a:round/>
+                      <a:headEnd w="med" len="med"/>
+                      <a:tailEnd w="med" len="med"/>
+                    </a:lnT>
+                    <a:lnB w="6350" cap="flat" cmpd="sng" algn="ctr">
+                      <a:solidFill>
+                        <a:schemeClr val="bg1">
+                          <a:lumMod val="65000"/>
+                        </a:schemeClr>
+                      </a:solidFill>
+                      <a:prstDash val="solid"/>
+                      <a:round/>
+                      <a:headEnd w="med" len="med"/>
+                      <a:tailEnd w="med" len="med"/>
+                    </a:lnB>
+                    <a:lnTlToBr w="12700" cmpd="sng">
+                      <a:noFill/>
+                      <a:prstDash val="solid"/>
+                    </a:lnTlToBr>
+                    <a:lnBlToTr w="12700" cmpd="sng">
+                      <a:noFill/>
+                      <a:prstDash val="solid"/>
+                    </a:lnBlToTr>
+                    <a:solidFill>
+                      <a:schemeClr val="bg1"/>
+                    </a:solidFill>
+                  </a:tcPr>
+                </a:tc>
+                <a:extLst>
+                  <a:ext uri="{0D108BD9-81ED-4DB2-BD59-A6C34878D82A}">
+                    <a16:rowId xmlns:a16="http://schemas.microsoft.com/office/drawing/2014/main" val="10005"/>
+                  </a:ext>
+                </a:extLst>
+              </a:tr>
+              <a:tr h="569342">
+                <a:tc>
+                  <a:txBody>
+                    <a:bodyPr/>
+                    <a:lstStyle/>
+                    <a:p>
+                      <a:pPr marL="0" algn="ctr" defTabSz="914400" rtl="0" eaLnBrk="1" latinLnBrk="1" hangingPunct="1">
+                        <a:lnSpc>
+                          <a:spcPct val="115000"/>
+                        </a:lnSpc>
+                        <a:spcAft>
+                          <a:spcPts val="0"/>
+                        </a:spcAft>
+                        <a:defRPr/>
+                      </a:pPr>
+                      <a:r>
+                        <a:rPr lang="ko-KR" altLang="en-US" sz="1050" b="0" kern="1200" dirty="0">
+                          <a:solidFill>
+                            <a:schemeClr val="tx1"/>
+                          </a:solidFill>
+                          <a:latin typeface="피플폰트 Bold" panose="020B0600000101010101" pitchFamily="50" charset="-127"/>
+                          <a:ea typeface="피플폰트 Bold" panose="020B0600000101010101" pitchFamily="50" charset="-127"/>
+                          <a:cs typeface="+mn-cs"/>
+                        </a:rPr>
+                        <a:t>만기일</a:t>
+                      </a:r>
+                    </a:p>
+                  </a:txBody>
+                  <a:tcPr marL="51192" marR="51192" marT="7110" marB="0" anchor="ctr">
+                    <a:lnL w="12700" cmpd="sng">
+                      <a:noFill/>
+                    </a:lnL>
+                    <a:lnR w="12700" cmpd="sng">
+                      <a:noFill/>
+                    </a:lnR>
+                    <a:lnT w="6350" cap="flat" cmpd="sng" algn="ctr">
+                      <a:solidFill>
+                        <a:schemeClr val="bg1">
+                          <a:lumMod val="65000"/>
+                        </a:schemeClr>
+                      </a:solidFill>
+                      <a:prstDash val="solid"/>
+                      <a:round/>
+                      <a:headEnd w="med" len="med"/>
+                      <a:tailEnd w="med" len="med"/>
+                    </a:lnT>
+                    <a:lnB w="6350" cap="flat" cmpd="sng" algn="ctr">
+                      <a:solidFill>
+                        <a:schemeClr val="bg1">
+                          <a:lumMod val="65000"/>
+                        </a:schemeClr>
+                      </a:solidFill>
+                      <a:prstDash val="solid"/>
+                      <a:round/>
+                      <a:headEnd type="none" w="med" len="med"/>
+                      <a:tailEnd type="none" w="med" len="med"/>
+                    </a:lnB>
+                    <a:lnTlToBr w="12700" cmpd="sng">
+                      <a:noFill/>
+                      <a:prstDash val="solid"/>
+                    </a:lnTlToBr>
+                    <a:lnBlToTr w="12700" cmpd="sng">
+                      <a:noFill/>
+                      <a:prstDash val="solid"/>
+                    </a:lnBlToTr>
+                    <a:solidFill>
+                      <a:schemeClr val="bg1">
+                        <a:lumMod val="95000"/>
+                      </a:schemeClr>
+                    </a:solidFill>
+                  </a:tcPr>
+                </a:tc>
+                <a:tc>
+                  <a:txBody>
+                    <a:bodyPr/>
+                    <a:lstStyle/>
+                    <a:p>
+                      <a:pPr marL="0" lvl="0" indent="-342900" algn="l" defTabSz="914400" rtl="0" eaLnBrk="1" latinLnBrk="1" hangingPunct="1">
+                        <a:lnSpc>
+                          <a:spcPct val="115000"/>
+                        </a:lnSpc>
+                        <a:spcAft>
+                          <a:spcPts val="0"/>
+                        </a:spcAft>
+                        <a:buFont typeface="Arial" panose="020B0604020202020204" pitchFamily="34" charset="0"/>
+                        <a:buChar char="•"/>
+                        <a:tabLst>
+                          <a:tab pos="457200" algn="l"/>
+                        </a:tabLst>
+                        <a:defRPr/>
+                      </a:pPr>
+                      <a:r>
+                        <a:rPr lang="en-US" sz="1050" b="0" kern="1200" dirty="0">
+                          <a:solidFill>
+                            <a:schemeClr val="tx1"/>
+                          </a:solidFill>
+                          <a:latin typeface="피플폰트 Bold" panose="020B0600000101010101" pitchFamily="50" charset="-127"/>
+                          <a:ea typeface="피플폰트 Bold" panose="020B0600000101010101" pitchFamily="50" charset="-127"/>
+                          <a:cs typeface="+mn-cs"/>
+                        </a:rPr>
+                        <a:t>20xx</a:t>
+                      </a:r>
+                      <a:r>
+                        <a:rPr lang="ko-KR" altLang="en-US" sz="1050" b="0" kern="1200" dirty="0">
+                          <a:solidFill>
+                            <a:schemeClr val="tx1"/>
+                          </a:solidFill>
+                          <a:latin typeface="피플폰트 Bold" panose="020B0600000101010101" pitchFamily="50" charset="-127"/>
+                          <a:ea typeface="피플폰트 Bold" panose="020B0600000101010101" pitchFamily="50" charset="-127"/>
+                          <a:cs typeface="+mn-cs"/>
+                        </a:rPr>
+                        <a:t>년</a:t>
+                      </a:r>
+                      <a:r>
+                        <a:rPr lang="en-US" sz="1050" b="0" kern="1200" dirty="0">
+                          <a:solidFill>
+                            <a:schemeClr val="tx1"/>
+                          </a:solidFill>
+                          <a:latin typeface="피플폰트 Bold" panose="020B0600000101010101" pitchFamily="50" charset="-127"/>
+                          <a:ea typeface="피플폰트 Bold" panose="020B0600000101010101" pitchFamily="50" charset="-127"/>
+                          <a:cs typeface="+mn-cs"/>
+                        </a:rPr>
+                        <a:t> xx</a:t>
+                      </a:r>
+                      <a:r>
+                        <a:rPr lang="ko-KR" altLang="en-US" sz="1050" b="0" kern="1200" dirty="0">
+                          <a:solidFill>
+                            <a:schemeClr val="tx1"/>
+                          </a:solidFill>
+                          <a:latin typeface="피플폰트 Bold" panose="020B0600000101010101" pitchFamily="50" charset="-127"/>
+                          <a:ea typeface="피플폰트 Bold" panose="020B0600000101010101" pitchFamily="50" charset="-127"/>
+                          <a:cs typeface="+mn-cs"/>
+                        </a:rPr>
+                        <a:t>월 </a:t>
+                      </a:r>
+                      <a:r>
+                        <a:rPr lang="en-US" sz="1050" b="0" kern="1200" dirty="0">
+                          <a:solidFill>
+                            <a:schemeClr val="tx1"/>
+                          </a:solidFill>
+                          <a:latin typeface="피플폰트 Bold" panose="020B0600000101010101" pitchFamily="50" charset="-127"/>
+                          <a:ea typeface="피플폰트 Bold" panose="020B0600000101010101" pitchFamily="50" charset="-127"/>
+                          <a:cs typeface="+mn-cs"/>
+                        </a:rPr>
+                        <a:t>(</a:t>
+                      </a:r>
+                      <a:r>
+                        <a:rPr lang="ko-KR" altLang="en-US" sz="1050" b="0" kern="1200" dirty="0">
+                          <a:solidFill>
+                            <a:schemeClr val="tx1"/>
+                          </a:solidFill>
+                          <a:latin typeface="피플폰트 Bold" panose="020B0600000101010101" pitchFamily="50" charset="-127"/>
+                          <a:ea typeface="피플폰트 Bold" panose="020B0600000101010101" pitchFamily="50" charset="-127"/>
+                          <a:cs typeface="+mn-cs"/>
+                        </a:rPr>
+                        <a:t>발행일로부터 </a:t>
+                      </a:r>
+                      <a:r>
+                        <a:rPr lang="en-US" altLang="ko-KR" sz="1050" b="0" kern="1200" dirty="0">
+                          <a:solidFill>
+                            <a:schemeClr val="tx1"/>
+                          </a:solidFill>
+                          <a:latin typeface="피플폰트 Bold" panose="020B0600000101010101" pitchFamily="50" charset="-127"/>
+                          <a:ea typeface="피플폰트 Bold" panose="020B0600000101010101" pitchFamily="50" charset="-127"/>
+                          <a:cs typeface="+mn-cs"/>
+                        </a:rPr>
+                        <a:t>xx</a:t>
+                      </a:r>
+                      <a:r>
+                        <a:rPr lang="ko-KR" altLang="en-US" sz="1050" b="0" kern="1200" dirty="0">
+                          <a:solidFill>
+                            <a:schemeClr val="tx1"/>
+                          </a:solidFill>
+                          <a:latin typeface="피플폰트 Bold" panose="020B0600000101010101" pitchFamily="50" charset="-127"/>
+                          <a:ea typeface="피플폰트 Bold" panose="020B0600000101010101" pitchFamily="50" charset="-127"/>
+                          <a:cs typeface="+mn-cs"/>
+                        </a:rPr>
+                        <a:t>개월</a:t>
+                      </a:r>
+                      <a:r>
+                        <a:rPr lang="en-US" sz="1050" b="0" kern="1200" dirty="0">
+                          <a:solidFill>
+                            <a:schemeClr val="tx1"/>
+                          </a:solidFill>
+                          <a:latin typeface="피플폰트 Bold" panose="020B0600000101010101" pitchFamily="50" charset="-127"/>
+                          <a:ea typeface="피플폰트 Bold" panose="020B0600000101010101" pitchFamily="50" charset="-127"/>
+                          <a:cs typeface="+mn-cs"/>
+                        </a:rPr>
+                        <a:t>) </a:t>
+                      </a:r>
+                    </a:p>
+                  </a:txBody>
+                  <a:tcPr marL="51192" marR="51192" marT="7110" marB="0" anchor="ctr">
+                    <a:lnL w="12700" cmpd="sng">
+                      <a:noFill/>
+                    </a:lnL>
+                    <a:lnR w="12700" cmpd="sng">
+                      <a:noFill/>
+                    </a:lnR>
+                    <a:lnT w="6350" cap="flat" cmpd="sng" algn="ctr">
+                      <a:solidFill>
+                        <a:schemeClr val="bg1">
+                          <a:lumMod val="65000"/>
+                        </a:schemeClr>
+                      </a:solidFill>
+                      <a:prstDash val="solid"/>
+                      <a:round/>
+                      <a:headEnd w="med" len="med"/>
+                      <a:tailEnd w="med" len="med"/>
+                    </a:lnT>
+                    <a:lnB w="6350" cap="flat" cmpd="sng" algn="ctr">
+                      <a:solidFill>
+                        <a:schemeClr val="bg1">
+                          <a:lumMod val="65000"/>
+                        </a:schemeClr>
+                      </a:solidFill>
+                      <a:prstDash val="solid"/>
+                      <a:round/>
+                      <a:headEnd type="none" w="med" len="med"/>
+                      <a:tailEnd type="none" w="med" len="med"/>
+                    </a:lnB>
+                    <a:lnTlToBr w="12700" cmpd="sng">
+                      <a:noFill/>
+                      <a:prstDash val="solid"/>
+                    </a:lnTlToBr>
+                    <a:lnBlToTr w="12700" cmpd="sng">
+                      <a:noFill/>
+                      <a:prstDash val="solid"/>
+                    </a:lnBlToTr>
+                    <a:solidFill>
+                      <a:schemeClr val="bg1"/>
+                    </a:solidFill>
+                  </a:tcPr>
+                </a:tc>
+                <a:extLst>
+                  <a:ext uri="{0D108BD9-81ED-4DB2-BD59-A6C34878D82A}">
+                    <a16:rowId xmlns:a16="http://schemas.microsoft.com/office/drawing/2014/main" val="10006"/>
+                  </a:ext>
+                </a:extLst>
+              </a:tr>
+              <a:tr h="569342">
+                <a:tc>
+                  <a:txBody>
+                    <a:bodyPr/>
+                    <a:lstStyle/>
+                    <a:p>
+                      <a:pPr marL="0" algn="ctr" defTabSz="914400" rtl="0" eaLnBrk="1" latinLnBrk="1" hangingPunct="1">
+                        <a:lnSpc>
+                          <a:spcPct val="115000"/>
+                        </a:lnSpc>
+                        <a:spcAft>
+                          <a:spcPts val="0"/>
+                        </a:spcAft>
+                        <a:defRPr/>
+                      </a:pPr>
+                      <a:r>
+                        <a:rPr lang="ko-KR" altLang="en-US" sz="1050" b="0" kern="1200" dirty="0">
+                          <a:solidFill>
+                            <a:schemeClr val="tx1"/>
+                          </a:solidFill>
+                          <a:latin typeface="피플폰트 Bold" panose="020B0600000101010101" pitchFamily="50" charset="-127"/>
+                          <a:ea typeface="피플폰트 Bold" panose="020B0600000101010101" pitchFamily="50" charset="-127"/>
+                          <a:cs typeface="+mn-cs"/>
+                        </a:rPr>
+                        <a:t>금융조건</a:t>
+                      </a:r>
+                    </a:p>
+                  </a:txBody>
+                  <a:tcPr marL="51192" marR="51192" marT="7110" marB="0" anchor="ctr">
+                    <a:lnL w="12700" cmpd="sng">
+                      <a:noFill/>
+                    </a:lnL>
+                    <a:lnR w="12700" cmpd="sng">
+                      <a:noFill/>
+                    </a:lnR>
+                    <a:lnT w="6350" cap="flat" cmpd="sng" algn="ctr">
+                      <a:solidFill>
+                        <a:schemeClr val="bg1">
+                          <a:lumMod val="65000"/>
+                        </a:schemeClr>
+                      </a:solidFill>
+                      <a:prstDash val="solid"/>
+                      <a:round/>
+                      <a:headEnd w="med" len="med"/>
+                      <a:tailEnd w="med" len="med"/>
+                    </a:lnT>
+                    <a:lnB w="6350" cap="flat" cmpd="sng" algn="ctr">
+                      <a:solidFill>
+                        <a:schemeClr val="bg1">
+                          <a:lumMod val="65000"/>
+                        </a:schemeClr>
+                      </a:solidFill>
+                      <a:prstDash val="solid"/>
+                      <a:round/>
+                      <a:headEnd type="none" w="med" len="med"/>
+                      <a:tailEnd type="none" w="med" len="med"/>
+                    </a:lnB>
+                    <a:lnTlToBr w="12700" cmpd="sng">
+                      <a:noFill/>
+                      <a:prstDash val="solid"/>
+                    </a:lnTlToBr>
+                    <a:lnBlToTr w="12700" cmpd="sng">
+                      <a:noFill/>
+                      <a:prstDash val="solid"/>
+                    </a:lnBlToTr>
+                    <a:solidFill>
+                      <a:schemeClr val="bg1">
+                        <a:lumMod val="95000"/>
+                      </a:schemeClr>
+                    </a:solidFill>
+                  </a:tcPr>
+                </a:tc>
+                <a:tc>
+                  <a:txBody>
+                    <a:bodyPr/>
+                    <a:lstStyle/>
+                    <a:p>
+                      <a:pPr marL="0" lvl="0" indent="-342900" algn="l" defTabSz="914400" rtl="0" eaLnBrk="1" latinLnBrk="1" hangingPunct="1">
+                        <a:lnSpc>
+                          <a:spcPct val="115000"/>
+                        </a:lnSpc>
+                        <a:spcAft>
+                          <a:spcPts val="0"/>
+                        </a:spcAft>
+                        <a:buFont typeface="Arial" panose="020B0604020202020204" pitchFamily="34" charset="0"/>
+                        <a:buChar char="•"/>
+                        <a:tabLst>
+                          <a:tab pos="457200" algn="l"/>
+                        </a:tabLst>
+                        <a:defRPr/>
+                      </a:pPr>
+                      <a:r>
+                        <a:rPr lang="ko-KR" altLang="en-US" sz="1050" b="0" kern="1200" dirty="0">
+                          <a:solidFill>
+                            <a:schemeClr val="tx1"/>
+                          </a:solidFill>
+                          <a:latin typeface="피플폰트 Bold" panose="020B0600000101010101" pitchFamily="50" charset="-127"/>
+                          <a:ea typeface="피플폰트 Bold" panose="020B0600000101010101" pitchFamily="50" charset="-127"/>
+                          <a:cs typeface="+mn-cs"/>
+                        </a:rPr>
+                        <a:t>직접 </a:t>
+                      </a:r>
+                      <a:r>
+                        <a:rPr lang="ko-KR" altLang="en-US" sz="1050" b="0" kern="1200" dirty="0" err="1">
+                          <a:solidFill>
+                            <a:schemeClr val="tx1"/>
+                          </a:solidFill>
+                          <a:latin typeface="피플폰트 Bold" panose="020B0600000101010101" pitchFamily="50" charset="-127"/>
+                          <a:ea typeface="피플폰트 Bold" panose="020B0600000101010101" pitchFamily="50" charset="-127"/>
+                          <a:cs typeface="+mn-cs"/>
+                        </a:rPr>
+                        <a:t>적어야함</a:t>
+                      </a:r>
+                      <a:endParaRPr lang="en-US" sz="1050" b="0" kern="1200" dirty="0">
+                        <a:solidFill>
+                          <a:schemeClr val="tx1"/>
+                        </a:solidFill>
+                        <a:latin typeface="피플폰트 Bold" panose="020B0600000101010101" pitchFamily="50" charset="-127"/>
+                        <a:ea typeface="피플폰트 Bold" panose="020B0600000101010101" pitchFamily="50" charset="-127"/>
+                        <a:cs typeface="+mn-cs"/>
+                      </a:endParaRPr>
+                    </a:p>
+                  </a:txBody>
+                  <a:tcPr marL="51192" marR="51192" marT="7110" marB="0" anchor="ctr">
+                    <a:lnL w="12700" cmpd="sng">
+                      <a:noFill/>
+                    </a:lnL>
+                    <a:lnR w="12700" cmpd="sng">
+                      <a:noFill/>
+                    </a:lnR>
+                    <a:lnT w="6350" cap="flat" cmpd="sng" algn="ctr">
+                      <a:solidFill>
+                        <a:schemeClr val="bg1">
+                          <a:lumMod val="65000"/>
+                        </a:schemeClr>
+                      </a:solidFill>
+                      <a:prstDash val="solid"/>
+                      <a:round/>
+                      <a:headEnd w="med" len="med"/>
+                      <a:tailEnd w="med" len="med"/>
+                    </a:lnT>
+                    <a:lnB w="6350" cap="flat" cmpd="sng" algn="ctr">
+                      <a:solidFill>
+                        <a:schemeClr val="bg1">
+                          <a:lumMod val="65000"/>
+                        </a:schemeClr>
+                      </a:solidFill>
+                      <a:prstDash val="solid"/>
+                      <a:round/>
+                      <a:headEnd type="none" w="med" len="med"/>
+                      <a:tailEnd type="none" w="med" len="med"/>
+                    </a:lnB>
+                    <a:lnTlToBr w="12700" cmpd="sng">
+                      <a:noFill/>
+                      <a:prstDash val="solid"/>
+                    </a:lnTlToBr>
+                    <a:lnBlToTr w="12700" cmpd="sng">
+                      <a:noFill/>
+                      <a:prstDash val="solid"/>
+                    </a:lnBlToTr>
+                    <a:solidFill>
+                      <a:schemeClr val="bg1"/>
+                    </a:solidFill>
+                  </a:tcPr>
+                </a:tc>
+                <a:extLst>
+                  <a:ext uri="{0D108BD9-81ED-4DB2-BD59-A6C34878D82A}">
+                    <a16:rowId xmlns:a16="http://schemas.microsoft.com/office/drawing/2014/main" val="3597849041"/>
+                  </a:ext>
+                </a:extLst>
+              </a:tr>
+              <a:tr h="553370">
+                <a:tc>
+                  <a:txBody>
+                    <a:bodyPr/>
+                    <a:lstStyle/>
+                    <a:p>
+                      <a:pPr marL="0" algn="ctr" defTabSz="914400" rtl="0" eaLnBrk="1" latinLnBrk="1" hangingPunct="1">
+                        <a:lnSpc>
+                          <a:spcPct val="115000"/>
+                        </a:lnSpc>
+                        <a:spcAft>
+                          <a:spcPts val="0"/>
+                        </a:spcAft>
+                        <a:defRPr/>
+                      </a:pPr>
+                      <a:r>
+                        <a:rPr lang="ko-KR" altLang="en-US" sz="1050" b="0" kern="1200" dirty="0">
+                          <a:solidFill>
+                            <a:schemeClr val="tx1"/>
+                          </a:solidFill>
+                          <a:latin typeface="피플폰트 Bold" panose="020B0600000101010101" pitchFamily="50" charset="-127"/>
+                          <a:ea typeface="피플폰트 Bold" panose="020B0600000101010101" pitchFamily="50" charset="-127"/>
+                          <a:cs typeface="+mn-cs"/>
+                        </a:rPr>
+                        <a:t>이자지급주기</a:t>
+                      </a:r>
+                    </a:p>
+                  </a:txBody>
+                  <a:tcPr marL="51192" marR="51192" marT="7110" marB="0" anchor="ctr">
+                    <a:lnL w="12700" cmpd="sng">
+                      <a:noFill/>
+                    </a:lnL>
+                    <a:lnR w="12700" cmpd="sng">
+                      <a:noFill/>
+                    </a:lnR>
+                    <a:lnT w="6350" cap="flat" cmpd="sng" algn="ctr">
+                      <a:solidFill>
+                        <a:schemeClr val="bg1">
+                          <a:lumMod val="65000"/>
+                        </a:schemeClr>
+                      </a:solidFill>
+                      <a:prstDash val="solid"/>
+                      <a:round/>
+                      <a:headEnd w="med" len="med"/>
+                      <a:tailEnd w="med" len="med"/>
+                    </a:lnT>
+                    <a:lnB w="6350" cap="flat" cmpd="sng" algn="ctr">
+                      <a:solidFill>
+                        <a:schemeClr val="bg1">
+                          <a:lumMod val="65000"/>
+                        </a:schemeClr>
+                      </a:solidFill>
+                      <a:prstDash val="solid"/>
+                      <a:round/>
+                      <a:headEnd type="none" w="med" len="med"/>
+                      <a:tailEnd type="none" w="med" len="med"/>
+                    </a:lnB>
+                    <a:lnTlToBr w="12700" cmpd="sng">
+                      <a:noFill/>
+                      <a:prstDash val="solid"/>
+                    </a:lnTlToBr>
+                    <a:lnBlToTr w="12700" cmpd="sng">
+                      <a:noFill/>
+                      <a:prstDash val="solid"/>
+                    </a:lnBlToTr>
+                    <a:solidFill>
+                      <a:schemeClr val="bg1">
+                        <a:lumMod val="95000"/>
+                      </a:schemeClr>
+                    </a:solidFill>
+                  </a:tcPr>
+                </a:tc>
+                <a:tc>
+                  <a:txBody>
+                    <a:bodyPr/>
+                    <a:lstStyle/>
+                    <a:p>
+                      <a:pPr marL="0" lvl="0" indent="-342900" algn="l" defTabSz="914400" rtl="0" eaLnBrk="1" latinLnBrk="1" hangingPunct="1">
+                        <a:lnSpc>
+                          <a:spcPct val="115000"/>
+                        </a:lnSpc>
+                        <a:spcAft>
+                          <a:spcPts val="0"/>
+                        </a:spcAft>
+                        <a:buFont typeface="Arial" panose="020B0604020202020204" pitchFamily="34" charset="0"/>
+                        <a:buChar char="•"/>
+                        <a:tabLst>
+                          <a:tab pos="457200" algn="l"/>
+                        </a:tabLst>
+                        <a:defRPr/>
+                      </a:pPr>
+                      <a:r>
+                        <a:rPr lang="en-US" sz="1050" b="0" kern="1200" dirty="0">
+                          <a:solidFill>
+                            <a:schemeClr val="tx1"/>
+                          </a:solidFill>
+                          <a:latin typeface="피플폰트 Bold" panose="020B0600000101010101" pitchFamily="50" charset="-127"/>
+                          <a:ea typeface="피플폰트 Bold" panose="020B0600000101010101" pitchFamily="50" charset="-127"/>
+                          <a:cs typeface="+mn-cs"/>
+                        </a:rPr>
+                        <a:t>[xx]</a:t>
+                      </a:r>
+                      <a:r>
+                        <a:rPr lang="ko-KR" altLang="en-US" sz="1050" b="0" kern="1200" dirty="0">
+                          <a:solidFill>
+                            <a:schemeClr val="tx1"/>
+                          </a:solidFill>
+                          <a:latin typeface="피플폰트 Bold" panose="020B0600000101010101" pitchFamily="50" charset="-127"/>
+                          <a:ea typeface="피플폰트 Bold" panose="020B0600000101010101" pitchFamily="50" charset="-127"/>
+                          <a:cs typeface="+mn-cs"/>
+                        </a:rPr>
+                        <a:t>개월 단위 후취</a:t>
+                      </a:r>
+                    </a:p>
+                  </a:txBody>
+                  <a:tcPr marL="51192" marR="51192" marT="7110" marB="0" anchor="ctr">
+                    <a:lnL w="12700" cmpd="sng">
+                      <a:noFill/>
+                    </a:lnL>
+                    <a:lnR w="12700" cmpd="sng">
+                      <a:noFill/>
+                    </a:lnR>
+                    <a:lnT w="6350" cap="flat" cmpd="sng" algn="ctr">
+                      <a:solidFill>
+                        <a:schemeClr val="bg1">
+                          <a:lumMod val="65000"/>
+                        </a:schemeClr>
+                      </a:solidFill>
+                      <a:prstDash val="solid"/>
+                      <a:round/>
+                      <a:headEnd w="med" len="med"/>
+                      <a:tailEnd w="med" len="med"/>
+                    </a:lnT>
+                    <a:lnB w="6350" cap="flat" cmpd="sng" algn="ctr">
+                      <a:solidFill>
+                        <a:schemeClr val="bg1">
+                          <a:lumMod val="65000"/>
+                        </a:schemeClr>
+                      </a:solidFill>
+                      <a:prstDash val="solid"/>
+                      <a:round/>
+                      <a:headEnd type="none" w="med" len="med"/>
+                      <a:tailEnd type="none" w="med" len="med"/>
+                    </a:lnB>
+                    <a:lnTlToBr w="12700" cmpd="sng">
+                      <a:noFill/>
+                      <a:prstDash val="solid"/>
+                    </a:lnTlToBr>
+                    <a:lnBlToTr w="12700" cmpd="sng">
+                      <a:noFill/>
+                      <a:prstDash val="solid"/>
+                    </a:lnBlToTr>
+                    <a:solidFill>
+                      <a:schemeClr val="bg1"/>
+                    </a:solidFill>
+                  </a:tcPr>
+                </a:tc>
+                <a:extLst>
+                  <a:ext uri="{0D108BD9-81ED-4DB2-BD59-A6C34878D82A}">
+                    <a16:rowId xmlns:a16="http://schemas.microsoft.com/office/drawing/2014/main" val="3785421565"/>
+                  </a:ext>
+                </a:extLst>
+              </a:tr>
+            </a:tbl>
+          </a:graphicData>
+        </a:graphic>
+      </p:graphicFrame>
+      <p:sp>
+        <p:nvSpPr>
+          <p:cNvPr id="6" name="텍스트 개체 틀 4">
+            <a:extLst>
+              <a:ext uri="{FF2B5EF4-FFF2-40B4-BE49-F238E27FC236}">
+                <a16:creationId xmlns:a16="http://schemas.microsoft.com/office/drawing/2014/main" id="{745B4E01-8E51-938E-3086-5CA353FEBC62}"/>
+              </a:ext>
+            </a:extLst>
+          </p:cNvPr>
+          <p:cNvSpPr>
+            <a:spLocks noGrp="1"/>
+          </p:cNvSpPr>
+          <p:nvPr>
+            <p:ph type="body" sz="quarter" idx="11"/>
+          </p:nvPr>
+        </p:nvSpPr>
+        <p:spPr>
+          <a:xfrm>
+            <a:off x="393700" y="588702"/>
+            <a:ext cx="3228975" cy="265509"/>
+          </a:xfrm>
+        </p:spPr>
+        <p:txBody>
+          <a:bodyPr/>
+          <a:lstStyle/>
+          <a:p>
+            <a:r>
+              <a:rPr lang="en-US" altLang="ko-KR" dirty="0">
+                <a:latin typeface="피플폰트 Bold" panose="020B0600000101010101" pitchFamily="50" charset="-127"/>
+                <a:ea typeface="피플폰트 Bold" panose="020B0600000101010101" pitchFamily="50" charset="-127"/>
+              </a:rPr>
+              <a:t>1.1 </a:t>
+            </a:r>
+            <a:r>
+              <a:rPr lang="ko-KR" altLang="en-US" dirty="0">
+                <a:latin typeface="피플폰트 Bold" panose="020B0600000101010101" pitchFamily="50" charset="-127"/>
+                <a:ea typeface="피플폰트 Bold" panose="020B0600000101010101" pitchFamily="50" charset="-127"/>
+              </a:rPr>
+              <a:t>본건 사모사채 개요</a:t>
+            </a:r>
+          </a:p>
+        </p:txBody>
+      </p:sp>
+      <p:sp>
+        <p:nvSpPr>
+          <p:cNvPr id="8" name="슬라이드 번호 개체 틀 1">
+            <a:extLst>
+              <a:ext uri="{FF2B5EF4-FFF2-40B4-BE49-F238E27FC236}">
+                <a16:creationId xmlns:a16="http://schemas.microsoft.com/office/drawing/2014/main" id="{1D2DAE9A-5557-4587-B1B1-8C1886F4C64A}"/>
+              </a:ext>
+            </a:extLst>
+          </p:cNvPr>
+          <p:cNvSpPr txBox="1">
+            <a:spLocks/>
+          </p:cNvSpPr>
+          <p:nvPr/>
+        </p:nvSpPr>
+        <p:spPr>
+          <a:xfrm>
+            <a:off x="6567488" y="6576219"/>
+            <a:ext cx="3097212" cy="227169"/>
+          </a:xfrm>
+          <a:prstGeom prst="rect">
+            <a:avLst/>
+          </a:prstGeom>
+        </p:spPr>
+        <p:txBody>
+          <a:bodyPr vert="horz" lIns="91440" tIns="45720" rIns="0" bIns="45720" rtlCol="0" anchor="ctr"/>
+          <a:lstStyle>
+            <a:defPPr>
+              <a:defRPr lang="en-US"/>
+            </a:defPPr>
+            <a:lvl1pPr marL="0" algn="r" defTabSz="457200" rtl="0" eaLnBrk="1" latinLnBrk="0" hangingPunct="1">
+              <a:defRPr sz="800" kern="1200">
+                <a:solidFill>
+                  <a:schemeClr val="tx1">
+                    <a:tint val="75000"/>
+                  </a:schemeClr>
+                </a:solidFill>
+                <a:latin typeface="+mn-ea"/>
+                <a:ea typeface="+mn-ea"/>
+                <a:cs typeface="+mn-cs"/>
+              </a:defRPr>
+            </a:lvl1pPr>
+            <a:lvl2pPr marL="457200" algn="l" defTabSz="457200" rtl="0" eaLnBrk="1" latinLnBrk="0" hangingPunct="1">
+              <a:defRPr sz="1800" kern="1200">
+                <a:solidFill>
+                  <a:schemeClr val="tx1"/>
+                </a:solidFill>
+                <a:latin typeface="+mn-lt"/>
+                <a:ea typeface="+mn-ea"/>
+                <a:cs typeface="+mn-cs"/>
+              </a:defRPr>
+            </a:lvl2pPr>
+            <a:lvl3pPr marL="914400" algn="l" defTabSz="457200" rtl="0" eaLnBrk="1" latinLnBrk="0" hangingPunct="1">
+              <a:defRPr sz="1800" kern="1200">
+                <a:solidFill>
+                  <a:schemeClr val="tx1"/>
+                </a:solidFill>
+                <a:latin typeface="+mn-lt"/>
+                <a:ea typeface="+mn-ea"/>
+                <a:cs typeface="+mn-cs"/>
+              </a:defRPr>
+            </a:lvl3pPr>
+            <a:lvl4pPr marL="1371600" algn="l" defTabSz="457200" rtl="0" eaLnBrk="1" latinLnBrk="0" hangingPunct="1">
+              <a:defRPr sz="1800" kern="1200">
+                <a:solidFill>
+                  <a:schemeClr val="tx1"/>
+                </a:solidFill>
+                <a:latin typeface="+mn-lt"/>
+                <a:ea typeface="+mn-ea"/>
+                <a:cs typeface="+mn-cs"/>
+              </a:defRPr>
+            </a:lvl4pPr>
+            <a:lvl5pPr marL="1828800" algn="l" defTabSz="457200" rtl="0" eaLnBrk="1" latinLnBrk="0" hangingPunct="1">
+              <a:defRPr sz="1800" kern="1200">
+                <a:solidFill>
+                  <a:schemeClr val="tx1"/>
+                </a:solidFill>
+                <a:latin typeface="+mn-lt"/>
+                <a:ea typeface="+mn-ea"/>
+                <a:cs typeface="+mn-cs"/>
+              </a:defRPr>
+            </a:lvl5pPr>
+            <a:lvl6pPr marL="2286000" algn="l" defTabSz="457200" rtl="0" eaLnBrk="1" latinLnBrk="0" hangingPunct="1">
+              <a:defRPr sz="1800" kern="1200">
+                <a:solidFill>
+                  <a:schemeClr val="tx1"/>
+                </a:solidFill>
+                <a:latin typeface="+mn-lt"/>
+                <a:ea typeface="+mn-ea"/>
+                <a:cs typeface="+mn-cs"/>
+              </a:defRPr>
+            </a:lvl6pPr>
+            <a:lvl7pPr marL="2743200" algn="l" defTabSz="457200" rtl="0" eaLnBrk="1" latinLnBrk="0" hangingPunct="1">
+              <a:defRPr sz="1800" kern="1200">
+                <a:solidFill>
+                  <a:schemeClr val="tx1"/>
+                </a:solidFill>
+                <a:latin typeface="+mn-lt"/>
+                <a:ea typeface="+mn-ea"/>
+                <a:cs typeface="+mn-cs"/>
+              </a:defRPr>
+            </a:lvl7pPr>
+            <a:lvl8pPr marL="3200400" algn="l" defTabSz="457200" rtl="0" eaLnBrk="1" latinLnBrk="0" hangingPunct="1">
+              <a:defRPr sz="1800" kern="1200">
+                <a:solidFill>
+                  <a:schemeClr val="tx1"/>
+                </a:solidFill>
+                <a:latin typeface="+mn-lt"/>
+                <a:ea typeface="+mn-ea"/>
+                <a:cs typeface="+mn-cs"/>
+              </a:defRPr>
+            </a:lvl8pPr>
+            <a:lvl9pPr marL="3657600" algn="l" defTabSz="457200" rtl="0" eaLnBrk="1" latinLnBrk="0" hangingPunct="1">
+              <a:defRPr sz="1800" kern="1200">
+                <a:solidFill>
+                  <a:schemeClr val="tx1"/>
+                </a:solidFill>
+                <a:latin typeface="+mn-lt"/>
+                <a:ea typeface="+mn-ea"/>
+                <a:cs typeface="+mn-cs"/>
+              </a:defRPr>
+            </a:lvl9pPr>
+          </a:lstStyle>
+          <a:p>
+            <a:pPr>
+              <a:defRPr/>
+            </a:pPr>
+            <a:r>
+              <a:rPr lang="ko-KR" altLang="en-US" dirty="0">
+                <a:latin typeface="피플폰트 Light" panose="020B0600000101010101" pitchFamily="50" charset="-127"/>
+                <a:ea typeface="피플폰트 Light" panose="020B0600000101010101" pitchFamily="50" charset="-127"/>
+              </a:rPr>
+              <a:t>사업명｜</a:t>
+            </a:r>
+            <a:r>
+              <a:rPr lang="en-US" altLang="ko-KR" dirty="0">
+                <a:latin typeface="피플폰트 Light" panose="020B0600000101010101" pitchFamily="50" charset="-127"/>
+                <a:ea typeface="피플폰트 Light" panose="020B0600000101010101" pitchFamily="50" charset="-127"/>
+              </a:rPr>
+              <a:t>  </a:t>
+            </a:r>
+            <a:fld id="{F3A57096-21A8-44ED-AF94-8A259496D2BE}" type="slidenum">
+              <a:rPr lang="en-US" altLang="en-US" smtClean="0">
+                <a:latin typeface="피플폰트 Light" panose="020B0600000101010101" pitchFamily="50" charset="-127"/>
+                <a:ea typeface="피플폰트 Light" panose="020B0600000101010101" pitchFamily="50" charset="-127"/>
+              </a:rPr>
+              <a:pPr>
+                <a:defRPr/>
+              </a:pPr>
+              <a:t>6</a:t>
+            </a:fld>
+            <a:endParaRPr lang="en-US" altLang="en-US" dirty="0">
+              <a:latin typeface="피플폰트 Light" panose="020B0600000101010101" pitchFamily="50" charset="-127"/>
+              <a:ea typeface="피플폰트 Light" panose="020B0600000101010101" pitchFamily="50" charset="-127"/>
+            </a:endParaRPr>
+          </a:p>
+        </p:txBody>
+      </p:sp>
+    </p:spTree>
+  </p:cSld>
+  <p:clrMapOvr>
+    <a:masterClrMapping/>
+  </p:clrMapOvr>
+  <p:transition/>
+</p:sld>
+</file>
+
+<file path=ppt/slides/slide7.xml><?xml version="1.0" encoding="utf-8"?>
+<p:sld xmlns:a="http://schemas.openxmlformats.org/drawingml/2006/main" xmlns:r="http://schemas.openxmlformats.org/officeDocument/2006/relationships" xmlns:p="http://schemas.openxmlformats.org/presentationml/2006/main">
+  <p:cSld>
+    <p:spTree>
+      <p:nvGrpSpPr>
+        <p:cNvPr id="1" name=""/>
+        <p:cNvGrpSpPr/>
+        <p:nvPr/>
+      </p:nvGrpSpPr>
+      <p:grpSpPr>
+        <a:xfrm>
+          <a:off x="0" y="0"/>
+          <a:ext cx="0" cy="0"/>
+          <a:chOff x="0" y="0"/>
+          <a:chExt cx="0" cy="0"/>
+        </a:xfrm>
+      </p:grpSpPr>
       <p:grpSp>
         <p:nvGrpSpPr>
           <p:cNvPr id="14" name="그룹 13">
@@ -11829,7 +14578,7 @@
 </p:sld>
 </file>
 
-<file path=ppt/slides/slide7.xml><?xml version="1.0" encoding="utf-8"?>
+<file path=ppt/slides/slide8.xml><?xml version="1.0" encoding="utf-8"?>
 <p:sld xmlns:a="http://schemas.openxmlformats.org/drawingml/2006/main" xmlns:r="http://schemas.openxmlformats.org/officeDocument/2006/relationships" xmlns:p="http://schemas.openxmlformats.org/presentationml/2006/main">
   <p:cSld>
     <p:spTree>
@@ -12391,7 +15140,7 @@
 </p:sld>
 </file>
 
-<file path=ppt/slides/slide8.xml><?xml version="1.0" encoding="utf-8"?>
+<file path=ppt/slides/slide9.xml><?xml version="1.0" encoding="utf-8"?>
 <p:sld xmlns:a="http://schemas.openxmlformats.org/drawingml/2006/main" xmlns:r="http://schemas.openxmlformats.org/officeDocument/2006/relationships" xmlns:p="http://schemas.openxmlformats.org/presentationml/2006/main">
   <p:cSld>
     <p:spTree>
@@ -12947,460 +15696,6 @@
   <p:clrMapOvr>
     <a:masterClrMapping/>
   </p:clrMapOvr>
-</p:sld>
-</file>
-
-<file path=ppt/slides/slide9.xml><?xml version="1.0" encoding="utf-8"?>
-<p:sld xmlns:a="http://schemas.openxmlformats.org/drawingml/2006/main" xmlns:r="http://schemas.openxmlformats.org/officeDocument/2006/relationships" xmlns:p="http://schemas.openxmlformats.org/presentationml/2006/main">
-  <p:cSld>
-    <p:spTree>
-      <p:nvGrpSpPr>
-        <p:cNvPr id="1" name=""/>
-        <p:cNvGrpSpPr/>
-        <p:nvPr/>
-      </p:nvGrpSpPr>
-      <p:grpSpPr>
-        <a:xfrm>
-          <a:off x="0" y="0"/>
-          <a:ext cx="0" cy="0"/>
-          <a:chOff x="0" y="0"/>
-          <a:chExt cx="0" cy="0"/>
-        </a:xfrm>
-      </p:grpSpPr>
-      <p:sp>
-        <p:nvSpPr>
-          <p:cNvPr id="4" name="텍스트 개체 틀 3"/>
-          <p:cNvSpPr>
-            <a:spLocks noGrp="1"/>
-          </p:cNvSpPr>
-          <p:nvPr>
-            <p:ph type="body" sz="quarter" idx="10"/>
-          </p:nvPr>
-        </p:nvSpPr>
-        <p:spPr/>
-        <p:txBody>
-          <a:bodyPr/>
-          <a:lstStyle/>
-          <a:p>
-            <a:pPr lvl="0">
-              <a:defRPr/>
-            </a:pPr>
-            <a:r>
-              <a:rPr lang="ko-KR" altLang="en-US" dirty="0">
-                <a:latin typeface="피플폰트 Bold" panose="020B0600000101010101" pitchFamily="50" charset="-127"/>
-                <a:ea typeface="피플폰트 Bold" panose="020B0600000101010101" pitchFamily="50" charset="-127"/>
-              </a:rPr>
-              <a:t>제목</a:t>
-            </a:r>
-          </a:p>
-        </p:txBody>
-      </p:sp>
-      <p:sp>
-        <p:nvSpPr>
-          <p:cNvPr id="2" name="텍스트 개체 틀 4">
-            <a:extLst>
-              <a:ext uri="{FF2B5EF4-FFF2-40B4-BE49-F238E27FC236}">
-                <a16:creationId xmlns:a16="http://schemas.microsoft.com/office/drawing/2014/main" id="{10D206EE-4599-9CC4-A08C-CA49006EA536}"/>
-              </a:ext>
-            </a:extLst>
-          </p:cNvPr>
-          <p:cNvSpPr>
-            <a:spLocks noGrp="1"/>
-          </p:cNvSpPr>
-          <p:nvPr>
-            <p:ph type="body" sz="quarter" idx="11"/>
-          </p:nvPr>
-        </p:nvSpPr>
-        <p:spPr/>
-        <p:txBody>
-          <a:bodyPr/>
-          <a:lstStyle/>
-          <a:p>
-            <a:r>
-              <a:rPr lang="ko-KR" altLang="en-US" dirty="0">
-                <a:latin typeface="피플폰트 Bold" panose="020B0600000101010101" pitchFamily="50" charset="-127"/>
-                <a:ea typeface="피플폰트 Bold" panose="020B0600000101010101" pitchFamily="50" charset="-127"/>
-              </a:rPr>
-              <a:t>소제목</a:t>
-            </a:r>
-          </a:p>
-        </p:txBody>
-      </p:sp>
-      <p:sp>
-        <p:nvSpPr>
-          <p:cNvPr id="18" name="텍스트 개체 틀 2">
-            <a:extLst>
-              <a:ext uri="{FF2B5EF4-FFF2-40B4-BE49-F238E27FC236}">
-                <a16:creationId xmlns:a16="http://schemas.microsoft.com/office/drawing/2014/main" id="{E2A2AC6F-E152-4C5D-9AAC-4E8A0AA8A9CE}"/>
-              </a:ext>
-            </a:extLst>
-          </p:cNvPr>
-          <p:cNvSpPr txBox="1">
-            <a:spLocks/>
-          </p:cNvSpPr>
-          <p:nvPr/>
-        </p:nvSpPr>
-        <p:spPr>
-          <a:xfrm>
-            <a:off x="393698" y="823870"/>
-            <a:ext cx="9118602" cy="489117"/>
-          </a:xfrm>
-          <a:prstGeom prst="rect">
-            <a:avLst/>
-          </a:prstGeom>
-        </p:spPr>
-        <p:txBody>
-          <a:bodyPr vert="horz" lIns="91440" tIns="45720" rIns="91440" bIns="45720" rtlCol="0">
-            <a:noAutofit/>
-          </a:bodyPr>
-          <a:lstStyle>
-            <a:lvl1pPr marL="228600" indent="-228600" algn="l" defTabSz="914400" rtl="0" eaLnBrk="1" latinLnBrk="1" hangingPunct="1">
-              <a:lnSpc>
-                <a:spcPct val="90000"/>
-              </a:lnSpc>
-              <a:spcBef>
-                <a:spcPts val="1000"/>
-              </a:spcBef>
-              <a:buFont typeface="Arial" panose="020B0604020202020204" pitchFamily="34" charset="0"/>
-              <a:buChar char="•"/>
-              <a:defRPr sz="2800" kern="1200">
-                <a:solidFill>
-                  <a:schemeClr val="tx1"/>
-                </a:solidFill>
-                <a:latin typeface="+mn-lt"/>
-                <a:ea typeface="+mn-ea"/>
-                <a:cs typeface="+mn-cs"/>
-              </a:defRPr>
-            </a:lvl1pPr>
-            <a:lvl2pPr marL="685800" indent="-228600" algn="l" defTabSz="914400" rtl="0" eaLnBrk="1" latinLnBrk="1" hangingPunct="1">
-              <a:lnSpc>
-                <a:spcPct val="90000"/>
-              </a:lnSpc>
-              <a:spcBef>
-                <a:spcPts val="500"/>
-              </a:spcBef>
-              <a:buFont typeface="Arial" panose="020B0604020202020204" pitchFamily="34" charset="0"/>
-              <a:buChar char="•"/>
-              <a:defRPr sz="2400" kern="1200">
-                <a:solidFill>
-                  <a:schemeClr val="tx1"/>
-                </a:solidFill>
-                <a:latin typeface="+mn-lt"/>
-                <a:ea typeface="+mn-ea"/>
-                <a:cs typeface="+mn-cs"/>
-              </a:defRPr>
-            </a:lvl2pPr>
-            <a:lvl3pPr marL="1143000" indent="-228600" algn="l" defTabSz="914400" rtl="0" eaLnBrk="1" latinLnBrk="1" hangingPunct="1">
-              <a:lnSpc>
-                <a:spcPct val="90000"/>
-              </a:lnSpc>
-              <a:spcBef>
-                <a:spcPts val="500"/>
-              </a:spcBef>
-              <a:buFont typeface="Arial" panose="020B0604020202020204" pitchFamily="34" charset="0"/>
-              <a:buChar char="•"/>
-              <a:defRPr sz="2000" kern="1200">
-                <a:solidFill>
-                  <a:schemeClr val="tx1"/>
-                </a:solidFill>
-                <a:latin typeface="+mn-lt"/>
-                <a:ea typeface="+mn-ea"/>
-                <a:cs typeface="+mn-cs"/>
-              </a:defRPr>
-            </a:lvl3pPr>
-            <a:lvl4pPr marL="1600200" indent="-228600" algn="l" defTabSz="914400" rtl="0" eaLnBrk="1" latinLnBrk="1" hangingPunct="1">
-              <a:lnSpc>
-                <a:spcPct val="90000"/>
-              </a:lnSpc>
-              <a:spcBef>
-                <a:spcPts val="500"/>
-              </a:spcBef>
-              <a:buFont typeface="Arial" panose="020B0604020202020204" pitchFamily="34" charset="0"/>
-              <a:buChar char="•"/>
-              <a:defRPr sz="1800" kern="1200">
-                <a:solidFill>
-                  <a:schemeClr val="tx1"/>
-                </a:solidFill>
-                <a:latin typeface="+mn-lt"/>
-                <a:ea typeface="+mn-ea"/>
-                <a:cs typeface="+mn-cs"/>
-              </a:defRPr>
-            </a:lvl4pPr>
-            <a:lvl5pPr marL="2057400" indent="-228600" algn="l" defTabSz="914400" rtl="0" eaLnBrk="1" latinLnBrk="1" hangingPunct="1">
-              <a:lnSpc>
-                <a:spcPct val="90000"/>
-              </a:lnSpc>
-              <a:spcBef>
-                <a:spcPts val="500"/>
-              </a:spcBef>
-              <a:buFont typeface="Arial" panose="020B0604020202020204" pitchFamily="34" charset="0"/>
-              <a:buChar char="•"/>
-              <a:defRPr sz="1800" kern="1200">
-                <a:solidFill>
-                  <a:schemeClr val="tx1"/>
-                </a:solidFill>
-                <a:latin typeface="+mn-lt"/>
-                <a:ea typeface="+mn-ea"/>
-                <a:cs typeface="+mn-cs"/>
-              </a:defRPr>
-            </a:lvl5pPr>
-            <a:lvl6pPr marL="2514600" indent="-228600" algn="l" defTabSz="914400" rtl="0" eaLnBrk="1" latinLnBrk="1" hangingPunct="1">
-              <a:lnSpc>
-                <a:spcPct val="90000"/>
-              </a:lnSpc>
-              <a:spcBef>
-                <a:spcPts val="500"/>
-              </a:spcBef>
-              <a:buFont typeface="Arial" panose="020B0604020202020204" pitchFamily="34" charset="0"/>
-              <a:buChar char="•"/>
-              <a:defRPr sz="1800" kern="1200">
-                <a:solidFill>
-                  <a:schemeClr val="tx1"/>
-                </a:solidFill>
-                <a:latin typeface="+mn-lt"/>
-                <a:ea typeface="+mn-ea"/>
-                <a:cs typeface="+mn-cs"/>
-              </a:defRPr>
-            </a:lvl6pPr>
-            <a:lvl7pPr marL="2971800" indent="-228600" algn="l" defTabSz="914400" rtl="0" eaLnBrk="1" latinLnBrk="1" hangingPunct="1">
-              <a:lnSpc>
-                <a:spcPct val="90000"/>
-              </a:lnSpc>
-              <a:spcBef>
-                <a:spcPts val="500"/>
-              </a:spcBef>
-              <a:buFont typeface="Arial" panose="020B0604020202020204" pitchFamily="34" charset="0"/>
-              <a:buChar char="•"/>
-              <a:defRPr sz="1800" kern="1200">
-                <a:solidFill>
-                  <a:schemeClr val="tx1"/>
-                </a:solidFill>
-                <a:latin typeface="+mn-lt"/>
-                <a:ea typeface="+mn-ea"/>
-                <a:cs typeface="+mn-cs"/>
-              </a:defRPr>
-            </a:lvl7pPr>
-            <a:lvl8pPr marL="3429000" indent="-228600" algn="l" defTabSz="914400" rtl="0" eaLnBrk="1" latinLnBrk="1" hangingPunct="1">
-              <a:lnSpc>
-                <a:spcPct val="90000"/>
-              </a:lnSpc>
-              <a:spcBef>
-                <a:spcPts val="500"/>
-              </a:spcBef>
-              <a:buFont typeface="Arial" panose="020B0604020202020204" pitchFamily="34" charset="0"/>
-              <a:buChar char="•"/>
-              <a:defRPr sz="1800" kern="1200">
-                <a:solidFill>
-                  <a:schemeClr val="tx1"/>
-                </a:solidFill>
-                <a:latin typeface="+mn-lt"/>
-                <a:ea typeface="+mn-ea"/>
-                <a:cs typeface="+mn-cs"/>
-              </a:defRPr>
-            </a:lvl8pPr>
-            <a:lvl9pPr marL="3886200" indent="-228600" algn="l" defTabSz="914400" rtl="0" eaLnBrk="1" latinLnBrk="1" hangingPunct="1">
-              <a:lnSpc>
-                <a:spcPct val="90000"/>
-              </a:lnSpc>
-              <a:spcBef>
-                <a:spcPts val="500"/>
-              </a:spcBef>
-              <a:buFont typeface="Arial" panose="020B0604020202020204" pitchFamily="34" charset="0"/>
-              <a:buChar char="•"/>
-              <a:defRPr sz="1800" kern="1200">
-                <a:solidFill>
-                  <a:schemeClr val="tx1"/>
-                </a:solidFill>
-                <a:latin typeface="+mn-lt"/>
-                <a:ea typeface="+mn-ea"/>
-                <a:cs typeface="+mn-cs"/>
-              </a:defRPr>
-            </a:lvl9pPr>
-          </a:lstStyle>
-          <a:p>
-            <a:pPr marL="0" lvl="0" indent="0">
-              <a:lnSpc>
-                <a:spcPct val="130000"/>
-              </a:lnSpc>
-              <a:spcBef>
-                <a:spcPts val="0"/>
-              </a:spcBef>
-              <a:buNone/>
-              <a:defRPr/>
-            </a:pPr>
-            <a:r>
-              <a:rPr lang="ko-KR" altLang="en-US" sz="1000" dirty="0">
-                <a:latin typeface="피플폰트 Bold" panose="020B0600000101010101" pitchFamily="50" charset="-127"/>
-                <a:ea typeface="피플폰트 Bold" panose="020B0600000101010101" pitchFamily="50" charset="-127"/>
-              </a:rPr>
-              <a:t>페이지 요약</a:t>
-            </a:r>
-          </a:p>
-        </p:txBody>
-      </p:sp>
-      <p:sp>
-        <p:nvSpPr>
-          <p:cNvPr id="11" name="슬라이드 번호 개체 틀 1">
-            <a:extLst>
-              <a:ext uri="{FF2B5EF4-FFF2-40B4-BE49-F238E27FC236}">
-                <a16:creationId xmlns:a16="http://schemas.microsoft.com/office/drawing/2014/main" id="{7C2A9A1C-92B7-4856-B43A-49BFF81DD5F8}"/>
-              </a:ext>
-            </a:extLst>
-          </p:cNvPr>
-          <p:cNvSpPr txBox="1">
-            <a:spLocks/>
-          </p:cNvSpPr>
-          <p:nvPr/>
-        </p:nvSpPr>
-        <p:spPr>
-          <a:xfrm>
-            <a:off x="6567488" y="6576219"/>
-            <a:ext cx="3097212" cy="227169"/>
-          </a:xfrm>
-          <a:prstGeom prst="rect">
-            <a:avLst/>
-          </a:prstGeom>
-        </p:spPr>
-        <p:txBody>
-          <a:bodyPr vert="horz" lIns="91440" tIns="45720" rIns="0" bIns="45720" rtlCol="0" anchor="ctr"/>
-          <a:lstStyle>
-            <a:defPPr>
-              <a:defRPr lang="en-US"/>
-            </a:defPPr>
-            <a:lvl1pPr marL="0" algn="r" defTabSz="457200" rtl="0" eaLnBrk="1" latinLnBrk="0" hangingPunct="1">
-              <a:defRPr sz="800" kern="1200">
-                <a:solidFill>
-                  <a:schemeClr val="tx1">
-                    <a:tint val="75000"/>
-                  </a:schemeClr>
-                </a:solidFill>
-                <a:latin typeface="+mn-ea"/>
-                <a:ea typeface="+mn-ea"/>
-                <a:cs typeface="+mn-cs"/>
-              </a:defRPr>
-            </a:lvl1pPr>
-            <a:lvl2pPr marL="457200" algn="l" defTabSz="457200" rtl="0" eaLnBrk="1" latinLnBrk="0" hangingPunct="1">
-              <a:defRPr sz="1800" kern="1200">
-                <a:solidFill>
-                  <a:schemeClr val="tx1"/>
-                </a:solidFill>
-                <a:latin typeface="+mn-lt"/>
-                <a:ea typeface="+mn-ea"/>
-                <a:cs typeface="+mn-cs"/>
-              </a:defRPr>
-            </a:lvl2pPr>
-            <a:lvl3pPr marL="914400" algn="l" defTabSz="457200" rtl="0" eaLnBrk="1" latinLnBrk="0" hangingPunct="1">
-              <a:defRPr sz="1800" kern="1200">
-                <a:solidFill>
-                  <a:schemeClr val="tx1"/>
-                </a:solidFill>
-                <a:latin typeface="+mn-lt"/>
-                <a:ea typeface="+mn-ea"/>
-                <a:cs typeface="+mn-cs"/>
-              </a:defRPr>
-            </a:lvl3pPr>
-            <a:lvl4pPr marL="1371600" algn="l" defTabSz="457200" rtl="0" eaLnBrk="1" latinLnBrk="0" hangingPunct="1">
-              <a:defRPr sz="1800" kern="1200">
-                <a:solidFill>
-                  <a:schemeClr val="tx1"/>
-                </a:solidFill>
-                <a:latin typeface="+mn-lt"/>
-                <a:ea typeface="+mn-ea"/>
-                <a:cs typeface="+mn-cs"/>
-              </a:defRPr>
-            </a:lvl4pPr>
-            <a:lvl5pPr marL="1828800" algn="l" defTabSz="457200" rtl="0" eaLnBrk="1" latinLnBrk="0" hangingPunct="1">
-              <a:defRPr sz="1800" kern="1200">
-                <a:solidFill>
-                  <a:schemeClr val="tx1"/>
-                </a:solidFill>
-                <a:latin typeface="+mn-lt"/>
-                <a:ea typeface="+mn-ea"/>
-                <a:cs typeface="+mn-cs"/>
-              </a:defRPr>
-            </a:lvl5pPr>
-            <a:lvl6pPr marL="2286000" algn="l" defTabSz="457200" rtl="0" eaLnBrk="1" latinLnBrk="0" hangingPunct="1">
-              <a:defRPr sz="1800" kern="1200">
-                <a:solidFill>
-                  <a:schemeClr val="tx1"/>
-                </a:solidFill>
-                <a:latin typeface="+mn-lt"/>
-                <a:ea typeface="+mn-ea"/>
-                <a:cs typeface="+mn-cs"/>
-              </a:defRPr>
-            </a:lvl6pPr>
-            <a:lvl7pPr marL="2743200" algn="l" defTabSz="457200" rtl="0" eaLnBrk="1" latinLnBrk="0" hangingPunct="1">
-              <a:defRPr sz="1800" kern="1200">
-                <a:solidFill>
-                  <a:schemeClr val="tx1"/>
-                </a:solidFill>
-                <a:latin typeface="+mn-lt"/>
-                <a:ea typeface="+mn-ea"/>
-                <a:cs typeface="+mn-cs"/>
-              </a:defRPr>
-            </a:lvl7pPr>
-            <a:lvl8pPr marL="3200400" algn="l" defTabSz="457200" rtl="0" eaLnBrk="1" latinLnBrk="0" hangingPunct="1">
-              <a:defRPr sz="1800" kern="1200">
-                <a:solidFill>
-                  <a:schemeClr val="tx1"/>
-                </a:solidFill>
-                <a:latin typeface="+mn-lt"/>
-                <a:ea typeface="+mn-ea"/>
-                <a:cs typeface="+mn-cs"/>
-              </a:defRPr>
-            </a:lvl8pPr>
-            <a:lvl9pPr marL="3657600" algn="l" defTabSz="457200" rtl="0" eaLnBrk="1" latinLnBrk="0" hangingPunct="1">
-              <a:defRPr sz="1800" kern="1200">
-                <a:solidFill>
-                  <a:schemeClr val="tx1"/>
-                </a:solidFill>
-                <a:latin typeface="+mn-lt"/>
-                <a:ea typeface="+mn-ea"/>
-                <a:cs typeface="+mn-cs"/>
-              </a:defRPr>
-            </a:lvl9pPr>
-          </a:lstStyle>
-          <a:p>
-            <a:pPr>
-              <a:defRPr/>
-            </a:pPr>
-            <a:r>
-              <a:rPr lang="ko-KR" altLang="en-US" dirty="0">
-                <a:latin typeface="피플폰트 Light" panose="020B0600000101010101" pitchFamily="50" charset="-127"/>
-                <a:ea typeface="피플폰트 Light" panose="020B0600000101010101" pitchFamily="50" charset="-127"/>
-              </a:rPr>
-              <a:t>사업명｜</a:t>
-            </a:r>
-            <a:r>
-              <a:rPr lang="en-US" altLang="ko-KR" dirty="0">
-                <a:latin typeface="피플폰트 Light" panose="020B0600000101010101" pitchFamily="50" charset="-127"/>
-                <a:ea typeface="피플폰트 Light" panose="020B0600000101010101" pitchFamily="50" charset="-127"/>
-              </a:rPr>
-              <a:t>  </a:t>
-            </a:r>
-            <a:fld id="{F3A57096-21A8-44ED-AF94-8A259496D2BE}" type="slidenum">
-              <a:rPr lang="en-US" altLang="en-US" smtClean="0">
-                <a:latin typeface="피플폰트 Light" panose="020B0600000101010101" pitchFamily="50" charset="-127"/>
-                <a:ea typeface="피플폰트 Light" panose="020B0600000101010101" pitchFamily="50" charset="-127"/>
-              </a:rPr>
-              <a:pPr>
-                <a:defRPr/>
-              </a:pPr>
-              <a:t>9</a:t>
-            </a:fld>
-            <a:endParaRPr lang="en-US" altLang="en-US" dirty="0">
-              <a:latin typeface="피플폰트 Light" panose="020B0600000101010101" pitchFamily="50" charset="-127"/>
-              <a:ea typeface="피플폰트 Light" panose="020B0600000101010101" pitchFamily="50" charset="-127"/>
-            </a:endParaRPr>
-          </a:p>
-        </p:txBody>
-      </p:sp>
-    </p:spTree>
-  </p:cSld>
-  <p:clrMapOvr>
-    <a:masterClrMapping/>
-  </p:clrMapOvr>
-  <p:transition/>
 </p:sld>
 </file>
 

--- a/templates/레이아웃.pptx
+++ b/templates/레이아웃.pptx
@@ -221,7 +221,7 @@
           <a:p>
             <a:fld id="{E7FB0CBE-BEF5-4768-88B7-C8D33A226F82}" type="datetimeFigureOut">
               <a:rPr lang="ko-KR" altLang="en-US" smtClean="0"/>
-              <a:t>2026-07-22</a:t>
+              <a:t>2026-07-23</a:t>
             </a:fld>
             <a:endParaRPr lang="ko-KR" altLang="en-US"/>
           </a:p>
@@ -703,7 +703,7 @@
           <a:p>
             <a:fld id="{62E3A85F-5A81-4A2C-ADB7-CB9A7B252CB6}" type="datetimeFigureOut">
               <a:rPr lang="ko-KR" altLang="en-US" smtClean="0"/>
-              <a:t>2026-07-22</a:t>
+              <a:t>2026-07-23</a:t>
             </a:fld>
             <a:endParaRPr lang="ko-KR" altLang="en-US"/>
           </a:p>
@@ -873,7 +873,7 @@
           <a:p>
             <a:fld id="{62E3A85F-5A81-4A2C-ADB7-CB9A7B252CB6}" type="datetimeFigureOut">
               <a:rPr lang="ko-KR" altLang="en-US" smtClean="0"/>
-              <a:t>2026-07-22</a:t>
+              <a:t>2026-07-23</a:t>
             </a:fld>
             <a:endParaRPr lang="ko-KR" altLang="en-US"/>
           </a:p>
@@ -1053,7 +1053,7 @@
           <a:p>
             <a:fld id="{62E3A85F-5A81-4A2C-ADB7-CB9A7B252CB6}" type="datetimeFigureOut">
               <a:rPr lang="ko-KR" altLang="en-US" smtClean="0"/>
-              <a:t>2026-07-22</a:t>
+              <a:t>2026-07-23</a:t>
             </a:fld>
             <a:endParaRPr lang="ko-KR" altLang="en-US"/>
           </a:p>
@@ -1641,7 +1641,7 @@
           <a:p>
             <a:fld id="{62E3A85F-5A81-4A2C-ADB7-CB9A7B252CB6}" type="datetimeFigureOut">
               <a:rPr lang="ko-KR" altLang="en-US" smtClean="0"/>
-              <a:t>2026-07-22</a:t>
+              <a:t>2026-07-23</a:t>
             </a:fld>
             <a:endParaRPr lang="ko-KR" altLang="en-US"/>
           </a:p>
@@ -1885,7 +1885,7 @@
           <a:p>
             <a:fld id="{62E3A85F-5A81-4A2C-ADB7-CB9A7B252CB6}" type="datetimeFigureOut">
               <a:rPr lang="ko-KR" altLang="en-US" smtClean="0"/>
-              <a:t>2026-07-22</a:t>
+              <a:t>2026-07-23</a:t>
             </a:fld>
             <a:endParaRPr lang="ko-KR" altLang="en-US"/>
           </a:p>
@@ -2117,7 +2117,7 @@
           <a:p>
             <a:fld id="{62E3A85F-5A81-4A2C-ADB7-CB9A7B252CB6}" type="datetimeFigureOut">
               <a:rPr lang="ko-KR" altLang="en-US" smtClean="0"/>
-              <a:t>2026-07-22</a:t>
+              <a:t>2026-07-23</a:t>
             </a:fld>
             <a:endParaRPr lang="ko-KR" altLang="en-US"/>
           </a:p>
@@ -2484,7 +2484,7 @@
           <a:p>
             <a:fld id="{62E3A85F-5A81-4A2C-ADB7-CB9A7B252CB6}" type="datetimeFigureOut">
               <a:rPr lang="ko-KR" altLang="en-US" smtClean="0"/>
-              <a:t>2026-07-22</a:t>
+              <a:t>2026-07-23</a:t>
             </a:fld>
             <a:endParaRPr lang="ko-KR" altLang="en-US"/>
           </a:p>
@@ -2602,7 +2602,7 @@
           <a:p>
             <a:fld id="{62E3A85F-5A81-4A2C-ADB7-CB9A7B252CB6}" type="datetimeFigureOut">
               <a:rPr lang="ko-KR" altLang="en-US" smtClean="0"/>
-              <a:t>2026-07-22</a:t>
+              <a:t>2026-07-23</a:t>
             </a:fld>
             <a:endParaRPr lang="ko-KR" altLang="en-US"/>
           </a:p>
@@ -2697,7 +2697,7 @@
           <a:p>
             <a:fld id="{62E3A85F-5A81-4A2C-ADB7-CB9A7B252CB6}" type="datetimeFigureOut">
               <a:rPr lang="ko-KR" altLang="en-US" smtClean="0"/>
-              <a:t>2026-07-22</a:t>
+              <a:t>2026-07-23</a:t>
             </a:fld>
             <a:endParaRPr lang="ko-KR" altLang="en-US"/>
           </a:p>
@@ -2974,7 +2974,7 @@
           <a:p>
             <a:fld id="{62E3A85F-5A81-4A2C-ADB7-CB9A7B252CB6}" type="datetimeFigureOut">
               <a:rPr lang="ko-KR" altLang="en-US" smtClean="0"/>
-              <a:t>2026-07-22</a:t>
+              <a:t>2026-07-23</a:t>
             </a:fld>
             <a:endParaRPr lang="ko-KR" altLang="en-US"/>
           </a:p>
@@ -3231,7 +3231,7 @@
           <a:p>
             <a:fld id="{62E3A85F-5A81-4A2C-ADB7-CB9A7B252CB6}" type="datetimeFigureOut">
               <a:rPr lang="ko-KR" altLang="en-US" smtClean="0"/>
-              <a:t>2026-07-22</a:t>
+              <a:t>2026-07-23</a:t>
             </a:fld>
             <a:endParaRPr lang="ko-KR" altLang="en-US"/>
           </a:p>
@@ -3444,7 +3444,7 @@
           <a:p>
             <a:fld id="{62E3A85F-5A81-4A2C-ADB7-CB9A7B252CB6}" type="datetimeFigureOut">
               <a:rPr lang="ko-KR" altLang="en-US" smtClean="0"/>
-              <a:t>2026-07-22</a:t>
+              <a:t>2026-07-23</a:t>
             </a:fld>
             <a:endParaRPr lang="ko-KR" altLang="en-US"/>
           </a:p>
@@ -6896,10 +6896,10 @@
       </p:grpSpPr>
       <p:sp>
         <p:nvSpPr>
-          <p:cNvPr id="25" name="육각형 24">
+          <p:cNvPr id="32" name="육각형 31">
             <a:extLst>
               <a:ext uri="{FF2B5EF4-FFF2-40B4-BE49-F238E27FC236}">
-                <a16:creationId xmlns:a16="http://schemas.microsoft.com/office/drawing/2014/main" id="{34C4331A-3665-4D62-8E3C-7B11E0A556C4}"/>
+                <a16:creationId xmlns:a16="http://schemas.microsoft.com/office/drawing/2014/main" id="{71BF35C0-FCD1-454B-8AED-CF040E1BE420}"/>
               </a:ext>
             </a:extLst>
           </p:cNvPr>
@@ -6908,8 +6908,8 @@
         </p:nvSpPr>
         <p:spPr>
           <a:xfrm>
-            <a:off x="1187918" y="2952900"/>
-            <a:ext cx="7530164" cy="1660710"/>
+            <a:off x="1187919" y="5211057"/>
+            <a:ext cx="7530164" cy="1013176"/>
           </a:xfrm>
           <a:prstGeom prst="hexagon">
             <a:avLst>
@@ -6953,10 +6953,10 @@
       </p:sp>
       <p:sp>
         <p:nvSpPr>
-          <p:cNvPr id="26" name="육각형 25">
+          <p:cNvPr id="33" name="육각형 32">
             <a:extLst>
               <a:ext uri="{FF2B5EF4-FFF2-40B4-BE49-F238E27FC236}">
-                <a16:creationId xmlns:a16="http://schemas.microsoft.com/office/drawing/2014/main" id="{7BF180A2-A688-40F0-A757-2E6DE480716C}"/>
+                <a16:creationId xmlns:a16="http://schemas.microsoft.com/office/drawing/2014/main" id="{3CDF811D-22A7-4AF6-A899-50A72139B16F}"/>
               </a:ext>
             </a:extLst>
           </p:cNvPr>
@@ -6965,8 +6965,8 @@
         </p:nvSpPr>
         <p:spPr>
           <a:xfrm>
-            <a:off x="1355774" y="2873664"/>
-            <a:ext cx="7175041" cy="1873756"/>
+            <a:off x="1355775" y="5131821"/>
+            <a:ext cx="7175041" cy="1092412"/>
           </a:xfrm>
           <a:prstGeom prst="hexagon">
             <a:avLst>
@@ -7007,6 +7007,117 @@
       </p:sp>
       <p:sp>
         <p:nvSpPr>
+          <p:cNvPr id="25" name="육각형 24">
+            <a:extLst>
+              <a:ext uri="{FF2B5EF4-FFF2-40B4-BE49-F238E27FC236}">
+                <a16:creationId xmlns:a16="http://schemas.microsoft.com/office/drawing/2014/main" id="{34C4331A-3665-4D62-8E3C-7B11E0A556C4}"/>
+              </a:ext>
+            </a:extLst>
+          </p:cNvPr>
+          <p:cNvSpPr/>
+          <p:nvPr/>
+        </p:nvSpPr>
+        <p:spPr>
+          <a:xfrm>
+            <a:off x="1211516" y="3168315"/>
+            <a:ext cx="7530164" cy="1013176"/>
+          </a:xfrm>
+          <a:prstGeom prst="hexagon">
+            <a:avLst>
+              <a:gd name="adj" fmla="val 18529"/>
+              <a:gd name="vf" fmla="val 115470"/>
+            </a:avLst>
+          </a:prstGeom>
+          <a:solidFill>
+            <a:srgbClr val="2E75B6">
+              <a:alpha val="75000"/>
+            </a:srgbClr>
+          </a:solidFill>
+          <a:ln>
+            <a:noFill/>
+          </a:ln>
+        </p:spPr>
+        <p:style>
+          <a:lnRef idx="2">
+            <a:schemeClr val="accent1">
+              <a:shade val="50000"/>
+            </a:schemeClr>
+          </a:lnRef>
+          <a:fillRef idx="1">
+            <a:schemeClr val="accent1"/>
+          </a:fillRef>
+          <a:effectRef idx="0">
+            <a:schemeClr val="accent1"/>
+          </a:effectRef>
+          <a:fontRef idx="minor">
+            <a:schemeClr val="lt1"/>
+          </a:fontRef>
+        </p:style>
+        <p:txBody>
+          <a:bodyPr rtlCol="0" anchor="ctr"/>
+          <a:lstStyle/>
+          <a:p>
+            <a:pPr algn="ctr"/>
+            <a:endParaRPr lang="ko-KR" altLang="en-US" dirty="0"/>
+          </a:p>
+        </p:txBody>
+      </p:sp>
+      <p:sp>
+        <p:nvSpPr>
+          <p:cNvPr id="26" name="육각형 25">
+            <a:extLst>
+              <a:ext uri="{FF2B5EF4-FFF2-40B4-BE49-F238E27FC236}">
+                <a16:creationId xmlns:a16="http://schemas.microsoft.com/office/drawing/2014/main" id="{7BF180A2-A688-40F0-A757-2E6DE480716C}"/>
+              </a:ext>
+            </a:extLst>
+          </p:cNvPr>
+          <p:cNvSpPr/>
+          <p:nvPr/>
+        </p:nvSpPr>
+        <p:spPr>
+          <a:xfrm>
+            <a:off x="1379372" y="3089079"/>
+            <a:ext cx="7175041" cy="1092412"/>
+          </a:xfrm>
+          <a:prstGeom prst="hexagon">
+            <a:avLst>
+              <a:gd name="adj" fmla="val 18529"/>
+              <a:gd name="vf" fmla="val 115470"/>
+            </a:avLst>
+          </a:prstGeom>
+          <a:solidFill>
+            <a:schemeClr val="bg1"/>
+          </a:solidFill>
+          <a:ln>
+            <a:noFill/>
+          </a:ln>
+        </p:spPr>
+        <p:style>
+          <a:lnRef idx="2">
+            <a:schemeClr val="accent1">
+              <a:shade val="50000"/>
+            </a:schemeClr>
+          </a:lnRef>
+          <a:fillRef idx="1">
+            <a:schemeClr val="accent1"/>
+          </a:fillRef>
+          <a:effectRef idx="0">
+            <a:schemeClr val="accent1"/>
+          </a:effectRef>
+          <a:fontRef idx="minor">
+            <a:schemeClr val="lt1"/>
+          </a:fontRef>
+        </p:style>
+        <p:txBody>
+          <a:bodyPr rtlCol="0" anchor="ctr"/>
+          <a:lstStyle/>
+          <a:p>
+            <a:endParaRPr lang="ko-KR" altLang="en-US" dirty="0"/>
+          </a:p>
+        </p:txBody>
+      </p:sp>
+      <p:sp>
+        <p:nvSpPr>
           <p:cNvPr id="27" name="TextBox 26">
             <a:extLst>
               <a:ext uri="{FF2B5EF4-FFF2-40B4-BE49-F238E27FC236}">
@@ -7019,8 +7130,8 @@
         </p:nvSpPr>
         <p:spPr>
           <a:xfrm>
-            <a:off x="1767382" y="2958072"/>
-            <a:ext cx="6662480" cy="1661993"/>
+            <a:off x="1790980" y="3191902"/>
+            <a:ext cx="6662480" cy="1107996"/>
           </a:xfrm>
           <a:prstGeom prst="rect">
             <a:avLst/>
@@ -7427,221 +7538,16 @@
             </a:endParaRPr>
           </a:p>
           <a:p>
-            <a:pPr marL="285750" indent="-285750">
-              <a:buFont typeface="Batang" panose="02030600000101010101" pitchFamily="18" charset="-127"/>
-              <a:buChar char="→"/>
-            </a:pPr>
-            <a:r>
-              <a:rPr lang="ko-KR" altLang="en-US" sz="1200" dirty="0">
-                <a:latin typeface="피플폰트 Bold" panose="020B0600000101010101" pitchFamily="50" charset="-127"/>
-                <a:ea typeface="피플폰트 Bold" panose="020B0600000101010101" pitchFamily="50" charset="-127"/>
-              </a:rPr>
-              <a:t>낮은 토지확보 리스크</a:t>
-            </a:r>
             <a:endParaRPr lang="en-US" altLang="ko-KR" sz="1200" dirty="0">
+              <a:solidFill>
+                <a:schemeClr val="tx1">
+                  <a:lumMod val="65000"/>
+                  <a:lumOff val="35000"/>
+                </a:schemeClr>
+              </a:solidFill>
               <a:latin typeface="피플폰트 Bold" panose="020B0600000101010101" pitchFamily="50" charset="-127"/>
               <a:ea typeface="피플폰트 Bold" panose="020B0600000101010101" pitchFamily="50" charset="-127"/>
             </a:endParaRPr>
-          </a:p>
-          <a:p>
-            <a:pPr marL="742950" lvl="1" indent="-285750">
-              <a:buFont typeface="Wingdings" panose="05000000000000000000" pitchFamily="2" charset="2"/>
-              <a:buChar char="§"/>
-            </a:pPr>
-            <a:r>
-              <a:rPr lang="ko-KR" altLang="en-US" sz="1200" dirty="0">
-                <a:solidFill>
-                  <a:schemeClr val="tx1">
-                    <a:lumMod val="65000"/>
-                    <a:lumOff val="35000"/>
-                  </a:schemeClr>
-                </a:solidFill>
-                <a:latin typeface="피플폰트 Bold" panose="020B0600000101010101" pitchFamily="50" charset="-127"/>
-                <a:ea typeface="피플폰트 Bold" panose="020B0600000101010101" pitchFamily="50" charset="-127"/>
-              </a:rPr>
-              <a:t>소유권 이전 완료 토지 </a:t>
-            </a:r>
-            <a:r>
-              <a:rPr lang="en-US" altLang="ko-KR" sz="1200" dirty="0">
-                <a:solidFill>
-                  <a:schemeClr val="tx1">
-                    <a:lumMod val="65000"/>
-                    <a:lumOff val="35000"/>
-                  </a:schemeClr>
-                </a:solidFill>
-                <a:latin typeface="피플폰트 Bold" panose="020B0600000101010101" pitchFamily="50" charset="-127"/>
-                <a:ea typeface="피플폰트 Bold" panose="020B0600000101010101" pitchFamily="50" charset="-127"/>
-              </a:rPr>
-              <a:t>81.48% (</a:t>
-            </a:r>
-            <a:r>
-              <a:rPr lang="ko-KR" altLang="en-US" sz="1200" dirty="0">
-                <a:solidFill>
-                  <a:schemeClr val="tx1">
-                    <a:lumMod val="65000"/>
-                    <a:lumOff val="35000"/>
-                  </a:schemeClr>
-                </a:solidFill>
-                <a:latin typeface="피플폰트 Bold" panose="020B0600000101010101" pitchFamily="50" charset="-127"/>
-                <a:ea typeface="피플폰트 Bold" panose="020B0600000101010101" pitchFamily="50" charset="-127"/>
-              </a:rPr>
-              <a:t>본 건 으로 소유권 확보</a:t>
-            </a:r>
-            <a:r>
-              <a:rPr lang="en-US" altLang="ko-KR" sz="1200" dirty="0">
-                <a:solidFill>
-                  <a:schemeClr val="tx1">
-                    <a:lumMod val="65000"/>
-                    <a:lumOff val="35000"/>
-                  </a:schemeClr>
-                </a:solidFill>
-                <a:latin typeface="피플폰트 Bold" panose="020B0600000101010101" pitchFamily="50" charset="-127"/>
-                <a:ea typeface="피플폰트 Bold" panose="020B0600000101010101" pitchFamily="50" charset="-127"/>
-              </a:rPr>
-              <a:t>)</a:t>
-            </a:r>
-          </a:p>
-          <a:p>
-            <a:pPr marL="742950" lvl="1" indent="-285750">
-              <a:buFont typeface="Wingdings" panose="05000000000000000000" pitchFamily="2" charset="2"/>
-              <a:buChar char="§"/>
-            </a:pPr>
-            <a:r>
-              <a:rPr lang="ko-KR" altLang="en-US" sz="1200" dirty="0">
-                <a:solidFill>
-                  <a:schemeClr val="tx1">
-                    <a:lumMod val="65000"/>
-                    <a:lumOff val="35000"/>
-                  </a:schemeClr>
-                </a:solidFill>
-                <a:latin typeface="피플폰트 Bold" panose="020B0600000101010101" pitchFamily="50" charset="-127"/>
-                <a:ea typeface="피플폰트 Bold" panose="020B0600000101010101" pitchFamily="50" charset="-127"/>
-              </a:rPr>
-              <a:t>협의 완료 및 국공유지 </a:t>
-            </a:r>
-            <a:r>
-              <a:rPr lang="en-US" altLang="ko-KR" sz="1200" dirty="0">
-                <a:solidFill>
-                  <a:schemeClr val="tx1">
-                    <a:lumMod val="65000"/>
-                    <a:lumOff val="35000"/>
-                  </a:schemeClr>
-                </a:solidFill>
-                <a:latin typeface="피플폰트 Bold" panose="020B0600000101010101" pitchFamily="50" charset="-127"/>
-                <a:ea typeface="피플폰트 Bold" panose="020B0600000101010101" pitchFamily="50" charset="-127"/>
-              </a:rPr>
-              <a:t>12.48%</a:t>
-            </a:r>
-          </a:p>
-          <a:p>
-            <a:pPr marL="742950" lvl="1" indent="-285750">
-              <a:buFont typeface="Wingdings" panose="05000000000000000000" pitchFamily="2" charset="2"/>
-              <a:buChar char="§"/>
-            </a:pPr>
-            <a:r>
-              <a:rPr lang="ko-KR" altLang="en-US" sz="1200" dirty="0">
-                <a:solidFill>
-                  <a:schemeClr val="tx1">
-                    <a:lumMod val="65000"/>
-                    <a:lumOff val="35000"/>
-                  </a:schemeClr>
-                </a:solidFill>
-                <a:latin typeface="피플폰트 Bold" panose="020B0600000101010101" pitchFamily="50" charset="-127"/>
-                <a:ea typeface="피플폰트 Bold" panose="020B0600000101010101" pitchFamily="50" charset="-127"/>
-              </a:rPr>
-              <a:t>수용 예정 토지 </a:t>
-            </a:r>
-            <a:r>
-              <a:rPr lang="en-US" altLang="ko-KR" sz="1200" dirty="0">
-                <a:solidFill>
-                  <a:schemeClr val="tx1">
-                    <a:lumMod val="65000"/>
-                    <a:lumOff val="35000"/>
-                  </a:schemeClr>
-                </a:solidFill>
-                <a:latin typeface="피플폰트 Bold" panose="020B0600000101010101" pitchFamily="50" charset="-127"/>
-                <a:ea typeface="피플폰트 Bold" panose="020B0600000101010101" pitchFamily="50" charset="-127"/>
-              </a:rPr>
-              <a:t>6.04% (</a:t>
-            </a:r>
-            <a:r>
-              <a:rPr lang="ko-KR" altLang="en-US" sz="1200" dirty="0">
-                <a:solidFill>
-                  <a:schemeClr val="tx1">
-                    <a:lumMod val="65000"/>
-                    <a:lumOff val="35000"/>
-                  </a:schemeClr>
-                </a:solidFill>
-                <a:latin typeface="피플폰트 Bold" panose="020B0600000101010101" pitchFamily="50" charset="-127"/>
-                <a:ea typeface="피플폰트 Bold" panose="020B0600000101010101" pitchFamily="50" charset="-127"/>
-              </a:rPr>
-              <a:t>본 건 실행 후 바로 수용 신청 </a:t>
-            </a:r>
-            <a:r>
-              <a:rPr lang="en-US" altLang="ko-KR" sz="1200" dirty="0">
-                <a:solidFill>
-                  <a:schemeClr val="tx1">
-                    <a:lumMod val="65000"/>
-                    <a:lumOff val="35000"/>
-                  </a:schemeClr>
-                </a:solidFill>
-                <a:latin typeface="피플폰트 Bold" panose="020B0600000101010101" pitchFamily="50" charset="-127"/>
-                <a:ea typeface="피플폰트 Bold" panose="020B0600000101010101" pitchFamily="50" charset="-127"/>
-              </a:rPr>
-              <a:t>5</a:t>
-            </a:r>
-            <a:r>
-              <a:rPr lang="ko-KR" altLang="en-US" sz="1200" dirty="0">
-                <a:solidFill>
-                  <a:schemeClr val="tx1">
-                    <a:lumMod val="65000"/>
-                    <a:lumOff val="35000"/>
-                  </a:schemeClr>
-                </a:solidFill>
-                <a:latin typeface="피플폰트 Bold" panose="020B0600000101010101" pitchFamily="50" charset="-127"/>
-                <a:ea typeface="피플폰트 Bold" panose="020B0600000101010101" pitchFamily="50" charset="-127"/>
-              </a:rPr>
-              <a:t>개월 이내 </a:t>
-            </a:r>
-            <a:r>
-              <a:rPr lang="ko-KR" altLang="en-US" sz="1200" dirty="0" err="1">
-                <a:solidFill>
-                  <a:schemeClr val="tx1">
-                    <a:lumMod val="65000"/>
-                    <a:lumOff val="35000"/>
-                  </a:schemeClr>
-                </a:solidFill>
-                <a:latin typeface="피플폰트 Bold" panose="020B0600000101010101" pitchFamily="50" charset="-127"/>
-                <a:ea typeface="피플폰트 Bold" panose="020B0600000101010101" pitchFamily="50" charset="-127"/>
-              </a:rPr>
-              <a:t>수용권</a:t>
-            </a:r>
-            <a:r>
-              <a:rPr lang="ko-KR" altLang="en-US" sz="1200" dirty="0">
-                <a:solidFill>
-                  <a:schemeClr val="tx1">
-                    <a:lumMod val="65000"/>
-                    <a:lumOff val="35000"/>
-                  </a:schemeClr>
-                </a:solidFill>
-                <a:latin typeface="피플폰트 Bold" panose="020B0600000101010101" pitchFamily="50" charset="-127"/>
-                <a:ea typeface="피플폰트 Bold" panose="020B0600000101010101" pitchFamily="50" charset="-127"/>
-              </a:rPr>
-              <a:t> 확보 예정 </a:t>
-            </a:r>
-            <a:r>
-              <a:rPr lang="en-US" altLang="ko-KR" sz="1200" dirty="0">
-                <a:solidFill>
-                  <a:schemeClr val="tx1">
-                    <a:lumMod val="65000"/>
-                    <a:lumOff val="35000"/>
-                  </a:schemeClr>
-                </a:solidFill>
-                <a:latin typeface="피플폰트 Bold" panose="020B0600000101010101" pitchFamily="50" charset="-127"/>
-                <a:ea typeface="피플폰트 Bold" panose="020B0600000101010101" pitchFamily="50" charset="-127"/>
-              </a:rPr>
-              <a:t>)</a:t>
-            </a:r>
           </a:p>
         </p:txBody>
       </p:sp>
@@ -7659,7 +7565,7 @@
         </p:nvGrpSpPr>
         <p:grpSpPr>
           <a:xfrm>
-            <a:off x="3060136" y="2301790"/>
+            <a:off x="3083734" y="2517205"/>
             <a:ext cx="3507352" cy="369332"/>
             <a:chOff x="3444233" y="2876563"/>
             <a:chExt cx="3507352" cy="369332"/>
@@ -7843,360 +7749,6 @@
           </p:spPr>
         </p:pic>
       </p:grpSp>
-      <p:sp>
-        <p:nvSpPr>
-          <p:cNvPr id="6" name="육각형 5">
-            <a:extLst>
-              <a:ext uri="{FF2B5EF4-FFF2-40B4-BE49-F238E27FC236}">
-                <a16:creationId xmlns:a16="http://schemas.microsoft.com/office/drawing/2014/main" id="{FA022E6C-0D6F-491B-9045-753EBB067A7C}"/>
-              </a:ext>
-            </a:extLst>
-          </p:cNvPr>
-          <p:cNvSpPr/>
-          <p:nvPr/>
-        </p:nvSpPr>
-        <p:spPr>
-          <a:xfrm>
-            <a:off x="1187918" y="1436792"/>
-            <a:ext cx="7530164" cy="579610"/>
-          </a:xfrm>
-          <a:prstGeom prst="hexagon">
-            <a:avLst>
-              <a:gd name="adj" fmla="val 18529"/>
-              <a:gd name="vf" fmla="val 115470"/>
-            </a:avLst>
-          </a:prstGeom>
-          <a:solidFill>
-            <a:srgbClr val="2E75B6">
-              <a:alpha val="75000"/>
-            </a:srgbClr>
-          </a:solidFill>
-          <a:ln>
-            <a:noFill/>
-          </a:ln>
-        </p:spPr>
-        <p:style>
-          <a:lnRef idx="2">
-            <a:schemeClr val="accent1">
-              <a:shade val="50000"/>
-            </a:schemeClr>
-          </a:lnRef>
-          <a:fillRef idx="1">
-            <a:schemeClr val="accent1"/>
-          </a:fillRef>
-          <a:effectRef idx="0">
-            <a:schemeClr val="accent1"/>
-          </a:effectRef>
-          <a:fontRef idx="minor">
-            <a:schemeClr val="lt1"/>
-          </a:fontRef>
-        </p:style>
-        <p:txBody>
-          <a:bodyPr rtlCol="0" anchor="ctr"/>
-          <a:lstStyle/>
-          <a:p>
-            <a:pPr algn="ctr"/>
-            <a:endParaRPr lang="ko-KR" altLang="en-US" dirty="0"/>
-          </a:p>
-        </p:txBody>
-      </p:sp>
-      <p:sp>
-        <p:nvSpPr>
-          <p:cNvPr id="18" name="육각형 17">
-            <a:extLst>
-              <a:ext uri="{FF2B5EF4-FFF2-40B4-BE49-F238E27FC236}">
-                <a16:creationId xmlns:a16="http://schemas.microsoft.com/office/drawing/2014/main" id="{248C9E92-D4B6-44A0-A5CC-0DC8126C63FD}"/>
-              </a:ext>
-            </a:extLst>
-          </p:cNvPr>
-          <p:cNvSpPr/>
-          <p:nvPr/>
-        </p:nvSpPr>
-        <p:spPr>
-          <a:xfrm>
-            <a:off x="1323500" y="1412280"/>
-            <a:ext cx="7258999" cy="627709"/>
-          </a:xfrm>
-          <a:prstGeom prst="hexagon">
-            <a:avLst>
-              <a:gd name="adj" fmla="val 18529"/>
-              <a:gd name="vf" fmla="val 115470"/>
-            </a:avLst>
-          </a:prstGeom>
-          <a:solidFill>
-            <a:schemeClr val="bg1"/>
-          </a:solidFill>
-          <a:ln>
-            <a:noFill/>
-          </a:ln>
-        </p:spPr>
-        <p:style>
-          <a:lnRef idx="2">
-            <a:schemeClr val="accent1">
-              <a:shade val="50000"/>
-            </a:schemeClr>
-          </a:lnRef>
-          <a:fillRef idx="1">
-            <a:schemeClr val="accent1"/>
-          </a:fillRef>
-          <a:effectRef idx="0">
-            <a:schemeClr val="accent1"/>
-          </a:effectRef>
-          <a:fontRef idx="minor">
-            <a:schemeClr val="lt1"/>
-          </a:fontRef>
-        </p:style>
-        <p:txBody>
-          <a:bodyPr rtlCol="0" anchor="ctr"/>
-          <a:lstStyle/>
-          <a:p>
-            <a:endParaRPr lang="ko-KR" altLang="en-US" dirty="0"/>
-          </a:p>
-        </p:txBody>
-      </p:sp>
-      <p:sp>
-        <p:nvSpPr>
-          <p:cNvPr id="43" name="TextBox 42">
-            <a:extLst>
-              <a:ext uri="{FF2B5EF4-FFF2-40B4-BE49-F238E27FC236}">
-                <a16:creationId xmlns:a16="http://schemas.microsoft.com/office/drawing/2014/main" id="{824ECF91-BE5D-49F6-80F0-6708354EDBCC}"/>
-              </a:ext>
-            </a:extLst>
-          </p:cNvPr>
-          <p:cNvSpPr txBox="1"/>
-          <p:nvPr/>
-        </p:nvSpPr>
-        <p:spPr>
-          <a:xfrm>
-            <a:off x="1614745" y="1466674"/>
-            <a:ext cx="6967754" cy="507831"/>
-          </a:xfrm>
-          <a:prstGeom prst="rect">
-            <a:avLst/>
-          </a:prstGeom>
-          <a:noFill/>
-        </p:spPr>
-        <p:txBody>
-          <a:bodyPr wrap="square" lIns="0" tIns="0" rIns="0" bIns="0" rtlCol="0">
-            <a:spAutoFit/>
-          </a:bodyPr>
-          <a:lstStyle/>
-          <a:p>
-            <a:pPr marL="285750" indent="-285750">
-              <a:buFont typeface="Batang" panose="02030600000101010101" pitchFamily="18" charset="-127"/>
-              <a:buChar char="→"/>
-            </a:pPr>
-            <a:r>
-              <a:rPr lang="ko-KR" altLang="en-US" sz="1100" dirty="0">
-                <a:solidFill>
-                  <a:schemeClr val="tx1">
-                    <a:lumMod val="65000"/>
-                    <a:lumOff val="35000"/>
-                  </a:schemeClr>
-                </a:solidFill>
-                <a:latin typeface="피플폰트 Bold" panose="020B0600000101010101" pitchFamily="50" charset="-127"/>
-                <a:ea typeface="피플폰트 Bold" panose="020B0600000101010101" pitchFamily="50" charset="-127"/>
-              </a:rPr>
-              <a:t>본 건 사업은 충청남도 천안시 </a:t>
-            </a:r>
-            <a:r>
-              <a:rPr lang="ko-KR" altLang="en-US" sz="1100" dirty="0" err="1">
-                <a:solidFill>
-                  <a:schemeClr val="tx1">
-                    <a:lumMod val="65000"/>
-                    <a:lumOff val="35000"/>
-                  </a:schemeClr>
-                </a:solidFill>
-                <a:latin typeface="피플폰트 Bold" panose="020B0600000101010101" pitchFamily="50" charset="-127"/>
-                <a:ea typeface="피플폰트 Bold" panose="020B0600000101010101" pitchFamily="50" charset="-127"/>
-              </a:rPr>
-              <a:t>서북구</a:t>
-            </a:r>
-            <a:r>
-              <a:rPr lang="ko-KR" altLang="en-US" sz="1100" dirty="0">
-                <a:solidFill>
-                  <a:schemeClr val="tx1">
-                    <a:lumMod val="65000"/>
-                    <a:lumOff val="35000"/>
-                  </a:schemeClr>
-                </a:solidFill>
-                <a:latin typeface="피플폰트 Bold" panose="020B0600000101010101" pitchFamily="50" charset="-127"/>
-                <a:ea typeface="피플폰트 Bold" panose="020B0600000101010101" pitchFamily="50" charset="-127"/>
-              </a:rPr>
-              <a:t> </a:t>
-            </a:r>
-            <a:r>
-              <a:rPr lang="ko-KR" altLang="en-US" sz="1100" dirty="0" err="1">
-                <a:solidFill>
-                  <a:schemeClr val="tx1">
-                    <a:lumMod val="65000"/>
-                    <a:lumOff val="35000"/>
-                  </a:schemeClr>
-                </a:solidFill>
-                <a:latin typeface="피플폰트 Bold" panose="020B0600000101010101" pitchFamily="50" charset="-127"/>
-                <a:ea typeface="피플폰트 Bold" panose="020B0600000101010101" pitchFamily="50" charset="-127"/>
-              </a:rPr>
-              <a:t>부대동</a:t>
-            </a:r>
-            <a:r>
-              <a:rPr lang="ko-KR" altLang="en-US" sz="1100" dirty="0">
-                <a:solidFill>
-                  <a:schemeClr val="tx1">
-                    <a:lumMod val="65000"/>
-                    <a:lumOff val="35000"/>
-                  </a:schemeClr>
-                </a:solidFill>
-                <a:latin typeface="피플폰트 Bold" panose="020B0600000101010101" pitchFamily="50" charset="-127"/>
-                <a:ea typeface="피플폰트 Bold" panose="020B0600000101010101" pitchFamily="50" charset="-127"/>
-              </a:rPr>
-              <a:t> </a:t>
-            </a:r>
-            <a:r>
-              <a:rPr lang="en-US" altLang="ko-KR" sz="1100" dirty="0">
-                <a:solidFill>
-                  <a:schemeClr val="tx1">
-                    <a:lumMod val="65000"/>
-                    <a:lumOff val="35000"/>
-                  </a:schemeClr>
-                </a:solidFill>
-                <a:latin typeface="피플폰트 Bold" panose="020B0600000101010101" pitchFamily="50" charset="-127"/>
-                <a:ea typeface="피플폰트 Bold" panose="020B0600000101010101" pitchFamily="50" charset="-127"/>
-              </a:rPr>
-              <a:t>354</a:t>
-            </a:r>
-            <a:r>
-              <a:rPr lang="ko-KR" altLang="en-US" sz="1100" dirty="0">
-                <a:solidFill>
-                  <a:schemeClr val="tx1">
-                    <a:lumMod val="65000"/>
-                    <a:lumOff val="35000"/>
-                  </a:schemeClr>
-                </a:solidFill>
-                <a:latin typeface="피플폰트 Bold" panose="020B0600000101010101" pitchFamily="50" charset="-127"/>
-                <a:ea typeface="피플폰트 Bold" panose="020B0600000101010101" pitchFamily="50" charset="-127"/>
-              </a:rPr>
-              <a:t>번지 일원에 진행하는 천안 부성</a:t>
-            </a:r>
-            <a:r>
-              <a:rPr lang="en-US" altLang="ko-KR" sz="1100" dirty="0">
-                <a:solidFill>
-                  <a:schemeClr val="tx1">
-                    <a:lumMod val="65000"/>
-                    <a:lumOff val="35000"/>
-                  </a:schemeClr>
-                </a:solidFill>
-                <a:latin typeface="피플폰트 Bold" panose="020B0600000101010101" pitchFamily="50" charset="-127"/>
-                <a:ea typeface="피플폰트 Bold" panose="020B0600000101010101" pitchFamily="50" charset="-127"/>
-              </a:rPr>
-              <a:t>2</a:t>
-            </a:r>
-            <a:r>
-              <a:rPr lang="ko-KR" altLang="en-US" sz="1100" dirty="0">
-                <a:solidFill>
-                  <a:schemeClr val="tx1">
-                    <a:lumMod val="65000"/>
-                    <a:lumOff val="35000"/>
-                  </a:schemeClr>
-                </a:solidFill>
-                <a:latin typeface="피플폰트 Bold" panose="020B0600000101010101" pitchFamily="50" charset="-127"/>
-                <a:ea typeface="피플폰트 Bold" panose="020B0600000101010101" pitchFamily="50" charset="-127"/>
-              </a:rPr>
-              <a:t>지구 도시개발사업</a:t>
-            </a:r>
-            <a:endParaRPr lang="en-US" altLang="ko-KR" sz="1100" dirty="0">
-              <a:solidFill>
-                <a:schemeClr val="tx1">
-                  <a:lumMod val="65000"/>
-                  <a:lumOff val="35000"/>
-                </a:schemeClr>
-              </a:solidFill>
-              <a:latin typeface="피플폰트 Bold" panose="020B0600000101010101" pitchFamily="50" charset="-127"/>
-              <a:ea typeface="피플폰트 Bold" panose="020B0600000101010101" pitchFamily="50" charset="-127"/>
-            </a:endParaRPr>
-          </a:p>
-          <a:p>
-            <a:pPr marL="285750" indent="-285750">
-              <a:buFont typeface="Batang" panose="02030600000101010101" pitchFamily="18" charset="-127"/>
-              <a:buChar char="→"/>
-            </a:pPr>
-            <a:r>
-              <a:rPr lang="ko-KR" altLang="en-US" sz="1100" dirty="0">
-                <a:solidFill>
-                  <a:schemeClr val="tx1">
-                    <a:lumMod val="65000"/>
-                    <a:lumOff val="35000"/>
-                  </a:schemeClr>
-                </a:solidFill>
-                <a:latin typeface="피플폰트 Bold" panose="020B0600000101010101" pitchFamily="50" charset="-127"/>
-                <a:ea typeface="피플폰트 Bold" panose="020B0600000101010101" pitchFamily="50" charset="-127"/>
-              </a:rPr>
-              <a:t>미확보 필지 수용재결 절차 진행을 위한 토지 소유권 확보를 위한</a:t>
-            </a:r>
-            <a:r>
-              <a:rPr lang="en-US" altLang="ko-KR" sz="1100" dirty="0">
-                <a:solidFill>
-                  <a:schemeClr val="tx1">
-                    <a:lumMod val="65000"/>
-                    <a:lumOff val="35000"/>
-                  </a:schemeClr>
-                </a:solidFill>
-                <a:latin typeface="피플폰트 Bold" panose="020B0600000101010101" pitchFamily="50" charset="-127"/>
-                <a:ea typeface="피플폰트 Bold" panose="020B0600000101010101" pitchFamily="50" charset="-127"/>
-              </a:rPr>
-              <a:t> </a:t>
-            </a:r>
-            <a:r>
-              <a:rPr lang="ko-KR" altLang="en-US" sz="1100" dirty="0">
-                <a:solidFill>
-                  <a:schemeClr val="tx1">
-                    <a:lumMod val="65000"/>
-                    <a:lumOff val="35000"/>
-                  </a:schemeClr>
-                </a:solidFill>
-                <a:latin typeface="피플폰트 Bold" panose="020B0600000101010101" pitchFamily="50" charset="-127"/>
-                <a:ea typeface="피플폰트 Bold" panose="020B0600000101010101" pitchFamily="50" charset="-127"/>
-              </a:rPr>
-              <a:t>토지담보 대출 중  </a:t>
-            </a:r>
-            <a:r>
-              <a:rPr lang="en-US" altLang="ko-KR" sz="1100" dirty="0" err="1">
-                <a:solidFill>
-                  <a:schemeClr val="tx1">
-                    <a:lumMod val="65000"/>
-                    <a:lumOff val="35000"/>
-                  </a:schemeClr>
-                </a:solidFill>
-                <a:latin typeface="피플폰트 Bold" panose="020B0600000101010101" pitchFamily="50" charset="-127"/>
-                <a:ea typeface="피플폰트 Bold" panose="020B0600000101010101" pitchFamily="50" charset="-127"/>
-              </a:rPr>
-              <a:t>Tr.B</a:t>
-            </a:r>
-            <a:r>
-              <a:rPr lang="ko-KR" altLang="en-US" sz="1100" dirty="0">
-                <a:solidFill>
-                  <a:schemeClr val="tx1">
-                    <a:lumMod val="65000"/>
-                    <a:lumOff val="35000"/>
-                  </a:schemeClr>
-                </a:solidFill>
-                <a:latin typeface="피플폰트 Bold" panose="020B0600000101010101" pitchFamily="50" charset="-127"/>
-                <a:ea typeface="피플폰트 Bold" panose="020B0600000101010101" pitchFamily="50" charset="-127"/>
-              </a:rPr>
-              <a:t>를 기초자산으로 사모사채를 발행하는 건</a:t>
-            </a:r>
-            <a:endParaRPr lang="en-US" altLang="ko-KR" sz="1100" dirty="0">
-              <a:solidFill>
-                <a:schemeClr val="tx1">
-                  <a:lumMod val="65000"/>
-                  <a:lumOff val="35000"/>
-                </a:schemeClr>
-              </a:solidFill>
-              <a:latin typeface="피플폰트 Bold" panose="020B0600000101010101" pitchFamily="50" charset="-127"/>
-              <a:ea typeface="피플폰트 Bold" panose="020B0600000101010101" pitchFamily="50" charset="-127"/>
-            </a:endParaRPr>
-          </a:p>
-        </p:txBody>
-      </p:sp>
       <p:pic>
         <p:nvPicPr>
           <p:cNvPr id="29" name="그림 28">
@@ -8229,452 +7781,6 @@
       </p:pic>
       <p:sp>
         <p:nvSpPr>
-          <p:cNvPr id="41" name="슬라이드 번호 개체 틀 1">
-            <a:extLst>
-              <a:ext uri="{FF2B5EF4-FFF2-40B4-BE49-F238E27FC236}">
-                <a16:creationId xmlns:a16="http://schemas.microsoft.com/office/drawing/2014/main" id="{D7F47276-D647-49EF-BF3D-158D5D8E2650}"/>
-              </a:ext>
-            </a:extLst>
-          </p:cNvPr>
-          <p:cNvSpPr txBox="1">
-            <a:spLocks/>
-          </p:cNvSpPr>
-          <p:nvPr/>
-        </p:nvSpPr>
-        <p:spPr>
-          <a:xfrm>
-            <a:off x="6669088" y="6605754"/>
-            <a:ext cx="3097212" cy="227169"/>
-          </a:xfrm>
-          <a:prstGeom prst="rect">
-            <a:avLst/>
-          </a:prstGeom>
-        </p:spPr>
-        <p:txBody>
-          <a:bodyPr vert="horz" lIns="91440" tIns="45720" rIns="0" bIns="45720" rtlCol="0" anchor="ctr"/>
-          <a:lstStyle>
-            <a:defPPr>
-              <a:defRPr lang="en-US"/>
-            </a:defPPr>
-            <a:lvl1pPr marL="0" algn="r" defTabSz="457200" rtl="0" eaLnBrk="1" latinLnBrk="0" hangingPunct="1">
-              <a:defRPr sz="800" kern="1200">
-                <a:solidFill>
-                  <a:schemeClr val="tx1">
-                    <a:tint val="75000"/>
-                  </a:schemeClr>
-                </a:solidFill>
-                <a:latin typeface="+mn-ea"/>
-                <a:ea typeface="+mn-ea"/>
-                <a:cs typeface="+mn-cs"/>
-              </a:defRPr>
-            </a:lvl1pPr>
-            <a:lvl2pPr marL="457200" algn="l" defTabSz="457200" rtl="0" eaLnBrk="1" latinLnBrk="0" hangingPunct="1">
-              <a:defRPr sz="1800" kern="1200">
-                <a:solidFill>
-                  <a:schemeClr val="tx1"/>
-                </a:solidFill>
-                <a:latin typeface="+mn-lt"/>
-                <a:ea typeface="+mn-ea"/>
-                <a:cs typeface="+mn-cs"/>
-              </a:defRPr>
-            </a:lvl2pPr>
-            <a:lvl3pPr marL="914400" algn="l" defTabSz="457200" rtl="0" eaLnBrk="1" latinLnBrk="0" hangingPunct="1">
-              <a:defRPr sz="1800" kern="1200">
-                <a:solidFill>
-                  <a:schemeClr val="tx1"/>
-                </a:solidFill>
-                <a:latin typeface="+mn-lt"/>
-                <a:ea typeface="+mn-ea"/>
-                <a:cs typeface="+mn-cs"/>
-              </a:defRPr>
-            </a:lvl3pPr>
-            <a:lvl4pPr marL="1371600" algn="l" defTabSz="457200" rtl="0" eaLnBrk="1" latinLnBrk="0" hangingPunct="1">
-              <a:defRPr sz="1800" kern="1200">
-                <a:solidFill>
-                  <a:schemeClr val="tx1"/>
-                </a:solidFill>
-                <a:latin typeface="+mn-lt"/>
-                <a:ea typeface="+mn-ea"/>
-                <a:cs typeface="+mn-cs"/>
-              </a:defRPr>
-            </a:lvl4pPr>
-            <a:lvl5pPr marL="1828800" algn="l" defTabSz="457200" rtl="0" eaLnBrk="1" latinLnBrk="0" hangingPunct="1">
-              <a:defRPr sz="1800" kern="1200">
-                <a:solidFill>
-                  <a:schemeClr val="tx1"/>
-                </a:solidFill>
-                <a:latin typeface="+mn-lt"/>
-                <a:ea typeface="+mn-ea"/>
-                <a:cs typeface="+mn-cs"/>
-              </a:defRPr>
-            </a:lvl5pPr>
-            <a:lvl6pPr marL="2286000" algn="l" defTabSz="457200" rtl="0" eaLnBrk="1" latinLnBrk="0" hangingPunct="1">
-              <a:defRPr sz="1800" kern="1200">
-                <a:solidFill>
-                  <a:schemeClr val="tx1"/>
-                </a:solidFill>
-                <a:latin typeface="+mn-lt"/>
-                <a:ea typeface="+mn-ea"/>
-                <a:cs typeface="+mn-cs"/>
-              </a:defRPr>
-            </a:lvl6pPr>
-            <a:lvl7pPr marL="2743200" algn="l" defTabSz="457200" rtl="0" eaLnBrk="1" latinLnBrk="0" hangingPunct="1">
-              <a:defRPr sz="1800" kern="1200">
-                <a:solidFill>
-                  <a:schemeClr val="tx1"/>
-                </a:solidFill>
-                <a:latin typeface="+mn-lt"/>
-                <a:ea typeface="+mn-ea"/>
-                <a:cs typeface="+mn-cs"/>
-              </a:defRPr>
-            </a:lvl7pPr>
-            <a:lvl8pPr marL="3200400" algn="l" defTabSz="457200" rtl="0" eaLnBrk="1" latinLnBrk="0" hangingPunct="1">
-              <a:defRPr sz="1800" kern="1200">
-                <a:solidFill>
-                  <a:schemeClr val="tx1"/>
-                </a:solidFill>
-                <a:latin typeface="+mn-lt"/>
-                <a:ea typeface="+mn-ea"/>
-                <a:cs typeface="+mn-cs"/>
-              </a:defRPr>
-            </a:lvl8pPr>
-            <a:lvl9pPr marL="3657600" algn="l" defTabSz="457200" rtl="0" eaLnBrk="1" latinLnBrk="0" hangingPunct="1">
-              <a:defRPr sz="1800" kern="1200">
-                <a:solidFill>
-                  <a:schemeClr val="tx1"/>
-                </a:solidFill>
-                <a:latin typeface="+mn-lt"/>
-                <a:ea typeface="+mn-ea"/>
-                <a:cs typeface="+mn-cs"/>
-              </a:defRPr>
-            </a:lvl9pPr>
-          </a:lstStyle>
-          <a:p>
-            <a:pPr>
-              <a:defRPr/>
-            </a:pPr>
-            <a:fld id="{F3A57096-21A8-44ED-AF94-8A259496D2BE}" type="slidenum">
-              <a:rPr lang="en-US" altLang="en-US" b="1" smtClean="0">
-                <a:solidFill>
-                  <a:schemeClr val="tx1"/>
-                </a:solidFill>
-                <a:latin typeface="피플폰트 Light" panose="020B0600000101010101" pitchFamily="50" charset="-127"/>
-                <a:ea typeface="피플폰트 Light" panose="020B0600000101010101" pitchFamily="50" charset="-127"/>
-              </a:rPr>
-              <a:pPr>
-                <a:defRPr/>
-              </a:pPr>
-              <a:t>2</a:t>
-            </a:fld>
-            <a:endParaRPr lang="en-US" altLang="en-US" b="1" dirty="0">
-              <a:solidFill>
-                <a:schemeClr val="tx1"/>
-              </a:solidFill>
-              <a:latin typeface="피플폰트 Light" panose="020B0600000101010101" pitchFamily="50" charset="-127"/>
-              <a:ea typeface="피플폰트 Light" panose="020B0600000101010101" pitchFamily="50" charset="-127"/>
-            </a:endParaRPr>
-          </a:p>
-        </p:txBody>
-      </p:sp>
-      <p:sp>
-        <p:nvSpPr>
-          <p:cNvPr id="42" name="슬라이드 번호 개체 틀 1">
-            <a:extLst>
-              <a:ext uri="{FF2B5EF4-FFF2-40B4-BE49-F238E27FC236}">
-                <a16:creationId xmlns:a16="http://schemas.microsoft.com/office/drawing/2014/main" id="{FAB241E8-8D34-4664-B472-B4C5D1B7229A}"/>
-              </a:ext>
-            </a:extLst>
-          </p:cNvPr>
-          <p:cNvSpPr txBox="1">
-            <a:spLocks/>
-          </p:cNvSpPr>
-          <p:nvPr/>
-        </p:nvSpPr>
-        <p:spPr>
-          <a:xfrm>
-            <a:off x="0" y="6605755"/>
-            <a:ext cx="3097212" cy="227169"/>
-          </a:xfrm>
-          <a:prstGeom prst="rect">
-            <a:avLst/>
-          </a:prstGeom>
-        </p:spPr>
-        <p:txBody>
-          <a:bodyPr vert="horz" lIns="91440" tIns="45720" rIns="0" bIns="45720" rtlCol="0" anchor="ctr"/>
-          <a:lstStyle>
-            <a:defPPr>
-              <a:defRPr lang="en-US"/>
-            </a:defPPr>
-            <a:lvl1pPr marL="0" algn="r" defTabSz="457200" rtl="0" eaLnBrk="1" latinLnBrk="0" hangingPunct="1">
-              <a:defRPr sz="800" kern="1200">
-                <a:solidFill>
-                  <a:schemeClr val="tx1">
-                    <a:tint val="75000"/>
-                  </a:schemeClr>
-                </a:solidFill>
-                <a:latin typeface="+mn-ea"/>
-                <a:ea typeface="+mn-ea"/>
-                <a:cs typeface="+mn-cs"/>
-              </a:defRPr>
-            </a:lvl1pPr>
-            <a:lvl2pPr marL="457200" algn="l" defTabSz="457200" rtl="0" eaLnBrk="1" latinLnBrk="0" hangingPunct="1">
-              <a:defRPr sz="1800" kern="1200">
-                <a:solidFill>
-                  <a:schemeClr val="tx1"/>
-                </a:solidFill>
-                <a:latin typeface="+mn-lt"/>
-                <a:ea typeface="+mn-ea"/>
-                <a:cs typeface="+mn-cs"/>
-              </a:defRPr>
-            </a:lvl2pPr>
-            <a:lvl3pPr marL="914400" algn="l" defTabSz="457200" rtl="0" eaLnBrk="1" latinLnBrk="0" hangingPunct="1">
-              <a:defRPr sz="1800" kern="1200">
-                <a:solidFill>
-                  <a:schemeClr val="tx1"/>
-                </a:solidFill>
-                <a:latin typeface="+mn-lt"/>
-                <a:ea typeface="+mn-ea"/>
-                <a:cs typeface="+mn-cs"/>
-              </a:defRPr>
-            </a:lvl3pPr>
-            <a:lvl4pPr marL="1371600" algn="l" defTabSz="457200" rtl="0" eaLnBrk="1" latinLnBrk="0" hangingPunct="1">
-              <a:defRPr sz="1800" kern="1200">
-                <a:solidFill>
-                  <a:schemeClr val="tx1"/>
-                </a:solidFill>
-                <a:latin typeface="+mn-lt"/>
-                <a:ea typeface="+mn-ea"/>
-                <a:cs typeface="+mn-cs"/>
-              </a:defRPr>
-            </a:lvl4pPr>
-            <a:lvl5pPr marL="1828800" algn="l" defTabSz="457200" rtl="0" eaLnBrk="1" latinLnBrk="0" hangingPunct="1">
-              <a:defRPr sz="1800" kern="1200">
-                <a:solidFill>
-                  <a:schemeClr val="tx1"/>
-                </a:solidFill>
-                <a:latin typeface="+mn-lt"/>
-                <a:ea typeface="+mn-ea"/>
-                <a:cs typeface="+mn-cs"/>
-              </a:defRPr>
-            </a:lvl5pPr>
-            <a:lvl6pPr marL="2286000" algn="l" defTabSz="457200" rtl="0" eaLnBrk="1" latinLnBrk="0" hangingPunct="1">
-              <a:defRPr sz="1800" kern="1200">
-                <a:solidFill>
-                  <a:schemeClr val="tx1"/>
-                </a:solidFill>
-                <a:latin typeface="+mn-lt"/>
-                <a:ea typeface="+mn-ea"/>
-                <a:cs typeface="+mn-cs"/>
-              </a:defRPr>
-            </a:lvl6pPr>
-            <a:lvl7pPr marL="2743200" algn="l" defTabSz="457200" rtl="0" eaLnBrk="1" latinLnBrk="0" hangingPunct="1">
-              <a:defRPr sz="1800" kern="1200">
-                <a:solidFill>
-                  <a:schemeClr val="tx1"/>
-                </a:solidFill>
-                <a:latin typeface="+mn-lt"/>
-                <a:ea typeface="+mn-ea"/>
-                <a:cs typeface="+mn-cs"/>
-              </a:defRPr>
-            </a:lvl7pPr>
-            <a:lvl8pPr marL="3200400" algn="l" defTabSz="457200" rtl="0" eaLnBrk="1" latinLnBrk="0" hangingPunct="1">
-              <a:defRPr sz="1800" kern="1200">
-                <a:solidFill>
-                  <a:schemeClr val="tx1"/>
-                </a:solidFill>
-                <a:latin typeface="+mn-lt"/>
-                <a:ea typeface="+mn-ea"/>
-                <a:cs typeface="+mn-cs"/>
-              </a:defRPr>
-            </a:lvl8pPr>
-            <a:lvl9pPr marL="3657600" algn="l" defTabSz="457200" rtl="0" eaLnBrk="1" latinLnBrk="0" hangingPunct="1">
-              <a:defRPr sz="1800" kern="1200">
-                <a:solidFill>
-                  <a:schemeClr val="tx1"/>
-                </a:solidFill>
-                <a:latin typeface="+mn-lt"/>
-                <a:ea typeface="+mn-ea"/>
-                <a:cs typeface="+mn-cs"/>
-              </a:defRPr>
-            </a:lvl9pPr>
-          </a:lstStyle>
-          <a:p>
-            <a:pPr algn="l">
-              <a:defRPr/>
-            </a:pPr>
-            <a:r>
-              <a:rPr lang="ko-KR" altLang="en-US" b="1" dirty="0">
-                <a:solidFill>
-                  <a:schemeClr val="tx1"/>
-                </a:solidFill>
-                <a:latin typeface="피플폰트 Light" panose="020B0600000101010101" pitchFamily="50" charset="-127"/>
-                <a:ea typeface="피플폰트 Light" panose="020B0600000101010101" pitchFamily="50" charset="-127"/>
-              </a:rPr>
-              <a:t>신도림역 </a:t>
-            </a:r>
-            <a:r>
-              <a:rPr lang="ko-KR" altLang="en-US" b="1" dirty="0" err="1">
-                <a:solidFill>
-                  <a:schemeClr val="tx1"/>
-                </a:solidFill>
-                <a:latin typeface="피플폰트 Light" panose="020B0600000101010101" pitchFamily="50" charset="-127"/>
-                <a:ea typeface="피플폰트 Light" panose="020B0600000101010101" pitchFamily="50" charset="-127"/>
-              </a:rPr>
-              <a:t>디큐브시티</a:t>
-            </a:r>
-            <a:r>
-              <a:rPr lang="ko-KR" altLang="en-US" b="1" dirty="0">
-                <a:solidFill>
-                  <a:schemeClr val="tx1"/>
-                </a:solidFill>
-                <a:latin typeface="피플폰트 Light" panose="020B0600000101010101" pitchFamily="50" charset="-127"/>
-                <a:ea typeface="피플폰트 Light" panose="020B0600000101010101" pitchFamily="50" charset="-127"/>
-              </a:rPr>
-              <a:t> 복합시설 </a:t>
-            </a:r>
-            <a:r>
-              <a:rPr lang="ko-KR" altLang="en-US" b="1" dirty="0" err="1">
-                <a:solidFill>
-                  <a:schemeClr val="tx1"/>
-                </a:solidFill>
-                <a:latin typeface="피플폰트 Light" panose="020B0600000101010101" pitchFamily="50" charset="-127"/>
-                <a:ea typeface="피플폰트 Light" panose="020B0600000101010101" pitchFamily="50" charset="-127"/>
-              </a:rPr>
-              <a:t>리모델링사업</a:t>
-            </a:r>
-            <a:r>
-              <a:rPr lang="ko-KR" altLang="en-US" b="1" dirty="0">
-                <a:solidFill>
-                  <a:schemeClr val="tx1"/>
-                </a:solidFill>
-                <a:latin typeface="피플폰트 Light" panose="020B0600000101010101" pitchFamily="50" charset="-127"/>
-                <a:ea typeface="피플폰트 Light" panose="020B0600000101010101" pitchFamily="50" charset="-127"/>
-              </a:rPr>
-              <a:t> 담보대출</a:t>
-            </a:r>
-            <a:endParaRPr lang="en-US" altLang="en-US" b="1" dirty="0">
-              <a:solidFill>
-                <a:schemeClr val="tx1"/>
-              </a:solidFill>
-              <a:latin typeface="피플폰트 Light" panose="020B0600000101010101" pitchFamily="50" charset="-127"/>
-              <a:ea typeface="피플폰트 Light" panose="020B0600000101010101" pitchFamily="50" charset="-127"/>
-            </a:endParaRPr>
-          </a:p>
-        </p:txBody>
-      </p:sp>
-      <p:sp>
-        <p:nvSpPr>
-          <p:cNvPr id="49" name="육각형 48">
-            <a:extLst>
-              <a:ext uri="{FF2B5EF4-FFF2-40B4-BE49-F238E27FC236}">
-                <a16:creationId xmlns:a16="http://schemas.microsoft.com/office/drawing/2014/main" id="{239993E1-0C01-4E17-BE0A-BC1644DFAC08}"/>
-              </a:ext>
-            </a:extLst>
-          </p:cNvPr>
-          <p:cNvSpPr/>
-          <p:nvPr/>
-        </p:nvSpPr>
-        <p:spPr>
-          <a:xfrm>
-            <a:off x="1191472" y="5738998"/>
-            <a:ext cx="7530164" cy="432987"/>
-          </a:xfrm>
-          <a:prstGeom prst="hexagon">
-            <a:avLst>
-              <a:gd name="adj" fmla="val 18529"/>
-              <a:gd name="vf" fmla="val 115470"/>
-            </a:avLst>
-          </a:prstGeom>
-          <a:solidFill>
-            <a:srgbClr val="2E75B6">
-              <a:alpha val="75000"/>
-            </a:srgbClr>
-          </a:solidFill>
-          <a:ln>
-            <a:noFill/>
-          </a:ln>
-        </p:spPr>
-        <p:style>
-          <a:lnRef idx="2">
-            <a:schemeClr val="accent1">
-              <a:shade val="50000"/>
-            </a:schemeClr>
-          </a:lnRef>
-          <a:fillRef idx="1">
-            <a:schemeClr val="accent1"/>
-          </a:fillRef>
-          <a:effectRef idx="0">
-            <a:schemeClr val="accent1"/>
-          </a:effectRef>
-          <a:fontRef idx="minor">
-            <a:schemeClr val="lt1"/>
-          </a:fontRef>
-        </p:style>
-        <p:txBody>
-          <a:bodyPr rtlCol="0" anchor="ctr"/>
-          <a:lstStyle/>
-          <a:p>
-            <a:pPr algn="ctr"/>
-            <a:endParaRPr lang="ko-KR" altLang="en-US" dirty="0"/>
-          </a:p>
-        </p:txBody>
-      </p:sp>
-      <p:sp>
-        <p:nvSpPr>
-          <p:cNvPr id="50" name="육각형 49">
-            <a:extLst>
-              <a:ext uri="{FF2B5EF4-FFF2-40B4-BE49-F238E27FC236}">
-                <a16:creationId xmlns:a16="http://schemas.microsoft.com/office/drawing/2014/main" id="{A136C212-8876-4D18-8018-0CA3ADCF5B1E}"/>
-              </a:ext>
-            </a:extLst>
-          </p:cNvPr>
-          <p:cNvSpPr/>
-          <p:nvPr/>
-        </p:nvSpPr>
-        <p:spPr>
-          <a:xfrm>
-            <a:off x="1327054" y="5722255"/>
-            <a:ext cx="7258999" cy="471246"/>
-          </a:xfrm>
-          <a:prstGeom prst="hexagon">
-            <a:avLst>
-              <a:gd name="adj" fmla="val 18529"/>
-              <a:gd name="vf" fmla="val 115470"/>
-            </a:avLst>
-          </a:prstGeom>
-          <a:solidFill>
-            <a:schemeClr val="bg1"/>
-          </a:solidFill>
-          <a:ln>
-            <a:noFill/>
-          </a:ln>
-        </p:spPr>
-        <p:style>
-          <a:lnRef idx="2">
-            <a:schemeClr val="accent1">
-              <a:shade val="50000"/>
-            </a:schemeClr>
-          </a:lnRef>
-          <a:fillRef idx="1">
-            <a:schemeClr val="accent1"/>
-          </a:fillRef>
-          <a:effectRef idx="0">
-            <a:schemeClr val="accent1"/>
-          </a:effectRef>
-          <a:fontRef idx="minor">
-            <a:schemeClr val="lt1"/>
-          </a:fontRef>
-        </p:style>
-        <p:txBody>
-          <a:bodyPr rtlCol="0" anchor="ctr"/>
-          <a:lstStyle/>
-          <a:p>
-            <a:endParaRPr lang="ko-KR" altLang="en-US" dirty="0"/>
-          </a:p>
-        </p:txBody>
-      </p:sp>
-      <p:sp>
-        <p:nvSpPr>
           <p:cNvPr id="51" name="TextBox 50">
             <a:extLst>
               <a:ext uri="{FF2B5EF4-FFF2-40B4-BE49-F238E27FC236}">
@@ -8687,7 +7793,7 @@
         </p:nvSpPr>
         <p:spPr>
           <a:xfrm>
-            <a:off x="1618299" y="5870351"/>
+            <a:off x="1618298" y="5580365"/>
             <a:ext cx="6340064" cy="169277"/>
           </a:xfrm>
           <a:prstGeom prst="rect">
@@ -8771,7 +7877,7 @@
         </p:nvGrpSpPr>
         <p:grpSpPr>
           <a:xfrm>
-            <a:off x="3426583" y="5021994"/>
+            <a:off x="3426584" y="4385287"/>
             <a:ext cx="2723494" cy="369332"/>
             <a:chOff x="3444233" y="2876563"/>
             <a:chExt cx="2723494" cy="369332"/>
@@ -8865,7 +7971,7 @@
         </p:nvSpPr>
         <p:spPr>
           <a:xfrm>
-            <a:off x="2447898" y="5452969"/>
+            <a:off x="2447899" y="4816262"/>
             <a:ext cx="4680863" cy="253916"/>
           </a:xfrm>
           <a:prstGeom prst="rect">
@@ -8967,7 +8073,7 @@
         </p:nvSpPr>
         <p:spPr>
           <a:xfrm>
-            <a:off x="2447899" y="2638009"/>
+            <a:off x="2471497" y="2853424"/>
             <a:ext cx="4680863" cy="253916"/>
           </a:xfrm>
           <a:prstGeom prst="rect">
@@ -9000,6 +8106,517 @@
               </a:solidFill>
               <a:latin typeface="피플폰트 Bold" panose="020B0600000101010101" pitchFamily="50" charset="-127"/>
               <a:ea typeface="피플폰트 Bold" panose="020B0600000101010101" pitchFamily="50" charset="-127"/>
+            </a:endParaRPr>
+          </a:p>
+        </p:txBody>
+      </p:sp>
+      <p:sp>
+        <p:nvSpPr>
+          <p:cNvPr id="30" name="육각형 29">
+            <a:extLst>
+              <a:ext uri="{FF2B5EF4-FFF2-40B4-BE49-F238E27FC236}">
+                <a16:creationId xmlns:a16="http://schemas.microsoft.com/office/drawing/2014/main" id="{76C5E0ED-9FEC-4202-B067-11F4586C6BA6}"/>
+              </a:ext>
+            </a:extLst>
+          </p:cNvPr>
+          <p:cNvSpPr/>
+          <p:nvPr/>
+        </p:nvSpPr>
+        <p:spPr>
+          <a:xfrm>
+            <a:off x="1187918" y="1441089"/>
+            <a:ext cx="7530164" cy="1013176"/>
+          </a:xfrm>
+          <a:prstGeom prst="hexagon">
+            <a:avLst>
+              <a:gd name="adj" fmla="val 18529"/>
+              <a:gd name="vf" fmla="val 115470"/>
+            </a:avLst>
+          </a:prstGeom>
+          <a:solidFill>
+            <a:srgbClr val="2E75B6">
+              <a:alpha val="75000"/>
+            </a:srgbClr>
+          </a:solidFill>
+          <a:ln>
+            <a:noFill/>
+          </a:ln>
+        </p:spPr>
+        <p:style>
+          <a:lnRef idx="2">
+            <a:schemeClr val="accent1">
+              <a:shade val="50000"/>
+            </a:schemeClr>
+          </a:lnRef>
+          <a:fillRef idx="1">
+            <a:schemeClr val="accent1"/>
+          </a:fillRef>
+          <a:effectRef idx="0">
+            <a:schemeClr val="accent1"/>
+          </a:effectRef>
+          <a:fontRef idx="minor">
+            <a:schemeClr val="lt1"/>
+          </a:fontRef>
+        </p:style>
+        <p:txBody>
+          <a:bodyPr rtlCol="0" anchor="ctr"/>
+          <a:lstStyle/>
+          <a:p>
+            <a:pPr algn="ctr"/>
+            <a:endParaRPr lang="ko-KR" altLang="en-US" dirty="0"/>
+          </a:p>
+        </p:txBody>
+      </p:sp>
+      <p:sp>
+        <p:nvSpPr>
+          <p:cNvPr id="31" name="육각형 30">
+            <a:extLst>
+              <a:ext uri="{FF2B5EF4-FFF2-40B4-BE49-F238E27FC236}">
+                <a16:creationId xmlns:a16="http://schemas.microsoft.com/office/drawing/2014/main" id="{07C2B09D-C354-4D56-9466-AB8D1449EC7A}"/>
+              </a:ext>
+            </a:extLst>
+          </p:cNvPr>
+          <p:cNvSpPr/>
+          <p:nvPr/>
+        </p:nvSpPr>
+        <p:spPr>
+          <a:xfrm>
+            <a:off x="1355774" y="1361853"/>
+            <a:ext cx="7175041" cy="1092412"/>
+          </a:xfrm>
+          <a:prstGeom prst="hexagon">
+            <a:avLst>
+              <a:gd name="adj" fmla="val 18529"/>
+              <a:gd name="vf" fmla="val 115470"/>
+            </a:avLst>
+          </a:prstGeom>
+          <a:solidFill>
+            <a:schemeClr val="bg1"/>
+          </a:solidFill>
+          <a:ln>
+            <a:noFill/>
+          </a:ln>
+        </p:spPr>
+        <p:style>
+          <a:lnRef idx="2">
+            <a:schemeClr val="accent1">
+              <a:shade val="50000"/>
+            </a:schemeClr>
+          </a:lnRef>
+          <a:fillRef idx="1">
+            <a:schemeClr val="accent1"/>
+          </a:fillRef>
+          <a:effectRef idx="0">
+            <a:schemeClr val="accent1"/>
+          </a:effectRef>
+          <a:fontRef idx="minor">
+            <a:schemeClr val="lt1"/>
+          </a:fontRef>
+        </p:style>
+        <p:txBody>
+          <a:bodyPr rtlCol="0" anchor="ctr"/>
+          <a:lstStyle/>
+          <a:p>
+            <a:endParaRPr lang="ko-KR" altLang="en-US" dirty="0"/>
+          </a:p>
+        </p:txBody>
+      </p:sp>
+      <p:sp>
+        <p:nvSpPr>
+          <p:cNvPr id="43" name="TextBox 42">
+            <a:extLst>
+              <a:ext uri="{FF2B5EF4-FFF2-40B4-BE49-F238E27FC236}">
+                <a16:creationId xmlns:a16="http://schemas.microsoft.com/office/drawing/2014/main" id="{824ECF91-BE5D-49F6-80F0-6708354EDBCC}"/>
+              </a:ext>
+            </a:extLst>
+          </p:cNvPr>
+          <p:cNvSpPr txBox="1"/>
+          <p:nvPr/>
+        </p:nvSpPr>
+        <p:spPr>
+          <a:xfrm>
+            <a:off x="1614745" y="1668753"/>
+            <a:ext cx="6967754" cy="507831"/>
+          </a:xfrm>
+          <a:prstGeom prst="rect">
+            <a:avLst/>
+          </a:prstGeom>
+          <a:noFill/>
+        </p:spPr>
+        <p:txBody>
+          <a:bodyPr wrap="square" lIns="0" tIns="0" rIns="0" bIns="0" rtlCol="0">
+            <a:spAutoFit/>
+          </a:bodyPr>
+          <a:lstStyle/>
+          <a:p>
+            <a:pPr marL="285750" indent="-285750">
+              <a:buFont typeface="Batang" panose="02030600000101010101" pitchFamily="18" charset="-127"/>
+              <a:buChar char="→"/>
+            </a:pPr>
+            <a:r>
+              <a:rPr lang="ko-KR" altLang="en-US" sz="1100" dirty="0">
+                <a:solidFill>
+                  <a:schemeClr val="tx1">
+                    <a:lumMod val="65000"/>
+                    <a:lumOff val="35000"/>
+                  </a:schemeClr>
+                </a:solidFill>
+                <a:latin typeface="피플폰트 Bold" panose="020B0600000101010101" pitchFamily="50" charset="-127"/>
+                <a:ea typeface="피플폰트 Bold" panose="020B0600000101010101" pitchFamily="50" charset="-127"/>
+              </a:rPr>
+              <a:t>본 건 사업은 충청남도 천안시 </a:t>
+            </a:r>
+            <a:r>
+              <a:rPr lang="ko-KR" altLang="en-US" sz="1100" dirty="0" err="1">
+                <a:solidFill>
+                  <a:schemeClr val="tx1">
+                    <a:lumMod val="65000"/>
+                    <a:lumOff val="35000"/>
+                  </a:schemeClr>
+                </a:solidFill>
+                <a:latin typeface="피플폰트 Bold" panose="020B0600000101010101" pitchFamily="50" charset="-127"/>
+                <a:ea typeface="피플폰트 Bold" panose="020B0600000101010101" pitchFamily="50" charset="-127"/>
+              </a:rPr>
+              <a:t>서북구</a:t>
+            </a:r>
+            <a:r>
+              <a:rPr lang="ko-KR" altLang="en-US" sz="1100" dirty="0">
+                <a:solidFill>
+                  <a:schemeClr val="tx1">
+                    <a:lumMod val="65000"/>
+                    <a:lumOff val="35000"/>
+                  </a:schemeClr>
+                </a:solidFill>
+                <a:latin typeface="피플폰트 Bold" panose="020B0600000101010101" pitchFamily="50" charset="-127"/>
+                <a:ea typeface="피플폰트 Bold" panose="020B0600000101010101" pitchFamily="50" charset="-127"/>
+              </a:rPr>
+              <a:t> </a:t>
+            </a:r>
+            <a:r>
+              <a:rPr lang="ko-KR" altLang="en-US" sz="1100" dirty="0" err="1">
+                <a:solidFill>
+                  <a:schemeClr val="tx1">
+                    <a:lumMod val="65000"/>
+                    <a:lumOff val="35000"/>
+                  </a:schemeClr>
+                </a:solidFill>
+                <a:latin typeface="피플폰트 Bold" panose="020B0600000101010101" pitchFamily="50" charset="-127"/>
+                <a:ea typeface="피플폰트 Bold" panose="020B0600000101010101" pitchFamily="50" charset="-127"/>
+              </a:rPr>
+              <a:t>부대동</a:t>
+            </a:r>
+            <a:r>
+              <a:rPr lang="ko-KR" altLang="en-US" sz="1100" dirty="0">
+                <a:solidFill>
+                  <a:schemeClr val="tx1">
+                    <a:lumMod val="65000"/>
+                    <a:lumOff val="35000"/>
+                  </a:schemeClr>
+                </a:solidFill>
+                <a:latin typeface="피플폰트 Bold" panose="020B0600000101010101" pitchFamily="50" charset="-127"/>
+                <a:ea typeface="피플폰트 Bold" panose="020B0600000101010101" pitchFamily="50" charset="-127"/>
+              </a:rPr>
+              <a:t> </a:t>
+            </a:r>
+            <a:r>
+              <a:rPr lang="en-US" altLang="ko-KR" sz="1100" dirty="0">
+                <a:solidFill>
+                  <a:schemeClr val="tx1">
+                    <a:lumMod val="65000"/>
+                    <a:lumOff val="35000"/>
+                  </a:schemeClr>
+                </a:solidFill>
+                <a:latin typeface="피플폰트 Bold" panose="020B0600000101010101" pitchFamily="50" charset="-127"/>
+                <a:ea typeface="피플폰트 Bold" panose="020B0600000101010101" pitchFamily="50" charset="-127"/>
+              </a:rPr>
+              <a:t>354</a:t>
+            </a:r>
+            <a:r>
+              <a:rPr lang="ko-KR" altLang="en-US" sz="1100" dirty="0">
+                <a:solidFill>
+                  <a:schemeClr val="tx1">
+                    <a:lumMod val="65000"/>
+                    <a:lumOff val="35000"/>
+                  </a:schemeClr>
+                </a:solidFill>
+                <a:latin typeface="피플폰트 Bold" panose="020B0600000101010101" pitchFamily="50" charset="-127"/>
+                <a:ea typeface="피플폰트 Bold" panose="020B0600000101010101" pitchFamily="50" charset="-127"/>
+              </a:rPr>
+              <a:t>번지 일원에 진행하는 천안 부성</a:t>
+            </a:r>
+            <a:r>
+              <a:rPr lang="en-US" altLang="ko-KR" sz="1100" dirty="0">
+                <a:solidFill>
+                  <a:schemeClr val="tx1">
+                    <a:lumMod val="65000"/>
+                    <a:lumOff val="35000"/>
+                  </a:schemeClr>
+                </a:solidFill>
+                <a:latin typeface="피플폰트 Bold" panose="020B0600000101010101" pitchFamily="50" charset="-127"/>
+                <a:ea typeface="피플폰트 Bold" panose="020B0600000101010101" pitchFamily="50" charset="-127"/>
+              </a:rPr>
+              <a:t>2</a:t>
+            </a:r>
+            <a:r>
+              <a:rPr lang="ko-KR" altLang="en-US" sz="1100" dirty="0">
+                <a:solidFill>
+                  <a:schemeClr val="tx1">
+                    <a:lumMod val="65000"/>
+                    <a:lumOff val="35000"/>
+                  </a:schemeClr>
+                </a:solidFill>
+                <a:latin typeface="피플폰트 Bold" panose="020B0600000101010101" pitchFamily="50" charset="-127"/>
+                <a:ea typeface="피플폰트 Bold" panose="020B0600000101010101" pitchFamily="50" charset="-127"/>
+              </a:rPr>
+              <a:t>지구 도시개발사업</a:t>
+            </a:r>
+            <a:endParaRPr lang="en-US" altLang="ko-KR" sz="1100" dirty="0">
+              <a:solidFill>
+                <a:schemeClr val="tx1">
+                  <a:lumMod val="65000"/>
+                  <a:lumOff val="35000"/>
+                </a:schemeClr>
+              </a:solidFill>
+              <a:latin typeface="피플폰트 Bold" panose="020B0600000101010101" pitchFamily="50" charset="-127"/>
+              <a:ea typeface="피플폰트 Bold" panose="020B0600000101010101" pitchFamily="50" charset="-127"/>
+            </a:endParaRPr>
+          </a:p>
+          <a:p>
+            <a:pPr marL="285750" indent="-285750">
+              <a:buFont typeface="Batang" panose="02030600000101010101" pitchFamily="18" charset="-127"/>
+              <a:buChar char="→"/>
+            </a:pPr>
+            <a:r>
+              <a:rPr lang="ko-KR" altLang="en-US" sz="1100" dirty="0">
+                <a:solidFill>
+                  <a:schemeClr val="tx1">
+                    <a:lumMod val="65000"/>
+                    <a:lumOff val="35000"/>
+                  </a:schemeClr>
+                </a:solidFill>
+                <a:latin typeface="피플폰트 Bold" panose="020B0600000101010101" pitchFamily="50" charset="-127"/>
+                <a:ea typeface="피플폰트 Bold" panose="020B0600000101010101" pitchFamily="50" charset="-127"/>
+              </a:rPr>
+              <a:t>미확보 필지 수용재결 절차 진행을 위한 토지 소유권 확보를 위한</a:t>
+            </a:r>
+            <a:r>
+              <a:rPr lang="en-US" altLang="ko-KR" sz="1100" dirty="0">
+                <a:solidFill>
+                  <a:schemeClr val="tx1">
+                    <a:lumMod val="65000"/>
+                    <a:lumOff val="35000"/>
+                  </a:schemeClr>
+                </a:solidFill>
+                <a:latin typeface="피플폰트 Bold" panose="020B0600000101010101" pitchFamily="50" charset="-127"/>
+                <a:ea typeface="피플폰트 Bold" panose="020B0600000101010101" pitchFamily="50" charset="-127"/>
+              </a:rPr>
+              <a:t> </a:t>
+            </a:r>
+            <a:r>
+              <a:rPr lang="ko-KR" altLang="en-US" sz="1100" dirty="0">
+                <a:solidFill>
+                  <a:schemeClr val="tx1">
+                    <a:lumMod val="65000"/>
+                    <a:lumOff val="35000"/>
+                  </a:schemeClr>
+                </a:solidFill>
+                <a:latin typeface="피플폰트 Bold" panose="020B0600000101010101" pitchFamily="50" charset="-127"/>
+                <a:ea typeface="피플폰트 Bold" panose="020B0600000101010101" pitchFamily="50" charset="-127"/>
+              </a:rPr>
+              <a:t>토지담보 대출 중  </a:t>
+            </a:r>
+            <a:r>
+              <a:rPr lang="en-US" altLang="ko-KR" sz="1100" dirty="0" err="1">
+                <a:solidFill>
+                  <a:schemeClr val="tx1">
+                    <a:lumMod val="65000"/>
+                    <a:lumOff val="35000"/>
+                  </a:schemeClr>
+                </a:solidFill>
+                <a:latin typeface="피플폰트 Bold" panose="020B0600000101010101" pitchFamily="50" charset="-127"/>
+                <a:ea typeface="피플폰트 Bold" panose="020B0600000101010101" pitchFamily="50" charset="-127"/>
+              </a:rPr>
+              <a:t>Tr.B</a:t>
+            </a:r>
+            <a:r>
+              <a:rPr lang="ko-KR" altLang="en-US" sz="1100" dirty="0">
+                <a:solidFill>
+                  <a:schemeClr val="tx1">
+                    <a:lumMod val="65000"/>
+                    <a:lumOff val="35000"/>
+                  </a:schemeClr>
+                </a:solidFill>
+                <a:latin typeface="피플폰트 Bold" panose="020B0600000101010101" pitchFamily="50" charset="-127"/>
+                <a:ea typeface="피플폰트 Bold" panose="020B0600000101010101" pitchFamily="50" charset="-127"/>
+              </a:rPr>
+              <a:t>를 기초자산으로 사모사채를 발행하는 건</a:t>
+            </a:r>
+            <a:endParaRPr lang="en-US" altLang="ko-KR" sz="1100" dirty="0">
+              <a:solidFill>
+                <a:schemeClr val="tx1">
+                  <a:lumMod val="65000"/>
+                  <a:lumOff val="35000"/>
+                </a:schemeClr>
+              </a:solidFill>
+              <a:latin typeface="피플폰트 Bold" panose="020B0600000101010101" pitchFamily="50" charset="-127"/>
+              <a:ea typeface="피플폰트 Bold" panose="020B0600000101010101" pitchFamily="50" charset="-127"/>
+            </a:endParaRPr>
+          </a:p>
+        </p:txBody>
+      </p:sp>
+      <p:sp>
+        <p:nvSpPr>
+          <p:cNvPr id="34" name="슬라이드 번호 개체 틀 1">
+            <a:extLst>
+              <a:ext uri="{FF2B5EF4-FFF2-40B4-BE49-F238E27FC236}">
+                <a16:creationId xmlns:a16="http://schemas.microsoft.com/office/drawing/2014/main" id="{A9B718EA-3C6C-4C62-8C33-6580F28A13A7}"/>
+              </a:ext>
+            </a:extLst>
+          </p:cNvPr>
+          <p:cNvSpPr txBox="1">
+            <a:spLocks/>
+          </p:cNvSpPr>
+          <p:nvPr/>
+        </p:nvSpPr>
+        <p:spPr>
+          <a:xfrm>
+            <a:off x="6567488" y="6576219"/>
+            <a:ext cx="3097212" cy="227169"/>
+          </a:xfrm>
+          <a:prstGeom prst="rect">
+            <a:avLst/>
+          </a:prstGeom>
+        </p:spPr>
+        <p:txBody>
+          <a:bodyPr vert="horz" lIns="91440" tIns="45720" rIns="0" bIns="45720" rtlCol="0" anchor="ctr"/>
+          <a:lstStyle>
+            <a:defPPr>
+              <a:defRPr lang="en-US"/>
+            </a:defPPr>
+            <a:lvl1pPr marL="0" algn="r" defTabSz="457200" rtl="0" eaLnBrk="1" latinLnBrk="0" hangingPunct="1">
+              <a:defRPr sz="800" kern="1200">
+                <a:solidFill>
+                  <a:schemeClr val="tx1">
+                    <a:tint val="75000"/>
+                  </a:schemeClr>
+                </a:solidFill>
+                <a:latin typeface="+mn-ea"/>
+                <a:ea typeface="+mn-ea"/>
+                <a:cs typeface="+mn-cs"/>
+              </a:defRPr>
+            </a:lvl1pPr>
+            <a:lvl2pPr marL="457200" algn="l" defTabSz="457200" rtl="0" eaLnBrk="1" latinLnBrk="0" hangingPunct="1">
+              <a:defRPr sz="1800" kern="1200">
+                <a:solidFill>
+                  <a:schemeClr val="tx1"/>
+                </a:solidFill>
+                <a:latin typeface="+mn-lt"/>
+                <a:ea typeface="+mn-ea"/>
+                <a:cs typeface="+mn-cs"/>
+              </a:defRPr>
+            </a:lvl2pPr>
+            <a:lvl3pPr marL="914400" algn="l" defTabSz="457200" rtl="0" eaLnBrk="1" latinLnBrk="0" hangingPunct="1">
+              <a:defRPr sz="1800" kern="1200">
+                <a:solidFill>
+                  <a:schemeClr val="tx1"/>
+                </a:solidFill>
+                <a:latin typeface="+mn-lt"/>
+                <a:ea typeface="+mn-ea"/>
+                <a:cs typeface="+mn-cs"/>
+              </a:defRPr>
+            </a:lvl3pPr>
+            <a:lvl4pPr marL="1371600" algn="l" defTabSz="457200" rtl="0" eaLnBrk="1" latinLnBrk="0" hangingPunct="1">
+              <a:defRPr sz="1800" kern="1200">
+                <a:solidFill>
+                  <a:schemeClr val="tx1"/>
+                </a:solidFill>
+                <a:latin typeface="+mn-lt"/>
+                <a:ea typeface="+mn-ea"/>
+                <a:cs typeface="+mn-cs"/>
+              </a:defRPr>
+            </a:lvl4pPr>
+            <a:lvl5pPr marL="1828800" algn="l" defTabSz="457200" rtl="0" eaLnBrk="1" latinLnBrk="0" hangingPunct="1">
+              <a:defRPr sz="1800" kern="1200">
+                <a:solidFill>
+                  <a:schemeClr val="tx1"/>
+                </a:solidFill>
+                <a:latin typeface="+mn-lt"/>
+                <a:ea typeface="+mn-ea"/>
+                <a:cs typeface="+mn-cs"/>
+              </a:defRPr>
+            </a:lvl5pPr>
+            <a:lvl6pPr marL="2286000" algn="l" defTabSz="457200" rtl="0" eaLnBrk="1" latinLnBrk="0" hangingPunct="1">
+              <a:defRPr sz="1800" kern="1200">
+                <a:solidFill>
+                  <a:schemeClr val="tx1"/>
+                </a:solidFill>
+                <a:latin typeface="+mn-lt"/>
+                <a:ea typeface="+mn-ea"/>
+                <a:cs typeface="+mn-cs"/>
+              </a:defRPr>
+            </a:lvl6pPr>
+            <a:lvl7pPr marL="2743200" algn="l" defTabSz="457200" rtl="0" eaLnBrk="1" latinLnBrk="0" hangingPunct="1">
+              <a:defRPr sz="1800" kern="1200">
+                <a:solidFill>
+                  <a:schemeClr val="tx1"/>
+                </a:solidFill>
+                <a:latin typeface="+mn-lt"/>
+                <a:ea typeface="+mn-ea"/>
+                <a:cs typeface="+mn-cs"/>
+              </a:defRPr>
+            </a:lvl7pPr>
+            <a:lvl8pPr marL="3200400" algn="l" defTabSz="457200" rtl="0" eaLnBrk="1" latinLnBrk="0" hangingPunct="1">
+              <a:defRPr sz="1800" kern="1200">
+                <a:solidFill>
+                  <a:schemeClr val="tx1"/>
+                </a:solidFill>
+                <a:latin typeface="+mn-lt"/>
+                <a:ea typeface="+mn-ea"/>
+                <a:cs typeface="+mn-cs"/>
+              </a:defRPr>
+            </a:lvl8pPr>
+            <a:lvl9pPr marL="3657600" algn="l" defTabSz="457200" rtl="0" eaLnBrk="1" latinLnBrk="0" hangingPunct="1">
+              <a:defRPr sz="1800" kern="1200">
+                <a:solidFill>
+                  <a:schemeClr val="tx1"/>
+                </a:solidFill>
+                <a:latin typeface="+mn-lt"/>
+                <a:ea typeface="+mn-ea"/>
+                <a:cs typeface="+mn-cs"/>
+              </a:defRPr>
+            </a:lvl9pPr>
+          </a:lstStyle>
+          <a:p>
+            <a:pPr>
+              <a:defRPr/>
+            </a:pPr>
+            <a:r>
+              <a:rPr lang="ko-KR" altLang="en-US" dirty="0">
+                <a:latin typeface="피플폰트 Light" panose="020B0600000101010101" pitchFamily="50" charset="-127"/>
+                <a:ea typeface="피플폰트 Light" panose="020B0600000101010101" pitchFamily="50" charset="-127"/>
+              </a:rPr>
+              <a:t>사업명｜</a:t>
+            </a:r>
+            <a:r>
+              <a:rPr lang="en-US" altLang="ko-KR" dirty="0">
+                <a:latin typeface="피플폰트 Light" panose="020B0600000101010101" pitchFamily="50" charset="-127"/>
+                <a:ea typeface="피플폰트 Light" panose="020B0600000101010101" pitchFamily="50" charset="-127"/>
+              </a:rPr>
+              <a:t>  </a:t>
+            </a:r>
+            <a:fld id="{F3A57096-21A8-44ED-AF94-8A259496D2BE}" type="slidenum">
+              <a:rPr lang="en-US" altLang="en-US" smtClean="0">
+                <a:latin typeface="피플폰트 Light" panose="020B0600000101010101" pitchFamily="50" charset="-127"/>
+                <a:ea typeface="피플폰트 Light" panose="020B0600000101010101" pitchFamily="50" charset="-127"/>
+              </a:rPr>
+              <a:pPr>
+                <a:defRPr/>
+              </a:pPr>
+              <a:t>2</a:t>
+            </a:fld>
+            <a:endParaRPr lang="en-US" altLang="en-US" dirty="0">
+              <a:latin typeface="피플폰트 Light" panose="020B0600000101010101" pitchFamily="50" charset="-127"/>
+              <a:ea typeface="피플폰트 Light" panose="020B0600000101010101" pitchFamily="50" charset="-127"/>
             </a:endParaRPr>
           </a:p>
         </p:txBody>

--- a/templates/레이아웃.pptx
+++ b/templates/레이아웃.pptx
@@ -6965,7 +6965,7 @@
         </p:nvSpPr>
         <p:spPr>
           <a:xfrm>
-            <a:off x="1355775" y="5131821"/>
+            <a:off x="1355775" y="5177541"/>
             <a:ext cx="7175041" cy="1092412"/>
           </a:xfrm>
           <a:prstGeom prst="hexagon">
@@ -7076,7 +7076,7 @@
         </p:nvSpPr>
         <p:spPr>
           <a:xfrm>
-            <a:off x="1379372" y="3089079"/>
+            <a:off x="1379372" y="3125655"/>
             <a:ext cx="7175041" cy="1092412"/>
           </a:xfrm>
           <a:prstGeom prst="hexagon">
@@ -8181,7 +8181,7 @@
         </p:nvSpPr>
         <p:spPr>
           <a:xfrm>
-            <a:off x="1355774" y="1361853"/>
+            <a:off x="1355774" y="1398429"/>
             <a:ext cx="7175041" cy="1092412"/>
           </a:xfrm>
           <a:prstGeom prst="hexagon">

--- a/templates/레이아웃.pptx
+++ b/templates/레이아웃.pptx
@@ -5,7 +5,7 @@
     <p:sldMasterId id="2147483660" r:id="rId1"/>
   </p:sldMasterIdLst>
   <p:notesMasterIdLst>
-    <p:notesMasterId r:id="rId13"/>
+    <p:notesMasterId r:id="rId15"/>
   </p:notesMasterIdLst>
   <p:sldIdLst>
     <p:sldId id="262" r:id="rId2"/>
@@ -15,10 +15,12 @@
     <p:sldId id="271" r:id="rId6"/>
     <p:sldId id="303" r:id="rId7"/>
     <p:sldId id="304" r:id="rId8"/>
-    <p:sldId id="328" r:id="rId9"/>
-    <p:sldId id="506" r:id="rId10"/>
-    <p:sldId id="305" r:id="rId11"/>
-    <p:sldId id="312" r:id="rId12"/>
+    <p:sldId id="482" r:id="rId9"/>
+    <p:sldId id="328" r:id="rId10"/>
+    <p:sldId id="508" r:id="rId11"/>
+    <p:sldId id="506" r:id="rId12"/>
+    <p:sldId id="305" r:id="rId13"/>
+    <p:sldId id="312" r:id="rId14"/>
   </p:sldIdLst>
   <p:sldSz cx="9906000" cy="6858000" type="A4"/>
   <p:notesSz cx="6797675" cy="9926638"/>
@@ -221,7 +223,7 @@
           <a:p>
             <a:fld id="{E7FB0CBE-BEF5-4768-88B7-C8D33A226F82}" type="datetimeFigureOut">
               <a:rPr lang="ko-KR" altLang="en-US" smtClean="0"/>
-              <a:t>2026-07-23</a:t>
+              <a:t>2026-07-29</a:t>
             </a:fld>
             <a:endParaRPr lang="ko-KR" altLang="en-US"/>
           </a:p>
@@ -572,6 +574,90 @@
 </p:notes>
 </file>
 
+<file path=ppt/notesSlides/notesSlide2.xml><?xml version="1.0" encoding="utf-8"?>
+<p:notes xmlns:a="http://schemas.openxmlformats.org/drawingml/2006/main" xmlns:r="http://schemas.openxmlformats.org/officeDocument/2006/relationships" xmlns:p="http://schemas.openxmlformats.org/presentationml/2006/main">
+  <p:cSld>
+    <p:spTree>
+      <p:nvGrpSpPr>
+        <p:cNvPr id="1" name=""/>
+        <p:cNvGrpSpPr/>
+        <p:nvPr/>
+      </p:nvGrpSpPr>
+      <p:grpSpPr>
+        <a:xfrm>
+          <a:off x="0" y="0"/>
+          <a:ext cx="0" cy="0"/>
+          <a:chOff x="0" y="0"/>
+          <a:chExt cx="0" cy="0"/>
+        </a:xfrm>
+      </p:grpSpPr>
+      <p:sp>
+        <p:nvSpPr>
+          <p:cNvPr id="2" name="슬라이드 이미지 개체 틀 1"/>
+          <p:cNvSpPr>
+            <a:spLocks noGrp="1" noRot="1" noChangeAspect="1"/>
+          </p:cNvSpPr>
+          <p:nvPr>
+            <p:ph type="sldImg"/>
+          </p:nvPr>
+        </p:nvSpPr>
+        <p:spPr/>
+      </p:sp>
+      <p:sp>
+        <p:nvSpPr>
+          <p:cNvPr id="3" name="슬라이드 노트 개체 틀 2"/>
+          <p:cNvSpPr>
+            <a:spLocks noGrp="1"/>
+          </p:cNvSpPr>
+          <p:nvPr>
+            <p:ph type="body" idx="1"/>
+          </p:nvPr>
+        </p:nvSpPr>
+        <p:spPr/>
+        <p:txBody>
+          <a:bodyPr/>
+          <a:lstStyle/>
+          <a:p>
+            <a:endParaRPr lang="ko-KR" altLang="en-US" dirty="0"/>
+          </a:p>
+        </p:txBody>
+      </p:sp>
+      <p:sp>
+        <p:nvSpPr>
+          <p:cNvPr id="4" name="슬라이드 번호 개체 틀 3"/>
+          <p:cNvSpPr>
+            <a:spLocks noGrp="1"/>
+          </p:cNvSpPr>
+          <p:nvPr>
+            <p:ph type="sldNum" sz="quarter" idx="5"/>
+          </p:nvPr>
+        </p:nvSpPr>
+        <p:spPr/>
+        <p:txBody>
+          <a:bodyPr/>
+          <a:lstStyle/>
+          <a:p>
+            <a:fld id="{F566EBDD-C751-45FE-A110-B7B11DBE4945}" type="slidenum">
+              <a:rPr lang="ko-KR" altLang="en-US" smtClean="0"/>
+              <a:t>8</a:t>
+            </a:fld>
+            <a:endParaRPr lang="ko-KR" altLang="en-US"/>
+          </a:p>
+        </p:txBody>
+      </p:sp>
+    </p:spTree>
+    <p:extLst>
+      <p:ext uri="{BB962C8B-B14F-4D97-AF65-F5344CB8AC3E}">
+        <p14:creationId xmlns:p14="http://schemas.microsoft.com/office/powerpoint/2010/main" val="3723332631"/>
+      </p:ext>
+    </p:extLst>
+  </p:cSld>
+  <p:clrMapOvr>
+    <a:masterClrMapping/>
+  </p:clrMapOvr>
+</p:notes>
+</file>
+
 <file path=ppt/slideLayouts/slideLayout1.xml><?xml version="1.0" encoding="utf-8"?>
 <p:sldLayout xmlns:a="http://schemas.openxmlformats.org/drawingml/2006/main" xmlns:r="http://schemas.openxmlformats.org/officeDocument/2006/relationships" xmlns:p="http://schemas.openxmlformats.org/presentationml/2006/main" type="title" preserve="1">
   <p:cSld name="제목 슬라이드">
@@ -703,7 +789,7 @@
           <a:p>
             <a:fld id="{62E3A85F-5A81-4A2C-ADB7-CB9A7B252CB6}" type="datetimeFigureOut">
               <a:rPr lang="ko-KR" altLang="en-US" smtClean="0"/>
-              <a:t>2026-07-23</a:t>
+              <a:t>2026-07-29</a:t>
             </a:fld>
             <a:endParaRPr lang="ko-KR" altLang="en-US"/>
           </a:p>
@@ -873,7 +959,7 @@
           <a:p>
             <a:fld id="{62E3A85F-5A81-4A2C-ADB7-CB9A7B252CB6}" type="datetimeFigureOut">
               <a:rPr lang="ko-KR" altLang="en-US" smtClean="0"/>
-              <a:t>2026-07-23</a:t>
+              <a:t>2026-07-29</a:t>
             </a:fld>
             <a:endParaRPr lang="ko-KR" altLang="en-US"/>
           </a:p>
@@ -1053,7 +1139,7 @@
           <a:p>
             <a:fld id="{62E3A85F-5A81-4A2C-ADB7-CB9A7B252CB6}" type="datetimeFigureOut">
               <a:rPr lang="ko-KR" altLang="en-US" smtClean="0"/>
-              <a:t>2026-07-23</a:t>
+              <a:t>2026-07-29</a:t>
             </a:fld>
             <a:endParaRPr lang="ko-KR" altLang="en-US"/>
           </a:p>
@@ -1641,7 +1727,7 @@
           <a:p>
             <a:fld id="{62E3A85F-5A81-4A2C-ADB7-CB9A7B252CB6}" type="datetimeFigureOut">
               <a:rPr lang="ko-KR" altLang="en-US" smtClean="0"/>
-              <a:t>2026-07-23</a:t>
+              <a:t>2026-07-29</a:t>
             </a:fld>
             <a:endParaRPr lang="ko-KR" altLang="en-US"/>
           </a:p>
@@ -1885,7 +1971,7 @@
           <a:p>
             <a:fld id="{62E3A85F-5A81-4A2C-ADB7-CB9A7B252CB6}" type="datetimeFigureOut">
               <a:rPr lang="ko-KR" altLang="en-US" smtClean="0"/>
-              <a:t>2026-07-23</a:t>
+              <a:t>2026-07-29</a:t>
             </a:fld>
             <a:endParaRPr lang="ko-KR" altLang="en-US"/>
           </a:p>
@@ -2117,7 +2203,7 @@
           <a:p>
             <a:fld id="{62E3A85F-5A81-4A2C-ADB7-CB9A7B252CB6}" type="datetimeFigureOut">
               <a:rPr lang="ko-KR" altLang="en-US" smtClean="0"/>
-              <a:t>2026-07-23</a:t>
+              <a:t>2026-07-29</a:t>
             </a:fld>
             <a:endParaRPr lang="ko-KR" altLang="en-US"/>
           </a:p>
@@ -2484,7 +2570,7 @@
           <a:p>
             <a:fld id="{62E3A85F-5A81-4A2C-ADB7-CB9A7B252CB6}" type="datetimeFigureOut">
               <a:rPr lang="ko-KR" altLang="en-US" smtClean="0"/>
-              <a:t>2026-07-23</a:t>
+              <a:t>2026-07-29</a:t>
             </a:fld>
             <a:endParaRPr lang="ko-KR" altLang="en-US"/>
           </a:p>
@@ -2602,7 +2688,7 @@
           <a:p>
             <a:fld id="{62E3A85F-5A81-4A2C-ADB7-CB9A7B252CB6}" type="datetimeFigureOut">
               <a:rPr lang="ko-KR" altLang="en-US" smtClean="0"/>
-              <a:t>2026-07-23</a:t>
+              <a:t>2026-07-29</a:t>
             </a:fld>
             <a:endParaRPr lang="ko-KR" altLang="en-US"/>
           </a:p>
@@ -2697,7 +2783,7 @@
           <a:p>
             <a:fld id="{62E3A85F-5A81-4A2C-ADB7-CB9A7B252CB6}" type="datetimeFigureOut">
               <a:rPr lang="ko-KR" altLang="en-US" smtClean="0"/>
-              <a:t>2026-07-23</a:t>
+              <a:t>2026-07-29</a:t>
             </a:fld>
             <a:endParaRPr lang="ko-KR" altLang="en-US"/>
           </a:p>
@@ -2974,7 +3060,7 @@
           <a:p>
             <a:fld id="{62E3A85F-5A81-4A2C-ADB7-CB9A7B252CB6}" type="datetimeFigureOut">
               <a:rPr lang="ko-KR" altLang="en-US" smtClean="0"/>
-              <a:t>2026-07-23</a:t>
+              <a:t>2026-07-29</a:t>
             </a:fld>
             <a:endParaRPr lang="ko-KR" altLang="en-US"/>
           </a:p>
@@ -3231,7 +3317,7 @@
           <a:p>
             <a:fld id="{62E3A85F-5A81-4A2C-ADB7-CB9A7B252CB6}" type="datetimeFigureOut">
               <a:rPr lang="ko-KR" altLang="en-US" smtClean="0"/>
-              <a:t>2026-07-23</a:t>
+              <a:t>2026-07-29</a:t>
             </a:fld>
             <a:endParaRPr lang="ko-KR" altLang="en-US"/>
           </a:p>
@@ -3444,7 +3530,7 @@
           <a:p>
             <a:fld id="{62E3A85F-5A81-4A2C-ADB7-CB9A7B252CB6}" type="datetimeFigureOut">
               <a:rPr lang="ko-KR" altLang="en-US" smtClean="0"/>
-              <a:t>2026-07-23</a:t>
+              <a:t>2026-07-29</a:t>
             </a:fld>
             <a:endParaRPr lang="ko-KR" altLang="en-US"/>
           </a:p>
@@ -5096,6 +5182,11 @@
         </p:txBody>
       </p:sp>
     </p:spTree>
+    <p:extLst>
+      <p:ext uri="{BB962C8B-B14F-4D97-AF65-F5344CB8AC3E}">
+        <p14:creationId xmlns:p14="http://schemas.microsoft.com/office/powerpoint/2010/main" val="1317430851"/>
+      </p:ext>
+    </p:extLst>
   </p:cSld>
   <p:clrMapOvr>
     <a:masterClrMapping/>
@@ -5105,6 +5196,1019 @@
 </file>
 
 <file path=ppt/slides/slide11.xml><?xml version="1.0" encoding="utf-8"?>
+<p:sld xmlns:a="http://schemas.openxmlformats.org/drawingml/2006/main" xmlns:r="http://schemas.openxmlformats.org/officeDocument/2006/relationships" xmlns:p="http://schemas.openxmlformats.org/presentationml/2006/main">
+  <p:cSld>
+    <p:spTree>
+      <p:nvGrpSpPr>
+        <p:cNvPr id="1" name=""/>
+        <p:cNvGrpSpPr/>
+        <p:nvPr/>
+      </p:nvGrpSpPr>
+      <p:grpSpPr>
+        <a:xfrm>
+          <a:off x="0" y="0"/>
+          <a:ext cx="0" cy="0"/>
+          <a:chOff x="0" y="0"/>
+          <a:chExt cx="0" cy="0"/>
+        </a:xfrm>
+      </p:grpSpPr>
+      <p:pic>
+        <p:nvPicPr>
+          <p:cNvPr id="2" name="그림 1">
+            <a:extLst>
+              <a:ext uri="{FF2B5EF4-FFF2-40B4-BE49-F238E27FC236}">
+                <a16:creationId xmlns:a16="http://schemas.microsoft.com/office/drawing/2014/main" id="{5B4C0DED-FC0A-4276-BB06-0290D081D971}"/>
+              </a:ext>
+            </a:extLst>
+          </p:cNvPr>
+          <p:cNvPicPr>
+            <a:picLocks noChangeAspect="1"/>
+          </p:cNvPicPr>
+          <p:nvPr/>
+        </p:nvPicPr>
+        <p:blipFill rotWithShape="1">
+          <a:blip r:embed="rId2"/>
+          <a:srcRect l="34124" t="35068" r="5643" b="19413"/>
+          <a:stretch/>
+        </p:blipFill>
+        <p:spPr>
+          <a:xfrm>
+            <a:off x="-1" y="4136207"/>
+            <a:ext cx="9906001" cy="2463967"/>
+          </a:xfrm>
+          <a:prstGeom prst="rect">
+            <a:avLst/>
+          </a:prstGeom>
+        </p:spPr>
+      </p:pic>
+      <p:pic>
+        <p:nvPicPr>
+          <p:cNvPr id="17" name="그림 16">
+            <a:extLst>
+              <a:ext uri="{FF2B5EF4-FFF2-40B4-BE49-F238E27FC236}">
+                <a16:creationId xmlns:a16="http://schemas.microsoft.com/office/drawing/2014/main" id="{1DD57231-2B6A-43DF-9ED0-FB2FB86EF23C}"/>
+              </a:ext>
+            </a:extLst>
+          </p:cNvPr>
+          <p:cNvPicPr>
+            <a:picLocks noChangeAspect="1"/>
+          </p:cNvPicPr>
+          <p:nvPr/>
+        </p:nvPicPr>
+        <p:blipFill>
+          <a:blip r:embed="rId3"/>
+          <a:stretch>
+            <a:fillRect/>
+          </a:stretch>
+        </p:blipFill>
+        <p:spPr>
+          <a:xfrm>
+            <a:off x="342423" y="257826"/>
+            <a:ext cx="2665584" cy="213076"/>
+          </a:xfrm>
+          <a:prstGeom prst="rect">
+            <a:avLst/>
+          </a:prstGeom>
+        </p:spPr>
+      </p:pic>
+      <p:sp>
+        <p:nvSpPr>
+          <p:cNvPr id="25" name="타원 24">
+            <a:extLst>
+              <a:ext uri="{FF2B5EF4-FFF2-40B4-BE49-F238E27FC236}">
+                <a16:creationId xmlns:a16="http://schemas.microsoft.com/office/drawing/2014/main" id="{892442E4-BA68-419D-944D-0E981AEF998B}"/>
+              </a:ext>
+            </a:extLst>
+          </p:cNvPr>
+          <p:cNvSpPr/>
+          <p:nvPr/>
+        </p:nvSpPr>
+        <p:spPr>
+          <a:xfrm>
+            <a:off x="6256041" y="2960411"/>
+            <a:ext cx="3132000" cy="3132000"/>
+          </a:xfrm>
+          <a:prstGeom prst="ellipse">
+            <a:avLst/>
+          </a:prstGeom>
+          <a:solidFill>
+            <a:srgbClr val="2E75B6"/>
+          </a:solidFill>
+          <a:ln>
+            <a:noFill/>
+          </a:ln>
+        </p:spPr>
+        <p:style>
+          <a:lnRef idx="2">
+            <a:schemeClr val="accent1">
+              <a:shade val="50000"/>
+            </a:schemeClr>
+          </a:lnRef>
+          <a:fillRef idx="1">
+            <a:schemeClr val="accent1"/>
+          </a:fillRef>
+          <a:effectRef idx="0">
+            <a:schemeClr val="accent1"/>
+          </a:effectRef>
+          <a:fontRef idx="minor">
+            <a:schemeClr val="lt1"/>
+          </a:fontRef>
+        </p:style>
+        <p:txBody>
+          <a:bodyPr rtlCol="0" anchor="ctr"/>
+          <a:lstStyle/>
+          <a:p>
+            <a:pPr algn="ctr"/>
+            <a:endParaRPr lang="ko-KR" altLang="en-US" dirty="0"/>
+          </a:p>
+        </p:txBody>
+      </p:sp>
+      <p:sp>
+        <p:nvSpPr>
+          <p:cNvPr id="26" name="타원 25">
+            <a:extLst>
+              <a:ext uri="{FF2B5EF4-FFF2-40B4-BE49-F238E27FC236}">
+                <a16:creationId xmlns:a16="http://schemas.microsoft.com/office/drawing/2014/main" id="{EB56E101-BCBD-40A4-99F5-D2FDC42CA5A3}"/>
+              </a:ext>
+            </a:extLst>
+          </p:cNvPr>
+          <p:cNvSpPr/>
+          <p:nvPr/>
+        </p:nvSpPr>
+        <p:spPr>
+          <a:xfrm>
+            <a:off x="6479253" y="3164844"/>
+            <a:ext cx="2680631" cy="2723133"/>
+          </a:xfrm>
+          <a:prstGeom prst="ellipse">
+            <a:avLst/>
+          </a:prstGeom>
+          <a:solidFill>
+            <a:srgbClr val="92D050"/>
+          </a:solidFill>
+          <a:ln w="76200">
+            <a:solidFill>
+              <a:schemeClr val="bg1"/>
+            </a:solidFill>
+          </a:ln>
+        </p:spPr>
+        <p:style>
+          <a:lnRef idx="2">
+            <a:schemeClr val="accent1">
+              <a:shade val="50000"/>
+            </a:schemeClr>
+          </a:lnRef>
+          <a:fillRef idx="1">
+            <a:schemeClr val="accent1"/>
+          </a:fillRef>
+          <a:effectRef idx="0">
+            <a:schemeClr val="accent1"/>
+          </a:effectRef>
+          <a:fontRef idx="minor">
+            <a:schemeClr val="lt1"/>
+          </a:fontRef>
+        </p:style>
+        <p:txBody>
+          <a:bodyPr rtlCol="0" anchor="ctr"/>
+          <a:lstStyle/>
+          <a:p>
+            <a:pPr algn="ctr"/>
+            <a:endParaRPr lang="ko-KR" altLang="en-US"/>
+          </a:p>
+        </p:txBody>
+      </p:sp>
+      <p:sp>
+        <p:nvSpPr>
+          <p:cNvPr id="27" name="타원 26">
+            <a:extLst>
+              <a:ext uri="{FF2B5EF4-FFF2-40B4-BE49-F238E27FC236}">
+                <a16:creationId xmlns:a16="http://schemas.microsoft.com/office/drawing/2014/main" id="{3A3FD978-F67F-4F41-A996-C9D3FB06FE38}"/>
+              </a:ext>
+            </a:extLst>
+          </p:cNvPr>
+          <p:cNvSpPr/>
+          <p:nvPr/>
+        </p:nvSpPr>
+        <p:spPr>
+          <a:xfrm>
+            <a:off x="5877822" y="264438"/>
+            <a:ext cx="3492000" cy="3492000"/>
+          </a:xfrm>
+          <a:prstGeom prst="ellipse">
+            <a:avLst/>
+          </a:prstGeom>
+          <a:solidFill>
+            <a:srgbClr val="2E75B6"/>
+          </a:solidFill>
+          <a:ln>
+            <a:noFill/>
+          </a:ln>
+        </p:spPr>
+        <p:style>
+          <a:lnRef idx="2">
+            <a:schemeClr val="accent1">
+              <a:shade val="50000"/>
+            </a:schemeClr>
+          </a:lnRef>
+          <a:fillRef idx="1">
+            <a:schemeClr val="accent1"/>
+          </a:fillRef>
+          <a:effectRef idx="0">
+            <a:schemeClr val="accent1"/>
+          </a:effectRef>
+          <a:fontRef idx="minor">
+            <a:schemeClr val="lt1"/>
+          </a:fontRef>
+        </p:style>
+        <p:txBody>
+          <a:bodyPr rtlCol="0" anchor="ctr"/>
+          <a:lstStyle/>
+          <a:p>
+            <a:pPr algn="ctr"/>
+            <a:endParaRPr lang="ko-KR" altLang="en-US" dirty="0"/>
+          </a:p>
+        </p:txBody>
+      </p:sp>
+      <p:sp>
+        <p:nvSpPr>
+          <p:cNvPr id="28" name="타원 27">
+            <a:extLst>
+              <a:ext uri="{FF2B5EF4-FFF2-40B4-BE49-F238E27FC236}">
+                <a16:creationId xmlns:a16="http://schemas.microsoft.com/office/drawing/2014/main" id="{7442E925-D1CF-4E49-8E1A-6BE23EF6B1EB}"/>
+              </a:ext>
+            </a:extLst>
+          </p:cNvPr>
+          <p:cNvSpPr/>
+          <p:nvPr/>
+        </p:nvSpPr>
+        <p:spPr>
+          <a:xfrm>
+            <a:off x="6146441" y="495050"/>
+            <a:ext cx="2959819" cy="3045868"/>
+          </a:xfrm>
+          <a:prstGeom prst="ellipse">
+            <a:avLst/>
+          </a:prstGeom>
+          <a:solidFill>
+            <a:srgbClr val="92D050"/>
+          </a:solidFill>
+          <a:ln w="76200">
+            <a:solidFill>
+              <a:schemeClr val="bg1"/>
+            </a:solidFill>
+          </a:ln>
+        </p:spPr>
+        <p:style>
+          <a:lnRef idx="2">
+            <a:schemeClr val="accent1">
+              <a:shade val="50000"/>
+            </a:schemeClr>
+          </a:lnRef>
+          <a:fillRef idx="1">
+            <a:schemeClr val="accent1"/>
+          </a:fillRef>
+          <a:effectRef idx="0">
+            <a:schemeClr val="accent1"/>
+          </a:effectRef>
+          <a:fontRef idx="minor">
+            <a:schemeClr val="lt1"/>
+          </a:fontRef>
+        </p:style>
+        <p:txBody>
+          <a:bodyPr rtlCol="0" anchor="ctr"/>
+          <a:lstStyle/>
+          <a:p>
+            <a:pPr algn="ctr"/>
+            <a:endParaRPr lang="ko-KR" altLang="en-US"/>
+          </a:p>
+        </p:txBody>
+      </p:sp>
+      <p:sp>
+        <p:nvSpPr>
+          <p:cNvPr id="29" name="타원 28">
+            <a:extLst>
+              <a:ext uri="{FF2B5EF4-FFF2-40B4-BE49-F238E27FC236}">
+                <a16:creationId xmlns:a16="http://schemas.microsoft.com/office/drawing/2014/main" id="{A9DF0422-9C1C-4D6E-84D9-B33AD0834E5C}"/>
+              </a:ext>
+            </a:extLst>
+          </p:cNvPr>
+          <p:cNvSpPr/>
+          <p:nvPr/>
+        </p:nvSpPr>
+        <p:spPr>
+          <a:xfrm>
+            <a:off x="4893066" y="2222958"/>
+            <a:ext cx="2448000" cy="2448000"/>
+          </a:xfrm>
+          <a:prstGeom prst="ellipse">
+            <a:avLst/>
+          </a:prstGeom>
+          <a:solidFill>
+            <a:srgbClr val="2E75B6"/>
+          </a:solidFill>
+          <a:ln>
+            <a:noFill/>
+          </a:ln>
+        </p:spPr>
+        <p:style>
+          <a:lnRef idx="2">
+            <a:schemeClr val="accent1">
+              <a:shade val="50000"/>
+            </a:schemeClr>
+          </a:lnRef>
+          <a:fillRef idx="1">
+            <a:schemeClr val="accent1"/>
+          </a:fillRef>
+          <a:effectRef idx="0">
+            <a:schemeClr val="accent1"/>
+          </a:effectRef>
+          <a:fontRef idx="minor">
+            <a:schemeClr val="lt1"/>
+          </a:fontRef>
+        </p:style>
+        <p:txBody>
+          <a:bodyPr rtlCol="0" anchor="ctr"/>
+          <a:lstStyle/>
+          <a:p>
+            <a:pPr algn="ctr"/>
+            <a:endParaRPr lang="ko-KR" altLang="en-US" dirty="0"/>
+          </a:p>
+        </p:txBody>
+      </p:sp>
+      <p:sp>
+        <p:nvSpPr>
+          <p:cNvPr id="30" name="타원 29">
+            <a:extLst>
+              <a:ext uri="{FF2B5EF4-FFF2-40B4-BE49-F238E27FC236}">
+                <a16:creationId xmlns:a16="http://schemas.microsoft.com/office/drawing/2014/main" id="{F801DFB0-65D4-4FF3-A4CD-523E0B863A92}"/>
+              </a:ext>
+            </a:extLst>
+          </p:cNvPr>
+          <p:cNvSpPr/>
+          <p:nvPr/>
+        </p:nvSpPr>
+        <p:spPr>
+          <a:xfrm>
+            <a:off x="5091944" y="2395729"/>
+            <a:ext cx="2072556" cy="2085592"/>
+          </a:xfrm>
+          <a:prstGeom prst="ellipse">
+            <a:avLst/>
+          </a:prstGeom>
+          <a:solidFill>
+            <a:srgbClr val="92D050"/>
+          </a:solidFill>
+          <a:ln w="76200">
+            <a:solidFill>
+              <a:schemeClr val="bg1"/>
+            </a:solidFill>
+          </a:ln>
+        </p:spPr>
+        <p:style>
+          <a:lnRef idx="2">
+            <a:schemeClr val="accent1">
+              <a:shade val="50000"/>
+            </a:schemeClr>
+          </a:lnRef>
+          <a:fillRef idx="1">
+            <a:schemeClr val="accent1"/>
+          </a:fillRef>
+          <a:effectRef idx="0">
+            <a:schemeClr val="accent1"/>
+          </a:effectRef>
+          <a:fontRef idx="minor">
+            <a:schemeClr val="lt1"/>
+          </a:fontRef>
+        </p:style>
+        <p:txBody>
+          <a:bodyPr rtlCol="0" anchor="ctr"/>
+          <a:lstStyle/>
+          <a:p>
+            <a:pPr algn="ctr"/>
+            <a:endParaRPr lang="ko-KR" altLang="en-US"/>
+          </a:p>
+        </p:txBody>
+      </p:sp>
+      <p:grpSp>
+        <p:nvGrpSpPr>
+          <p:cNvPr id="32" name="그룹 31">
+            <a:extLst>
+              <a:ext uri="{FF2B5EF4-FFF2-40B4-BE49-F238E27FC236}">
+                <a16:creationId xmlns:a16="http://schemas.microsoft.com/office/drawing/2014/main" id="{25F2CF36-38A3-4A79-B832-57FCCC1929A4}"/>
+              </a:ext>
+            </a:extLst>
+          </p:cNvPr>
+          <p:cNvGrpSpPr/>
+          <p:nvPr/>
+        </p:nvGrpSpPr>
+        <p:grpSpPr>
+          <a:xfrm>
+            <a:off x="1271800" y="3565688"/>
+            <a:ext cx="1230128" cy="338554"/>
+            <a:chOff x="1450226" y="3100952"/>
+            <a:chExt cx="1230128" cy="338554"/>
+          </a:xfrm>
+        </p:grpSpPr>
+        <p:sp>
+          <p:nvSpPr>
+            <p:cNvPr id="33" name="TextBox 32">
+              <a:extLst>
+                <a:ext uri="{FF2B5EF4-FFF2-40B4-BE49-F238E27FC236}">
+                  <a16:creationId xmlns:a16="http://schemas.microsoft.com/office/drawing/2014/main" id="{78E28E92-72BA-4563-8F91-92E4C2566D9F}"/>
+                </a:ext>
+              </a:extLst>
+            </p:cNvPr>
+            <p:cNvSpPr txBox="1"/>
+            <p:nvPr/>
+          </p:nvSpPr>
+          <p:spPr>
+            <a:xfrm>
+              <a:off x="1952270" y="3100952"/>
+              <a:ext cx="728084" cy="338554"/>
+            </a:xfrm>
+            <a:prstGeom prst="rect">
+              <a:avLst/>
+            </a:prstGeom>
+            <a:noFill/>
+          </p:spPr>
+          <p:txBody>
+            <a:bodyPr wrap="none" rtlCol="0">
+              <a:spAutoFit/>
+            </a:bodyPr>
+            <a:lstStyle/>
+            <a:p>
+              <a:r>
+                <a:rPr lang="ko-KR" altLang="en-US" sz="1600" dirty="0">
+                  <a:latin typeface="피플폰트 Bold" panose="020B0600000101010101" pitchFamily="50" charset="-127"/>
+                  <a:ea typeface="피플폰트 Bold" panose="020B0600000101010101" pitchFamily="50" charset="-127"/>
+                </a:rPr>
+                <a:t>소제목</a:t>
+              </a:r>
+            </a:p>
+          </p:txBody>
+        </p:sp>
+        <p:sp>
+          <p:nvSpPr>
+            <p:cNvPr id="34" name="TextBox 33">
+              <a:extLst>
+                <a:ext uri="{FF2B5EF4-FFF2-40B4-BE49-F238E27FC236}">
+                  <a16:creationId xmlns:a16="http://schemas.microsoft.com/office/drawing/2014/main" id="{3899673F-CDEE-4E43-92EC-AB5BC385E734}"/>
+                </a:ext>
+              </a:extLst>
+            </p:cNvPr>
+            <p:cNvSpPr txBox="1"/>
+            <p:nvPr/>
+          </p:nvSpPr>
+          <p:spPr>
+            <a:xfrm>
+              <a:off x="1450226" y="3100952"/>
+              <a:ext cx="444609" cy="338554"/>
+            </a:xfrm>
+            <a:prstGeom prst="rect">
+              <a:avLst/>
+            </a:prstGeom>
+            <a:noFill/>
+          </p:spPr>
+          <p:txBody>
+            <a:bodyPr wrap="none" rtlCol="0">
+              <a:spAutoFit/>
+            </a:bodyPr>
+            <a:lstStyle/>
+            <a:p>
+              <a:r>
+                <a:rPr lang="en-US" altLang="ko-KR" sz="1600" dirty="0">
+                  <a:latin typeface="피플폰트 Bold" panose="020B0600000101010101" pitchFamily="50" charset="-127"/>
+                  <a:ea typeface="피플폰트 Bold" panose="020B0600000101010101" pitchFamily="50" charset="-127"/>
+                </a:rPr>
+                <a:t>4.1</a:t>
+              </a:r>
+            </a:p>
+          </p:txBody>
+        </p:sp>
+      </p:grpSp>
+      <p:sp>
+        <p:nvSpPr>
+          <p:cNvPr id="31" name="TextBox 30">
+            <a:extLst>
+              <a:ext uri="{FF2B5EF4-FFF2-40B4-BE49-F238E27FC236}">
+                <a16:creationId xmlns:a16="http://schemas.microsoft.com/office/drawing/2014/main" id="{A0C7AD87-666B-4DF0-B421-61A74BB13515}"/>
+              </a:ext>
+            </a:extLst>
+          </p:cNvPr>
+          <p:cNvSpPr txBox="1"/>
+          <p:nvPr/>
+        </p:nvSpPr>
+        <p:spPr>
+          <a:xfrm>
+            <a:off x="1169067" y="2953758"/>
+            <a:ext cx="3614399" cy="584775"/>
+          </a:xfrm>
+          <a:prstGeom prst="rect">
+            <a:avLst/>
+          </a:prstGeom>
+          <a:noFill/>
+        </p:spPr>
+        <p:txBody>
+          <a:bodyPr wrap="square" anchor="ctr">
+            <a:spAutoFit/>
+          </a:bodyPr>
+          <a:lstStyle/>
+          <a:p>
+            <a:pPr lvl="0">
+              <a:defRPr/>
+            </a:pPr>
+            <a:r>
+              <a:rPr lang="en-US" altLang="ko-KR" sz="3200" dirty="0">
+                <a:solidFill>
+                  <a:schemeClr val="accent1">
+                    <a:lumMod val="75000"/>
+                  </a:schemeClr>
+                </a:solidFill>
+                <a:latin typeface="피플폰트 Bold" panose="020B0600000101010101" pitchFamily="50" charset="-127"/>
+                <a:ea typeface="피플폰트 Bold" panose="020B0600000101010101" pitchFamily="50" charset="-127"/>
+              </a:rPr>
+              <a:t>04  Appendix</a:t>
+            </a:r>
+            <a:endParaRPr lang="ko-KR" altLang="en-US" sz="3200" dirty="0">
+              <a:solidFill>
+                <a:schemeClr val="accent1">
+                  <a:lumMod val="75000"/>
+                </a:schemeClr>
+              </a:solidFill>
+              <a:latin typeface="피플폰트 Bold" panose="020B0600000101010101" pitchFamily="50" charset="-127"/>
+              <a:ea typeface="피플폰트 Bold" panose="020B0600000101010101" pitchFamily="50" charset="-127"/>
+            </a:endParaRPr>
+          </a:p>
+        </p:txBody>
+      </p:sp>
+    </p:spTree>
+    <p:extLst>
+      <p:ext uri="{BB962C8B-B14F-4D97-AF65-F5344CB8AC3E}">
+        <p14:creationId xmlns:p14="http://schemas.microsoft.com/office/powerpoint/2010/main" val="217085347"/>
+      </p:ext>
+    </p:extLst>
+  </p:cSld>
+  <p:clrMapOvr>
+    <a:masterClrMapping/>
+  </p:clrMapOvr>
+</p:sld>
+</file>
+
+<file path=ppt/slides/slide12.xml><?xml version="1.0" encoding="utf-8"?>
+<p:sld xmlns:a="http://schemas.openxmlformats.org/drawingml/2006/main" xmlns:r="http://schemas.openxmlformats.org/officeDocument/2006/relationships" xmlns:p="http://schemas.openxmlformats.org/presentationml/2006/main">
+  <p:cSld>
+    <p:spTree>
+      <p:nvGrpSpPr>
+        <p:cNvPr id="1" name=""/>
+        <p:cNvGrpSpPr/>
+        <p:nvPr/>
+      </p:nvGrpSpPr>
+      <p:grpSpPr>
+        <a:xfrm>
+          <a:off x="0" y="0"/>
+          <a:ext cx="0" cy="0"/>
+          <a:chOff x="0" y="0"/>
+          <a:chExt cx="0" cy="0"/>
+        </a:xfrm>
+      </p:grpSpPr>
+      <p:sp>
+        <p:nvSpPr>
+          <p:cNvPr id="4" name="텍스트 개체 틀 3"/>
+          <p:cNvSpPr>
+            <a:spLocks noGrp="1"/>
+          </p:cNvSpPr>
+          <p:nvPr>
+            <p:ph type="body" sz="quarter" idx="10"/>
+          </p:nvPr>
+        </p:nvSpPr>
+        <p:spPr/>
+        <p:txBody>
+          <a:bodyPr/>
+          <a:lstStyle/>
+          <a:p>
+            <a:pPr lvl="0">
+              <a:defRPr/>
+            </a:pPr>
+            <a:r>
+              <a:rPr lang="ko-KR" altLang="en-US" dirty="0">
+                <a:latin typeface="피플폰트 Bold" panose="020B0600000101010101" pitchFamily="50" charset="-127"/>
+                <a:ea typeface="피플폰트 Bold" panose="020B0600000101010101" pitchFamily="50" charset="-127"/>
+              </a:rPr>
+              <a:t>제목</a:t>
+            </a:r>
+          </a:p>
+        </p:txBody>
+      </p:sp>
+      <p:sp>
+        <p:nvSpPr>
+          <p:cNvPr id="2" name="텍스트 개체 틀 4">
+            <a:extLst>
+              <a:ext uri="{FF2B5EF4-FFF2-40B4-BE49-F238E27FC236}">
+                <a16:creationId xmlns:a16="http://schemas.microsoft.com/office/drawing/2014/main" id="{10D206EE-4599-9CC4-A08C-CA49006EA536}"/>
+              </a:ext>
+            </a:extLst>
+          </p:cNvPr>
+          <p:cNvSpPr>
+            <a:spLocks noGrp="1"/>
+          </p:cNvSpPr>
+          <p:nvPr>
+            <p:ph type="body" sz="quarter" idx="11"/>
+          </p:nvPr>
+        </p:nvSpPr>
+        <p:spPr/>
+        <p:txBody>
+          <a:bodyPr/>
+          <a:lstStyle/>
+          <a:p>
+            <a:r>
+              <a:rPr lang="ko-KR" altLang="en-US" dirty="0">
+                <a:latin typeface="피플폰트 Bold" panose="020B0600000101010101" pitchFamily="50" charset="-127"/>
+                <a:ea typeface="피플폰트 Bold" panose="020B0600000101010101" pitchFamily="50" charset="-127"/>
+              </a:rPr>
+              <a:t>소제목</a:t>
+            </a:r>
+          </a:p>
+        </p:txBody>
+      </p:sp>
+      <p:sp>
+        <p:nvSpPr>
+          <p:cNvPr id="18" name="텍스트 개체 틀 2">
+            <a:extLst>
+              <a:ext uri="{FF2B5EF4-FFF2-40B4-BE49-F238E27FC236}">
+                <a16:creationId xmlns:a16="http://schemas.microsoft.com/office/drawing/2014/main" id="{E2A2AC6F-E152-4C5D-9AAC-4E8A0AA8A9CE}"/>
+              </a:ext>
+            </a:extLst>
+          </p:cNvPr>
+          <p:cNvSpPr txBox="1">
+            <a:spLocks/>
+          </p:cNvSpPr>
+          <p:nvPr/>
+        </p:nvSpPr>
+        <p:spPr>
+          <a:xfrm>
+            <a:off x="393698" y="823870"/>
+            <a:ext cx="9118602" cy="489117"/>
+          </a:xfrm>
+          <a:prstGeom prst="rect">
+            <a:avLst/>
+          </a:prstGeom>
+        </p:spPr>
+        <p:txBody>
+          <a:bodyPr vert="horz" lIns="91440" tIns="45720" rIns="91440" bIns="45720" rtlCol="0">
+            <a:noAutofit/>
+          </a:bodyPr>
+          <a:lstStyle>
+            <a:lvl1pPr marL="228600" indent="-228600" algn="l" defTabSz="914400" rtl="0" eaLnBrk="1" latinLnBrk="1" hangingPunct="1">
+              <a:lnSpc>
+                <a:spcPct val="90000"/>
+              </a:lnSpc>
+              <a:spcBef>
+                <a:spcPts val="1000"/>
+              </a:spcBef>
+              <a:buFont typeface="Arial" panose="020B0604020202020204" pitchFamily="34" charset="0"/>
+              <a:buChar char="•"/>
+              <a:defRPr sz="2800" kern="1200">
+                <a:solidFill>
+                  <a:schemeClr val="tx1"/>
+                </a:solidFill>
+                <a:latin typeface="+mn-lt"/>
+                <a:ea typeface="+mn-ea"/>
+                <a:cs typeface="+mn-cs"/>
+              </a:defRPr>
+            </a:lvl1pPr>
+            <a:lvl2pPr marL="685800" indent="-228600" algn="l" defTabSz="914400" rtl="0" eaLnBrk="1" latinLnBrk="1" hangingPunct="1">
+              <a:lnSpc>
+                <a:spcPct val="90000"/>
+              </a:lnSpc>
+              <a:spcBef>
+                <a:spcPts val="500"/>
+              </a:spcBef>
+              <a:buFont typeface="Arial" panose="020B0604020202020204" pitchFamily="34" charset="0"/>
+              <a:buChar char="•"/>
+              <a:defRPr sz="2400" kern="1200">
+                <a:solidFill>
+                  <a:schemeClr val="tx1"/>
+                </a:solidFill>
+                <a:latin typeface="+mn-lt"/>
+                <a:ea typeface="+mn-ea"/>
+                <a:cs typeface="+mn-cs"/>
+              </a:defRPr>
+            </a:lvl2pPr>
+            <a:lvl3pPr marL="1143000" indent="-228600" algn="l" defTabSz="914400" rtl="0" eaLnBrk="1" latinLnBrk="1" hangingPunct="1">
+              <a:lnSpc>
+                <a:spcPct val="90000"/>
+              </a:lnSpc>
+              <a:spcBef>
+                <a:spcPts val="500"/>
+              </a:spcBef>
+              <a:buFont typeface="Arial" panose="020B0604020202020204" pitchFamily="34" charset="0"/>
+              <a:buChar char="•"/>
+              <a:defRPr sz="2000" kern="1200">
+                <a:solidFill>
+                  <a:schemeClr val="tx1"/>
+                </a:solidFill>
+                <a:latin typeface="+mn-lt"/>
+                <a:ea typeface="+mn-ea"/>
+                <a:cs typeface="+mn-cs"/>
+              </a:defRPr>
+            </a:lvl3pPr>
+            <a:lvl4pPr marL="1600200" indent="-228600" algn="l" defTabSz="914400" rtl="0" eaLnBrk="1" latinLnBrk="1" hangingPunct="1">
+              <a:lnSpc>
+                <a:spcPct val="90000"/>
+              </a:lnSpc>
+              <a:spcBef>
+                <a:spcPts val="500"/>
+              </a:spcBef>
+              <a:buFont typeface="Arial" panose="020B0604020202020204" pitchFamily="34" charset="0"/>
+              <a:buChar char="•"/>
+              <a:defRPr sz="1800" kern="1200">
+                <a:solidFill>
+                  <a:schemeClr val="tx1"/>
+                </a:solidFill>
+                <a:latin typeface="+mn-lt"/>
+                <a:ea typeface="+mn-ea"/>
+                <a:cs typeface="+mn-cs"/>
+              </a:defRPr>
+            </a:lvl4pPr>
+            <a:lvl5pPr marL="2057400" indent="-228600" algn="l" defTabSz="914400" rtl="0" eaLnBrk="1" latinLnBrk="1" hangingPunct="1">
+              <a:lnSpc>
+                <a:spcPct val="90000"/>
+              </a:lnSpc>
+              <a:spcBef>
+                <a:spcPts val="500"/>
+              </a:spcBef>
+              <a:buFont typeface="Arial" panose="020B0604020202020204" pitchFamily="34" charset="0"/>
+              <a:buChar char="•"/>
+              <a:defRPr sz="1800" kern="1200">
+                <a:solidFill>
+                  <a:schemeClr val="tx1"/>
+                </a:solidFill>
+                <a:latin typeface="+mn-lt"/>
+                <a:ea typeface="+mn-ea"/>
+                <a:cs typeface="+mn-cs"/>
+              </a:defRPr>
+            </a:lvl5pPr>
+            <a:lvl6pPr marL="2514600" indent="-228600" algn="l" defTabSz="914400" rtl="0" eaLnBrk="1" latinLnBrk="1" hangingPunct="1">
+              <a:lnSpc>
+                <a:spcPct val="90000"/>
+              </a:lnSpc>
+              <a:spcBef>
+                <a:spcPts val="500"/>
+              </a:spcBef>
+              <a:buFont typeface="Arial" panose="020B0604020202020204" pitchFamily="34" charset="0"/>
+              <a:buChar char="•"/>
+              <a:defRPr sz="1800" kern="1200">
+                <a:solidFill>
+                  <a:schemeClr val="tx1"/>
+                </a:solidFill>
+                <a:latin typeface="+mn-lt"/>
+                <a:ea typeface="+mn-ea"/>
+                <a:cs typeface="+mn-cs"/>
+              </a:defRPr>
+            </a:lvl6pPr>
+            <a:lvl7pPr marL="2971800" indent="-228600" algn="l" defTabSz="914400" rtl="0" eaLnBrk="1" latinLnBrk="1" hangingPunct="1">
+              <a:lnSpc>
+                <a:spcPct val="90000"/>
+              </a:lnSpc>
+              <a:spcBef>
+                <a:spcPts val="500"/>
+              </a:spcBef>
+              <a:buFont typeface="Arial" panose="020B0604020202020204" pitchFamily="34" charset="0"/>
+              <a:buChar char="•"/>
+              <a:defRPr sz="1800" kern="1200">
+                <a:solidFill>
+                  <a:schemeClr val="tx1"/>
+                </a:solidFill>
+                <a:latin typeface="+mn-lt"/>
+                <a:ea typeface="+mn-ea"/>
+                <a:cs typeface="+mn-cs"/>
+              </a:defRPr>
+            </a:lvl7pPr>
+            <a:lvl8pPr marL="3429000" indent="-228600" algn="l" defTabSz="914400" rtl="0" eaLnBrk="1" latinLnBrk="1" hangingPunct="1">
+              <a:lnSpc>
+                <a:spcPct val="90000"/>
+              </a:lnSpc>
+              <a:spcBef>
+                <a:spcPts val="500"/>
+              </a:spcBef>
+              <a:buFont typeface="Arial" panose="020B0604020202020204" pitchFamily="34" charset="0"/>
+              <a:buChar char="•"/>
+              <a:defRPr sz="1800" kern="1200">
+                <a:solidFill>
+                  <a:schemeClr val="tx1"/>
+                </a:solidFill>
+                <a:latin typeface="+mn-lt"/>
+                <a:ea typeface="+mn-ea"/>
+                <a:cs typeface="+mn-cs"/>
+              </a:defRPr>
+            </a:lvl8pPr>
+            <a:lvl9pPr marL="3886200" indent="-228600" algn="l" defTabSz="914400" rtl="0" eaLnBrk="1" latinLnBrk="1" hangingPunct="1">
+              <a:lnSpc>
+                <a:spcPct val="90000"/>
+              </a:lnSpc>
+              <a:spcBef>
+                <a:spcPts val="500"/>
+              </a:spcBef>
+              <a:buFont typeface="Arial" panose="020B0604020202020204" pitchFamily="34" charset="0"/>
+              <a:buChar char="•"/>
+              <a:defRPr sz="1800" kern="1200">
+                <a:solidFill>
+                  <a:schemeClr val="tx1"/>
+                </a:solidFill>
+                <a:latin typeface="+mn-lt"/>
+                <a:ea typeface="+mn-ea"/>
+                <a:cs typeface="+mn-cs"/>
+              </a:defRPr>
+            </a:lvl9pPr>
+          </a:lstStyle>
+          <a:p>
+            <a:pPr marL="0" lvl="0" indent="0">
+              <a:lnSpc>
+                <a:spcPct val="130000"/>
+              </a:lnSpc>
+              <a:spcBef>
+                <a:spcPts val="0"/>
+              </a:spcBef>
+              <a:buNone/>
+              <a:defRPr/>
+            </a:pPr>
+            <a:r>
+              <a:rPr lang="ko-KR" altLang="en-US" sz="1000" dirty="0">
+                <a:latin typeface="피플폰트 Bold" panose="020B0600000101010101" pitchFamily="50" charset="-127"/>
+                <a:ea typeface="피플폰트 Bold" panose="020B0600000101010101" pitchFamily="50" charset="-127"/>
+              </a:rPr>
+              <a:t>페이지 요약</a:t>
+            </a:r>
+          </a:p>
+        </p:txBody>
+      </p:sp>
+      <p:sp>
+        <p:nvSpPr>
+          <p:cNvPr id="11" name="슬라이드 번호 개체 틀 1">
+            <a:extLst>
+              <a:ext uri="{FF2B5EF4-FFF2-40B4-BE49-F238E27FC236}">
+                <a16:creationId xmlns:a16="http://schemas.microsoft.com/office/drawing/2014/main" id="{7C2A9A1C-92B7-4856-B43A-49BFF81DD5F8}"/>
+              </a:ext>
+            </a:extLst>
+          </p:cNvPr>
+          <p:cNvSpPr txBox="1">
+            <a:spLocks/>
+          </p:cNvSpPr>
+          <p:nvPr/>
+        </p:nvSpPr>
+        <p:spPr>
+          <a:xfrm>
+            <a:off x="6567488" y="6576219"/>
+            <a:ext cx="3097212" cy="227169"/>
+          </a:xfrm>
+          <a:prstGeom prst="rect">
+            <a:avLst/>
+          </a:prstGeom>
+        </p:spPr>
+        <p:txBody>
+          <a:bodyPr vert="horz" lIns="91440" tIns="45720" rIns="0" bIns="45720" rtlCol="0" anchor="ctr"/>
+          <a:lstStyle>
+            <a:defPPr>
+              <a:defRPr lang="en-US"/>
+            </a:defPPr>
+            <a:lvl1pPr marL="0" algn="r" defTabSz="457200" rtl="0" eaLnBrk="1" latinLnBrk="0" hangingPunct="1">
+              <a:defRPr sz="800" kern="1200">
+                <a:solidFill>
+                  <a:schemeClr val="tx1">
+                    <a:tint val="75000"/>
+                  </a:schemeClr>
+                </a:solidFill>
+                <a:latin typeface="+mn-ea"/>
+                <a:ea typeface="+mn-ea"/>
+                <a:cs typeface="+mn-cs"/>
+              </a:defRPr>
+            </a:lvl1pPr>
+            <a:lvl2pPr marL="457200" algn="l" defTabSz="457200" rtl="0" eaLnBrk="1" latinLnBrk="0" hangingPunct="1">
+              <a:defRPr sz="1800" kern="1200">
+                <a:solidFill>
+                  <a:schemeClr val="tx1"/>
+                </a:solidFill>
+                <a:latin typeface="+mn-lt"/>
+                <a:ea typeface="+mn-ea"/>
+                <a:cs typeface="+mn-cs"/>
+              </a:defRPr>
+            </a:lvl2pPr>
+            <a:lvl3pPr marL="914400" algn="l" defTabSz="457200" rtl="0" eaLnBrk="1" latinLnBrk="0" hangingPunct="1">
+              <a:defRPr sz="1800" kern="1200">
+                <a:solidFill>
+                  <a:schemeClr val="tx1"/>
+                </a:solidFill>
+                <a:latin typeface="+mn-lt"/>
+                <a:ea typeface="+mn-ea"/>
+                <a:cs typeface="+mn-cs"/>
+              </a:defRPr>
+            </a:lvl3pPr>
+            <a:lvl4pPr marL="1371600" algn="l" defTabSz="457200" rtl="0" eaLnBrk="1" latinLnBrk="0" hangingPunct="1">
+              <a:defRPr sz="1800" kern="1200">
+                <a:solidFill>
+                  <a:schemeClr val="tx1"/>
+                </a:solidFill>
+                <a:latin typeface="+mn-lt"/>
+                <a:ea typeface="+mn-ea"/>
+                <a:cs typeface="+mn-cs"/>
+              </a:defRPr>
+            </a:lvl4pPr>
+            <a:lvl5pPr marL="1828800" algn="l" defTabSz="457200" rtl="0" eaLnBrk="1" latinLnBrk="0" hangingPunct="1">
+              <a:defRPr sz="1800" kern="1200">
+                <a:solidFill>
+                  <a:schemeClr val="tx1"/>
+                </a:solidFill>
+                <a:latin typeface="+mn-lt"/>
+                <a:ea typeface="+mn-ea"/>
+                <a:cs typeface="+mn-cs"/>
+              </a:defRPr>
+            </a:lvl5pPr>
+            <a:lvl6pPr marL="2286000" algn="l" defTabSz="457200" rtl="0" eaLnBrk="1" latinLnBrk="0" hangingPunct="1">
+              <a:defRPr sz="1800" kern="1200">
+                <a:solidFill>
+                  <a:schemeClr val="tx1"/>
+                </a:solidFill>
+                <a:latin typeface="+mn-lt"/>
+                <a:ea typeface="+mn-ea"/>
+                <a:cs typeface="+mn-cs"/>
+              </a:defRPr>
+            </a:lvl6pPr>
+            <a:lvl7pPr marL="2743200" algn="l" defTabSz="457200" rtl="0" eaLnBrk="1" latinLnBrk="0" hangingPunct="1">
+              <a:defRPr sz="1800" kern="1200">
+                <a:solidFill>
+                  <a:schemeClr val="tx1"/>
+                </a:solidFill>
+                <a:latin typeface="+mn-lt"/>
+                <a:ea typeface="+mn-ea"/>
+                <a:cs typeface="+mn-cs"/>
+              </a:defRPr>
+            </a:lvl7pPr>
+            <a:lvl8pPr marL="3200400" algn="l" defTabSz="457200" rtl="0" eaLnBrk="1" latinLnBrk="0" hangingPunct="1">
+              <a:defRPr sz="1800" kern="1200">
+                <a:solidFill>
+                  <a:schemeClr val="tx1"/>
+                </a:solidFill>
+                <a:latin typeface="+mn-lt"/>
+                <a:ea typeface="+mn-ea"/>
+                <a:cs typeface="+mn-cs"/>
+              </a:defRPr>
+            </a:lvl8pPr>
+            <a:lvl9pPr marL="3657600" algn="l" defTabSz="457200" rtl="0" eaLnBrk="1" latinLnBrk="0" hangingPunct="1">
+              <a:defRPr sz="1800" kern="1200">
+                <a:solidFill>
+                  <a:schemeClr val="tx1"/>
+                </a:solidFill>
+                <a:latin typeface="+mn-lt"/>
+                <a:ea typeface="+mn-ea"/>
+                <a:cs typeface="+mn-cs"/>
+              </a:defRPr>
+            </a:lvl9pPr>
+          </a:lstStyle>
+          <a:p>
+            <a:pPr>
+              <a:defRPr/>
+            </a:pPr>
+            <a:r>
+              <a:rPr lang="ko-KR" altLang="en-US" dirty="0">
+                <a:latin typeface="피플폰트 Light" panose="020B0600000101010101" pitchFamily="50" charset="-127"/>
+                <a:ea typeface="피플폰트 Light" panose="020B0600000101010101" pitchFamily="50" charset="-127"/>
+              </a:rPr>
+              <a:t>사업명｜</a:t>
+            </a:r>
+            <a:r>
+              <a:rPr lang="en-US" altLang="ko-KR" dirty="0">
+                <a:latin typeface="피플폰트 Light" panose="020B0600000101010101" pitchFamily="50" charset="-127"/>
+                <a:ea typeface="피플폰트 Light" panose="020B0600000101010101" pitchFamily="50" charset="-127"/>
+              </a:rPr>
+              <a:t>  </a:t>
+            </a:r>
+            <a:fld id="{F3A57096-21A8-44ED-AF94-8A259496D2BE}" type="slidenum">
+              <a:rPr lang="en-US" altLang="en-US" smtClean="0">
+                <a:latin typeface="피플폰트 Light" panose="020B0600000101010101" pitchFamily="50" charset="-127"/>
+                <a:ea typeface="피플폰트 Light" panose="020B0600000101010101" pitchFamily="50" charset="-127"/>
+              </a:rPr>
+              <a:pPr>
+                <a:defRPr/>
+              </a:pPr>
+              <a:t>12</a:t>
+            </a:fld>
+            <a:endParaRPr lang="en-US" altLang="en-US" dirty="0">
+              <a:latin typeface="피플폰트 Light" panose="020B0600000101010101" pitchFamily="50" charset="-127"/>
+              <a:ea typeface="피플폰트 Light" panose="020B0600000101010101" pitchFamily="50" charset="-127"/>
+            </a:endParaRPr>
+          </a:p>
+        </p:txBody>
+      </p:sp>
+    </p:spTree>
+  </p:cSld>
+  <p:clrMapOvr>
+    <a:masterClrMapping/>
+  </p:clrMapOvr>
+  <p:transition/>
+</p:sld>
+</file>
+
+<file path=ppt/slides/slide13.xml><?xml version="1.0" encoding="utf-8"?>
 <p:sld xmlns:a="http://schemas.openxmlformats.org/drawingml/2006/main" xmlns:r="http://schemas.openxmlformats.org/officeDocument/2006/relationships" xmlns:p="http://schemas.openxmlformats.org/presentationml/2006/main">
   <p:cSld>
     <p:spTree>
@@ -6894,279 +7998,304 @@
           <a:chExt cx="0" cy="0"/>
         </a:xfrm>
       </p:grpSpPr>
-      <p:sp>
-        <p:nvSpPr>
-          <p:cNvPr id="32" name="육각형 31">
+      <p:grpSp>
+        <p:nvGrpSpPr>
+          <p:cNvPr id="39" name="그룹 38">
             <a:extLst>
               <a:ext uri="{FF2B5EF4-FFF2-40B4-BE49-F238E27FC236}">
-                <a16:creationId xmlns:a16="http://schemas.microsoft.com/office/drawing/2014/main" id="{71BF35C0-FCD1-454B-8AED-CF040E1BE420}"/>
+                <a16:creationId xmlns:a16="http://schemas.microsoft.com/office/drawing/2014/main" id="{FC624110-1AF7-4F94-8BC0-1F17A47FE956}"/>
               </a:ext>
             </a:extLst>
           </p:cNvPr>
-          <p:cNvSpPr/>
+          <p:cNvGrpSpPr/>
           <p:nvPr/>
-        </p:nvSpPr>
-        <p:spPr>
+        </p:nvGrpSpPr>
+        <p:grpSpPr>
           <a:xfrm>
-            <a:off x="1187919" y="5211057"/>
-            <a:ext cx="7530164" cy="1013176"/>
+            <a:off x="1187918" y="5162520"/>
+            <a:ext cx="7530164" cy="1174243"/>
+            <a:chOff x="1211516" y="3125655"/>
+            <a:chExt cx="7530164" cy="1174243"/>
           </a:xfrm>
-          <a:prstGeom prst="hexagon">
-            <a:avLst>
-              <a:gd name="adj" fmla="val 18529"/>
-              <a:gd name="vf" fmla="val 115470"/>
-            </a:avLst>
-          </a:prstGeom>
-          <a:solidFill>
-            <a:srgbClr val="2E75B6">
-              <a:alpha val="75000"/>
-            </a:srgbClr>
-          </a:solidFill>
-          <a:ln>
+        </p:grpSpPr>
+        <p:sp>
+          <p:nvSpPr>
+            <p:cNvPr id="40" name="육각형 39">
+              <a:extLst>
+                <a:ext uri="{FF2B5EF4-FFF2-40B4-BE49-F238E27FC236}">
+                  <a16:creationId xmlns:a16="http://schemas.microsoft.com/office/drawing/2014/main" id="{C70BA32E-BABD-4C8C-AF62-620DE97D8D9D}"/>
+                </a:ext>
+              </a:extLst>
+            </p:cNvPr>
+            <p:cNvSpPr/>
+            <p:nvPr/>
+          </p:nvSpPr>
+          <p:spPr>
+            <a:xfrm>
+              <a:off x="1211516" y="3168315"/>
+              <a:ext cx="7530164" cy="1013176"/>
+            </a:xfrm>
+            <a:prstGeom prst="hexagon">
+              <a:avLst>
+                <a:gd name="adj" fmla="val 18529"/>
+                <a:gd name="vf" fmla="val 115470"/>
+              </a:avLst>
+            </a:prstGeom>
+            <a:solidFill>
+              <a:srgbClr val="2E75B6">
+                <a:alpha val="75000"/>
+              </a:srgbClr>
+            </a:solidFill>
+            <a:ln>
+              <a:noFill/>
+            </a:ln>
+          </p:spPr>
+          <p:style>
+            <a:lnRef idx="2">
+              <a:schemeClr val="accent1">
+                <a:shade val="50000"/>
+              </a:schemeClr>
+            </a:lnRef>
+            <a:fillRef idx="1">
+              <a:schemeClr val="accent1"/>
+            </a:fillRef>
+            <a:effectRef idx="0">
+              <a:schemeClr val="accent1"/>
+            </a:effectRef>
+            <a:fontRef idx="minor">
+              <a:schemeClr val="lt1"/>
+            </a:fontRef>
+          </p:style>
+          <p:txBody>
+            <a:bodyPr rtlCol="0" anchor="ctr"/>
+            <a:lstStyle/>
+            <a:p>
+              <a:pPr algn="ctr"/>
+              <a:endParaRPr lang="ko-KR" altLang="en-US" dirty="0"/>
+            </a:p>
+          </p:txBody>
+        </p:sp>
+        <p:sp>
+          <p:nvSpPr>
+            <p:cNvPr id="41" name="육각형 40">
+              <a:extLst>
+                <a:ext uri="{FF2B5EF4-FFF2-40B4-BE49-F238E27FC236}">
+                  <a16:creationId xmlns:a16="http://schemas.microsoft.com/office/drawing/2014/main" id="{6A6632BC-DC0C-40B3-ADD5-D61362C2AB3A}"/>
+                </a:ext>
+              </a:extLst>
+            </p:cNvPr>
+            <p:cNvSpPr/>
+            <p:nvPr/>
+          </p:nvSpPr>
+          <p:spPr>
+            <a:xfrm>
+              <a:off x="1379372" y="3125655"/>
+              <a:ext cx="7175041" cy="1092412"/>
+            </a:xfrm>
+            <a:prstGeom prst="hexagon">
+              <a:avLst>
+                <a:gd name="adj" fmla="val 18529"/>
+                <a:gd name="vf" fmla="val 115470"/>
+              </a:avLst>
+            </a:prstGeom>
+            <a:solidFill>
+              <a:schemeClr val="bg1"/>
+            </a:solidFill>
+            <a:ln>
+              <a:noFill/>
+            </a:ln>
+          </p:spPr>
+          <p:style>
+            <a:lnRef idx="2">
+              <a:schemeClr val="accent1">
+                <a:shade val="50000"/>
+              </a:schemeClr>
+            </a:lnRef>
+            <a:fillRef idx="1">
+              <a:schemeClr val="accent1"/>
+            </a:fillRef>
+            <a:effectRef idx="0">
+              <a:schemeClr val="accent1"/>
+            </a:effectRef>
+            <a:fontRef idx="minor">
+              <a:schemeClr val="lt1"/>
+            </a:fontRef>
+          </p:style>
+          <p:txBody>
+            <a:bodyPr rtlCol="0" anchor="ctr"/>
+            <a:lstStyle/>
+            <a:p>
+              <a:endParaRPr lang="ko-KR" altLang="en-US" dirty="0"/>
+            </a:p>
+          </p:txBody>
+        </p:sp>
+        <p:sp>
+          <p:nvSpPr>
+            <p:cNvPr id="42" name="TextBox 41">
+              <a:extLst>
+                <a:ext uri="{FF2B5EF4-FFF2-40B4-BE49-F238E27FC236}">
+                  <a16:creationId xmlns:a16="http://schemas.microsoft.com/office/drawing/2014/main" id="{0C1FFE1D-0092-4FDE-9561-A5C3FF36F70D}"/>
+                </a:ext>
+              </a:extLst>
+            </p:cNvPr>
+            <p:cNvSpPr txBox="1"/>
+            <p:nvPr/>
+          </p:nvSpPr>
+          <p:spPr>
+            <a:xfrm>
+              <a:off x="1790980" y="3191902"/>
+              <a:ext cx="6662480" cy="1107996"/>
+            </a:xfrm>
+            <a:prstGeom prst="rect">
+              <a:avLst/>
+            </a:prstGeom>
             <a:noFill/>
-          </a:ln>
-        </p:spPr>
-        <p:style>
-          <a:lnRef idx="2">
-            <a:schemeClr val="accent1">
-              <a:shade val="50000"/>
-            </a:schemeClr>
-          </a:lnRef>
-          <a:fillRef idx="1">
-            <a:schemeClr val="accent1"/>
-          </a:fillRef>
-          <a:effectRef idx="0">
-            <a:schemeClr val="accent1"/>
-          </a:effectRef>
-          <a:fontRef idx="minor">
-            <a:schemeClr val="lt1"/>
-          </a:fontRef>
-        </p:style>
-        <p:txBody>
-          <a:bodyPr rtlCol="0" anchor="ctr"/>
-          <a:lstStyle/>
-          <a:p>
-            <a:pPr algn="ctr"/>
-            <a:endParaRPr lang="ko-KR" altLang="en-US" dirty="0"/>
-          </a:p>
-        </p:txBody>
-      </p:sp>
-      <p:sp>
-        <p:nvSpPr>
-          <p:cNvPr id="33" name="육각형 32">
-            <a:extLst>
-              <a:ext uri="{FF2B5EF4-FFF2-40B4-BE49-F238E27FC236}">
-                <a16:creationId xmlns:a16="http://schemas.microsoft.com/office/drawing/2014/main" id="{3CDF811D-22A7-4AF6-A899-50A72139B16F}"/>
-              </a:ext>
-            </a:extLst>
-          </p:cNvPr>
-          <p:cNvSpPr/>
-          <p:nvPr/>
-        </p:nvSpPr>
-        <p:spPr>
-          <a:xfrm>
-            <a:off x="1355775" y="5177541"/>
-            <a:ext cx="7175041" cy="1092412"/>
-          </a:xfrm>
-          <a:prstGeom prst="hexagon">
-            <a:avLst>
-              <a:gd name="adj" fmla="val 18529"/>
-              <a:gd name="vf" fmla="val 115470"/>
-            </a:avLst>
-          </a:prstGeom>
-          <a:solidFill>
-            <a:schemeClr val="bg1"/>
-          </a:solidFill>
-          <a:ln>
-            <a:noFill/>
-          </a:ln>
-        </p:spPr>
-        <p:style>
-          <a:lnRef idx="2">
-            <a:schemeClr val="accent1">
-              <a:shade val="50000"/>
-            </a:schemeClr>
-          </a:lnRef>
-          <a:fillRef idx="1">
-            <a:schemeClr val="accent1"/>
-          </a:fillRef>
-          <a:effectRef idx="0">
-            <a:schemeClr val="accent1"/>
-          </a:effectRef>
-          <a:fontRef idx="minor">
-            <a:schemeClr val="lt1"/>
-          </a:fontRef>
-        </p:style>
-        <p:txBody>
-          <a:bodyPr rtlCol="0" anchor="ctr"/>
-          <a:lstStyle/>
-          <a:p>
-            <a:endParaRPr lang="ko-KR" altLang="en-US" dirty="0"/>
-          </a:p>
-        </p:txBody>
-      </p:sp>
-      <p:sp>
-        <p:nvSpPr>
-          <p:cNvPr id="25" name="육각형 24">
-            <a:extLst>
-              <a:ext uri="{FF2B5EF4-FFF2-40B4-BE49-F238E27FC236}">
-                <a16:creationId xmlns:a16="http://schemas.microsoft.com/office/drawing/2014/main" id="{34C4331A-3665-4D62-8E3C-7B11E0A556C4}"/>
-              </a:ext>
-            </a:extLst>
-          </p:cNvPr>
-          <p:cNvSpPr/>
-          <p:nvPr/>
-        </p:nvSpPr>
-        <p:spPr>
-          <a:xfrm>
-            <a:off x="1211516" y="3168315"/>
-            <a:ext cx="7530164" cy="1013176"/>
-          </a:xfrm>
-          <a:prstGeom prst="hexagon">
-            <a:avLst>
-              <a:gd name="adj" fmla="val 18529"/>
-              <a:gd name="vf" fmla="val 115470"/>
-            </a:avLst>
-          </a:prstGeom>
-          <a:solidFill>
-            <a:srgbClr val="2E75B6">
-              <a:alpha val="75000"/>
-            </a:srgbClr>
-          </a:solidFill>
-          <a:ln>
-            <a:noFill/>
-          </a:ln>
-        </p:spPr>
-        <p:style>
-          <a:lnRef idx="2">
-            <a:schemeClr val="accent1">
-              <a:shade val="50000"/>
-            </a:schemeClr>
-          </a:lnRef>
-          <a:fillRef idx="1">
-            <a:schemeClr val="accent1"/>
-          </a:fillRef>
-          <a:effectRef idx="0">
-            <a:schemeClr val="accent1"/>
-          </a:effectRef>
-          <a:fontRef idx="minor">
-            <a:schemeClr val="lt1"/>
-          </a:fontRef>
-        </p:style>
-        <p:txBody>
-          <a:bodyPr rtlCol="0" anchor="ctr"/>
-          <a:lstStyle/>
-          <a:p>
-            <a:pPr algn="ctr"/>
-            <a:endParaRPr lang="ko-KR" altLang="en-US" dirty="0"/>
-          </a:p>
-        </p:txBody>
-      </p:sp>
-      <p:sp>
-        <p:nvSpPr>
-          <p:cNvPr id="26" name="육각형 25">
-            <a:extLst>
-              <a:ext uri="{FF2B5EF4-FFF2-40B4-BE49-F238E27FC236}">
-                <a16:creationId xmlns:a16="http://schemas.microsoft.com/office/drawing/2014/main" id="{7BF180A2-A688-40F0-A757-2E6DE480716C}"/>
-              </a:ext>
-            </a:extLst>
-          </p:cNvPr>
-          <p:cNvSpPr/>
-          <p:nvPr/>
-        </p:nvSpPr>
-        <p:spPr>
-          <a:xfrm>
-            <a:off x="1379372" y="3125655"/>
-            <a:ext cx="7175041" cy="1092412"/>
-          </a:xfrm>
-          <a:prstGeom prst="hexagon">
-            <a:avLst>
-              <a:gd name="adj" fmla="val 18529"/>
-              <a:gd name="vf" fmla="val 115470"/>
-            </a:avLst>
-          </a:prstGeom>
-          <a:solidFill>
-            <a:schemeClr val="bg1"/>
-          </a:solidFill>
-          <a:ln>
-            <a:noFill/>
-          </a:ln>
-        </p:spPr>
-        <p:style>
-          <a:lnRef idx="2">
-            <a:schemeClr val="accent1">
-              <a:shade val="50000"/>
-            </a:schemeClr>
-          </a:lnRef>
-          <a:fillRef idx="1">
-            <a:schemeClr val="accent1"/>
-          </a:fillRef>
-          <a:effectRef idx="0">
-            <a:schemeClr val="accent1"/>
-          </a:effectRef>
-          <a:fontRef idx="minor">
-            <a:schemeClr val="lt1"/>
-          </a:fontRef>
-        </p:style>
-        <p:txBody>
-          <a:bodyPr rtlCol="0" anchor="ctr"/>
-          <a:lstStyle/>
-          <a:p>
-            <a:endParaRPr lang="ko-KR" altLang="en-US" dirty="0"/>
-          </a:p>
-        </p:txBody>
-      </p:sp>
-      <p:sp>
-        <p:nvSpPr>
-          <p:cNvPr id="27" name="TextBox 26">
-            <a:extLst>
-              <a:ext uri="{FF2B5EF4-FFF2-40B4-BE49-F238E27FC236}">
-                <a16:creationId xmlns:a16="http://schemas.microsoft.com/office/drawing/2014/main" id="{560AF0D2-5F4C-4C38-A7FF-0B4675AA3603}"/>
-              </a:ext>
-            </a:extLst>
-          </p:cNvPr>
-          <p:cNvSpPr txBox="1"/>
-          <p:nvPr/>
-        </p:nvSpPr>
-        <p:spPr>
-          <a:xfrm>
-            <a:off x="1790980" y="3191902"/>
-            <a:ext cx="6662480" cy="1107996"/>
-          </a:xfrm>
-          <a:prstGeom prst="rect">
-            <a:avLst/>
-          </a:prstGeom>
-          <a:noFill/>
-        </p:spPr>
-        <p:txBody>
-          <a:bodyPr wrap="square" lIns="0" tIns="0" rIns="0" bIns="0" rtlCol="0">
-            <a:spAutoFit/>
-          </a:bodyPr>
-          <a:lstStyle/>
-          <a:p>
-            <a:pPr marL="285750" indent="-285750">
-              <a:buFont typeface="Batang" panose="02030600000101010101" pitchFamily="18" charset="-127"/>
-              <a:buChar char="→"/>
-            </a:pPr>
-            <a:r>
-              <a:rPr lang="ko-KR" altLang="en-US" sz="1200" dirty="0">
+          </p:spPr>
+          <p:txBody>
+            <a:bodyPr wrap="square" lIns="0" tIns="0" rIns="0" bIns="0" rtlCol="0">
+              <a:spAutoFit/>
+            </a:bodyPr>
+            <a:lstStyle/>
+            <a:p>
+              <a:pPr marL="285750" indent="-285750">
+                <a:buFont typeface="Batang" panose="02030600000101010101" pitchFamily="18" charset="-127"/>
+                <a:buChar char="→"/>
+              </a:pPr>
+              <a:r>
+                <a:rPr lang="ko-KR" altLang="en-US" sz="1200" dirty="0">
+                  <a:latin typeface="피플폰트 Bold" panose="020B0600000101010101" pitchFamily="50" charset="-127"/>
+                  <a:ea typeface="피플폰트 Bold" panose="020B0600000101010101" pitchFamily="50" charset="-127"/>
+                </a:rPr>
+                <a:t>낮은 인허가 리스크</a:t>
+              </a:r>
+              <a:endParaRPr lang="en-US" altLang="ko-KR" sz="1200" dirty="0">
                 <a:latin typeface="피플폰트 Bold" panose="020B0600000101010101" pitchFamily="50" charset="-127"/>
                 <a:ea typeface="피플폰트 Bold" panose="020B0600000101010101" pitchFamily="50" charset="-127"/>
-              </a:rPr>
-              <a:t>낮은 인허가 리스크</a:t>
-            </a:r>
-            <a:endParaRPr lang="en-US" altLang="ko-KR" sz="1200" dirty="0">
-              <a:latin typeface="피플폰트 Bold" panose="020B0600000101010101" pitchFamily="50" charset="-127"/>
-              <a:ea typeface="피플폰트 Bold" panose="020B0600000101010101" pitchFamily="50" charset="-127"/>
-            </a:endParaRPr>
-          </a:p>
-          <a:p>
-            <a:pPr marL="742950" lvl="1" indent="-285750">
-              <a:buFont typeface="Wingdings" panose="05000000000000000000" pitchFamily="2" charset="2"/>
-              <a:buChar char="§"/>
-            </a:pPr>
-            <a:r>
-              <a:rPr lang="ko-KR" altLang="en-US" sz="1200" dirty="0">
+              </a:endParaRPr>
+            </a:p>
+            <a:p>
+              <a:pPr marL="742950" lvl="1" indent="-285750">
+                <a:buFont typeface="Wingdings" panose="05000000000000000000" pitchFamily="2" charset="2"/>
+                <a:buChar char="§"/>
+              </a:pPr>
+              <a:r>
+                <a:rPr lang="ko-KR" altLang="en-US" sz="1200" dirty="0">
+                  <a:solidFill>
+                    <a:schemeClr val="tx1">
+                      <a:lumMod val="65000"/>
+                      <a:lumOff val="35000"/>
+                    </a:schemeClr>
+                  </a:solidFill>
+                  <a:latin typeface="피플폰트 Bold" panose="020B0600000101010101" pitchFamily="50" charset="-127"/>
+                  <a:ea typeface="피플폰트 Bold" panose="020B0600000101010101" pitchFamily="50" charset="-127"/>
+                </a:rPr>
+                <a:t>‘</a:t>
+              </a:r>
+              <a:r>
+                <a:rPr lang="en-US" altLang="ko-KR" sz="1200" dirty="0">
+                  <a:solidFill>
+                    <a:schemeClr val="tx1">
+                      <a:lumMod val="65000"/>
+                      <a:lumOff val="35000"/>
+                    </a:schemeClr>
+                  </a:solidFill>
+                  <a:latin typeface="피플폰트 Bold" panose="020B0600000101010101" pitchFamily="50" charset="-127"/>
+                  <a:ea typeface="피플폰트 Bold" panose="020B0600000101010101" pitchFamily="50" charset="-127"/>
+                </a:rPr>
+                <a:t>25</a:t>
+              </a:r>
+              <a:r>
+                <a:rPr lang="ko-KR" altLang="en-US" sz="1200" dirty="0">
+                  <a:solidFill>
+                    <a:schemeClr val="tx1">
+                      <a:lumMod val="65000"/>
+                      <a:lumOff val="35000"/>
+                    </a:schemeClr>
+                  </a:solidFill>
+                  <a:latin typeface="피플폰트 Bold" panose="020B0600000101010101" pitchFamily="50" charset="-127"/>
+                  <a:ea typeface="피플폰트 Bold" panose="020B0600000101010101" pitchFamily="50" charset="-127"/>
+                </a:rPr>
+                <a:t>년 </a:t>
+              </a:r>
+              <a:r>
+                <a:rPr lang="en-US" altLang="ko-KR" sz="1200" dirty="0">
+                  <a:solidFill>
+                    <a:schemeClr val="tx1">
+                      <a:lumMod val="65000"/>
+                      <a:lumOff val="35000"/>
+                    </a:schemeClr>
+                  </a:solidFill>
+                  <a:latin typeface="피플폰트 Bold" panose="020B0600000101010101" pitchFamily="50" charset="-127"/>
+                  <a:ea typeface="피플폰트 Bold" panose="020B0600000101010101" pitchFamily="50" charset="-127"/>
+                </a:rPr>
+                <a:t>8</a:t>
+              </a:r>
+              <a:r>
+                <a:rPr lang="ko-KR" altLang="en-US" sz="1200" dirty="0">
+                  <a:solidFill>
+                    <a:schemeClr val="tx1">
+                      <a:lumMod val="65000"/>
+                      <a:lumOff val="35000"/>
+                    </a:schemeClr>
+                  </a:solidFill>
+                  <a:latin typeface="피플폰트 Bold" panose="020B0600000101010101" pitchFamily="50" charset="-127"/>
+                  <a:ea typeface="피플폰트 Bold" panose="020B0600000101010101" pitchFamily="50" charset="-127"/>
+                </a:rPr>
+                <a:t>월 실시계획인가 및 건축심의 완료</a:t>
+              </a:r>
+              <a:r>
+                <a:rPr lang="en-US" altLang="ko-KR" sz="1200" dirty="0">
+                  <a:solidFill>
+                    <a:schemeClr val="tx1">
+                      <a:lumMod val="65000"/>
+                      <a:lumOff val="35000"/>
+                    </a:schemeClr>
+                  </a:solidFill>
+                  <a:latin typeface="피플폰트 Bold" panose="020B0600000101010101" pitchFamily="50" charset="-127"/>
+                  <a:ea typeface="피플폰트 Bold" panose="020B0600000101010101" pitchFamily="50" charset="-127"/>
+                </a:rPr>
+                <a:t>, 26</a:t>
+              </a:r>
+              <a:r>
+                <a:rPr lang="ko-KR" altLang="en-US" sz="1200" dirty="0">
+                  <a:solidFill>
+                    <a:schemeClr val="tx1">
+                      <a:lumMod val="65000"/>
+                      <a:lumOff val="35000"/>
+                    </a:schemeClr>
+                  </a:solidFill>
+                  <a:latin typeface="피플폰트 Bold" panose="020B0600000101010101" pitchFamily="50" charset="-127"/>
+                  <a:ea typeface="피플폰트 Bold" panose="020B0600000101010101" pitchFamily="50" charset="-127"/>
+                </a:rPr>
+                <a:t>년 </a:t>
+              </a:r>
+              <a:r>
+                <a:rPr lang="en-US" altLang="ko-KR" sz="1200" dirty="0">
+                  <a:solidFill>
+                    <a:schemeClr val="tx1">
+                      <a:lumMod val="65000"/>
+                      <a:lumOff val="35000"/>
+                    </a:schemeClr>
+                  </a:solidFill>
+                  <a:latin typeface="피플폰트 Bold" panose="020B0600000101010101" pitchFamily="50" charset="-127"/>
+                  <a:ea typeface="피플폰트 Bold" panose="020B0600000101010101" pitchFamily="50" charset="-127"/>
+                </a:rPr>
+                <a:t>4</a:t>
+              </a:r>
+              <a:r>
+                <a:rPr lang="ko-KR" altLang="en-US" sz="1200" dirty="0">
+                  <a:solidFill>
+                    <a:schemeClr val="tx1">
+                      <a:lumMod val="65000"/>
+                      <a:lumOff val="35000"/>
+                    </a:schemeClr>
+                  </a:solidFill>
+                  <a:latin typeface="피플폰트 Bold" panose="020B0600000101010101" pitchFamily="50" charset="-127"/>
+                  <a:ea typeface="피플폰트 Bold" panose="020B0600000101010101" pitchFamily="50" charset="-127"/>
+                </a:rPr>
+                <a:t>월 사업계획 승인 완료 예정 </a:t>
+              </a:r>
+              <a:endParaRPr lang="en-US" altLang="ko-KR" sz="1200" dirty="0">
                 <a:solidFill>
                   <a:schemeClr val="tx1">
                     <a:lumMod val="65000"/>
@@ -7175,11 +8304,213 @@
                 </a:solidFill>
                 <a:latin typeface="피플폰트 Bold" panose="020B0600000101010101" pitchFamily="50" charset="-127"/>
                 <a:ea typeface="피플폰트 Bold" panose="020B0600000101010101" pitchFamily="50" charset="-127"/>
-              </a:rPr>
-              <a:t>‘</a:t>
-            </a:r>
-            <a:r>
-              <a:rPr lang="en-US" altLang="ko-KR" sz="1200" dirty="0">
+              </a:endParaRPr>
+            </a:p>
+            <a:p>
+              <a:pPr marL="285750" indent="-285750">
+                <a:buFont typeface="Batang" panose="02030600000101010101" pitchFamily="18" charset="-127"/>
+                <a:buChar char="→"/>
+              </a:pPr>
+              <a:r>
+                <a:rPr lang="ko-KR" altLang="en-US" sz="1200" dirty="0">
+                  <a:latin typeface="피플폰트 Bold" panose="020B0600000101010101" pitchFamily="50" charset="-127"/>
+                  <a:ea typeface="피플폰트 Bold" panose="020B0600000101010101" pitchFamily="50" charset="-127"/>
+                </a:rPr>
+                <a:t>시공사 리스크 </a:t>
+              </a:r>
+              <a:endParaRPr lang="en-US" altLang="ko-KR" sz="1200" dirty="0">
+                <a:latin typeface="피플폰트 Bold" panose="020B0600000101010101" pitchFamily="50" charset="-127"/>
+                <a:ea typeface="피플폰트 Bold" panose="020B0600000101010101" pitchFamily="50" charset="-127"/>
+              </a:endParaRPr>
+            </a:p>
+            <a:p>
+              <a:pPr marL="742950" lvl="1" indent="-285750">
+                <a:buFont typeface="Wingdings" panose="05000000000000000000" pitchFamily="2" charset="2"/>
+                <a:buChar char="§"/>
+              </a:pPr>
+              <a:r>
+                <a:rPr lang="ko-KR" altLang="en-US" sz="1200" dirty="0">
+                  <a:solidFill>
+                    <a:schemeClr val="tx1">
+                      <a:lumMod val="65000"/>
+                      <a:lumOff val="35000"/>
+                    </a:schemeClr>
+                  </a:solidFill>
+                  <a:latin typeface="피플폰트 Bold" panose="020B0600000101010101" pitchFamily="50" charset="-127"/>
+                  <a:ea typeface="피플폰트 Bold" panose="020B0600000101010101" pitchFamily="50" charset="-127"/>
+                </a:rPr>
+                <a:t>시공사인 </a:t>
+              </a:r>
+              <a:r>
+                <a:rPr lang="ko-KR" altLang="en-US" sz="1200" dirty="0" err="1">
+                  <a:solidFill>
+                    <a:schemeClr val="tx1">
+                      <a:lumMod val="65000"/>
+                      <a:lumOff val="35000"/>
+                    </a:schemeClr>
+                  </a:solidFill>
+                  <a:latin typeface="피플폰트 Bold" panose="020B0600000101010101" pitchFamily="50" charset="-127"/>
+                  <a:ea typeface="피플폰트 Bold" panose="020B0600000101010101" pitchFamily="50" charset="-127"/>
+                </a:rPr>
+                <a:t>포스코이앤씨</a:t>
+              </a:r>
+              <a:r>
+                <a:rPr lang="en-US" altLang="ko-KR" sz="1200" dirty="0">
+                  <a:solidFill>
+                    <a:schemeClr val="tx1">
+                      <a:lumMod val="65000"/>
+                      <a:lumOff val="35000"/>
+                    </a:schemeClr>
+                  </a:solidFill>
+                  <a:latin typeface="피플폰트 Bold" panose="020B0600000101010101" pitchFamily="50" charset="-127"/>
+                  <a:ea typeface="피플폰트 Bold" panose="020B0600000101010101" pitchFamily="50" charset="-127"/>
+                </a:rPr>
+                <a:t>(</a:t>
+              </a:r>
+              <a:r>
+                <a:rPr lang="ko-KR" altLang="en-US" sz="1200" dirty="0">
+                  <a:solidFill>
+                    <a:schemeClr val="tx1">
+                      <a:lumMod val="65000"/>
+                      <a:lumOff val="35000"/>
+                    </a:schemeClr>
+                  </a:solidFill>
+                  <a:latin typeface="피플폰트 Bold" panose="020B0600000101010101" pitchFamily="50" charset="-127"/>
+                  <a:ea typeface="피플폰트 Bold" panose="020B0600000101010101" pitchFamily="50" charset="-127"/>
+                </a:rPr>
+                <a:t>도급순위 </a:t>
+              </a:r>
+              <a:r>
+                <a:rPr lang="en-US" altLang="ko-KR" sz="1200" dirty="0">
+                  <a:solidFill>
+                    <a:schemeClr val="tx1">
+                      <a:lumMod val="65000"/>
+                      <a:lumOff val="35000"/>
+                    </a:schemeClr>
+                  </a:solidFill>
+                  <a:latin typeface="피플폰트 Bold" panose="020B0600000101010101" pitchFamily="50" charset="-127"/>
+                  <a:ea typeface="피플폰트 Bold" panose="020B0600000101010101" pitchFamily="50" charset="-127"/>
+                </a:rPr>
+                <a:t>7</a:t>
+              </a:r>
+              <a:r>
+                <a:rPr lang="ko-KR" altLang="en-US" sz="1200" dirty="0">
+                  <a:solidFill>
+                    <a:schemeClr val="tx1">
+                      <a:lumMod val="65000"/>
+                      <a:lumOff val="35000"/>
+                    </a:schemeClr>
+                  </a:solidFill>
+                  <a:latin typeface="피플폰트 Bold" panose="020B0600000101010101" pitchFamily="50" charset="-127"/>
+                  <a:ea typeface="피플폰트 Bold" panose="020B0600000101010101" pitchFamily="50" charset="-127"/>
+                </a:rPr>
+                <a:t>위</a:t>
+              </a:r>
+              <a:r>
+                <a:rPr lang="en-US" altLang="ko-KR" sz="1200" dirty="0">
+                  <a:solidFill>
+                    <a:schemeClr val="tx1">
+                      <a:lumMod val="65000"/>
+                      <a:lumOff val="35000"/>
+                    </a:schemeClr>
+                  </a:solidFill>
+                  <a:latin typeface="피플폰트 Bold" panose="020B0600000101010101" pitchFamily="50" charset="-127"/>
+                  <a:ea typeface="피플폰트 Bold" panose="020B0600000101010101" pitchFamily="50" charset="-127"/>
+                </a:rPr>
+                <a:t>, </a:t>
+              </a:r>
+              <a:r>
+                <a:rPr lang="ko-KR" altLang="en-US" sz="1200" dirty="0">
+                  <a:solidFill>
+                    <a:schemeClr val="tx1">
+                      <a:lumMod val="65000"/>
+                      <a:lumOff val="35000"/>
+                    </a:schemeClr>
+                  </a:solidFill>
+                  <a:latin typeface="피플폰트 Bold" panose="020B0600000101010101" pitchFamily="50" charset="-127"/>
+                  <a:ea typeface="피플폰트 Bold" panose="020B0600000101010101" pitchFamily="50" charset="-127"/>
+                </a:rPr>
+                <a:t>신용등급 </a:t>
+              </a:r>
+              <a:r>
+                <a:rPr lang="en-US" altLang="ko-KR" sz="1200" dirty="0">
+                  <a:solidFill>
+                    <a:schemeClr val="tx1">
+                      <a:lumMod val="65000"/>
+                      <a:lumOff val="35000"/>
+                    </a:schemeClr>
+                  </a:solidFill>
+                  <a:latin typeface="피플폰트 Bold" panose="020B0600000101010101" pitchFamily="50" charset="-127"/>
+                  <a:ea typeface="피플폰트 Bold" panose="020B0600000101010101" pitchFamily="50" charset="-127"/>
+                </a:rPr>
+                <a:t>A+)</a:t>
+              </a:r>
+              <a:r>
+                <a:rPr lang="ko-KR" altLang="en-US" sz="1200" dirty="0">
+                  <a:solidFill>
+                    <a:schemeClr val="tx1">
+                      <a:lumMod val="65000"/>
+                      <a:lumOff val="35000"/>
+                    </a:schemeClr>
+                  </a:solidFill>
+                  <a:latin typeface="피플폰트 Bold" panose="020B0600000101010101" pitchFamily="50" charset="-127"/>
+                  <a:ea typeface="피플폰트 Bold" panose="020B0600000101010101" pitchFamily="50" charset="-127"/>
+                </a:rPr>
+                <a:t> ‘</a:t>
+              </a:r>
+              <a:r>
+                <a:rPr lang="en-US" altLang="ko-KR" sz="1200" dirty="0">
+                  <a:solidFill>
+                    <a:schemeClr val="tx1">
+                      <a:lumMod val="65000"/>
+                      <a:lumOff val="35000"/>
+                    </a:schemeClr>
+                  </a:solidFill>
+                  <a:latin typeface="피플폰트 Bold" panose="020B0600000101010101" pitchFamily="50" charset="-127"/>
+                  <a:ea typeface="피플폰트 Bold" panose="020B0600000101010101" pitchFamily="50" charset="-127"/>
+                </a:rPr>
+                <a:t>26</a:t>
+              </a:r>
+              <a:r>
+                <a:rPr lang="ko-KR" altLang="en-US" sz="1200" dirty="0">
+                  <a:solidFill>
+                    <a:schemeClr val="tx1">
+                      <a:lumMod val="65000"/>
+                      <a:lumOff val="35000"/>
+                    </a:schemeClr>
+                  </a:solidFill>
+                  <a:latin typeface="피플폰트 Bold" panose="020B0600000101010101" pitchFamily="50" charset="-127"/>
+                  <a:ea typeface="피플폰트 Bold" panose="020B0600000101010101" pitchFamily="50" charset="-127"/>
+                </a:rPr>
+                <a:t>년 </a:t>
+              </a:r>
+              <a:r>
+                <a:rPr lang="en-US" altLang="ko-KR" sz="1200" dirty="0">
+                  <a:solidFill>
+                    <a:schemeClr val="tx1">
+                      <a:lumMod val="65000"/>
+                      <a:lumOff val="35000"/>
+                    </a:schemeClr>
+                  </a:solidFill>
+                  <a:latin typeface="피플폰트 Bold" panose="020B0600000101010101" pitchFamily="50" charset="-127"/>
+                  <a:ea typeface="피플폰트 Bold" panose="020B0600000101010101" pitchFamily="50" charset="-127"/>
+                </a:rPr>
+                <a:t>2</a:t>
+              </a:r>
+              <a:r>
+                <a:rPr lang="ko-KR" altLang="en-US" sz="1200" dirty="0">
+                  <a:solidFill>
+                    <a:schemeClr val="tx1">
+                      <a:lumMod val="65000"/>
+                      <a:lumOff val="35000"/>
+                    </a:schemeClr>
+                  </a:solidFill>
+                  <a:latin typeface="피플폰트 Bold" panose="020B0600000101010101" pitchFamily="50" charset="-127"/>
+                  <a:ea typeface="피플폰트 Bold" panose="020B0600000101010101" pitchFamily="50" charset="-127"/>
+                </a:rPr>
+                <a:t>월 최종 수주심의 완료</a:t>
+              </a:r>
+              <a:endParaRPr lang="en-US" altLang="ko-KR" sz="1200" dirty="0">
                 <a:solidFill>
                   <a:schemeClr val="tx1">
                     <a:lumMod val="65000"/>
@@ -7188,11 +8519,27 @@
                 </a:solidFill>
                 <a:latin typeface="피플폰트 Bold" panose="020B0600000101010101" pitchFamily="50" charset="-127"/>
                 <a:ea typeface="피플폰트 Bold" panose="020B0600000101010101" pitchFamily="50" charset="-127"/>
-              </a:rPr>
-              <a:t>25</a:t>
-            </a:r>
-            <a:r>
-              <a:rPr lang="ko-KR" altLang="en-US" sz="1200" dirty="0">
+              </a:endParaRPr>
+            </a:p>
+            <a:p>
+              <a:pPr marL="742950" lvl="1" indent="-285750">
+                <a:buFont typeface="Wingdings" panose="05000000000000000000" pitchFamily="2" charset="2"/>
+                <a:buChar char="§"/>
+              </a:pPr>
+              <a:r>
+                <a:rPr lang="ko-KR" altLang="en-US" sz="1200" dirty="0">
+                  <a:solidFill>
+                    <a:schemeClr val="tx1">
+                      <a:lumMod val="65000"/>
+                      <a:lumOff val="35000"/>
+                    </a:schemeClr>
+                  </a:solidFill>
+                  <a:latin typeface="피플폰트 Bold" panose="020B0600000101010101" pitchFamily="50" charset="-127"/>
+                  <a:ea typeface="피플폰트 Bold" panose="020B0600000101010101" pitchFamily="50" charset="-127"/>
+                </a:rPr>
+                <a:t>도급계약 체결 선행 조건</a:t>
+              </a:r>
+              <a:endParaRPr lang="en-US" altLang="ko-KR" sz="1200" dirty="0">
                 <a:solidFill>
                   <a:schemeClr val="tx1">
                     <a:lumMod val="65000"/>
@@ -7201,11 +8548,10 @@
                 </a:solidFill>
                 <a:latin typeface="피플폰트 Bold" panose="020B0600000101010101" pitchFamily="50" charset="-127"/>
                 <a:ea typeface="피플폰트 Bold" panose="020B0600000101010101" pitchFamily="50" charset="-127"/>
-              </a:rPr>
-              <a:t>년 </a:t>
-            </a:r>
-            <a:r>
-              <a:rPr lang="en-US" altLang="ko-KR" sz="1200" dirty="0">
+              </a:endParaRPr>
+            </a:p>
+            <a:p>
+              <a:endParaRPr lang="en-US" altLang="ko-KR" sz="1200" dirty="0">
                 <a:solidFill>
                   <a:schemeClr val="tx1">
                     <a:lumMod val="65000"/>
@@ -7214,11 +8560,309 @@
                 </a:solidFill>
                 <a:latin typeface="피플폰트 Bold" panose="020B0600000101010101" pitchFamily="50" charset="-127"/>
                 <a:ea typeface="피플폰트 Bold" panose="020B0600000101010101" pitchFamily="50" charset="-127"/>
-              </a:rPr>
-              <a:t>8</a:t>
-            </a:r>
-            <a:r>
-              <a:rPr lang="ko-KR" altLang="en-US" sz="1200" dirty="0">
+              </a:endParaRPr>
+            </a:p>
+          </p:txBody>
+        </p:sp>
+      </p:grpSp>
+      <p:grpSp>
+        <p:nvGrpSpPr>
+          <p:cNvPr id="35" name="그룹 34">
+            <a:extLst>
+              <a:ext uri="{FF2B5EF4-FFF2-40B4-BE49-F238E27FC236}">
+                <a16:creationId xmlns:a16="http://schemas.microsoft.com/office/drawing/2014/main" id="{C3E15BF6-2AAD-4784-AF22-178F039A5F00}"/>
+              </a:ext>
+            </a:extLst>
+          </p:cNvPr>
+          <p:cNvGrpSpPr/>
+          <p:nvPr/>
+        </p:nvGrpSpPr>
+        <p:grpSpPr>
+          <a:xfrm>
+            <a:off x="1187918" y="1403806"/>
+            <a:ext cx="7530164" cy="1174243"/>
+            <a:chOff x="1211516" y="3125655"/>
+            <a:chExt cx="7530164" cy="1174243"/>
+          </a:xfrm>
+        </p:grpSpPr>
+        <p:sp>
+          <p:nvSpPr>
+            <p:cNvPr id="36" name="육각형 35">
+              <a:extLst>
+                <a:ext uri="{FF2B5EF4-FFF2-40B4-BE49-F238E27FC236}">
+                  <a16:creationId xmlns:a16="http://schemas.microsoft.com/office/drawing/2014/main" id="{AFFF534F-A829-4919-AA8B-24B181367024}"/>
+                </a:ext>
+              </a:extLst>
+            </p:cNvPr>
+            <p:cNvSpPr/>
+            <p:nvPr/>
+          </p:nvSpPr>
+          <p:spPr>
+            <a:xfrm>
+              <a:off x="1211516" y="3168315"/>
+              <a:ext cx="7530164" cy="1013176"/>
+            </a:xfrm>
+            <a:prstGeom prst="hexagon">
+              <a:avLst>
+                <a:gd name="adj" fmla="val 18529"/>
+                <a:gd name="vf" fmla="val 115470"/>
+              </a:avLst>
+            </a:prstGeom>
+            <a:solidFill>
+              <a:srgbClr val="2E75B6">
+                <a:alpha val="75000"/>
+              </a:srgbClr>
+            </a:solidFill>
+            <a:ln>
+              <a:noFill/>
+            </a:ln>
+          </p:spPr>
+          <p:style>
+            <a:lnRef idx="2">
+              <a:schemeClr val="accent1">
+                <a:shade val="50000"/>
+              </a:schemeClr>
+            </a:lnRef>
+            <a:fillRef idx="1">
+              <a:schemeClr val="accent1"/>
+            </a:fillRef>
+            <a:effectRef idx="0">
+              <a:schemeClr val="accent1"/>
+            </a:effectRef>
+            <a:fontRef idx="minor">
+              <a:schemeClr val="lt1"/>
+            </a:fontRef>
+          </p:style>
+          <p:txBody>
+            <a:bodyPr rtlCol="0" anchor="ctr"/>
+            <a:lstStyle/>
+            <a:p>
+              <a:pPr algn="ctr"/>
+              <a:endParaRPr lang="ko-KR" altLang="en-US" dirty="0"/>
+            </a:p>
+          </p:txBody>
+        </p:sp>
+        <p:sp>
+          <p:nvSpPr>
+            <p:cNvPr id="37" name="육각형 36">
+              <a:extLst>
+                <a:ext uri="{FF2B5EF4-FFF2-40B4-BE49-F238E27FC236}">
+                  <a16:creationId xmlns:a16="http://schemas.microsoft.com/office/drawing/2014/main" id="{DFBD97D9-E9DF-41FD-A2ED-4CD99EB69472}"/>
+                </a:ext>
+              </a:extLst>
+            </p:cNvPr>
+            <p:cNvSpPr/>
+            <p:nvPr/>
+          </p:nvSpPr>
+          <p:spPr>
+            <a:xfrm>
+              <a:off x="1379372" y="3125655"/>
+              <a:ext cx="7175041" cy="1092412"/>
+            </a:xfrm>
+            <a:prstGeom prst="hexagon">
+              <a:avLst>
+                <a:gd name="adj" fmla="val 18529"/>
+                <a:gd name="vf" fmla="val 115470"/>
+              </a:avLst>
+            </a:prstGeom>
+            <a:solidFill>
+              <a:schemeClr val="bg1"/>
+            </a:solidFill>
+            <a:ln>
+              <a:noFill/>
+            </a:ln>
+          </p:spPr>
+          <p:style>
+            <a:lnRef idx="2">
+              <a:schemeClr val="accent1">
+                <a:shade val="50000"/>
+              </a:schemeClr>
+            </a:lnRef>
+            <a:fillRef idx="1">
+              <a:schemeClr val="accent1"/>
+            </a:fillRef>
+            <a:effectRef idx="0">
+              <a:schemeClr val="accent1"/>
+            </a:effectRef>
+            <a:fontRef idx="minor">
+              <a:schemeClr val="lt1"/>
+            </a:fontRef>
+          </p:style>
+          <p:txBody>
+            <a:bodyPr rtlCol="0" anchor="ctr"/>
+            <a:lstStyle/>
+            <a:p>
+              <a:endParaRPr lang="ko-KR" altLang="en-US" dirty="0"/>
+            </a:p>
+          </p:txBody>
+        </p:sp>
+        <p:sp>
+          <p:nvSpPr>
+            <p:cNvPr id="38" name="TextBox 37">
+              <a:extLst>
+                <a:ext uri="{FF2B5EF4-FFF2-40B4-BE49-F238E27FC236}">
+                  <a16:creationId xmlns:a16="http://schemas.microsoft.com/office/drawing/2014/main" id="{A77399D3-7ABB-4224-A2C2-F2D6F3B7B8EB}"/>
+                </a:ext>
+              </a:extLst>
+            </p:cNvPr>
+            <p:cNvSpPr txBox="1"/>
+            <p:nvPr/>
+          </p:nvSpPr>
+          <p:spPr>
+            <a:xfrm>
+              <a:off x="1790980" y="3191902"/>
+              <a:ext cx="6662480" cy="1107996"/>
+            </a:xfrm>
+            <a:prstGeom prst="rect">
+              <a:avLst/>
+            </a:prstGeom>
+            <a:noFill/>
+          </p:spPr>
+          <p:txBody>
+            <a:bodyPr wrap="square" lIns="0" tIns="0" rIns="0" bIns="0" rtlCol="0">
+              <a:spAutoFit/>
+            </a:bodyPr>
+            <a:lstStyle/>
+            <a:p>
+              <a:pPr marL="285750" indent="-285750">
+                <a:buFont typeface="Batang" panose="02030600000101010101" pitchFamily="18" charset="-127"/>
+                <a:buChar char="→"/>
+              </a:pPr>
+              <a:r>
+                <a:rPr lang="ko-KR" altLang="en-US" sz="1200" dirty="0">
+                  <a:latin typeface="피플폰트 Bold" panose="020B0600000101010101" pitchFamily="50" charset="-127"/>
+                  <a:ea typeface="피플폰트 Bold" panose="020B0600000101010101" pitchFamily="50" charset="-127"/>
+                </a:rPr>
+                <a:t>낮은 인허가 리스크</a:t>
+              </a:r>
+              <a:endParaRPr lang="en-US" altLang="ko-KR" sz="1200" dirty="0">
+                <a:latin typeface="피플폰트 Bold" panose="020B0600000101010101" pitchFamily="50" charset="-127"/>
+                <a:ea typeface="피플폰트 Bold" panose="020B0600000101010101" pitchFamily="50" charset="-127"/>
+              </a:endParaRPr>
+            </a:p>
+            <a:p>
+              <a:pPr marL="742950" lvl="1" indent="-285750">
+                <a:buFont typeface="Wingdings" panose="05000000000000000000" pitchFamily="2" charset="2"/>
+                <a:buChar char="§"/>
+              </a:pPr>
+              <a:r>
+                <a:rPr lang="ko-KR" altLang="en-US" sz="1200" dirty="0">
+                  <a:solidFill>
+                    <a:schemeClr val="tx1">
+                      <a:lumMod val="65000"/>
+                      <a:lumOff val="35000"/>
+                    </a:schemeClr>
+                  </a:solidFill>
+                  <a:latin typeface="피플폰트 Bold" panose="020B0600000101010101" pitchFamily="50" charset="-127"/>
+                  <a:ea typeface="피플폰트 Bold" panose="020B0600000101010101" pitchFamily="50" charset="-127"/>
+                </a:rPr>
+                <a:t>‘</a:t>
+              </a:r>
+              <a:r>
+                <a:rPr lang="en-US" altLang="ko-KR" sz="1200" dirty="0">
+                  <a:solidFill>
+                    <a:schemeClr val="tx1">
+                      <a:lumMod val="65000"/>
+                      <a:lumOff val="35000"/>
+                    </a:schemeClr>
+                  </a:solidFill>
+                  <a:latin typeface="피플폰트 Bold" panose="020B0600000101010101" pitchFamily="50" charset="-127"/>
+                  <a:ea typeface="피플폰트 Bold" panose="020B0600000101010101" pitchFamily="50" charset="-127"/>
+                </a:rPr>
+                <a:t>25</a:t>
+              </a:r>
+              <a:r>
+                <a:rPr lang="ko-KR" altLang="en-US" sz="1200" dirty="0">
+                  <a:solidFill>
+                    <a:schemeClr val="tx1">
+                      <a:lumMod val="65000"/>
+                      <a:lumOff val="35000"/>
+                    </a:schemeClr>
+                  </a:solidFill>
+                  <a:latin typeface="피플폰트 Bold" panose="020B0600000101010101" pitchFamily="50" charset="-127"/>
+                  <a:ea typeface="피플폰트 Bold" panose="020B0600000101010101" pitchFamily="50" charset="-127"/>
+                </a:rPr>
+                <a:t>년 </a:t>
+              </a:r>
+              <a:r>
+                <a:rPr lang="en-US" altLang="ko-KR" sz="1200" dirty="0">
+                  <a:solidFill>
+                    <a:schemeClr val="tx1">
+                      <a:lumMod val="65000"/>
+                      <a:lumOff val="35000"/>
+                    </a:schemeClr>
+                  </a:solidFill>
+                  <a:latin typeface="피플폰트 Bold" panose="020B0600000101010101" pitchFamily="50" charset="-127"/>
+                  <a:ea typeface="피플폰트 Bold" panose="020B0600000101010101" pitchFamily="50" charset="-127"/>
+                </a:rPr>
+                <a:t>8</a:t>
+              </a:r>
+              <a:r>
+                <a:rPr lang="ko-KR" altLang="en-US" sz="1200" dirty="0">
+                  <a:solidFill>
+                    <a:schemeClr val="tx1">
+                      <a:lumMod val="65000"/>
+                      <a:lumOff val="35000"/>
+                    </a:schemeClr>
+                  </a:solidFill>
+                  <a:latin typeface="피플폰트 Bold" panose="020B0600000101010101" pitchFamily="50" charset="-127"/>
+                  <a:ea typeface="피플폰트 Bold" panose="020B0600000101010101" pitchFamily="50" charset="-127"/>
+                </a:rPr>
+                <a:t>월 실시계획인가 및 건축심의 완료</a:t>
+              </a:r>
+              <a:r>
+                <a:rPr lang="en-US" altLang="ko-KR" sz="1200" dirty="0">
+                  <a:solidFill>
+                    <a:schemeClr val="tx1">
+                      <a:lumMod val="65000"/>
+                      <a:lumOff val="35000"/>
+                    </a:schemeClr>
+                  </a:solidFill>
+                  <a:latin typeface="피플폰트 Bold" panose="020B0600000101010101" pitchFamily="50" charset="-127"/>
+                  <a:ea typeface="피플폰트 Bold" panose="020B0600000101010101" pitchFamily="50" charset="-127"/>
+                </a:rPr>
+                <a:t>, 26</a:t>
+              </a:r>
+              <a:r>
+                <a:rPr lang="ko-KR" altLang="en-US" sz="1200" dirty="0">
+                  <a:solidFill>
+                    <a:schemeClr val="tx1">
+                      <a:lumMod val="65000"/>
+                      <a:lumOff val="35000"/>
+                    </a:schemeClr>
+                  </a:solidFill>
+                  <a:latin typeface="피플폰트 Bold" panose="020B0600000101010101" pitchFamily="50" charset="-127"/>
+                  <a:ea typeface="피플폰트 Bold" panose="020B0600000101010101" pitchFamily="50" charset="-127"/>
+                </a:rPr>
+                <a:t>년 </a:t>
+              </a:r>
+              <a:r>
+                <a:rPr lang="en-US" altLang="ko-KR" sz="1200" dirty="0">
+                  <a:solidFill>
+                    <a:schemeClr val="tx1">
+                      <a:lumMod val="65000"/>
+                      <a:lumOff val="35000"/>
+                    </a:schemeClr>
+                  </a:solidFill>
+                  <a:latin typeface="피플폰트 Bold" panose="020B0600000101010101" pitchFamily="50" charset="-127"/>
+                  <a:ea typeface="피플폰트 Bold" panose="020B0600000101010101" pitchFamily="50" charset="-127"/>
+                </a:rPr>
+                <a:t>4</a:t>
+              </a:r>
+              <a:r>
+                <a:rPr lang="ko-KR" altLang="en-US" sz="1200" dirty="0">
+                  <a:solidFill>
+                    <a:schemeClr val="tx1">
+                      <a:lumMod val="65000"/>
+                      <a:lumOff val="35000"/>
+                    </a:schemeClr>
+                  </a:solidFill>
+                  <a:latin typeface="피플폰트 Bold" panose="020B0600000101010101" pitchFamily="50" charset="-127"/>
+                  <a:ea typeface="피플폰트 Bold" panose="020B0600000101010101" pitchFamily="50" charset="-127"/>
+                </a:rPr>
+                <a:t>월 사업계획 승인 완료 예정 </a:t>
+              </a:r>
+              <a:endParaRPr lang="en-US" altLang="ko-KR" sz="1200" dirty="0">
                 <a:solidFill>
                   <a:schemeClr val="tx1">
                     <a:lumMod val="65000"/>
@@ -7227,11 +8871,213 @@
                 </a:solidFill>
                 <a:latin typeface="피플폰트 Bold" panose="020B0600000101010101" pitchFamily="50" charset="-127"/>
                 <a:ea typeface="피플폰트 Bold" panose="020B0600000101010101" pitchFamily="50" charset="-127"/>
-              </a:rPr>
-              <a:t>월 실시계획인가 및 건축심의 완료</a:t>
-            </a:r>
-            <a:r>
-              <a:rPr lang="en-US" altLang="ko-KR" sz="1200" dirty="0">
+              </a:endParaRPr>
+            </a:p>
+            <a:p>
+              <a:pPr marL="285750" indent="-285750">
+                <a:buFont typeface="Batang" panose="02030600000101010101" pitchFamily="18" charset="-127"/>
+                <a:buChar char="→"/>
+              </a:pPr>
+              <a:r>
+                <a:rPr lang="ko-KR" altLang="en-US" sz="1200" dirty="0">
+                  <a:latin typeface="피플폰트 Bold" panose="020B0600000101010101" pitchFamily="50" charset="-127"/>
+                  <a:ea typeface="피플폰트 Bold" panose="020B0600000101010101" pitchFamily="50" charset="-127"/>
+                </a:rPr>
+                <a:t>시공사 리스크 </a:t>
+              </a:r>
+              <a:endParaRPr lang="en-US" altLang="ko-KR" sz="1200" dirty="0">
+                <a:latin typeface="피플폰트 Bold" panose="020B0600000101010101" pitchFamily="50" charset="-127"/>
+                <a:ea typeface="피플폰트 Bold" panose="020B0600000101010101" pitchFamily="50" charset="-127"/>
+              </a:endParaRPr>
+            </a:p>
+            <a:p>
+              <a:pPr marL="742950" lvl="1" indent="-285750">
+                <a:buFont typeface="Wingdings" panose="05000000000000000000" pitchFamily="2" charset="2"/>
+                <a:buChar char="§"/>
+              </a:pPr>
+              <a:r>
+                <a:rPr lang="ko-KR" altLang="en-US" sz="1200" dirty="0">
+                  <a:solidFill>
+                    <a:schemeClr val="tx1">
+                      <a:lumMod val="65000"/>
+                      <a:lumOff val="35000"/>
+                    </a:schemeClr>
+                  </a:solidFill>
+                  <a:latin typeface="피플폰트 Bold" panose="020B0600000101010101" pitchFamily="50" charset="-127"/>
+                  <a:ea typeface="피플폰트 Bold" panose="020B0600000101010101" pitchFamily="50" charset="-127"/>
+                </a:rPr>
+                <a:t>시공사인 </a:t>
+              </a:r>
+              <a:r>
+                <a:rPr lang="ko-KR" altLang="en-US" sz="1200" dirty="0" err="1">
+                  <a:solidFill>
+                    <a:schemeClr val="tx1">
+                      <a:lumMod val="65000"/>
+                      <a:lumOff val="35000"/>
+                    </a:schemeClr>
+                  </a:solidFill>
+                  <a:latin typeface="피플폰트 Bold" panose="020B0600000101010101" pitchFamily="50" charset="-127"/>
+                  <a:ea typeface="피플폰트 Bold" panose="020B0600000101010101" pitchFamily="50" charset="-127"/>
+                </a:rPr>
+                <a:t>포스코이앤씨</a:t>
+              </a:r>
+              <a:r>
+                <a:rPr lang="en-US" altLang="ko-KR" sz="1200" dirty="0">
+                  <a:solidFill>
+                    <a:schemeClr val="tx1">
+                      <a:lumMod val="65000"/>
+                      <a:lumOff val="35000"/>
+                    </a:schemeClr>
+                  </a:solidFill>
+                  <a:latin typeface="피플폰트 Bold" panose="020B0600000101010101" pitchFamily="50" charset="-127"/>
+                  <a:ea typeface="피플폰트 Bold" panose="020B0600000101010101" pitchFamily="50" charset="-127"/>
+                </a:rPr>
+                <a:t>(</a:t>
+              </a:r>
+              <a:r>
+                <a:rPr lang="ko-KR" altLang="en-US" sz="1200" dirty="0">
+                  <a:solidFill>
+                    <a:schemeClr val="tx1">
+                      <a:lumMod val="65000"/>
+                      <a:lumOff val="35000"/>
+                    </a:schemeClr>
+                  </a:solidFill>
+                  <a:latin typeface="피플폰트 Bold" panose="020B0600000101010101" pitchFamily="50" charset="-127"/>
+                  <a:ea typeface="피플폰트 Bold" panose="020B0600000101010101" pitchFamily="50" charset="-127"/>
+                </a:rPr>
+                <a:t>도급순위 </a:t>
+              </a:r>
+              <a:r>
+                <a:rPr lang="en-US" altLang="ko-KR" sz="1200" dirty="0">
+                  <a:solidFill>
+                    <a:schemeClr val="tx1">
+                      <a:lumMod val="65000"/>
+                      <a:lumOff val="35000"/>
+                    </a:schemeClr>
+                  </a:solidFill>
+                  <a:latin typeface="피플폰트 Bold" panose="020B0600000101010101" pitchFamily="50" charset="-127"/>
+                  <a:ea typeface="피플폰트 Bold" panose="020B0600000101010101" pitchFamily="50" charset="-127"/>
+                </a:rPr>
+                <a:t>7</a:t>
+              </a:r>
+              <a:r>
+                <a:rPr lang="ko-KR" altLang="en-US" sz="1200" dirty="0">
+                  <a:solidFill>
+                    <a:schemeClr val="tx1">
+                      <a:lumMod val="65000"/>
+                      <a:lumOff val="35000"/>
+                    </a:schemeClr>
+                  </a:solidFill>
+                  <a:latin typeface="피플폰트 Bold" panose="020B0600000101010101" pitchFamily="50" charset="-127"/>
+                  <a:ea typeface="피플폰트 Bold" panose="020B0600000101010101" pitchFamily="50" charset="-127"/>
+                </a:rPr>
+                <a:t>위</a:t>
+              </a:r>
+              <a:r>
+                <a:rPr lang="en-US" altLang="ko-KR" sz="1200" dirty="0">
+                  <a:solidFill>
+                    <a:schemeClr val="tx1">
+                      <a:lumMod val="65000"/>
+                      <a:lumOff val="35000"/>
+                    </a:schemeClr>
+                  </a:solidFill>
+                  <a:latin typeface="피플폰트 Bold" panose="020B0600000101010101" pitchFamily="50" charset="-127"/>
+                  <a:ea typeface="피플폰트 Bold" panose="020B0600000101010101" pitchFamily="50" charset="-127"/>
+                </a:rPr>
+                <a:t>, </a:t>
+              </a:r>
+              <a:r>
+                <a:rPr lang="ko-KR" altLang="en-US" sz="1200" dirty="0">
+                  <a:solidFill>
+                    <a:schemeClr val="tx1">
+                      <a:lumMod val="65000"/>
+                      <a:lumOff val="35000"/>
+                    </a:schemeClr>
+                  </a:solidFill>
+                  <a:latin typeface="피플폰트 Bold" panose="020B0600000101010101" pitchFamily="50" charset="-127"/>
+                  <a:ea typeface="피플폰트 Bold" panose="020B0600000101010101" pitchFamily="50" charset="-127"/>
+                </a:rPr>
+                <a:t>신용등급 </a:t>
+              </a:r>
+              <a:r>
+                <a:rPr lang="en-US" altLang="ko-KR" sz="1200" dirty="0">
+                  <a:solidFill>
+                    <a:schemeClr val="tx1">
+                      <a:lumMod val="65000"/>
+                      <a:lumOff val="35000"/>
+                    </a:schemeClr>
+                  </a:solidFill>
+                  <a:latin typeface="피플폰트 Bold" panose="020B0600000101010101" pitchFamily="50" charset="-127"/>
+                  <a:ea typeface="피플폰트 Bold" panose="020B0600000101010101" pitchFamily="50" charset="-127"/>
+                </a:rPr>
+                <a:t>A+)</a:t>
+              </a:r>
+              <a:r>
+                <a:rPr lang="ko-KR" altLang="en-US" sz="1200" dirty="0">
+                  <a:solidFill>
+                    <a:schemeClr val="tx1">
+                      <a:lumMod val="65000"/>
+                      <a:lumOff val="35000"/>
+                    </a:schemeClr>
+                  </a:solidFill>
+                  <a:latin typeface="피플폰트 Bold" panose="020B0600000101010101" pitchFamily="50" charset="-127"/>
+                  <a:ea typeface="피플폰트 Bold" panose="020B0600000101010101" pitchFamily="50" charset="-127"/>
+                </a:rPr>
+                <a:t> ‘</a:t>
+              </a:r>
+              <a:r>
+                <a:rPr lang="en-US" altLang="ko-KR" sz="1200" dirty="0">
+                  <a:solidFill>
+                    <a:schemeClr val="tx1">
+                      <a:lumMod val="65000"/>
+                      <a:lumOff val="35000"/>
+                    </a:schemeClr>
+                  </a:solidFill>
+                  <a:latin typeface="피플폰트 Bold" panose="020B0600000101010101" pitchFamily="50" charset="-127"/>
+                  <a:ea typeface="피플폰트 Bold" panose="020B0600000101010101" pitchFamily="50" charset="-127"/>
+                </a:rPr>
+                <a:t>26</a:t>
+              </a:r>
+              <a:r>
+                <a:rPr lang="ko-KR" altLang="en-US" sz="1200" dirty="0">
+                  <a:solidFill>
+                    <a:schemeClr val="tx1">
+                      <a:lumMod val="65000"/>
+                      <a:lumOff val="35000"/>
+                    </a:schemeClr>
+                  </a:solidFill>
+                  <a:latin typeface="피플폰트 Bold" panose="020B0600000101010101" pitchFamily="50" charset="-127"/>
+                  <a:ea typeface="피플폰트 Bold" panose="020B0600000101010101" pitchFamily="50" charset="-127"/>
+                </a:rPr>
+                <a:t>년 </a:t>
+              </a:r>
+              <a:r>
+                <a:rPr lang="en-US" altLang="ko-KR" sz="1200" dirty="0">
+                  <a:solidFill>
+                    <a:schemeClr val="tx1">
+                      <a:lumMod val="65000"/>
+                      <a:lumOff val="35000"/>
+                    </a:schemeClr>
+                  </a:solidFill>
+                  <a:latin typeface="피플폰트 Bold" panose="020B0600000101010101" pitchFamily="50" charset="-127"/>
+                  <a:ea typeface="피플폰트 Bold" panose="020B0600000101010101" pitchFamily="50" charset="-127"/>
+                </a:rPr>
+                <a:t>2</a:t>
+              </a:r>
+              <a:r>
+                <a:rPr lang="ko-KR" altLang="en-US" sz="1200" dirty="0">
+                  <a:solidFill>
+                    <a:schemeClr val="tx1">
+                      <a:lumMod val="65000"/>
+                      <a:lumOff val="35000"/>
+                    </a:schemeClr>
+                  </a:solidFill>
+                  <a:latin typeface="피플폰트 Bold" panose="020B0600000101010101" pitchFamily="50" charset="-127"/>
+                  <a:ea typeface="피플폰트 Bold" panose="020B0600000101010101" pitchFamily="50" charset="-127"/>
+                </a:rPr>
+                <a:t>월 최종 수주심의 완료</a:t>
+              </a:r>
+              <a:endParaRPr lang="en-US" altLang="ko-KR" sz="1200" dirty="0">
                 <a:solidFill>
                   <a:schemeClr val="tx1">
                     <a:lumMod val="65000"/>
@@ -7240,11 +9086,27 @@
                 </a:solidFill>
                 <a:latin typeface="피플폰트 Bold" panose="020B0600000101010101" pitchFamily="50" charset="-127"/>
                 <a:ea typeface="피플폰트 Bold" panose="020B0600000101010101" pitchFamily="50" charset="-127"/>
-              </a:rPr>
-              <a:t>, 26</a:t>
-            </a:r>
-            <a:r>
-              <a:rPr lang="ko-KR" altLang="en-US" sz="1200" dirty="0">
+              </a:endParaRPr>
+            </a:p>
+            <a:p>
+              <a:pPr marL="742950" lvl="1" indent="-285750">
+                <a:buFont typeface="Wingdings" panose="05000000000000000000" pitchFamily="2" charset="2"/>
+                <a:buChar char="§"/>
+              </a:pPr>
+              <a:r>
+                <a:rPr lang="ko-KR" altLang="en-US" sz="1200" dirty="0">
+                  <a:solidFill>
+                    <a:schemeClr val="tx1">
+                      <a:lumMod val="65000"/>
+                      <a:lumOff val="35000"/>
+                    </a:schemeClr>
+                  </a:solidFill>
+                  <a:latin typeface="피플폰트 Bold" panose="020B0600000101010101" pitchFamily="50" charset="-127"/>
+                  <a:ea typeface="피플폰트 Bold" panose="020B0600000101010101" pitchFamily="50" charset="-127"/>
+                </a:rPr>
+                <a:t>도급계약 체결 선행 조건</a:t>
+              </a:r>
+              <a:endParaRPr lang="en-US" altLang="ko-KR" sz="1200" dirty="0">
                 <a:solidFill>
                   <a:schemeClr val="tx1">
                     <a:lumMod val="65000"/>
@@ -7253,11 +9115,10 @@
                 </a:solidFill>
                 <a:latin typeface="피플폰트 Bold" panose="020B0600000101010101" pitchFamily="50" charset="-127"/>
                 <a:ea typeface="피플폰트 Bold" panose="020B0600000101010101" pitchFamily="50" charset="-127"/>
-              </a:rPr>
-              <a:t>년 </a:t>
-            </a:r>
-            <a:r>
-              <a:rPr lang="en-US" altLang="ko-KR" sz="1200" dirty="0">
+              </a:endParaRPr>
+            </a:p>
+            <a:p>
+              <a:endParaRPr lang="en-US" altLang="ko-KR" sz="1200" dirty="0">
                 <a:solidFill>
                   <a:schemeClr val="tx1">
                     <a:lumMod val="65000"/>
@@ -7266,11 +9127,309 @@
                 </a:solidFill>
                 <a:latin typeface="피플폰트 Bold" panose="020B0600000101010101" pitchFamily="50" charset="-127"/>
                 <a:ea typeface="피플폰트 Bold" panose="020B0600000101010101" pitchFamily="50" charset="-127"/>
-              </a:rPr>
-              <a:t>4</a:t>
-            </a:r>
-            <a:r>
-              <a:rPr lang="ko-KR" altLang="en-US" sz="1200" dirty="0">
+              </a:endParaRPr>
+            </a:p>
+          </p:txBody>
+        </p:sp>
+      </p:grpSp>
+      <p:grpSp>
+        <p:nvGrpSpPr>
+          <p:cNvPr id="5" name="그룹 4">
+            <a:extLst>
+              <a:ext uri="{FF2B5EF4-FFF2-40B4-BE49-F238E27FC236}">
+                <a16:creationId xmlns:a16="http://schemas.microsoft.com/office/drawing/2014/main" id="{4892850F-6B9B-40C5-9EE6-69ABBBCDFBDC}"/>
+              </a:ext>
+            </a:extLst>
+          </p:cNvPr>
+          <p:cNvGrpSpPr/>
+          <p:nvPr/>
+        </p:nvGrpSpPr>
+        <p:grpSpPr>
+          <a:xfrm>
+            <a:off x="1211516" y="3207951"/>
+            <a:ext cx="7530164" cy="1174243"/>
+            <a:chOff x="1211516" y="3125655"/>
+            <a:chExt cx="7530164" cy="1174243"/>
+          </a:xfrm>
+        </p:grpSpPr>
+        <p:sp>
+          <p:nvSpPr>
+            <p:cNvPr id="25" name="육각형 24">
+              <a:extLst>
+                <a:ext uri="{FF2B5EF4-FFF2-40B4-BE49-F238E27FC236}">
+                  <a16:creationId xmlns:a16="http://schemas.microsoft.com/office/drawing/2014/main" id="{34C4331A-3665-4D62-8E3C-7B11E0A556C4}"/>
+                </a:ext>
+              </a:extLst>
+            </p:cNvPr>
+            <p:cNvSpPr/>
+            <p:nvPr/>
+          </p:nvSpPr>
+          <p:spPr>
+            <a:xfrm>
+              <a:off x="1211516" y="3168315"/>
+              <a:ext cx="7530164" cy="1013176"/>
+            </a:xfrm>
+            <a:prstGeom prst="hexagon">
+              <a:avLst>
+                <a:gd name="adj" fmla="val 18529"/>
+                <a:gd name="vf" fmla="val 115470"/>
+              </a:avLst>
+            </a:prstGeom>
+            <a:solidFill>
+              <a:srgbClr val="2E75B6">
+                <a:alpha val="75000"/>
+              </a:srgbClr>
+            </a:solidFill>
+            <a:ln>
+              <a:noFill/>
+            </a:ln>
+          </p:spPr>
+          <p:style>
+            <a:lnRef idx="2">
+              <a:schemeClr val="accent1">
+                <a:shade val="50000"/>
+              </a:schemeClr>
+            </a:lnRef>
+            <a:fillRef idx="1">
+              <a:schemeClr val="accent1"/>
+            </a:fillRef>
+            <a:effectRef idx="0">
+              <a:schemeClr val="accent1"/>
+            </a:effectRef>
+            <a:fontRef idx="minor">
+              <a:schemeClr val="lt1"/>
+            </a:fontRef>
+          </p:style>
+          <p:txBody>
+            <a:bodyPr rtlCol="0" anchor="ctr"/>
+            <a:lstStyle/>
+            <a:p>
+              <a:pPr algn="ctr"/>
+              <a:endParaRPr lang="ko-KR" altLang="en-US" dirty="0"/>
+            </a:p>
+          </p:txBody>
+        </p:sp>
+        <p:sp>
+          <p:nvSpPr>
+            <p:cNvPr id="26" name="육각형 25">
+              <a:extLst>
+                <a:ext uri="{FF2B5EF4-FFF2-40B4-BE49-F238E27FC236}">
+                  <a16:creationId xmlns:a16="http://schemas.microsoft.com/office/drawing/2014/main" id="{7BF180A2-A688-40F0-A757-2E6DE480716C}"/>
+                </a:ext>
+              </a:extLst>
+            </p:cNvPr>
+            <p:cNvSpPr/>
+            <p:nvPr/>
+          </p:nvSpPr>
+          <p:spPr>
+            <a:xfrm>
+              <a:off x="1379372" y="3125655"/>
+              <a:ext cx="7175041" cy="1092412"/>
+            </a:xfrm>
+            <a:prstGeom prst="hexagon">
+              <a:avLst>
+                <a:gd name="adj" fmla="val 18529"/>
+                <a:gd name="vf" fmla="val 115470"/>
+              </a:avLst>
+            </a:prstGeom>
+            <a:solidFill>
+              <a:schemeClr val="bg1"/>
+            </a:solidFill>
+            <a:ln>
+              <a:noFill/>
+            </a:ln>
+          </p:spPr>
+          <p:style>
+            <a:lnRef idx="2">
+              <a:schemeClr val="accent1">
+                <a:shade val="50000"/>
+              </a:schemeClr>
+            </a:lnRef>
+            <a:fillRef idx="1">
+              <a:schemeClr val="accent1"/>
+            </a:fillRef>
+            <a:effectRef idx="0">
+              <a:schemeClr val="accent1"/>
+            </a:effectRef>
+            <a:fontRef idx="minor">
+              <a:schemeClr val="lt1"/>
+            </a:fontRef>
+          </p:style>
+          <p:txBody>
+            <a:bodyPr rtlCol="0" anchor="ctr"/>
+            <a:lstStyle/>
+            <a:p>
+              <a:endParaRPr lang="ko-KR" altLang="en-US" dirty="0"/>
+            </a:p>
+          </p:txBody>
+        </p:sp>
+        <p:sp>
+          <p:nvSpPr>
+            <p:cNvPr id="27" name="TextBox 26">
+              <a:extLst>
+                <a:ext uri="{FF2B5EF4-FFF2-40B4-BE49-F238E27FC236}">
+                  <a16:creationId xmlns:a16="http://schemas.microsoft.com/office/drawing/2014/main" id="{560AF0D2-5F4C-4C38-A7FF-0B4675AA3603}"/>
+                </a:ext>
+              </a:extLst>
+            </p:cNvPr>
+            <p:cNvSpPr txBox="1"/>
+            <p:nvPr/>
+          </p:nvSpPr>
+          <p:spPr>
+            <a:xfrm>
+              <a:off x="1790980" y="3191902"/>
+              <a:ext cx="6662480" cy="1107996"/>
+            </a:xfrm>
+            <a:prstGeom prst="rect">
+              <a:avLst/>
+            </a:prstGeom>
+            <a:noFill/>
+          </p:spPr>
+          <p:txBody>
+            <a:bodyPr wrap="square" lIns="0" tIns="0" rIns="0" bIns="0" rtlCol="0">
+              <a:spAutoFit/>
+            </a:bodyPr>
+            <a:lstStyle/>
+            <a:p>
+              <a:pPr marL="285750" indent="-285750">
+                <a:buFont typeface="Batang" panose="02030600000101010101" pitchFamily="18" charset="-127"/>
+                <a:buChar char="→"/>
+              </a:pPr>
+              <a:r>
+                <a:rPr lang="ko-KR" altLang="en-US" sz="1200" dirty="0">
+                  <a:latin typeface="피플폰트 Bold" panose="020B0600000101010101" pitchFamily="50" charset="-127"/>
+                  <a:ea typeface="피플폰트 Bold" panose="020B0600000101010101" pitchFamily="50" charset="-127"/>
+                </a:rPr>
+                <a:t>낮은 인허가 리스크</a:t>
+              </a:r>
+              <a:endParaRPr lang="en-US" altLang="ko-KR" sz="1200" dirty="0">
+                <a:latin typeface="피플폰트 Bold" panose="020B0600000101010101" pitchFamily="50" charset="-127"/>
+                <a:ea typeface="피플폰트 Bold" panose="020B0600000101010101" pitchFamily="50" charset="-127"/>
+              </a:endParaRPr>
+            </a:p>
+            <a:p>
+              <a:pPr marL="742950" lvl="1" indent="-285750">
+                <a:buFont typeface="Wingdings" panose="05000000000000000000" pitchFamily="2" charset="2"/>
+                <a:buChar char="§"/>
+              </a:pPr>
+              <a:r>
+                <a:rPr lang="ko-KR" altLang="en-US" sz="1200" dirty="0">
+                  <a:solidFill>
+                    <a:schemeClr val="tx1">
+                      <a:lumMod val="65000"/>
+                      <a:lumOff val="35000"/>
+                    </a:schemeClr>
+                  </a:solidFill>
+                  <a:latin typeface="피플폰트 Bold" panose="020B0600000101010101" pitchFamily="50" charset="-127"/>
+                  <a:ea typeface="피플폰트 Bold" panose="020B0600000101010101" pitchFamily="50" charset="-127"/>
+                </a:rPr>
+                <a:t>‘</a:t>
+              </a:r>
+              <a:r>
+                <a:rPr lang="en-US" altLang="ko-KR" sz="1200" dirty="0">
+                  <a:solidFill>
+                    <a:schemeClr val="tx1">
+                      <a:lumMod val="65000"/>
+                      <a:lumOff val="35000"/>
+                    </a:schemeClr>
+                  </a:solidFill>
+                  <a:latin typeface="피플폰트 Bold" panose="020B0600000101010101" pitchFamily="50" charset="-127"/>
+                  <a:ea typeface="피플폰트 Bold" panose="020B0600000101010101" pitchFamily="50" charset="-127"/>
+                </a:rPr>
+                <a:t>25</a:t>
+              </a:r>
+              <a:r>
+                <a:rPr lang="ko-KR" altLang="en-US" sz="1200" dirty="0">
+                  <a:solidFill>
+                    <a:schemeClr val="tx1">
+                      <a:lumMod val="65000"/>
+                      <a:lumOff val="35000"/>
+                    </a:schemeClr>
+                  </a:solidFill>
+                  <a:latin typeface="피플폰트 Bold" panose="020B0600000101010101" pitchFamily="50" charset="-127"/>
+                  <a:ea typeface="피플폰트 Bold" panose="020B0600000101010101" pitchFamily="50" charset="-127"/>
+                </a:rPr>
+                <a:t>년 </a:t>
+              </a:r>
+              <a:r>
+                <a:rPr lang="en-US" altLang="ko-KR" sz="1200" dirty="0">
+                  <a:solidFill>
+                    <a:schemeClr val="tx1">
+                      <a:lumMod val="65000"/>
+                      <a:lumOff val="35000"/>
+                    </a:schemeClr>
+                  </a:solidFill>
+                  <a:latin typeface="피플폰트 Bold" panose="020B0600000101010101" pitchFamily="50" charset="-127"/>
+                  <a:ea typeface="피플폰트 Bold" panose="020B0600000101010101" pitchFamily="50" charset="-127"/>
+                </a:rPr>
+                <a:t>8</a:t>
+              </a:r>
+              <a:r>
+                <a:rPr lang="ko-KR" altLang="en-US" sz="1200" dirty="0">
+                  <a:solidFill>
+                    <a:schemeClr val="tx1">
+                      <a:lumMod val="65000"/>
+                      <a:lumOff val="35000"/>
+                    </a:schemeClr>
+                  </a:solidFill>
+                  <a:latin typeface="피플폰트 Bold" panose="020B0600000101010101" pitchFamily="50" charset="-127"/>
+                  <a:ea typeface="피플폰트 Bold" panose="020B0600000101010101" pitchFamily="50" charset="-127"/>
+                </a:rPr>
+                <a:t>월 실시계획인가 및 건축심의 완료</a:t>
+              </a:r>
+              <a:r>
+                <a:rPr lang="en-US" altLang="ko-KR" sz="1200" dirty="0">
+                  <a:solidFill>
+                    <a:schemeClr val="tx1">
+                      <a:lumMod val="65000"/>
+                      <a:lumOff val="35000"/>
+                    </a:schemeClr>
+                  </a:solidFill>
+                  <a:latin typeface="피플폰트 Bold" panose="020B0600000101010101" pitchFamily="50" charset="-127"/>
+                  <a:ea typeface="피플폰트 Bold" panose="020B0600000101010101" pitchFamily="50" charset="-127"/>
+                </a:rPr>
+                <a:t>, 26</a:t>
+              </a:r>
+              <a:r>
+                <a:rPr lang="ko-KR" altLang="en-US" sz="1200" dirty="0">
+                  <a:solidFill>
+                    <a:schemeClr val="tx1">
+                      <a:lumMod val="65000"/>
+                      <a:lumOff val="35000"/>
+                    </a:schemeClr>
+                  </a:solidFill>
+                  <a:latin typeface="피플폰트 Bold" panose="020B0600000101010101" pitchFamily="50" charset="-127"/>
+                  <a:ea typeface="피플폰트 Bold" panose="020B0600000101010101" pitchFamily="50" charset="-127"/>
+                </a:rPr>
+                <a:t>년 </a:t>
+              </a:r>
+              <a:r>
+                <a:rPr lang="en-US" altLang="ko-KR" sz="1200" dirty="0">
+                  <a:solidFill>
+                    <a:schemeClr val="tx1">
+                      <a:lumMod val="65000"/>
+                      <a:lumOff val="35000"/>
+                    </a:schemeClr>
+                  </a:solidFill>
+                  <a:latin typeface="피플폰트 Bold" panose="020B0600000101010101" pitchFamily="50" charset="-127"/>
+                  <a:ea typeface="피플폰트 Bold" panose="020B0600000101010101" pitchFamily="50" charset="-127"/>
+                </a:rPr>
+                <a:t>4</a:t>
+              </a:r>
+              <a:r>
+                <a:rPr lang="ko-KR" altLang="en-US" sz="1200" dirty="0">
+                  <a:solidFill>
+                    <a:schemeClr val="tx1">
+                      <a:lumMod val="65000"/>
+                      <a:lumOff val="35000"/>
+                    </a:schemeClr>
+                  </a:solidFill>
+                  <a:latin typeface="피플폰트 Bold" panose="020B0600000101010101" pitchFamily="50" charset="-127"/>
+                  <a:ea typeface="피플폰트 Bold" panose="020B0600000101010101" pitchFamily="50" charset="-127"/>
+                </a:rPr>
+                <a:t>월 사업계획 승인 완료 예정 </a:t>
+              </a:r>
+              <a:endParaRPr lang="en-US" altLang="ko-KR" sz="1200" dirty="0">
                 <a:solidFill>
                   <a:schemeClr val="tx1">
                     <a:lumMod val="65000"/>
@@ -7279,44 +9438,213 @@
                 </a:solidFill>
                 <a:latin typeface="피플폰트 Bold" panose="020B0600000101010101" pitchFamily="50" charset="-127"/>
                 <a:ea typeface="피플폰트 Bold" panose="020B0600000101010101" pitchFamily="50" charset="-127"/>
-              </a:rPr>
-              <a:t>월 사업계획 승인 완료 예정 </a:t>
-            </a:r>
-            <a:endParaRPr lang="en-US" altLang="ko-KR" sz="1200" dirty="0">
-              <a:solidFill>
-                <a:schemeClr val="tx1">
-                  <a:lumMod val="65000"/>
-                  <a:lumOff val="35000"/>
-                </a:schemeClr>
-              </a:solidFill>
-              <a:latin typeface="피플폰트 Bold" panose="020B0600000101010101" pitchFamily="50" charset="-127"/>
-              <a:ea typeface="피플폰트 Bold" panose="020B0600000101010101" pitchFamily="50" charset="-127"/>
-            </a:endParaRPr>
-          </a:p>
-          <a:p>
-            <a:pPr marL="285750" indent="-285750">
-              <a:buFont typeface="Batang" panose="02030600000101010101" pitchFamily="18" charset="-127"/>
-              <a:buChar char="→"/>
-            </a:pPr>
-            <a:r>
-              <a:rPr lang="ko-KR" altLang="en-US" sz="1200" dirty="0">
+              </a:endParaRPr>
+            </a:p>
+            <a:p>
+              <a:pPr marL="285750" indent="-285750">
+                <a:buFont typeface="Batang" panose="02030600000101010101" pitchFamily="18" charset="-127"/>
+                <a:buChar char="→"/>
+              </a:pPr>
+              <a:r>
+                <a:rPr lang="ko-KR" altLang="en-US" sz="1200" dirty="0">
+                  <a:latin typeface="피플폰트 Bold" panose="020B0600000101010101" pitchFamily="50" charset="-127"/>
+                  <a:ea typeface="피플폰트 Bold" panose="020B0600000101010101" pitchFamily="50" charset="-127"/>
+                </a:rPr>
+                <a:t>시공사 리스크 </a:t>
+              </a:r>
+              <a:endParaRPr lang="en-US" altLang="ko-KR" sz="1200" dirty="0">
                 <a:latin typeface="피플폰트 Bold" panose="020B0600000101010101" pitchFamily="50" charset="-127"/>
                 <a:ea typeface="피플폰트 Bold" panose="020B0600000101010101" pitchFamily="50" charset="-127"/>
-              </a:rPr>
-              <a:t>시공사 리스크 </a:t>
-            </a:r>
-            <a:endParaRPr lang="en-US" altLang="ko-KR" sz="1200" dirty="0">
-              <a:latin typeface="피플폰트 Bold" panose="020B0600000101010101" pitchFamily="50" charset="-127"/>
-              <a:ea typeface="피플폰트 Bold" panose="020B0600000101010101" pitchFamily="50" charset="-127"/>
-            </a:endParaRPr>
-          </a:p>
-          <a:p>
-            <a:pPr marL="742950" lvl="1" indent="-285750">
-              <a:buFont typeface="Wingdings" panose="05000000000000000000" pitchFamily="2" charset="2"/>
-              <a:buChar char="§"/>
-            </a:pPr>
-            <a:r>
-              <a:rPr lang="ko-KR" altLang="en-US" sz="1200" dirty="0">
+              </a:endParaRPr>
+            </a:p>
+            <a:p>
+              <a:pPr marL="742950" lvl="1" indent="-285750">
+                <a:buFont typeface="Wingdings" panose="05000000000000000000" pitchFamily="2" charset="2"/>
+                <a:buChar char="§"/>
+              </a:pPr>
+              <a:r>
+                <a:rPr lang="ko-KR" altLang="en-US" sz="1200" dirty="0">
+                  <a:solidFill>
+                    <a:schemeClr val="tx1">
+                      <a:lumMod val="65000"/>
+                      <a:lumOff val="35000"/>
+                    </a:schemeClr>
+                  </a:solidFill>
+                  <a:latin typeface="피플폰트 Bold" panose="020B0600000101010101" pitchFamily="50" charset="-127"/>
+                  <a:ea typeface="피플폰트 Bold" panose="020B0600000101010101" pitchFamily="50" charset="-127"/>
+                </a:rPr>
+                <a:t>시공사인 </a:t>
+              </a:r>
+              <a:r>
+                <a:rPr lang="ko-KR" altLang="en-US" sz="1200" dirty="0" err="1">
+                  <a:solidFill>
+                    <a:schemeClr val="tx1">
+                      <a:lumMod val="65000"/>
+                      <a:lumOff val="35000"/>
+                    </a:schemeClr>
+                  </a:solidFill>
+                  <a:latin typeface="피플폰트 Bold" panose="020B0600000101010101" pitchFamily="50" charset="-127"/>
+                  <a:ea typeface="피플폰트 Bold" panose="020B0600000101010101" pitchFamily="50" charset="-127"/>
+                </a:rPr>
+                <a:t>포스코이앤씨</a:t>
+              </a:r>
+              <a:r>
+                <a:rPr lang="en-US" altLang="ko-KR" sz="1200" dirty="0">
+                  <a:solidFill>
+                    <a:schemeClr val="tx1">
+                      <a:lumMod val="65000"/>
+                      <a:lumOff val="35000"/>
+                    </a:schemeClr>
+                  </a:solidFill>
+                  <a:latin typeface="피플폰트 Bold" panose="020B0600000101010101" pitchFamily="50" charset="-127"/>
+                  <a:ea typeface="피플폰트 Bold" panose="020B0600000101010101" pitchFamily="50" charset="-127"/>
+                </a:rPr>
+                <a:t>(</a:t>
+              </a:r>
+              <a:r>
+                <a:rPr lang="ko-KR" altLang="en-US" sz="1200" dirty="0">
+                  <a:solidFill>
+                    <a:schemeClr val="tx1">
+                      <a:lumMod val="65000"/>
+                      <a:lumOff val="35000"/>
+                    </a:schemeClr>
+                  </a:solidFill>
+                  <a:latin typeface="피플폰트 Bold" panose="020B0600000101010101" pitchFamily="50" charset="-127"/>
+                  <a:ea typeface="피플폰트 Bold" panose="020B0600000101010101" pitchFamily="50" charset="-127"/>
+                </a:rPr>
+                <a:t>도급순위 </a:t>
+              </a:r>
+              <a:r>
+                <a:rPr lang="en-US" altLang="ko-KR" sz="1200" dirty="0">
+                  <a:solidFill>
+                    <a:schemeClr val="tx1">
+                      <a:lumMod val="65000"/>
+                      <a:lumOff val="35000"/>
+                    </a:schemeClr>
+                  </a:solidFill>
+                  <a:latin typeface="피플폰트 Bold" panose="020B0600000101010101" pitchFamily="50" charset="-127"/>
+                  <a:ea typeface="피플폰트 Bold" panose="020B0600000101010101" pitchFamily="50" charset="-127"/>
+                </a:rPr>
+                <a:t>7</a:t>
+              </a:r>
+              <a:r>
+                <a:rPr lang="ko-KR" altLang="en-US" sz="1200" dirty="0">
+                  <a:solidFill>
+                    <a:schemeClr val="tx1">
+                      <a:lumMod val="65000"/>
+                      <a:lumOff val="35000"/>
+                    </a:schemeClr>
+                  </a:solidFill>
+                  <a:latin typeface="피플폰트 Bold" panose="020B0600000101010101" pitchFamily="50" charset="-127"/>
+                  <a:ea typeface="피플폰트 Bold" panose="020B0600000101010101" pitchFamily="50" charset="-127"/>
+                </a:rPr>
+                <a:t>위</a:t>
+              </a:r>
+              <a:r>
+                <a:rPr lang="en-US" altLang="ko-KR" sz="1200" dirty="0">
+                  <a:solidFill>
+                    <a:schemeClr val="tx1">
+                      <a:lumMod val="65000"/>
+                      <a:lumOff val="35000"/>
+                    </a:schemeClr>
+                  </a:solidFill>
+                  <a:latin typeface="피플폰트 Bold" panose="020B0600000101010101" pitchFamily="50" charset="-127"/>
+                  <a:ea typeface="피플폰트 Bold" panose="020B0600000101010101" pitchFamily="50" charset="-127"/>
+                </a:rPr>
+                <a:t>, </a:t>
+              </a:r>
+              <a:r>
+                <a:rPr lang="ko-KR" altLang="en-US" sz="1200" dirty="0">
+                  <a:solidFill>
+                    <a:schemeClr val="tx1">
+                      <a:lumMod val="65000"/>
+                      <a:lumOff val="35000"/>
+                    </a:schemeClr>
+                  </a:solidFill>
+                  <a:latin typeface="피플폰트 Bold" panose="020B0600000101010101" pitchFamily="50" charset="-127"/>
+                  <a:ea typeface="피플폰트 Bold" panose="020B0600000101010101" pitchFamily="50" charset="-127"/>
+                </a:rPr>
+                <a:t>신용등급 </a:t>
+              </a:r>
+              <a:r>
+                <a:rPr lang="en-US" altLang="ko-KR" sz="1200" dirty="0">
+                  <a:solidFill>
+                    <a:schemeClr val="tx1">
+                      <a:lumMod val="65000"/>
+                      <a:lumOff val="35000"/>
+                    </a:schemeClr>
+                  </a:solidFill>
+                  <a:latin typeface="피플폰트 Bold" panose="020B0600000101010101" pitchFamily="50" charset="-127"/>
+                  <a:ea typeface="피플폰트 Bold" panose="020B0600000101010101" pitchFamily="50" charset="-127"/>
+                </a:rPr>
+                <a:t>A+)</a:t>
+              </a:r>
+              <a:r>
+                <a:rPr lang="ko-KR" altLang="en-US" sz="1200" dirty="0">
+                  <a:solidFill>
+                    <a:schemeClr val="tx1">
+                      <a:lumMod val="65000"/>
+                      <a:lumOff val="35000"/>
+                    </a:schemeClr>
+                  </a:solidFill>
+                  <a:latin typeface="피플폰트 Bold" panose="020B0600000101010101" pitchFamily="50" charset="-127"/>
+                  <a:ea typeface="피플폰트 Bold" panose="020B0600000101010101" pitchFamily="50" charset="-127"/>
+                </a:rPr>
+                <a:t> ‘</a:t>
+              </a:r>
+              <a:r>
+                <a:rPr lang="en-US" altLang="ko-KR" sz="1200" dirty="0">
+                  <a:solidFill>
+                    <a:schemeClr val="tx1">
+                      <a:lumMod val="65000"/>
+                      <a:lumOff val="35000"/>
+                    </a:schemeClr>
+                  </a:solidFill>
+                  <a:latin typeface="피플폰트 Bold" panose="020B0600000101010101" pitchFamily="50" charset="-127"/>
+                  <a:ea typeface="피플폰트 Bold" panose="020B0600000101010101" pitchFamily="50" charset="-127"/>
+                </a:rPr>
+                <a:t>26</a:t>
+              </a:r>
+              <a:r>
+                <a:rPr lang="ko-KR" altLang="en-US" sz="1200" dirty="0">
+                  <a:solidFill>
+                    <a:schemeClr val="tx1">
+                      <a:lumMod val="65000"/>
+                      <a:lumOff val="35000"/>
+                    </a:schemeClr>
+                  </a:solidFill>
+                  <a:latin typeface="피플폰트 Bold" panose="020B0600000101010101" pitchFamily="50" charset="-127"/>
+                  <a:ea typeface="피플폰트 Bold" panose="020B0600000101010101" pitchFamily="50" charset="-127"/>
+                </a:rPr>
+                <a:t>년 </a:t>
+              </a:r>
+              <a:r>
+                <a:rPr lang="en-US" altLang="ko-KR" sz="1200" dirty="0">
+                  <a:solidFill>
+                    <a:schemeClr val="tx1">
+                      <a:lumMod val="65000"/>
+                      <a:lumOff val="35000"/>
+                    </a:schemeClr>
+                  </a:solidFill>
+                  <a:latin typeface="피플폰트 Bold" panose="020B0600000101010101" pitchFamily="50" charset="-127"/>
+                  <a:ea typeface="피플폰트 Bold" panose="020B0600000101010101" pitchFamily="50" charset="-127"/>
+                </a:rPr>
+                <a:t>2</a:t>
+              </a:r>
+              <a:r>
+                <a:rPr lang="ko-KR" altLang="en-US" sz="1200" dirty="0">
+                  <a:solidFill>
+                    <a:schemeClr val="tx1">
+                      <a:lumMod val="65000"/>
+                      <a:lumOff val="35000"/>
+                    </a:schemeClr>
+                  </a:solidFill>
+                  <a:latin typeface="피플폰트 Bold" panose="020B0600000101010101" pitchFamily="50" charset="-127"/>
+                  <a:ea typeface="피플폰트 Bold" panose="020B0600000101010101" pitchFamily="50" charset="-127"/>
+                </a:rPr>
+                <a:t>월 최종 수주심의 완료</a:t>
+              </a:r>
+              <a:endParaRPr lang="en-US" altLang="ko-KR" sz="1200" dirty="0">
                 <a:solidFill>
                   <a:schemeClr val="tx1">
                     <a:lumMod val="65000"/>
@@ -7325,11 +9653,27 @@
                 </a:solidFill>
                 <a:latin typeface="피플폰트 Bold" panose="020B0600000101010101" pitchFamily="50" charset="-127"/>
                 <a:ea typeface="피플폰트 Bold" panose="020B0600000101010101" pitchFamily="50" charset="-127"/>
-              </a:rPr>
-              <a:t>시공사인 </a:t>
-            </a:r>
-            <a:r>
-              <a:rPr lang="ko-KR" altLang="en-US" sz="1200" dirty="0" err="1">
+              </a:endParaRPr>
+            </a:p>
+            <a:p>
+              <a:pPr marL="742950" lvl="1" indent="-285750">
+                <a:buFont typeface="Wingdings" panose="05000000000000000000" pitchFamily="2" charset="2"/>
+                <a:buChar char="§"/>
+              </a:pPr>
+              <a:r>
+                <a:rPr lang="ko-KR" altLang="en-US" sz="1200" dirty="0">
+                  <a:solidFill>
+                    <a:schemeClr val="tx1">
+                      <a:lumMod val="65000"/>
+                      <a:lumOff val="35000"/>
+                    </a:schemeClr>
+                  </a:solidFill>
+                  <a:latin typeface="피플폰트 Bold" panose="020B0600000101010101" pitchFamily="50" charset="-127"/>
+                  <a:ea typeface="피플폰트 Bold" panose="020B0600000101010101" pitchFamily="50" charset="-127"/>
+                </a:rPr>
+                <a:t>도급계약 체결 선행 조건</a:t>
+              </a:r>
+              <a:endParaRPr lang="en-US" altLang="ko-KR" sz="1200" dirty="0">
                 <a:solidFill>
                   <a:schemeClr val="tx1">
                     <a:lumMod val="65000"/>
@@ -7338,11 +9682,10 @@
                 </a:solidFill>
                 <a:latin typeface="피플폰트 Bold" panose="020B0600000101010101" pitchFamily="50" charset="-127"/>
                 <a:ea typeface="피플폰트 Bold" panose="020B0600000101010101" pitchFamily="50" charset="-127"/>
-              </a:rPr>
-              <a:t>포스코이앤씨</a:t>
-            </a:r>
-            <a:r>
-              <a:rPr lang="en-US" altLang="ko-KR" sz="1200" dirty="0">
+              </a:endParaRPr>
+            </a:p>
+            <a:p>
+              <a:endParaRPr lang="en-US" altLang="ko-KR" sz="1200" dirty="0">
                 <a:solidFill>
                   <a:schemeClr val="tx1">
                     <a:lumMod val="65000"/>
@@ -7351,206 +9694,11 @@
                 </a:solidFill>
                 <a:latin typeface="피플폰트 Bold" panose="020B0600000101010101" pitchFamily="50" charset="-127"/>
                 <a:ea typeface="피플폰트 Bold" panose="020B0600000101010101" pitchFamily="50" charset="-127"/>
-              </a:rPr>
-              <a:t>(</a:t>
-            </a:r>
-            <a:r>
-              <a:rPr lang="ko-KR" altLang="en-US" sz="1200" dirty="0">
-                <a:solidFill>
-                  <a:schemeClr val="tx1">
-                    <a:lumMod val="65000"/>
-                    <a:lumOff val="35000"/>
-                  </a:schemeClr>
-                </a:solidFill>
-                <a:latin typeface="피플폰트 Bold" panose="020B0600000101010101" pitchFamily="50" charset="-127"/>
-                <a:ea typeface="피플폰트 Bold" panose="020B0600000101010101" pitchFamily="50" charset="-127"/>
-              </a:rPr>
-              <a:t>도급순위 </a:t>
-            </a:r>
-            <a:r>
-              <a:rPr lang="en-US" altLang="ko-KR" sz="1200" dirty="0">
-                <a:solidFill>
-                  <a:schemeClr val="tx1">
-                    <a:lumMod val="65000"/>
-                    <a:lumOff val="35000"/>
-                  </a:schemeClr>
-                </a:solidFill>
-                <a:latin typeface="피플폰트 Bold" panose="020B0600000101010101" pitchFamily="50" charset="-127"/>
-                <a:ea typeface="피플폰트 Bold" panose="020B0600000101010101" pitchFamily="50" charset="-127"/>
-              </a:rPr>
-              <a:t>7</a:t>
-            </a:r>
-            <a:r>
-              <a:rPr lang="ko-KR" altLang="en-US" sz="1200" dirty="0">
-                <a:solidFill>
-                  <a:schemeClr val="tx1">
-                    <a:lumMod val="65000"/>
-                    <a:lumOff val="35000"/>
-                  </a:schemeClr>
-                </a:solidFill>
-                <a:latin typeface="피플폰트 Bold" panose="020B0600000101010101" pitchFamily="50" charset="-127"/>
-                <a:ea typeface="피플폰트 Bold" panose="020B0600000101010101" pitchFamily="50" charset="-127"/>
-              </a:rPr>
-              <a:t>위</a:t>
-            </a:r>
-            <a:r>
-              <a:rPr lang="en-US" altLang="ko-KR" sz="1200" dirty="0">
-                <a:solidFill>
-                  <a:schemeClr val="tx1">
-                    <a:lumMod val="65000"/>
-                    <a:lumOff val="35000"/>
-                  </a:schemeClr>
-                </a:solidFill>
-                <a:latin typeface="피플폰트 Bold" panose="020B0600000101010101" pitchFamily="50" charset="-127"/>
-                <a:ea typeface="피플폰트 Bold" panose="020B0600000101010101" pitchFamily="50" charset="-127"/>
-              </a:rPr>
-              <a:t>, </a:t>
-            </a:r>
-            <a:r>
-              <a:rPr lang="ko-KR" altLang="en-US" sz="1200" dirty="0">
-                <a:solidFill>
-                  <a:schemeClr val="tx1">
-                    <a:lumMod val="65000"/>
-                    <a:lumOff val="35000"/>
-                  </a:schemeClr>
-                </a:solidFill>
-                <a:latin typeface="피플폰트 Bold" panose="020B0600000101010101" pitchFamily="50" charset="-127"/>
-                <a:ea typeface="피플폰트 Bold" panose="020B0600000101010101" pitchFamily="50" charset="-127"/>
-              </a:rPr>
-              <a:t>신용등급 </a:t>
-            </a:r>
-            <a:r>
-              <a:rPr lang="en-US" altLang="ko-KR" sz="1200" dirty="0">
-                <a:solidFill>
-                  <a:schemeClr val="tx1">
-                    <a:lumMod val="65000"/>
-                    <a:lumOff val="35000"/>
-                  </a:schemeClr>
-                </a:solidFill>
-                <a:latin typeface="피플폰트 Bold" panose="020B0600000101010101" pitchFamily="50" charset="-127"/>
-                <a:ea typeface="피플폰트 Bold" panose="020B0600000101010101" pitchFamily="50" charset="-127"/>
-              </a:rPr>
-              <a:t>A+)</a:t>
-            </a:r>
-            <a:r>
-              <a:rPr lang="ko-KR" altLang="en-US" sz="1200" dirty="0">
-                <a:solidFill>
-                  <a:schemeClr val="tx1">
-                    <a:lumMod val="65000"/>
-                    <a:lumOff val="35000"/>
-                  </a:schemeClr>
-                </a:solidFill>
-                <a:latin typeface="피플폰트 Bold" panose="020B0600000101010101" pitchFamily="50" charset="-127"/>
-                <a:ea typeface="피플폰트 Bold" panose="020B0600000101010101" pitchFamily="50" charset="-127"/>
-              </a:rPr>
-              <a:t> ‘</a:t>
-            </a:r>
-            <a:r>
-              <a:rPr lang="en-US" altLang="ko-KR" sz="1200" dirty="0">
-                <a:solidFill>
-                  <a:schemeClr val="tx1">
-                    <a:lumMod val="65000"/>
-                    <a:lumOff val="35000"/>
-                  </a:schemeClr>
-                </a:solidFill>
-                <a:latin typeface="피플폰트 Bold" panose="020B0600000101010101" pitchFamily="50" charset="-127"/>
-                <a:ea typeface="피플폰트 Bold" panose="020B0600000101010101" pitchFamily="50" charset="-127"/>
-              </a:rPr>
-              <a:t>26</a:t>
-            </a:r>
-            <a:r>
-              <a:rPr lang="ko-KR" altLang="en-US" sz="1200" dirty="0">
-                <a:solidFill>
-                  <a:schemeClr val="tx1">
-                    <a:lumMod val="65000"/>
-                    <a:lumOff val="35000"/>
-                  </a:schemeClr>
-                </a:solidFill>
-                <a:latin typeface="피플폰트 Bold" panose="020B0600000101010101" pitchFamily="50" charset="-127"/>
-                <a:ea typeface="피플폰트 Bold" panose="020B0600000101010101" pitchFamily="50" charset="-127"/>
-              </a:rPr>
-              <a:t>년 </a:t>
-            </a:r>
-            <a:r>
-              <a:rPr lang="en-US" altLang="ko-KR" sz="1200" dirty="0">
-                <a:solidFill>
-                  <a:schemeClr val="tx1">
-                    <a:lumMod val="65000"/>
-                    <a:lumOff val="35000"/>
-                  </a:schemeClr>
-                </a:solidFill>
-                <a:latin typeface="피플폰트 Bold" panose="020B0600000101010101" pitchFamily="50" charset="-127"/>
-                <a:ea typeface="피플폰트 Bold" panose="020B0600000101010101" pitchFamily="50" charset="-127"/>
-              </a:rPr>
-              <a:t>2</a:t>
-            </a:r>
-            <a:r>
-              <a:rPr lang="ko-KR" altLang="en-US" sz="1200" dirty="0">
-                <a:solidFill>
-                  <a:schemeClr val="tx1">
-                    <a:lumMod val="65000"/>
-                    <a:lumOff val="35000"/>
-                  </a:schemeClr>
-                </a:solidFill>
-                <a:latin typeface="피플폰트 Bold" panose="020B0600000101010101" pitchFamily="50" charset="-127"/>
-                <a:ea typeface="피플폰트 Bold" panose="020B0600000101010101" pitchFamily="50" charset="-127"/>
-              </a:rPr>
-              <a:t>월 최종 수주심의 완료</a:t>
-            </a:r>
-            <a:endParaRPr lang="en-US" altLang="ko-KR" sz="1200" dirty="0">
-              <a:solidFill>
-                <a:schemeClr val="tx1">
-                  <a:lumMod val="65000"/>
-                  <a:lumOff val="35000"/>
-                </a:schemeClr>
-              </a:solidFill>
-              <a:latin typeface="피플폰트 Bold" panose="020B0600000101010101" pitchFamily="50" charset="-127"/>
-              <a:ea typeface="피플폰트 Bold" panose="020B0600000101010101" pitchFamily="50" charset="-127"/>
-            </a:endParaRPr>
-          </a:p>
-          <a:p>
-            <a:pPr marL="742950" lvl="1" indent="-285750">
-              <a:buFont typeface="Wingdings" panose="05000000000000000000" pitchFamily="2" charset="2"/>
-              <a:buChar char="§"/>
-            </a:pPr>
-            <a:r>
-              <a:rPr lang="ko-KR" altLang="en-US" sz="1200" dirty="0">
-                <a:solidFill>
-                  <a:schemeClr val="tx1">
-                    <a:lumMod val="65000"/>
-                    <a:lumOff val="35000"/>
-                  </a:schemeClr>
-                </a:solidFill>
-                <a:latin typeface="피플폰트 Bold" panose="020B0600000101010101" pitchFamily="50" charset="-127"/>
-                <a:ea typeface="피플폰트 Bold" panose="020B0600000101010101" pitchFamily="50" charset="-127"/>
-              </a:rPr>
-              <a:t>도급계약 체결 선행 조건</a:t>
-            </a:r>
-            <a:endParaRPr lang="en-US" altLang="ko-KR" sz="1200" dirty="0">
-              <a:solidFill>
-                <a:schemeClr val="tx1">
-                  <a:lumMod val="65000"/>
-                  <a:lumOff val="35000"/>
-                </a:schemeClr>
-              </a:solidFill>
-              <a:latin typeface="피플폰트 Bold" panose="020B0600000101010101" pitchFamily="50" charset="-127"/>
-              <a:ea typeface="피플폰트 Bold" panose="020B0600000101010101" pitchFamily="50" charset="-127"/>
-            </a:endParaRPr>
-          </a:p>
-          <a:p>
-            <a:endParaRPr lang="en-US" altLang="ko-KR" sz="1200" dirty="0">
-              <a:solidFill>
-                <a:schemeClr val="tx1">
-                  <a:lumMod val="65000"/>
-                  <a:lumOff val="35000"/>
-                </a:schemeClr>
-              </a:solidFill>
-              <a:latin typeface="피플폰트 Bold" panose="020B0600000101010101" pitchFamily="50" charset="-127"/>
-              <a:ea typeface="피플폰트 Bold" panose="020B0600000101010101" pitchFamily="50" charset="-127"/>
-            </a:endParaRPr>
-          </a:p>
-        </p:txBody>
-      </p:sp>
+              </a:endParaRPr>
+            </a:p>
+          </p:txBody>
+        </p:sp>
+      </p:grpSp>
       <p:grpSp>
         <p:nvGrpSpPr>
           <p:cNvPr id="3" name="그룹 2">
@@ -7565,7 +9713,7 @@
         </p:nvGrpSpPr>
         <p:grpSpPr>
           <a:xfrm>
-            <a:off x="3083734" y="2517205"/>
+            <a:off x="3083734" y="2599501"/>
             <a:ext cx="3507352" cy="369332"/>
             <a:chOff x="3444233" y="2876563"/>
             <a:chExt cx="3507352" cy="369332"/>
@@ -7779,90 +9927,6 @@
           </a:prstGeom>
         </p:spPr>
       </p:pic>
-      <p:sp>
-        <p:nvSpPr>
-          <p:cNvPr id="51" name="TextBox 50">
-            <a:extLst>
-              <a:ext uri="{FF2B5EF4-FFF2-40B4-BE49-F238E27FC236}">
-                <a16:creationId xmlns:a16="http://schemas.microsoft.com/office/drawing/2014/main" id="{10C8C1A4-BCFC-4519-AD02-88CF579F3C27}"/>
-              </a:ext>
-            </a:extLst>
-          </p:cNvPr>
-          <p:cNvSpPr txBox="1"/>
-          <p:nvPr/>
-        </p:nvSpPr>
-        <p:spPr>
-          <a:xfrm>
-            <a:off x="1618298" y="5580365"/>
-            <a:ext cx="6340064" cy="169277"/>
-          </a:xfrm>
-          <a:prstGeom prst="rect">
-            <a:avLst/>
-          </a:prstGeom>
-          <a:noFill/>
-        </p:spPr>
-        <p:txBody>
-          <a:bodyPr wrap="square" lIns="0" tIns="0" rIns="0" bIns="0" rtlCol="0">
-            <a:spAutoFit/>
-          </a:bodyPr>
-          <a:lstStyle/>
-          <a:p>
-            <a:pPr marL="285750" indent="-285750">
-              <a:buFont typeface="Batang" panose="02030600000101010101" pitchFamily="18" charset="-127"/>
-              <a:buChar char="→"/>
-            </a:pPr>
-            <a:r>
-              <a:rPr lang="ko-KR" altLang="en-US" sz="1100" dirty="0">
-                <a:solidFill>
-                  <a:schemeClr val="tx1">
-                    <a:lumMod val="65000"/>
-                    <a:lumOff val="35000"/>
-                  </a:schemeClr>
-                </a:solidFill>
-                <a:latin typeface="피플폰트 Bold" panose="020B0600000101010101" pitchFamily="50" charset="-127"/>
-                <a:ea typeface="피플폰트 Bold" panose="020B0600000101010101" pitchFamily="50" charset="-127"/>
-              </a:rPr>
-              <a:t>만기 발행일로부터 </a:t>
-            </a:r>
-            <a:r>
-              <a:rPr lang="en-US" altLang="ko-KR" sz="1100" dirty="0">
-                <a:solidFill>
-                  <a:schemeClr val="tx1">
-                    <a:lumMod val="65000"/>
-                    <a:lumOff val="35000"/>
-                  </a:schemeClr>
-                </a:solidFill>
-                <a:latin typeface="피플폰트 Bold" panose="020B0600000101010101" pitchFamily="50" charset="-127"/>
-                <a:ea typeface="피플폰트 Bold" panose="020B0600000101010101" pitchFamily="50" charset="-127"/>
-              </a:rPr>
-              <a:t>6</a:t>
-            </a:r>
-            <a:r>
-              <a:rPr lang="ko-KR" altLang="en-US" sz="1100" dirty="0">
-                <a:solidFill>
-                  <a:schemeClr val="tx1">
-                    <a:lumMod val="65000"/>
-                    <a:lumOff val="35000"/>
-                  </a:schemeClr>
-                </a:solidFill>
-                <a:latin typeface="피플폰트 Bold" panose="020B0600000101010101" pitchFamily="50" charset="-127"/>
-                <a:ea typeface="피플폰트 Bold" panose="020B0600000101010101" pitchFamily="50" charset="-127"/>
-              </a:rPr>
-              <a:t>개월 만기로 짧은 만기</a:t>
-            </a:r>
-            <a:endParaRPr lang="en-US" altLang="ko-KR" sz="1100" dirty="0">
-              <a:solidFill>
-                <a:schemeClr val="tx1">
-                  <a:lumMod val="65000"/>
-                  <a:lumOff val="35000"/>
-                </a:schemeClr>
-              </a:solidFill>
-              <a:latin typeface="피플폰트 Bold" panose="020B0600000101010101" pitchFamily="50" charset="-127"/>
-              <a:ea typeface="피플폰트 Bold" panose="020B0600000101010101" pitchFamily="50" charset="-127"/>
-            </a:endParaRPr>
-          </a:p>
-        </p:txBody>
-      </p:sp>
       <p:grpSp>
         <p:nvGrpSpPr>
           <p:cNvPr id="52" name="그룹 51">
@@ -8073,7 +10137,7 @@
         </p:nvSpPr>
         <p:spPr>
           <a:xfrm>
-            <a:off x="2471497" y="2853424"/>
+            <a:off x="2471497" y="2935720"/>
             <a:ext cx="4680863" cy="253916"/>
           </a:xfrm>
           <a:prstGeom prst="rect">
@@ -8103,360 +10167,6 @@
             <a:endParaRPr lang="en-US" altLang="ko-KR" sz="1050" dirty="0">
               <a:solidFill>
                 <a:srgbClr val="0070C0"/>
-              </a:solidFill>
-              <a:latin typeface="피플폰트 Bold" panose="020B0600000101010101" pitchFamily="50" charset="-127"/>
-              <a:ea typeface="피플폰트 Bold" panose="020B0600000101010101" pitchFamily="50" charset="-127"/>
-            </a:endParaRPr>
-          </a:p>
-        </p:txBody>
-      </p:sp>
-      <p:sp>
-        <p:nvSpPr>
-          <p:cNvPr id="30" name="육각형 29">
-            <a:extLst>
-              <a:ext uri="{FF2B5EF4-FFF2-40B4-BE49-F238E27FC236}">
-                <a16:creationId xmlns:a16="http://schemas.microsoft.com/office/drawing/2014/main" id="{76C5E0ED-9FEC-4202-B067-11F4586C6BA6}"/>
-              </a:ext>
-            </a:extLst>
-          </p:cNvPr>
-          <p:cNvSpPr/>
-          <p:nvPr/>
-        </p:nvSpPr>
-        <p:spPr>
-          <a:xfrm>
-            <a:off x="1187918" y="1441089"/>
-            <a:ext cx="7530164" cy="1013176"/>
-          </a:xfrm>
-          <a:prstGeom prst="hexagon">
-            <a:avLst>
-              <a:gd name="adj" fmla="val 18529"/>
-              <a:gd name="vf" fmla="val 115470"/>
-            </a:avLst>
-          </a:prstGeom>
-          <a:solidFill>
-            <a:srgbClr val="2E75B6">
-              <a:alpha val="75000"/>
-            </a:srgbClr>
-          </a:solidFill>
-          <a:ln>
-            <a:noFill/>
-          </a:ln>
-        </p:spPr>
-        <p:style>
-          <a:lnRef idx="2">
-            <a:schemeClr val="accent1">
-              <a:shade val="50000"/>
-            </a:schemeClr>
-          </a:lnRef>
-          <a:fillRef idx="1">
-            <a:schemeClr val="accent1"/>
-          </a:fillRef>
-          <a:effectRef idx="0">
-            <a:schemeClr val="accent1"/>
-          </a:effectRef>
-          <a:fontRef idx="minor">
-            <a:schemeClr val="lt1"/>
-          </a:fontRef>
-        </p:style>
-        <p:txBody>
-          <a:bodyPr rtlCol="0" anchor="ctr"/>
-          <a:lstStyle/>
-          <a:p>
-            <a:pPr algn="ctr"/>
-            <a:endParaRPr lang="ko-KR" altLang="en-US" dirty="0"/>
-          </a:p>
-        </p:txBody>
-      </p:sp>
-      <p:sp>
-        <p:nvSpPr>
-          <p:cNvPr id="31" name="육각형 30">
-            <a:extLst>
-              <a:ext uri="{FF2B5EF4-FFF2-40B4-BE49-F238E27FC236}">
-                <a16:creationId xmlns:a16="http://schemas.microsoft.com/office/drawing/2014/main" id="{07C2B09D-C354-4D56-9466-AB8D1449EC7A}"/>
-              </a:ext>
-            </a:extLst>
-          </p:cNvPr>
-          <p:cNvSpPr/>
-          <p:nvPr/>
-        </p:nvSpPr>
-        <p:spPr>
-          <a:xfrm>
-            <a:off x="1355774" y="1398429"/>
-            <a:ext cx="7175041" cy="1092412"/>
-          </a:xfrm>
-          <a:prstGeom prst="hexagon">
-            <a:avLst>
-              <a:gd name="adj" fmla="val 18529"/>
-              <a:gd name="vf" fmla="val 115470"/>
-            </a:avLst>
-          </a:prstGeom>
-          <a:solidFill>
-            <a:schemeClr val="bg1"/>
-          </a:solidFill>
-          <a:ln>
-            <a:noFill/>
-          </a:ln>
-        </p:spPr>
-        <p:style>
-          <a:lnRef idx="2">
-            <a:schemeClr val="accent1">
-              <a:shade val="50000"/>
-            </a:schemeClr>
-          </a:lnRef>
-          <a:fillRef idx="1">
-            <a:schemeClr val="accent1"/>
-          </a:fillRef>
-          <a:effectRef idx="0">
-            <a:schemeClr val="accent1"/>
-          </a:effectRef>
-          <a:fontRef idx="minor">
-            <a:schemeClr val="lt1"/>
-          </a:fontRef>
-        </p:style>
-        <p:txBody>
-          <a:bodyPr rtlCol="0" anchor="ctr"/>
-          <a:lstStyle/>
-          <a:p>
-            <a:endParaRPr lang="ko-KR" altLang="en-US" dirty="0"/>
-          </a:p>
-        </p:txBody>
-      </p:sp>
-      <p:sp>
-        <p:nvSpPr>
-          <p:cNvPr id="43" name="TextBox 42">
-            <a:extLst>
-              <a:ext uri="{FF2B5EF4-FFF2-40B4-BE49-F238E27FC236}">
-                <a16:creationId xmlns:a16="http://schemas.microsoft.com/office/drawing/2014/main" id="{824ECF91-BE5D-49F6-80F0-6708354EDBCC}"/>
-              </a:ext>
-            </a:extLst>
-          </p:cNvPr>
-          <p:cNvSpPr txBox="1"/>
-          <p:nvPr/>
-        </p:nvSpPr>
-        <p:spPr>
-          <a:xfrm>
-            <a:off x="1614745" y="1668753"/>
-            <a:ext cx="6967754" cy="507831"/>
-          </a:xfrm>
-          <a:prstGeom prst="rect">
-            <a:avLst/>
-          </a:prstGeom>
-          <a:noFill/>
-        </p:spPr>
-        <p:txBody>
-          <a:bodyPr wrap="square" lIns="0" tIns="0" rIns="0" bIns="0" rtlCol="0">
-            <a:spAutoFit/>
-          </a:bodyPr>
-          <a:lstStyle/>
-          <a:p>
-            <a:pPr marL="285750" indent="-285750">
-              <a:buFont typeface="Batang" panose="02030600000101010101" pitchFamily="18" charset="-127"/>
-              <a:buChar char="→"/>
-            </a:pPr>
-            <a:r>
-              <a:rPr lang="ko-KR" altLang="en-US" sz="1100" dirty="0">
-                <a:solidFill>
-                  <a:schemeClr val="tx1">
-                    <a:lumMod val="65000"/>
-                    <a:lumOff val="35000"/>
-                  </a:schemeClr>
-                </a:solidFill>
-                <a:latin typeface="피플폰트 Bold" panose="020B0600000101010101" pitchFamily="50" charset="-127"/>
-                <a:ea typeface="피플폰트 Bold" panose="020B0600000101010101" pitchFamily="50" charset="-127"/>
-              </a:rPr>
-              <a:t>본 건 사업은 충청남도 천안시 </a:t>
-            </a:r>
-            <a:r>
-              <a:rPr lang="ko-KR" altLang="en-US" sz="1100" dirty="0" err="1">
-                <a:solidFill>
-                  <a:schemeClr val="tx1">
-                    <a:lumMod val="65000"/>
-                    <a:lumOff val="35000"/>
-                  </a:schemeClr>
-                </a:solidFill>
-                <a:latin typeface="피플폰트 Bold" panose="020B0600000101010101" pitchFamily="50" charset="-127"/>
-                <a:ea typeface="피플폰트 Bold" panose="020B0600000101010101" pitchFamily="50" charset="-127"/>
-              </a:rPr>
-              <a:t>서북구</a:t>
-            </a:r>
-            <a:r>
-              <a:rPr lang="ko-KR" altLang="en-US" sz="1100" dirty="0">
-                <a:solidFill>
-                  <a:schemeClr val="tx1">
-                    <a:lumMod val="65000"/>
-                    <a:lumOff val="35000"/>
-                  </a:schemeClr>
-                </a:solidFill>
-                <a:latin typeface="피플폰트 Bold" panose="020B0600000101010101" pitchFamily="50" charset="-127"/>
-                <a:ea typeface="피플폰트 Bold" panose="020B0600000101010101" pitchFamily="50" charset="-127"/>
-              </a:rPr>
-              <a:t> </a:t>
-            </a:r>
-            <a:r>
-              <a:rPr lang="ko-KR" altLang="en-US" sz="1100" dirty="0" err="1">
-                <a:solidFill>
-                  <a:schemeClr val="tx1">
-                    <a:lumMod val="65000"/>
-                    <a:lumOff val="35000"/>
-                  </a:schemeClr>
-                </a:solidFill>
-                <a:latin typeface="피플폰트 Bold" panose="020B0600000101010101" pitchFamily="50" charset="-127"/>
-                <a:ea typeface="피플폰트 Bold" panose="020B0600000101010101" pitchFamily="50" charset="-127"/>
-              </a:rPr>
-              <a:t>부대동</a:t>
-            </a:r>
-            <a:r>
-              <a:rPr lang="ko-KR" altLang="en-US" sz="1100" dirty="0">
-                <a:solidFill>
-                  <a:schemeClr val="tx1">
-                    <a:lumMod val="65000"/>
-                    <a:lumOff val="35000"/>
-                  </a:schemeClr>
-                </a:solidFill>
-                <a:latin typeface="피플폰트 Bold" panose="020B0600000101010101" pitchFamily="50" charset="-127"/>
-                <a:ea typeface="피플폰트 Bold" panose="020B0600000101010101" pitchFamily="50" charset="-127"/>
-              </a:rPr>
-              <a:t> </a:t>
-            </a:r>
-            <a:r>
-              <a:rPr lang="en-US" altLang="ko-KR" sz="1100" dirty="0">
-                <a:solidFill>
-                  <a:schemeClr val="tx1">
-                    <a:lumMod val="65000"/>
-                    <a:lumOff val="35000"/>
-                  </a:schemeClr>
-                </a:solidFill>
-                <a:latin typeface="피플폰트 Bold" panose="020B0600000101010101" pitchFamily="50" charset="-127"/>
-                <a:ea typeface="피플폰트 Bold" panose="020B0600000101010101" pitchFamily="50" charset="-127"/>
-              </a:rPr>
-              <a:t>354</a:t>
-            </a:r>
-            <a:r>
-              <a:rPr lang="ko-KR" altLang="en-US" sz="1100" dirty="0">
-                <a:solidFill>
-                  <a:schemeClr val="tx1">
-                    <a:lumMod val="65000"/>
-                    <a:lumOff val="35000"/>
-                  </a:schemeClr>
-                </a:solidFill>
-                <a:latin typeface="피플폰트 Bold" panose="020B0600000101010101" pitchFamily="50" charset="-127"/>
-                <a:ea typeface="피플폰트 Bold" panose="020B0600000101010101" pitchFamily="50" charset="-127"/>
-              </a:rPr>
-              <a:t>번지 일원에 진행하는 천안 부성</a:t>
-            </a:r>
-            <a:r>
-              <a:rPr lang="en-US" altLang="ko-KR" sz="1100" dirty="0">
-                <a:solidFill>
-                  <a:schemeClr val="tx1">
-                    <a:lumMod val="65000"/>
-                    <a:lumOff val="35000"/>
-                  </a:schemeClr>
-                </a:solidFill>
-                <a:latin typeface="피플폰트 Bold" panose="020B0600000101010101" pitchFamily="50" charset="-127"/>
-                <a:ea typeface="피플폰트 Bold" panose="020B0600000101010101" pitchFamily="50" charset="-127"/>
-              </a:rPr>
-              <a:t>2</a:t>
-            </a:r>
-            <a:r>
-              <a:rPr lang="ko-KR" altLang="en-US" sz="1100" dirty="0">
-                <a:solidFill>
-                  <a:schemeClr val="tx1">
-                    <a:lumMod val="65000"/>
-                    <a:lumOff val="35000"/>
-                  </a:schemeClr>
-                </a:solidFill>
-                <a:latin typeface="피플폰트 Bold" panose="020B0600000101010101" pitchFamily="50" charset="-127"/>
-                <a:ea typeface="피플폰트 Bold" panose="020B0600000101010101" pitchFamily="50" charset="-127"/>
-              </a:rPr>
-              <a:t>지구 도시개발사업</a:t>
-            </a:r>
-            <a:endParaRPr lang="en-US" altLang="ko-KR" sz="1100" dirty="0">
-              <a:solidFill>
-                <a:schemeClr val="tx1">
-                  <a:lumMod val="65000"/>
-                  <a:lumOff val="35000"/>
-                </a:schemeClr>
-              </a:solidFill>
-              <a:latin typeface="피플폰트 Bold" panose="020B0600000101010101" pitchFamily="50" charset="-127"/>
-              <a:ea typeface="피플폰트 Bold" panose="020B0600000101010101" pitchFamily="50" charset="-127"/>
-            </a:endParaRPr>
-          </a:p>
-          <a:p>
-            <a:pPr marL="285750" indent="-285750">
-              <a:buFont typeface="Batang" panose="02030600000101010101" pitchFamily="18" charset="-127"/>
-              <a:buChar char="→"/>
-            </a:pPr>
-            <a:r>
-              <a:rPr lang="ko-KR" altLang="en-US" sz="1100" dirty="0">
-                <a:solidFill>
-                  <a:schemeClr val="tx1">
-                    <a:lumMod val="65000"/>
-                    <a:lumOff val="35000"/>
-                  </a:schemeClr>
-                </a:solidFill>
-                <a:latin typeface="피플폰트 Bold" panose="020B0600000101010101" pitchFamily="50" charset="-127"/>
-                <a:ea typeface="피플폰트 Bold" panose="020B0600000101010101" pitchFamily="50" charset="-127"/>
-              </a:rPr>
-              <a:t>미확보 필지 수용재결 절차 진행을 위한 토지 소유권 확보를 위한</a:t>
-            </a:r>
-            <a:r>
-              <a:rPr lang="en-US" altLang="ko-KR" sz="1100" dirty="0">
-                <a:solidFill>
-                  <a:schemeClr val="tx1">
-                    <a:lumMod val="65000"/>
-                    <a:lumOff val="35000"/>
-                  </a:schemeClr>
-                </a:solidFill>
-                <a:latin typeface="피플폰트 Bold" panose="020B0600000101010101" pitchFamily="50" charset="-127"/>
-                <a:ea typeface="피플폰트 Bold" panose="020B0600000101010101" pitchFamily="50" charset="-127"/>
-              </a:rPr>
-              <a:t> </a:t>
-            </a:r>
-            <a:r>
-              <a:rPr lang="ko-KR" altLang="en-US" sz="1100" dirty="0">
-                <a:solidFill>
-                  <a:schemeClr val="tx1">
-                    <a:lumMod val="65000"/>
-                    <a:lumOff val="35000"/>
-                  </a:schemeClr>
-                </a:solidFill>
-                <a:latin typeface="피플폰트 Bold" panose="020B0600000101010101" pitchFamily="50" charset="-127"/>
-                <a:ea typeface="피플폰트 Bold" panose="020B0600000101010101" pitchFamily="50" charset="-127"/>
-              </a:rPr>
-              <a:t>토지담보 대출 중  </a:t>
-            </a:r>
-            <a:r>
-              <a:rPr lang="en-US" altLang="ko-KR" sz="1100" dirty="0" err="1">
-                <a:solidFill>
-                  <a:schemeClr val="tx1">
-                    <a:lumMod val="65000"/>
-                    <a:lumOff val="35000"/>
-                  </a:schemeClr>
-                </a:solidFill>
-                <a:latin typeface="피플폰트 Bold" panose="020B0600000101010101" pitchFamily="50" charset="-127"/>
-                <a:ea typeface="피플폰트 Bold" panose="020B0600000101010101" pitchFamily="50" charset="-127"/>
-              </a:rPr>
-              <a:t>Tr.B</a:t>
-            </a:r>
-            <a:r>
-              <a:rPr lang="ko-KR" altLang="en-US" sz="1100" dirty="0">
-                <a:solidFill>
-                  <a:schemeClr val="tx1">
-                    <a:lumMod val="65000"/>
-                    <a:lumOff val="35000"/>
-                  </a:schemeClr>
-                </a:solidFill>
-                <a:latin typeface="피플폰트 Bold" panose="020B0600000101010101" pitchFamily="50" charset="-127"/>
-                <a:ea typeface="피플폰트 Bold" panose="020B0600000101010101" pitchFamily="50" charset="-127"/>
-              </a:rPr>
-              <a:t>를 기초자산으로 사모사채를 발행하는 건</a:t>
-            </a:r>
-            <a:endParaRPr lang="en-US" altLang="ko-KR" sz="1100" dirty="0">
-              <a:solidFill>
-                <a:schemeClr val="tx1">
-                  <a:lumMod val="65000"/>
-                  <a:lumOff val="35000"/>
-                </a:schemeClr>
               </a:solidFill>
               <a:latin typeface="피플폰트 Bold" panose="020B0600000101010101" pitchFamily="50" charset="-127"/>
               <a:ea typeface="피플폰트 Bold" panose="020B0600000101010101" pitchFamily="50" charset="-127"/>
@@ -14200,6 +15910,2755 @@
   <p:cSld>
     <p:spTree>
       <p:nvGrpSpPr>
+        <p:cNvPr id="1" name="">
+          <a:extLst>
+            <a:ext uri="{FF2B5EF4-FFF2-40B4-BE49-F238E27FC236}">
+              <a16:creationId xmlns:a16="http://schemas.microsoft.com/office/drawing/2014/main" id="{D496497E-CA2D-B56C-671B-62057453067B}"/>
+            </a:ext>
+          </a:extLst>
+        </p:cNvPr>
+        <p:cNvGrpSpPr/>
+        <p:nvPr/>
+      </p:nvGrpSpPr>
+      <p:grpSpPr>
+        <a:xfrm>
+          <a:off x="0" y="0"/>
+          <a:ext cx="0" cy="0"/>
+          <a:chOff x="0" y="0"/>
+          <a:chExt cx="0" cy="0"/>
+        </a:xfrm>
+      </p:grpSpPr>
+      <p:sp>
+        <p:nvSpPr>
+          <p:cNvPr id="4" name="텍스트 개체 틀 3">
+            <a:extLst>
+              <a:ext uri="{FF2B5EF4-FFF2-40B4-BE49-F238E27FC236}">
+                <a16:creationId xmlns:a16="http://schemas.microsoft.com/office/drawing/2014/main" id="{C82BD8EB-E4D1-8DD6-9433-919D868E601D}"/>
+              </a:ext>
+            </a:extLst>
+          </p:cNvPr>
+          <p:cNvSpPr>
+            <a:spLocks noGrp="1"/>
+          </p:cNvSpPr>
+          <p:nvPr>
+            <p:ph type="body" sz="quarter" idx="10"/>
+          </p:nvPr>
+        </p:nvSpPr>
+        <p:spPr/>
+        <p:txBody>
+          <a:bodyPr/>
+          <a:lstStyle/>
+          <a:p>
+            <a:pPr lvl="0">
+              <a:defRPr/>
+            </a:pPr>
+            <a:r>
+              <a:rPr lang="en-US" altLang="ko-KR" dirty="0">
+                <a:latin typeface="피플폰트 Bold" panose="020B0600000101010101" pitchFamily="50" charset="-127"/>
+                <a:ea typeface="피플폰트 Bold" panose="020B0600000101010101" pitchFamily="50" charset="-127"/>
+              </a:rPr>
+              <a:t>02  </a:t>
+            </a:r>
+            <a:r>
+              <a:rPr lang="ko-KR" altLang="en-US" dirty="0">
+                <a:latin typeface="피플폰트 Bold" panose="020B0600000101010101" pitchFamily="50" charset="-127"/>
+                <a:ea typeface="피플폰트 Bold" panose="020B0600000101010101" pitchFamily="50" charset="-127"/>
+              </a:rPr>
+              <a:t>금융 개요</a:t>
+            </a:r>
+          </a:p>
+        </p:txBody>
+      </p:sp>
+      <p:cxnSp>
+        <p:nvCxnSpPr>
+          <p:cNvPr id="7" name="직선 화살표 연결선 6">
+            <a:extLst>
+              <a:ext uri="{FF2B5EF4-FFF2-40B4-BE49-F238E27FC236}">
+                <a16:creationId xmlns:a16="http://schemas.microsoft.com/office/drawing/2014/main" id="{335E72A8-37C2-924F-5535-B6ED3136737E}"/>
+              </a:ext>
+            </a:extLst>
+          </p:cNvPr>
+          <p:cNvCxnSpPr/>
+          <p:nvPr/>
+        </p:nvCxnSpPr>
+        <p:spPr>
+          <a:xfrm>
+            <a:off x="393700" y="1281520"/>
+            <a:ext cx="9118600" cy="0"/>
+          </a:xfrm>
+          <a:prstGeom prst="straightConnector1">
+            <a:avLst/>
+          </a:prstGeom>
+          <a:ln w="19050">
+            <a:solidFill>
+              <a:schemeClr val="bg1">
+                <a:lumMod val="50000"/>
+                <a:alpha val="50000"/>
+              </a:schemeClr>
+            </a:solidFill>
+          </a:ln>
+        </p:spPr>
+        <p:style>
+          <a:lnRef idx="1">
+            <a:schemeClr val="accent1"/>
+          </a:lnRef>
+          <a:fillRef idx="0">
+            <a:schemeClr val="accent1"/>
+          </a:fillRef>
+          <a:effectRef idx="0">
+            <a:schemeClr val="accent1"/>
+          </a:effectRef>
+          <a:fontRef idx="minor">
+            <a:schemeClr val="tx1"/>
+          </a:fontRef>
+        </p:style>
+      </p:cxnSp>
+      <p:cxnSp>
+        <p:nvCxnSpPr>
+          <p:cNvPr id="50" name="직선 화살표 연결선 49">
+            <a:extLst>
+              <a:ext uri="{FF2B5EF4-FFF2-40B4-BE49-F238E27FC236}">
+                <a16:creationId xmlns:a16="http://schemas.microsoft.com/office/drawing/2014/main" id="{E22D31CD-12B0-C76C-38FC-53ACE6B3C8BA}"/>
+              </a:ext>
+            </a:extLst>
+          </p:cNvPr>
+          <p:cNvCxnSpPr/>
+          <p:nvPr/>
+        </p:nvCxnSpPr>
+        <p:spPr>
+          <a:xfrm>
+            <a:off x="393700" y="6449059"/>
+            <a:ext cx="9118600" cy="0"/>
+          </a:xfrm>
+          <a:prstGeom prst="straightConnector1">
+            <a:avLst/>
+          </a:prstGeom>
+          <a:ln w="19050">
+            <a:solidFill>
+              <a:schemeClr val="bg1">
+                <a:lumMod val="50000"/>
+                <a:alpha val="50000"/>
+              </a:schemeClr>
+            </a:solidFill>
+          </a:ln>
+        </p:spPr>
+        <p:style>
+          <a:lnRef idx="1">
+            <a:schemeClr val="accent1"/>
+          </a:lnRef>
+          <a:fillRef idx="0">
+            <a:schemeClr val="accent1"/>
+          </a:fillRef>
+          <a:effectRef idx="0">
+            <a:schemeClr val="accent1"/>
+          </a:effectRef>
+          <a:fontRef idx="minor">
+            <a:schemeClr val="tx1"/>
+          </a:fontRef>
+        </p:style>
+      </p:cxnSp>
+      <p:sp>
+        <p:nvSpPr>
+          <p:cNvPr id="6" name="텍스트 개체 틀 4">
+            <a:extLst>
+              <a:ext uri="{FF2B5EF4-FFF2-40B4-BE49-F238E27FC236}">
+                <a16:creationId xmlns:a16="http://schemas.microsoft.com/office/drawing/2014/main" id="{9BBFC007-F478-2947-4705-FB218556BE3B}"/>
+              </a:ext>
+            </a:extLst>
+          </p:cNvPr>
+          <p:cNvSpPr>
+            <a:spLocks noGrp="1"/>
+          </p:cNvSpPr>
+          <p:nvPr>
+            <p:ph type="body" sz="quarter" idx="11"/>
+          </p:nvPr>
+        </p:nvSpPr>
+        <p:spPr>
+          <a:xfrm>
+            <a:off x="393700" y="588702"/>
+            <a:ext cx="3228975" cy="265509"/>
+          </a:xfrm>
+        </p:spPr>
+        <p:txBody>
+          <a:bodyPr/>
+          <a:lstStyle/>
+          <a:p>
+            <a:r>
+              <a:rPr lang="en-US" altLang="ko-KR" dirty="0">
+                <a:latin typeface="피플폰트 Bold" panose="020B0600000101010101" pitchFamily="50" charset="-127"/>
+                <a:ea typeface="피플폰트 Bold" panose="020B0600000101010101" pitchFamily="50" charset="-127"/>
+              </a:rPr>
+              <a:t>2.1  </a:t>
+            </a:r>
+            <a:r>
+              <a:rPr lang="ko-KR" altLang="en-US" dirty="0">
+                <a:latin typeface="피플폰트 Bold" panose="020B0600000101010101" pitchFamily="50" charset="-127"/>
+                <a:ea typeface="피플폰트 Bold" panose="020B0600000101010101" pitchFamily="50" charset="-127"/>
+              </a:rPr>
+              <a:t>금융 구조도</a:t>
+            </a:r>
+          </a:p>
+        </p:txBody>
+      </p:sp>
+      <p:graphicFrame>
+        <p:nvGraphicFramePr>
+          <p:cNvPr id="55" name="표 4">
+            <a:extLst>
+              <a:ext uri="{FF2B5EF4-FFF2-40B4-BE49-F238E27FC236}">
+                <a16:creationId xmlns:a16="http://schemas.microsoft.com/office/drawing/2014/main" id="{5E1AF96E-544D-41EC-ABEE-8311C06662AF}"/>
+              </a:ext>
+            </a:extLst>
+          </p:cNvPr>
+          <p:cNvGraphicFramePr>
+            <a:graphicFrameLocks noGrp="1"/>
+          </p:cNvGraphicFramePr>
+          <p:nvPr>
+            <p:extLst>
+              <p:ext uri="{D42A27DB-BD31-4B8C-83A1-F6EECF244321}">
+                <p14:modId xmlns:p14="http://schemas.microsoft.com/office/powerpoint/2010/main" val="1924965323"/>
+              </p:ext>
+            </p:extLst>
+          </p:nvPr>
+        </p:nvGraphicFramePr>
+        <p:xfrm>
+          <a:off x="3850619" y="3421826"/>
+          <a:ext cx="2336121" cy="458115"/>
+        </p:xfrm>
+        <a:graphic>
+          <a:graphicData uri="http://schemas.openxmlformats.org/drawingml/2006/table">
+            <a:tbl>
+              <a:tblPr firstRow="1" bandRow="1">
+                <a:effectLst>
+                  <a:outerShdw blurRad="50800" dist="38100" dir="2700000" algn="tl" rotWithShape="0">
+                    <a:prstClr val="black">
+                      <a:alpha val="40000"/>
+                    </a:prstClr>
+                  </a:outerShdw>
+                </a:effectLst>
+                <a:tableStyleId>{D03447BB-5D67-496B-8E87-E561075AD55C}</a:tableStyleId>
+              </a:tblPr>
+              <a:tblGrid>
+                <a:gridCol w="2336121">
+                  <a:extLst>
+                    <a:ext uri="{9D8B030D-6E8A-4147-A177-3AD203B41FA5}">
+                      <a16:colId xmlns:a16="http://schemas.microsoft.com/office/drawing/2014/main" val="20000"/>
+                    </a:ext>
+                  </a:extLst>
+                </a:gridCol>
+              </a:tblGrid>
+              <a:tr h="458115">
+                <a:tc>
+                  <a:txBody>
+                    <a:bodyPr/>
+                    <a:lstStyle/>
+                    <a:p>
+                      <a:pPr algn="ctr" latinLnBrk="1">
+                        <a:defRPr/>
+                      </a:pPr>
+                      <a:endParaRPr lang="ko-KR" altLang="en-US" sz="1000" dirty="0">
+                        <a:latin typeface="피플폰트 Bold" panose="020B0600000101010101" pitchFamily="50" charset="-127"/>
+                        <a:ea typeface="피플폰트 Bold" panose="020B0600000101010101" pitchFamily="50" charset="-127"/>
+                      </a:endParaRPr>
+                    </a:p>
+                  </a:txBody>
+                  <a:tcPr marL="152842" marR="152842" marT="76421" marB="76421" anchor="ctr">
+                    <a:lnL w="28575" cap="flat" cmpd="sng" algn="ctr">
+                      <a:solidFill>
+                        <a:schemeClr val="bg1"/>
+                      </a:solidFill>
+                      <a:prstDash val="solid"/>
+                      <a:round/>
+                      <a:headEnd type="none" w="med" len="med"/>
+                      <a:tailEnd type="none" w="med" len="med"/>
+                    </a:lnL>
+                    <a:lnR w="28575" cap="flat" cmpd="sng" algn="ctr">
+                      <a:solidFill>
+                        <a:schemeClr val="bg1"/>
+                      </a:solidFill>
+                      <a:prstDash val="solid"/>
+                      <a:round/>
+                      <a:headEnd type="none" w="med" len="med"/>
+                      <a:tailEnd type="none" w="med" len="med"/>
+                    </a:lnR>
+                    <a:lnT w="28575" cap="flat" cmpd="sng" algn="ctr">
+                      <a:solidFill>
+                        <a:schemeClr val="bg1"/>
+                      </a:solidFill>
+                      <a:prstDash val="solid"/>
+                      <a:round/>
+                      <a:headEnd type="none" w="med" len="med"/>
+                      <a:tailEnd type="none" w="med" len="med"/>
+                    </a:lnT>
+                    <a:lnB w="28575" cap="flat" cmpd="sng" algn="ctr">
+                      <a:solidFill>
+                        <a:schemeClr val="bg1"/>
+                      </a:solidFill>
+                      <a:prstDash val="solid"/>
+                      <a:round/>
+                      <a:headEnd type="none" w="med" len="med"/>
+                      <a:tailEnd type="none" w="med" len="med"/>
+                    </a:lnB>
+                    <a:solidFill>
+                      <a:srgbClr val="08377C"/>
+                    </a:solidFill>
+                  </a:tcPr>
+                </a:tc>
+                <a:extLst>
+                  <a:ext uri="{0D108BD9-81ED-4DB2-BD59-A6C34878D82A}">
+                    <a16:rowId xmlns:a16="http://schemas.microsoft.com/office/drawing/2014/main" val="10000"/>
+                  </a:ext>
+                </a:extLst>
+              </a:tr>
+            </a:tbl>
+          </a:graphicData>
+        </a:graphic>
+      </p:graphicFrame>
+      <p:graphicFrame>
+        <p:nvGraphicFramePr>
+          <p:cNvPr id="59" name="표 4">
+            <a:extLst>
+              <a:ext uri="{FF2B5EF4-FFF2-40B4-BE49-F238E27FC236}">
+                <a16:creationId xmlns:a16="http://schemas.microsoft.com/office/drawing/2014/main" id="{5CFB28B6-CFDF-4672-A21C-C633063EA345}"/>
+              </a:ext>
+            </a:extLst>
+          </p:cNvPr>
+          <p:cNvGraphicFramePr>
+            <a:graphicFrameLocks noGrp="1"/>
+          </p:cNvGraphicFramePr>
+          <p:nvPr>
+            <p:extLst>
+              <p:ext uri="{D42A27DB-BD31-4B8C-83A1-F6EECF244321}">
+                <p14:modId xmlns:p14="http://schemas.microsoft.com/office/powerpoint/2010/main" val="1764950952"/>
+              </p:ext>
+            </p:extLst>
+          </p:nvPr>
+        </p:nvGraphicFramePr>
+        <p:xfrm>
+          <a:off x="3374299" y="1972886"/>
+          <a:ext cx="1319637" cy="554250"/>
+        </p:xfrm>
+        <a:graphic>
+          <a:graphicData uri="http://schemas.openxmlformats.org/drawingml/2006/table">
+            <a:tbl>
+              <a:tblPr firstRow="1" bandRow="1">
+                <a:effectLst>
+                  <a:outerShdw blurRad="50800" dist="38100" dir="2700000" algn="tl" rotWithShape="0">
+                    <a:prstClr val="black">
+                      <a:alpha val="40000"/>
+                    </a:prstClr>
+                  </a:outerShdw>
+                </a:effectLst>
+                <a:tableStyleId>{D03447BB-5D67-496B-8E87-E561075AD55C}</a:tableStyleId>
+              </a:tblPr>
+              <a:tblGrid>
+                <a:gridCol w="1319637">
+                  <a:extLst>
+                    <a:ext uri="{9D8B030D-6E8A-4147-A177-3AD203B41FA5}">
+                      <a16:colId xmlns:a16="http://schemas.microsoft.com/office/drawing/2014/main" val="20000"/>
+                    </a:ext>
+                  </a:extLst>
+                </a:gridCol>
+              </a:tblGrid>
+              <a:tr h="236924">
+                <a:tc>
+                  <a:txBody>
+                    <a:bodyPr/>
+                    <a:lstStyle/>
+                    <a:p>
+                      <a:pPr algn="ctr" latinLnBrk="1">
+                        <a:defRPr/>
+                      </a:pPr>
+                      <a:endParaRPr lang="ko-KR" altLang="en-US" sz="1000" dirty="0">
+                        <a:latin typeface="피플폰트 Bold" panose="020B0600000101010101" pitchFamily="50" charset="-127"/>
+                        <a:ea typeface="피플폰트 Bold" panose="020B0600000101010101" pitchFamily="50" charset="-127"/>
+                      </a:endParaRPr>
+                    </a:p>
+                  </a:txBody>
+                  <a:tcPr marL="171674" marR="171674" marT="78033" marB="78033" anchor="ctr">
+                    <a:lnL w="28575" cap="flat" cmpd="sng" algn="ctr">
+                      <a:solidFill>
+                        <a:schemeClr val="bg1"/>
+                      </a:solidFill>
+                      <a:prstDash val="solid"/>
+                      <a:round/>
+                      <a:headEnd type="none" w="med" len="med"/>
+                      <a:tailEnd type="none" w="med" len="med"/>
+                    </a:lnL>
+                    <a:lnR w="28575" cap="flat" cmpd="sng" algn="ctr">
+                      <a:solidFill>
+                        <a:schemeClr val="bg1"/>
+                      </a:solidFill>
+                      <a:prstDash val="solid"/>
+                      <a:round/>
+                      <a:headEnd type="none" w="med" len="med"/>
+                      <a:tailEnd type="none" w="med" len="med"/>
+                    </a:lnR>
+                    <a:lnT w="28575" cap="flat" cmpd="sng" algn="ctr">
+                      <a:solidFill>
+                        <a:schemeClr val="bg1"/>
+                      </a:solidFill>
+                      <a:prstDash val="solid"/>
+                      <a:round/>
+                      <a:headEnd type="none" w="med" len="med"/>
+                      <a:tailEnd type="none" w="med" len="med"/>
+                    </a:lnT>
+                    <a:lnB w="28575" cap="flat" cmpd="sng" algn="ctr">
+                      <a:solidFill>
+                        <a:schemeClr val="bg1"/>
+                      </a:solidFill>
+                      <a:prstDash val="solid"/>
+                      <a:round/>
+                      <a:headEnd type="none" w="med" len="med"/>
+                      <a:tailEnd type="none" w="med" len="med"/>
+                    </a:lnB>
+                    <a:solidFill>
+                      <a:srgbClr val="0063A1"/>
+                    </a:solidFill>
+                  </a:tcPr>
+                </a:tc>
+                <a:extLst>
+                  <a:ext uri="{0D108BD9-81ED-4DB2-BD59-A6C34878D82A}">
+                    <a16:rowId xmlns:a16="http://schemas.microsoft.com/office/drawing/2014/main" val="10000"/>
+                  </a:ext>
+                </a:extLst>
+              </a:tr>
+              <a:tr h="245784">
+                <a:tc>
+                  <a:txBody>
+                    <a:bodyPr/>
+                    <a:lstStyle/>
+                    <a:p>
+                      <a:pPr algn="ctr" latinLnBrk="1">
+                        <a:defRPr/>
+                      </a:pPr>
+                      <a:endParaRPr lang="ko-KR" altLang="en-US" sz="1000" b="1" dirty="0">
+                        <a:solidFill>
+                          <a:schemeClr val="tx1"/>
+                        </a:solidFill>
+                        <a:latin typeface="피플폰트 Bold" panose="020B0600000101010101" pitchFamily="50" charset="-127"/>
+                        <a:ea typeface="피플폰트 Bold" panose="020B0600000101010101" pitchFamily="50" charset="-127"/>
+                      </a:endParaRPr>
+                    </a:p>
+                  </a:txBody>
+                  <a:tcPr marL="0" marR="0" marT="72000" marB="0">
+                    <a:lnL w="28575" cap="flat" cmpd="sng" algn="ctr">
+                      <a:solidFill>
+                        <a:schemeClr val="bg1"/>
+                      </a:solidFill>
+                      <a:prstDash val="solid"/>
+                      <a:round/>
+                      <a:headEnd type="none" w="med" len="med"/>
+                      <a:tailEnd type="none" w="med" len="med"/>
+                    </a:lnL>
+                    <a:lnR w="28575" cap="flat" cmpd="sng" algn="ctr">
+                      <a:solidFill>
+                        <a:schemeClr val="bg1"/>
+                      </a:solidFill>
+                      <a:prstDash val="solid"/>
+                      <a:round/>
+                      <a:headEnd type="none" w="med" len="med"/>
+                      <a:tailEnd type="none" w="med" len="med"/>
+                    </a:lnR>
+                    <a:lnT w="28575" cap="flat" cmpd="sng" algn="ctr">
+                      <a:solidFill>
+                        <a:schemeClr val="bg1"/>
+                      </a:solidFill>
+                      <a:prstDash val="solid"/>
+                      <a:round/>
+                      <a:headEnd type="none" w="med" len="med"/>
+                      <a:tailEnd type="none" w="med" len="med"/>
+                    </a:lnT>
+                    <a:lnB w="28575" cap="flat" cmpd="sng" algn="ctr">
+                      <a:solidFill>
+                        <a:schemeClr val="bg1"/>
+                      </a:solidFill>
+                      <a:prstDash val="solid"/>
+                      <a:round/>
+                      <a:headEnd type="none" w="med" len="med"/>
+                      <a:tailEnd type="none" w="med" len="med"/>
+                    </a:lnB>
+                    <a:solidFill>
+                      <a:srgbClr val="D9D9D9"/>
+                    </a:solidFill>
+                  </a:tcPr>
+                </a:tc>
+                <a:extLst>
+                  <a:ext uri="{0D108BD9-81ED-4DB2-BD59-A6C34878D82A}">
+                    <a16:rowId xmlns:a16="http://schemas.microsoft.com/office/drawing/2014/main" val="10001"/>
+                  </a:ext>
+                </a:extLst>
+              </a:tr>
+            </a:tbl>
+          </a:graphicData>
+        </a:graphic>
+      </p:graphicFrame>
+      <p:graphicFrame>
+        <p:nvGraphicFramePr>
+          <p:cNvPr id="60" name="표 4">
+            <a:extLst>
+              <a:ext uri="{FF2B5EF4-FFF2-40B4-BE49-F238E27FC236}">
+                <a16:creationId xmlns:a16="http://schemas.microsoft.com/office/drawing/2014/main" id="{A6B277D0-69D9-4E76-A9E5-A262783B3025}"/>
+              </a:ext>
+            </a:extLst>
+          </p:cNvPr>
+          <p:cNvGraphicFramePr>
+            <a:graphicFrameLocks noGrp="1"/>
+          </p:cNvGraphicFramePr>
+          <p:nvPr>
+            <p:extLst>
+              <p:ext uri="{D42A27DB-BD31-4B8C-83A1-F6EECF244321}">
+                <p14:modId xmlns:p14="http://schemas.microsoft.com/office/powerpoint/2010/main" val="1630514827"/>
+              </p:ext>
+            </p:extLst>
+          </p:nvPr>
+        </p:nvGraphicFramePr>
+        <p:xfrm>
+          <a:off x="5050700" y="2124587"/>
+          <a:ext cx="1218808" cy="402531"/>
+        </p:xfrm>
+        <a:graphic>
+          <a:graphicData uri="http://schemas.openxmlformats.org/drawingml/2006/table">
+            <a:tbl>
+              <a:tblPr firstRow="1" bandRow="1">
+                <a:effectLst>
+                  <a:outerShdw blurRad="50800" dist="38100" dir="2700000" algn="tl" rotWithShape="0">
+                    <a:prstClr val="black">
+                      <a:alpha val="40000"/>
+                    </a:prstClr>
+                  </a:outerShdw>
+                </a:effectLst>
+                <a:tableStyleId>{D03447BB-5D67-496B-8E87-E561075AD55C}</a:tableStyleId>
+              </a:tblPr>
+              <a:tblGrid>
+                <a:gridCol w="1218808">
+                  <a:extLst>
+                    <a:ext uri="{9D8B030D-6E8A-4147-A177-3AD203B41FA5}">
+                      <a16:colId xmlns:a16="http://schemas.microsoft.com/office/drawing/2014/main" val="20000"/>
+                    </a:ext>
+                  </a:extLst>
+                </a:gridCol>
+              </a:tblGrid>
+              <a:tr h="402531">
+                <a:tc>
+                  <a:txBody>
+                    <a:bodyPr/>
+                    <a:lstStyle/>
+                    <a:p>
+                      <a:pPr algn="ctr" latinLnBrk="1">
+                        <a:defRPr/>
+                      </a:pPr>
+                      <a:endParaRPr lang="ko-KR" altLang="en-US" sz="1000" dirty="0">
+                        <a:latin typeface="피플폰트 Bold" panose="020B0600000101010101" pitchFamily="50" charset="-127"/>
+                        <a:ea typeface="피플폰트 Bold" panose="020B0600000101010101" pitchFamily="50" charset="-127"/>
+                      </a:endParaRPr>
+                    </a:p>
+                  </a:txBody>
+                  <a:tcPr marL="171674" marR="171674" marT="78033" marB="78033" anchor="ctr">
+                    <a:lnL w="28575" cap="flat" cmpd="sng" algn="ctr">
+                      <a:solidFill>
+                        <a:schemeClr val="bg1"/>
+                      </a:solidFill>
+                      <a:prstDash val="solid"/>
+                      <a:round/>
+                      <a:headEnd type="none" w="med" len="med"/>
+                      <a:tailEnd type="none" w="med" len="med"/>
+                    </a:lnL>
+                    <a:lnR w="28575" cap="flat" cmpd="sng" algn="ctr">
+                      <a:solidFill>
+                        <a:schemeClr val="bg1"/>
+                      </a:solidFill>
+                      <a:prstDash val="solid"/>
+                      <a:round/>
+                      <a:headEnd type="none" w="med" len="med"/>
+                      <a:tailEnd type="none" w="med" len="med"/>
+                    </a:lnR>
+                    <a:lnT w="28575" cap="flat" cmpd="sng" algn="ctr">
+                      <a:solidFill>
+                        <a:schemeClr val="bg1"/>
+                      </a:solidFill>
+                      <a:prstDash val="solid"/>
+                      <a:round/>
+                      <a:headEnd type="none" w="med" len="med"/>
+                      <a:tailEnd type="none" w="med" len="med"/>
+                    </a:lnT>
+                    <a:lnB w="28575" cap="flat" cmpd="sng" algn="ctr">
+                      <a:solidFill>
+                        <a:schemeClr val="bg1"/>
+                      </a:solidFill>
+                      <a:prstDash val="solid"/>
+                      <a:round/>
+                      <a:headEnd type="none" w="med" len="med"/>
+                      <a:tailEnd type="none" w="med" len="med"/>
+                    </a:lnB>
+                    <a:solidFill>
+                      <a:srgbClr val="0063A1"/>
+                    </a:solidFill>
+                  </a:tcPr>
+                </a:tc>
+                <a:extLst>
+                  <a:ext uri="{0D108BD9-81ED-4DB2-BD59-A6C34878D82A}">
+                    <a16:rowId xmlns:a16="http://schemas.microsoft.com/office/drawing/2014/main" val="10000"/>
+                  </a:ext>
+                </a:extLst>
+              </a:tr>
+            </a:tbl>
+          </a:graphicData>
+        </a:graphic>
+      </p:graphicFrame>
+      <p:graphicFrame>
+        <p:nvGraphicFramePr>
+          <p:cNvPr id="61" name="표 4">
+            <a:extLst>
+              <a:ext uri="{FF2B5EF4-FFF2-40B4-BE49-F238E27FC236}">
+                <a16:creationId xmlns:a16="http://schemas.microsoft.com/office/drawing/2014/main" id="{3A758F2F-BCDF-4726-ACAE-51EF30BA1A28}"/>
+              </a:ext>
+            </a:extLst>
+          </p:cNvPr>
+          <p:cNvGraphicFramePr>
+            <a:graphicFrameLocks noGrp="1"/>
+          </p:cNvGraphicFramePr>
+          <p:nvPr>
+            <p:extLst>
+              <p:ext uri="{D42A27DB-BD31-4B8C-83A1-F6EECF244321}">
+                <p14:modId xmlns:p14="http://schemas.microsoft.com/office/powerpoint/2010/main" val="2756276718"/>
+              </p:ext>
+            </p:extLst>
+          </p:nvPr>
+        </p:nvGraphicFramePr>
+        <p:xfrm>
+          <a:off x="3551490" y="4769717"/>
+          <a:ext cx="1319637" cy="554249"/>
+        </p:xfrm>
+        <a:graphic>
+          <a:graphicData uri="http://schemas.openxmlformats.org/drawingml/2006/table">
+            <a:tbl>
+              <a:tblPr firstRow="1" bandRow="1">
+                <a:effectLst>
+                  <a:outerShdw blurRad="50800" dist="38100" dir="2700000" algn="tl" rotWithShape="0">
+                    <a:prstClr val="black">
+                      <a:alpha val="40000"/>
+                    </a:prstClr>
+                  </a:outerShdw>
+                </a:effectLst>
+                <a:tableStyleId>{D03447BB-5D67-496B-8E87-E561075AD55C}</a:tableStyleId>
+              </a:tblPr>
+              <a:tblGrid>
+                <a:gridCol w="1319637">
+                  <a:extLst>
+                    <a:ext uri="{9D8B030D-6E8A-4147-A177-3AD203B41FA5}">
+                      <a16:colId xmlns:a16="http://schemas.microsoft.com/office/drawing/2014/main" val="20000"/>
+                    </a:ext>
+                  </a:extLst>
+                </a:gridCol>
+              </a:tblGrid>
+              <a:tr h="554249">
+                <a:tc>
+                  <a:txBody>
+                    <a:bodyPr/>
+                    <a:lstStyle/>
+                    <a:p>
+                      <a:pPr algn="ctr" latinLnBrk="1">
+                        <a:defRPr/>
+                      </a:pPr>
+                      <a:endParaRPr lang="ko-KR" altLang="en-US" sz="1000" dirty="0">
+                        <a:latin typeface="피플폰트 Bold" panose="020B0600000101010101" pitchFamily="50" charset="-127"/>
+                        <a:ea typeface="피플폰트 Bold" panose="020B0600000101010101" pitchFamily="50" charset="-127"/>
+                      </a:endParaRPr>
+                    </a:p>
+                  </a:txBody>
+                  <a:tcPr marL="171674" marR="171674" marT="78033" marB="78033" anchor="ctr">
+                    <a:lnL w="28575" cap="flat" cmpd="sng" algn="ctr">
+                      <a:solidFill>
+                        <a:schemeClr val="bg1"/>
+                      </a:solidFill>
+                      <a:prstDash val="solid"/>
+                      <a:round/>
+                      <a:headEnd type="none" w="med" len="med"/>
+                      <a:tailEnd type="none" w="med" len="med"/>
+                    </a:lnL>
+                    <a:lnR w="28575" cap="flat" cmpd="sng" algn="ctr">
+                      <a:solidFill>
+                        <a:schemeClr val="bg1"/>
+                      </a:solidFill>
+                      <a:prstDash val="solid"/>
+                      <a:round/>
+                      <a:headEnd type="none" w="med" len="med"/>
+                      <a:tailEnd type="none" w="med" len="med"/>
+                    </a:lnR>
+                    <a:lnT w="28575" cap="flat" cmpd="sng" algn="ctr">
+                      <a:solidFill>
+                        <a:schemeClr val="bg1"/>
+                      </a:solidFill>
+                      <a:prstDash val="solid"/>
+                      <a:round/>
+                      <a:headEnd type="none" w="med" len="med"/>
+                      <a:tailEnd type="none" w="med" len="med"/>
+                    </a:lnT>
+                    <a:lnB w="28575" cap="flat" cmpd="sng" algn="ctr">
+                      <a:solidFill>
+                        <a:schemeClr val="bg1"/>
+                      </a:solidFill>
+                      <a:prstDash val="solid"/>
+                      <a:round/>
+                      <a:headEnd type="none" w="med" len="med"/>
+                      <a:tailEnd type="none" w="med" len="med"/>
+                    </a:lnB>
+                    <a:solidFill>
+                      <a:schemeClr val="accent5"/>
+                    </a:solidFill>
+                  </a:tcPr>
+                </a:tc>
+                <a:extLst>
+                  <a:ext uri="{0D108BD9-81ED-4DB2-BD59-A6C34878D82A}">
+                    <a16:rowId xmlns:a16="http://schemas.microsoft.com/office/drawing/2014/main" val="10000"/>
+                  </a:ext>
+                </a:extLst>
+              </a:tr>
+            </a:tbl>
+          </a:graphicData>
+        </a:graphic>
+      </p:graphicFrame>
+      <p:graphicFrame>
+        <p:nvGraphicFramePr>
+          <p:cNvPr id="66" name="표 4">
+            <a:extLst>
+              <a:ext uri="{FF2B5EF4-FFF2-40B4-BE49-F238E27FC236}">
+                <a16:creationId xmlns:a16="http://schemas.microsoft.com/office/drawing/2014/main" id="{1CA2B7BA-AD8B-4EA7-8564-D6A98C179AA0}"/>
+              </a:ext>
+            </a:extLst>
+          </p:cNvPr>
+          <p:cNvGraphicFramePr>
+            <a:graphicFrameLocks noGrp="1"/>
+          </p:cNvGraphicFramePr>
+          <p:nvPr>
+            <p:extLst>
+              <p:ext uri="{D42A27DB-BD31-4B8C-83A1-F6EECF244321}">
+                <p14:modId xmlns:p14="http://schemas.microsoft.com/office/powerpoint/2010/main" val="181927976"/>
+              </p:ext>
+            </p:extLst>
+          </p:nvPr>
+        </p:nvGraphicFramePr>
+        <p:xfrm>
+          <a:off x="5227889" y="4769716"/>
+          <a:ext cx="1319637" cy="554249"/>
+        </p:xfrm>
+        <a:graphic>
+          <a:graphicData uri="http://schemas.openxmlformats.org/drawingml/2006/table">
+            <a:tbl>
+              <a:tblPr firstRow="1" bandRow="1">
+                <a:effectLst>
+                  <a:outerShdw blurRad="50800" dist="38100" dir="2700000" algn="tl" rotWithShape="0">
+                    <a:prstClr val="black">
+                      <a:alpha val="40000"/>
+                    </a:prstClr>
+                  </a:outerShdw>
+                </a:effectLst>
+                <a:tableStyleId>{D03447BB-5D67-496B-8E87-E561075AD55C}</a:tableStyleId>
+              </a:tblPr>
+              <a:tblGrid>
+                <a:gridCol w="1319637">
+                  <a:extLst>
+                    <a:ext uri="{9D8B030D-6E8A-4147-A177-3AD203B41FA5}">
+                      <a16:colId xmlns:a16="http://schemas.microsoft.com/office/drawing/2014/main" val="20000"/>
+                    </a:ext>
+                  </a:extLst>
+                </a:gridCol>
+              </a:tblGrid>
+              <a:tr h="554249">
+                <a:tc>
+                  <a:txBody>
+                    <a:bodyPr/>
+                    <a:lstStyle/>
+                    <a:p>
+                      <a:pPr algn="ctr" latinLnBrk="1">
+                        <a:defRPr/>
+                      </a:pPr>
+                      <a:endParaRPr lang="ko-KR" altLang="en-US" sz="1000" dirty="0">
+                        <a:latin typeface="피플폰트 Bold" panose="020B0600000101010101" pitchFamily="50" charset="-127"/>
+                        <a:ea typeface="피플폰트 Bold" panose="020B0600000101010101" pitchFamily="50" charset="-127"/>
+                      </a:endParaRPr>
+                    </a:p>
+                  </a:txBody>
+                  <a:tcPr marL="171674" marR="171674" marT="78033" marB="78033" anchor="ctr">
+                    <a:lnL w="28575" cap="flat" cmpd="sng" algn="ctr">
+                      <a:solidFill>
+                        <a:schemeClr val="bg1"/>
+                      </a:solidFill>
+                      <a:prstDash val="solid"/>
+                      <a:round/>
+                      <a:headEnd type="none" w="med" len="med"/>
+                      <a:tailEnd type="none" w="med" len="med"/>
+                    </a:lnL>
+                    <a:lnR w="28575" cap="flat" cmpd="sng" algn="ctr">
+                      <a:solidFill>
+                        <a:schemeClr val="bg1"/>
+                      </a:solidFill>
+                      <a:prstDash val="solid"/>
+                      <a:round/>
+                      <a:headEnd type="none" w="med" len="med"/>
+                      <a:tailEnd type="none" w="med" len="med"/>
+                    </a:lnR>
+                    <a:lnT w="28575" cap="flat" cmpd="sng" algn="ctr">
+                      <a:solidFill>
+                        <a:schemeClr val="bg1"/>
+                      </a:solidFill>
+                      <a:prstDash val="solid"/>
+                      <a:round/>
+                      <a:headEnd type="none" w="med" len="med"/>
+                      <a:tailEnd type="none" w="med" len="med"/>
+                    </a:lnT>
+                    <a:lnB w="28575" cap="flat" cmpd="sng" algn="ctr">
+                      <a:solidFill>
+                        <a:schemeClr val="bg1"/>
+                      </a:solidFill>
+                      <a:prstDash val="solid"/>
+                      <a:round/>
+                      <a:headEnd type="none" w="med" len="med"/>
+                      <a:tailEnd type="none" w="med" len="med"/>
+                    </a:lnB>
+                    <a:solidFill>
+                      <a:schemeClr val="accent5"/>
+                    </a:solidFill>
+                  </a:tcPr>
+                </a:tc>
+                <a:extLst>
+                  <a:ext uri="{0D108BD9-81ED-4DB2-BD59-A6C34878D82A}">
+                    <a16:rowId xmlns:a16="http://schemas.microsoft.com/office/drawing/2014/main" val="10000"/>
+                  </a:ext>
+                </a:extLst>
+              </a:tr>
+            </a:tbl>
+          </a:graphicData>
+        </a:graphic>
+      </p:graphicFrame>
+      <p:graphicFrame>
+        <p:nvGraphicFramePr>
+          <p:cNvPr id="68" name="표 4">
+            <a:extLst>
+              <a:ext uri="{FF2B5EF4-FFF2-40B4-BE49-F238E27FC236}">
+                <a16:creationId xmlns:a16="http://schemas.microsoft.com/office/drawing/2014/main" id="{CFFD7038-13E8-451A-9065-BA4E71AC12EF}"/>
+              </a:ext>
+            </a:extLst>
+          </p:cNvPr>
+          <p:cNvGraphicFramePr>
+            <a:graphicFrameLocks noGrp="1"/>
+          </p:cNvGraphicFramePr>
+          <p:nvPr>
+            <p:extLst>
+              <p:ext uri="{D42A27DB-BD31-4B8C-83A1-F6EECF244321}">
+                <p14:modId xmlns:p14="http://schemas.microsoft.com/office/powerpoint/2010/main" val="3283531021"/>
+              </p:ext>
+            </p:extLst>
+          </p:nvPr>
+        </p:nvGraphicFramePr>
+        <p:xfrm>
+          <a:off x="7300010" y="2539270"/>
+          <a:ext cx="1522966" cy="2068430"/>
+        </p:xfrm>
+        <a:graphic>
+          <a:graphicData uri="http://schemas.openxmlformats.org/drawingml/2006/table">
+            <a:tbl>
+              <a:tblPr firstRow="1" bandRow="1">
+                <a:effectLst>
+                  <a:outerShdw blurRad="50800" dist="38100" dir="2700000" algn="tl" rotWithShape="0">
+                    <a:prstClr val="black">
+                      <a:alpha val="40000"/>
+                    </a:prstClr>
+                  </a:outerShdw>
+                </a:effectLst>
+                <a:tableStyleId>{D03447BB-5D67-496B-8E87-E561075AD55C}</a:tableStyleId>
+              </a:tblPr>
+              <a:tblGrid>
+                <a:gridCol w="1522966">
+                  <a:extLst>
+                    <a:ext uri="{9D8B030D-6E8A-4147-A177-3AD203B41FA5}">
+                      <a16:colId xmlns:a16="http://schemas.microsoft.com/office/drawing/2014/main" val="20000"/>
+                    </a:ext>
+                  </a:extLst>
+                </a:gridCol>
+              </a:tblGrid>
+              <a:tr h="360711">
+                <a:tc>
+                  <a:txBody>
+                    <a:bodyPr/>
+                    <a:lstStyle/>
+                    <a:p>
+                      <a:pPr algn="ctr" latinLnBrk="1">
+                        <a:defRPr/>
+                      </a:pPr>
+                      <a:endParaRPr lang="ko-KR" altLang="en-US" sz="1050" dirty="0">
+                        <a:latin typeface="피플폰트 Bold" panose="020B0600000101010101" pitchFamily="50" charset="-127"/>
+                        <a:ea typeface="피플폰트 Bold" panose="020B0600000101010101" pitchFamily="50" charset="-127"/>
+                      </a:endParaRPr>
+                    </a:p>
+                  </a:txBody>
+                  <a:tcPr marL="171674" marR="171674" marT="78033" marB="78033" anchor="ctr">
+                    <a:lnL w="28575" cap="flat" cmpd="sng" algn="ctr">
+                      <a:solidFill>
+                        <a:schemeClr val="bg1"/>
+                      </a:solidFill>
+                      <a:prstDash val="solid"/>
+                      <a:round/>
+                      <a:headEnd type="none" w="med" len="med"/>
+                      <a:tailEnd type="none" w="med" len="med"/>
+                    </a:lnL>
+                    <a:lnR w="28575" cap="flat" cmpd="sng" algn="ctr">
+                      <a:solidFill>
+                        <a:schemeClr val="bg1"/>
+                      </a:solidFill>
+                      <a:prstDash val="solid"/>
+                      <a:round/>
+                      <a:headEnd type="none" w="med" len="med"/>
+                      <a:tailEnd type="none" w="med" len="med"/>
+                    </a:lnR>
+                    <a:lnT w="28575" cap="flat" cmpd="sng" algn="ctr">
+                      <a:solidFill>
+                        <a:schemeClr val="bg1"/>
+                      </a:solidFill>
+                      <a:prstDash val="solid"/>
+                      <a:round/>
+                      <a:headEnd type="none" w="med" len="med"/>
+                      <a:tailEnd type="none" w="med" len="med"/>
+                    </a:lnT>
+                    <a:lnB w="28575" cap="flat" cmpd="sng" algn="ctr">
+                      <a:solidFill>
+                        <a:schemeClr val="bg1"/>
+                      </a:solidFill>
+                      <a:prstDash val="solid"/>
+                      <a:round/>
+                      <a:headEnd type="none" w="med" len="med"/>
+                      <a:tailEnd type="none" w="med" len="med"/>
+                    </a:lnB>
+                    <a:solidFill>
+                      <a:schemeClr val="tx2">
+                        <a:lumMod val="75000"/>
+                      </a:schemeClr>
+                    </a:solidFill>
+                  </a:tcPr>
+                </a:tc>
+                <a:extLst>
+                  <a:ext uri="{0D108BD9-81ED-4DB2-BD59-A6C34878D82A}">
+                    <a16:rowId xmlns:a16="http://schemas.microsoft.com/office/drawing/2014/main" val="10000"/>
+                  </a:ext>
+                </a:extLst>
+              </a:tr>
+              <a:tr h="1707719">
+                <a:tc>
+                  <a:txBody>
+                    <a:bodyPr/>
+                    <a:lstStyle/>
+                    <a:p>
+                      <a:pPr algn="ctr" latinLnBrk="1">
+                        <a:defRPr/>
+                      </a:pPr>
+                      <a:endParaRPr lang="ko-KR" altLang="en-US" sz="1600" b="1" dirty="0">
+                        <a:solidFill>
+                          <a:schemeClr val="tx1"/>
+                        </a:solidFill>
+                        <a:latin typeface="피플폰트 Bold" panose="020B0600000101010101" pitchFamily="50" charset="-127"/>
+                        <a:ea typeface="피플폰트 Bold" panose="020B0600000101010101" pitchFamily="50" charset="-127"/>
+                      </a:endParaRPr>
+                    </a:p>
+                  </a:txBody>
+                  <a:tcPr marL="0" marR="0" marT="72000" marB="0">
+                    <a:lnL w="28575" cap="flat" cmpd="sng" algn="ctr">
+                      <a:solidFill>
+                        <a:schemeClr val="bg1"/>
+                      </a:solidFill>
+                      <a:prstDash val="solid"/>
+                      <a:round/>
+                      <a:headEnd type="none" w="med" len="med"/>
+                      <a:tailEnd type="none" w="med" len="med"/>
+                    </a:lnL>
+                    <a:lnR w="28575" cap="flat" cmpd="sng" algn="ctr">
+                      <a:solidFill>
+                        <a:schemeClr val="bg1"/>
+                      </a:solidFill>
+                      <a:prstDash val="solid"/>
+                      <a:round/>
+                      <a:headEnd type="none" w="med" len="med"/>
+                      <a:tailEnd type="none" w="med" len="med"/>
+                    </a:lnR>
+                    <a:lnT w="28575" cap="flat" cmpd="sng" algn="ctr">
+                      <a:solidFill>
+                        <a:schemeClr val="bg1"/>
+                      </a:solidFill>
+                      <a:prstDash val="solid"/>
+                      <a:round/>
+                      <a:headEnd type="none" w="med" len="med"/>
+                      <a:tailEnd type="none" w="med" len="med"/>
+                    </a:lnT>
+                    <a:lnB w="28575" cap="flat" cmpd="sng" algn="ctr">
+                      <a:solidFill>
+                        <a:schemeClr val="bg1"/>
+                      </a:solidFill>
+                      <a:prstDash val="solid"/>
+                      <a:round/>
+                      <a:headEnd type="none" w="med" len="med"/>
+                      <a:tailEnd type="none" w="med" len="med"/>
+                    </a:lnB>
+                    <a:solidFill>
+                      <a:srgbClr val="D9D9D9"/>
+                    </a:solidFill>
+                  </a:tcPr>
+                </a:tc>
+                <a:extLst>
+                  <a:ext uri="{0D108BD9-81ED-4DB2-BD59-A6C34878D82A}">
+                    <a16:rowId xmlns:a16="http://schemas.microsoft.com/office/drawing/2014/main" val="10001"/>
+                  </a:ext>
+                </a:extLst>
+              </a:tr>
+            </a:tbl>
+          </a:graphicData>
+        </a:graphic>
+      </p:graphicFrame>
+      <p:graphicFrame>
+        <p:nvGraphicFramePr>
+          <p:cNvPr id="69" name="표 4">
+            <a:extLst>
+              <a:ext uri="{FF2B5EF4-FFF2-40B4-BE49-F238E27FC236}">
+                <a16:creationId xmlns:a16="http://schemas.microsoft.com/office/drawing/2014/main" id="{85AA7DEE-761D-47A3-8455-0741150FC233}"/>
+              </a:ext>
+            </a:extLst>
+          </p:cNvPr>
+          <p:cNvGraphicFramePr>
+            <a:graphicFrameLocks noGrp="1"/>
+          </p:cNvGraphicFramePr>
+          <p:nvPr>
+            <p:extLst>
+              <p:ext uri="{D42A27DB-BD31-4B8C-83A1-F6EECF244321}">
+                <p14:modId xmlns:p14="http://schemas.microsoft.com/office/powerpoint/2010/main" val="2452019722"/>
+              </p:ext>
+            </p:extLst>
+          </p:nvPr>
+        </p:nvGraphicFramePr>
+        <p:xfrm>
+          <a:off x="7515503" y="2999805"/>
+          <a:ext cx="1091980" cy="634251"/>
+        </p:xfrm>
+        <a:graphic>
+          <a:graphicData uri="http://schemas.openxmlformats.org/drawingml/2006/table">
+            <a:tbl>
+              <a:tblPr firstRow="1" bandRow="1">
+                <a:effectLst>
+                  <a:outerShdw blurRad="50800" dist="38100" dir="2700000" algn="tl" rotWithShape="0">
+                    <a:prstClr val="black">
+                      <a:alpha val="40000"/>
+                    </a:prstClr>
+                  </a:outerShdw>
+                </a:effectLst>
+                <a:tableStyleId>{D03447BB-5D67-496B-8E87-E561075AD55C}</a:tableStyleId>
+              </a:tblPr>
+              <a:tblGrid>
+                <a:gridCol w="1091980">
+                  <a:extLst>
+                    <a:ext uri="{9D8B030D-6E8A-4147-A177-3AD203B41FA5}">
+                      <a16:colId xmlns:a16="http://schemas.microsoft.com/office/drawing/2014/main" val="20000"/>
+                    </a:ext>
+                  </a:extLst>
+                </a:gridCol>
+              </a:tblGrid>
+              <a:tr h="634251">
+                <a:tc>
+                  <a:txBody>
+                    <a:bodyPr/>
+                    <a:lstStyle/>
+                    <a:p>
+                      <a:pPr algn="ctr" latinLnBrk="1">
+                        <a:defRPr/>
+                      </a:pPr>
+                      <a:endParaRPr lang="ko-KR" altLang="en-US" sz="900" dirty="0">
+                        <a:latin typeface="피플폰트 Bold" panose="020B0600000101010101" pitchFamily="50" charset="-127"/>
+                        <a:ea typeface="피플폰트 Bold" panose="020B0600000101010101" pitchFamily="50" charset="-127"/>
+                      </a:endParaRPr>
+                    </a:p>
+                  </a:txBody>
+                  <a:tcPr marL="71302" marR="71302" marT="69474" marB="69474" anchor="ctr">
+                    <a:lnL w="28575" cap="flat" cmpd="sng" algn="ctr">
+                      <a:solidFill>
+                        <a:schemeClr val="bg1"/>
+                      </a:solidFill>
+                      <a:prstDash val="solid"/>
+                      <a:round/>
+                      <a:headEnd type="none" w="med" len="med"/>
+                      <a:tailEnd type="none" w="med" len="med"/>
+                    </a:lnL>
+                    <a:lnR w="28575" cap="flat" cmpd="sng" algn="ctr">
+                      <a:solidFill>
+                        <a:schemeClr val="bg1"/>
+                      </a:solidFill>
+                      <a:prstDash val="solid"/>
+                      <a:round/>
+                      <a:headEnd type="none" w="med" len="med"/>
+                      <a:tailEnd type="none" w="med" len="med"/>
+                    </a:lnR>
+                    <a:lnT w="28575" cap="flat" cmpd="sng" algn="ctr">
+                      <a:solidFill>
+                        <a:schemeClr val="bg1"/>
+                      </a:solidFill>
+                      <a:prstDash val="solid"/>
+                      <a:round/>
+                      <a:headEnd type="none" w="med" len="med"/>
+                      <a:tailEnd type="none" w="med" len="med"/>
+                    </a:lnT>
+                    <a:lnB w="28575" cap="flat" cmpd="sng" algn="ctr">
+                      <a:solidFill>
+                        <a:schemeClr val="bg1"/>
+                      </a:solidFill>
+                      <a:prstDash val="solid"/>
+                      <a:round/>
+                      <a:headEnd type="none" w="med" len="med"/>
+                      <a:tailEnd type="none" w="med" len="med"/>
+                    </a:lnB>
+                    <a:solidFill>
+                      <a:schemeClr val="bg1">
+                        <a:lumMod val="50000"/>
+                      </a:schemeClr>
+                    </a:solidFill>
+                  </a:tcPr>
+                </a:tc>
+                <a:extLst>
+                  <a:ext uri="{0D108BD9-81ED-4DB2-BD59-A6C34878D82A}">
+                    <a16:rowId xmlns:a16="http://schemas.microsoft.com/office/drawing/2014/main" val="10000"/>
+                  </a:ext>
+                </a:extLst>
+              </a:tr>
+            </a:tbl>
+          </a:graphicData>
+        </a:graphic>
+      </p:graphicFrame>
+      <p:graphicFrame>
+        <p:nvGraphicFramePr>
+          <p:cNvPr id="71" name="표 4">
+            <a:extLst>
+              <a:ext uri="{FF2B5EF4-FFF2-40B4-BE49-F238E27FC236}">
+                <a16:creationId xmlns:a16="http://schemas.microsoft.com/office/drawing/2014/main" id="{A9B47528-D995-4A96-A084-E69DC968F3D2}"/>
+              </a:ext>
+            </a:extLst>
+          </p:cNvPr>
+          <p:cNvGraphicFramePr>
+            <a:graphicFrameLocks noGrp="1"/>
+          </p:cNvGraphicFramePr>
+          <p:nvPr>
+            <p:extLst>
+              <p:ext uri="{D42A27DB-BD31-4B8C-83A1-F6EECF244321}">
+                <p14:modId xmlns:p14="http://schemas.microsoft.com/office/powerpoint/2010/main" val="860528465"/>
+              </p:ext>
+            </p:extLst>
+          </p:nvPr>
+        </p:nvGraphicFramePr>
+        <p:xfrm>
+          <a:off x="795758" y="2520872"/>
+          <a:ext cx="1819273" cy="2405393"/>
+        </p:xfrm>
+        <a:graphic>
+          <a:graphicData uri="http://schemas.openxmlformats.org/drawingml/2006/table">
+            <a:tbl>
+              <a:tblPr firstRow="1" bandRow="1">
+                <a:effectLst>
+                  <a:outerShdw blurRad="50800" dist="38100" dir="2700000" algn="tl" rotWithShape="0">
+                    <a:prstClr val="black">
+                      <a:alpha val="40000"/>
+                    </a:prstClr>
+                  </a:outerShdw>
+                </a:effectLst>
+                <a:tableStyleId>{D03447BB-5D67-496B-8E87-E561075AD55C}</a:tableStyleId>
+              </a:tblPr>
+              <a:tblGrid>
+                <a:gridCol w="1819273">
+                  <a:extLst>
+                    <a:ext uri="{9D8B030D-6E8A-4147-A177-3AD203B41FA5}">
+                      <a16:colId xmlns:a16="http://schemas.microsoft.com/office/drawing/2014/main" val="20000"/>
+                    </a:ext>
+                  </a:extLst>
+                </a:gridCol>
+              </a:tblGrid>
+              <a:tr h="360000">
+                <a:tc>
+                  <a:txBody>
+                    <a:bodyPr/>
+                    <a:lstStyle/>
+                    <a:p>
+                      <a:pPr algn="ctr" latinLnBrk="1">
+                        <a:defRPr/>
+                      </a:pPr>
+                      <a:endParaRPr lang="ko-KR" altLang="en-US" sz="1050" dirty="0">
+                        <a:latin typeface="피플폰트 Bold" panose="020B0600000101010101" pitchFamily="50" charset="-127"/>
+                        <a:ea typeface="피플폰트 Bold" panose="020B0600000101010101" pitchFamily="50" charset="-127"/>
+                      </a:endParaRPr>
+                    </a:p>
+                  </a:txBody>
+                  <a:tcPr marL="171674" marR="171674" marT="78033" marB="78033" anchor="ctr">
+                    <a:lnL w="28575" cap="flat" cmpd="sng" algn="ctr">
+                      <a:solidFill>
+                        <a:schemeClr val="bg1"/>
+                      </a:solidFill>
+                      <a:prstDash val="solid"/>
+                      <a:round/>
+                      <a:headEnd type="none" w="med" len="med"/>
+                      <a:tailEnd type="none" w="med" len="med"/>
+                    </a:lnL>
+                    <a:lnR w="28575" cap="flat" cmpd="sng" algn="ctr">
+                      <a:solidFill>
+                        <a:schemeClr val="bg1"/>
+                      </a:solidFill>
+                      <a:prstDash val="solid"/>
+                      <a:round/>
+                      <a:headEnd type="none" w="med" len="med"/>
+                      <a:tailEnd type="none" w="med" len="med"/>
+                    </a:lnR>
+                    <a:lnT w="28575" cap="flat" cmpd="sng" algn="ctr">
+                      <a:solidFill>
+                        <a:schemeClr val="bg1"/>
+                      </a:solidFill>
+                      <a:prstDash val="solid"/>
+                      <a:round/>
+                      <a:headEnd type="none" w="med" len="med"/>
+                      <a:tailEnd type="none" w="med" len="med"/>
+                    </a:lnT>
+                    <a:lnB w="28575" cap="flat" cmpd="sng" algn="ctr">
+                      <a:solidFill>
+                        <a:schemeClr val="bg1"/>
+                      </a:solidFill>
+                      <a:prstDash val="solid"/>
+                      <a:round/>
+                      <a:headEnd type="none" w="med" len="med"/>
+                      <a:tailEnd type="none" w="med" len="med"/>
+                    </a:lnB>
+                    <a:solidFill>
+                      <a:schemeClr val="tx2">
+                        <a:lumMod val="75000"/>
+                      </a:schemeClr>
+                    </a:solidFill>
+                  </a:tcPr>
+                </a:tc>
+                <a:extLst>
+                  <a:ext uri="{0D108BD9-81ED-4DB2-BD59-A6C34878D82A}">
+                    <a16:rowId xmlns:a16="http://schemas.microsoft.com/office/drawing/2014/main" val="10000"/>
+                  </a:ext>
+                </a:extLst>
+              </a:tr>
+              <a:tr h="2045393">
+                <a:tc>
+                  <a:txBody>
+                    <a:bodyPr/>
+                    <a:lstStyle/>
+                    <a:p>
+                      <a:pPr algn="ctr" latinLnBrk="1">
+                        <a:defRPr/>
+                      </a:pPr>
+                      <a:endParaRPr lang="ko-KR" altLang="en-US" sz="1600" b="1" dirty="0">
+                        <a:solidFill>
+                          <a:schemeClr val="tx1"/>
+                        </a:solidFill>
+                        <a:latin typeface="피플폰트 Bold" panose="020B0600000101010101" pitchFamily="50" charset="-127"/>
+                        <a:ea typeface="피플폰트 Bold" panose="020B0600000101010101" pitchFamily="50" charset="-127"/>
+                      </a:endParaRPr>
+                    </a:p>
+                  </a:txBody>
+                  <a:tcPr marL="0" marR="0" marT="72000" marB="0">
+                    <a:lnL w="28575" cap="flat" cmpd="sng" algn="ctr">
+                      <a:solidFill>
+                        <a:schemeClr val="bg1"/>
+                      </a:solidFill>
+                      <a:prstDash val="solid"/>
+                      <a:round/>
+                      <a:headEnd type="none" w="med" len="med"/>
+                      <a:tailEnd type="none" w="med" len="med"/>
+                    </a:lnL>
+                    <a:lnR w="28575" cap="flat" cmpd="sng" algn="ctr">
+                      <a:solidFill>
+                        <a:schemeClr val="bg1"/>
+                      </a:solidFill>
+                      <a:prstDash val="solid"/>
+                      <a:round/>
+                      <a:headEnd type="none" w="med" len="med"/>
+                      <a:tailEnd type="none" w="med" len="med"/>
+                    </a:lnR>
+                    <a:lnT w="28575" cap="flat" cmpd="sng" algn="ctr">
+                      <a:solidFill>
+                        <a:schemeClr val="bg1"/>
+                      </a:solidFill>
+                      <a:prstDash val="solid"/>
+                      <a:round/>
+                      <a:headEnd type="none" w="med" len="med"/>
+                      <a:tailEnd type="none" w="med" len="med"/>
+                    </a:lnT>
+                    <a:lnB w="28575" cap="flat" cmpd="sng" algn="ctr">
+                      <a:solidFill>
+                        <a:schemeClr val="bg1"/>
+                      </a:solidFill>
+                      <a:prstDash val="solid"/>
+                      <a:round/>
+                      <a:headEnd type="none" w="med" len="med"/>
+                      <a:tailEnd type="none" w="med" len="med"/>
+                    </a:lnB>
+                    <a:solidFill>
+                      <a:srgbClr val="D9D9D9"/>
+                    </a:solidFill>
+                  </a:tcPr>
+                </a:tc>
+                <a:extLst>
+                  <a:ext uri="{0D108BD9-81ED-4DB2-BD59-A6C34878D82A}">
+                    <a16:rowId xmlns:a16="http://schemas.microsoft.com/office/drawing/2014/main" val="10001"/>
+                  </a:ext>
+                </a:extLst>
+              </a:tr>
+            </a:tbl>
+          </a:graphicData>
+        </a:graphic>
+      </p:graphicFrame>
+      <p:sp>
+        <p:nvSpPr>
+          <p:cNvPr id="74" name="직사각형 73">
+            <a:extLst>
+              <a:ext uri="{FF2B5EF4-FFF2-40B4-BE49-F238E27FC236}">
+                <a16:creationId xmlns:a16="http://schemas.microsoft.com/office/drawing/2014/main" id="{8FA2A1F3-4586-4624-924A-79650549C61A}"/>
+              </a:ext>
+            </a:extLst>
+          </p:cNvPr>
+          <p:cNvSpPr/>
+          <p:nvPr/>
+        </p:nvSpPr>
+        <p:spPr>
+          <a:xfrm>
+            <a:off x="941325" y="2997575"/>
+            <a:ext cx="1587084" cy="1794568"/>
+          </a:xfrm>
+          <a:prstGeom prst="rect">
+            <a:avLst/>
+          </a:prstGeom>
+          <a:solidFill>
+            <a:schemeClr val="bg1">
+              <a:lumMod val="95000"/>
+            </a:schemeClr>
+          </a:solidFill>
+          <a:ln>
+            <a:noFill/>
+          </a:ln>
+          <a:effectLst>
+            <a:outerShdw blurRad="50800" dist="38100" dir="5400000" algn="t" rotWithShape="0">
+              <a:prstClr val="black">
+                <a:alpha val="40000"/>
+              </a:prstClr>
+            </a:outerShdw>
+          </a:effectLst>
+        </p:spPr>
+        <p:txBody>
+          <a:bodyPr rtlCol="0" anchor="ctr"/>
+          <a:lstStyle/>
+          <a:p>
+            <a:pPr algn="ctr"/>
+            <a:endParaRPr lang="ko-KR" altLang="en-US"/>
+          </a:p>
+        </p:txBody>
+      </p:sp>
+      <p:graphicFrame>
+        <p:nvGraphicFramePr>
+          <p:cNvPr id="72" name="표 4">
+            <a:extLst>
+              <a:ext uri="{FF2B5EF4-FFF2-40B4-BE49-F238E27FC236}">
+                <a16:creationId xmlns:a16="http://schemas.microsoft.com/office/drawing/2014/main" id="{BA813C25-5D3B-4210-8DF9-AA7E7B6B2B96}"/>
+              </a:ext>
+            </a:extLst>
+          </p:cNvPr>
+          <p:cNvGraphicFramePr>
+            <a:graphicFrameLocks noGrp="1"/>
+          </p:cNvGraphicFramePr>
+          <p:nvPr>
+            <p:extLst>
+              <p:ext uri="{D42A27DB-BD31-4B8C-83A1-F6EECF244321}">
+                <p14:modId xmlns:p14="http://schemas.microsoft.com/office/powerpoint/2010/main" val="4108543442"/>
+              </p:ext>
+            </p:extLst>
+          </p:nvPr>
+        </p:nvGraphicFramePr>
+        <p:xfrm>
+          <a:off x="1060992" y="3236726"/>
+          <a:ext cx="1356468" cy="431201"/>
+        </p:xfrm>
+        <a:graphic>
+          <a:graphicData uri="http://schemas.openxmlformats.org/drawingml/2006/table">
+            <a:tbl>
+              <a:tblPr firstRow="1" bandRow="1">
+                <a:effectLst>
+                  <a:outerShdw blurRad="50800" dist="38100" dir="2700000" algn="tl" rotWithShape="0">
+                    <a:prstClr val="black">
+                      <a:alpha val="40000"/>
+                    </a:prstClr>
+                  </a:outerShdw>
+                </a:effectLst>
+                <a:tableStyleId>{D03447BB-5D67-496B-8E87-E561075AD55C}</a:tableStyleId>
+              </a:tblPr>
+              <a:tblGrid>
+                <a:gridCol w="1356468">
+                  <a:extLst>
+                    <a:ext uri="{9D8B030D-6E8A-4147-A177-3AD203B41FA5}">
+                      <a16:colId xmlns:a16="http://schemas.microsoft.com/office/drawing/2014/main" val="20000"/>
+                    </a:ext>
+                  </a:extLst>
+                </a:gridCol>
+              </a:tblGrid>
+              <a:tr h="431201">
+                <a:tc>
+                  <a:txBody>
+                    <a:bodyPr/>
+                    <a:lstStyle/>
+                    <a:p>
+                      <a:pPr algn="ctr" latinLnBrk="1">
+                        <a:defRPr/>
+                      </a:pPr>
+                      <a:endParaRPr lang="ko-KR" altLang="en-US" sz="900" dirty="0">
+                        <a:latin typeface="피플폰트 Bold" panose="020B0600000101010101" pitchFamily="50" charset="-127"/>
+                        <a:ea typeface="피플폰트 Bold" panose="020B0600000101010101" pitchFamily="50" charset="-127"/>
+                      </a:endParaRPr>
+                    </a:p>
+                  </a:txBody>
+                  <a:tcPr marL="74146" marR="74146" marT="72245" marB="72245" anchor="ctr">
+                    <a:lnL w="28575" cap="flat" cmpd="sng" algn="ctr">
+                      <a:solidFill>
+                        <a:schemeClr val="bg1"/>
+                      </a:solidFill>
+                      <a:prstDash val="solid"/>
+                      <a:round/>
+                      <a:headEnd type="none" w="med" len="med"/>
+                      <a:tailEnd type="none" w="med" len="med"/>
+                    </a:lnL>
+                    <a:lnR w="28575" cap="flat" cmpd="sng" algn="ctr">
+                      <a:solidFill>
+                        <a:schemeClr val="bg1"/>
+                      </a:solidFill>
+                      <a:prstDash val="solid"/>
+                      <a:round/>
+                      <a:headEnd type="none" w="med" len="med"/>
+                      <a:tailEnd type="none" w="med" len="med"/>
+                    </a:lnR>
+                    <a:lnT w="28575" cap="flat" cmpd="sng" algn="ctr">
+                      <a:solidFill>
+                        <a:schemeClr val="bg1"/>
+                      </a:solidFill>
+                      <a:prstDash val="solid"/>
+                      <a:round/>
+                      <a:headEnd type="none" w="med" len="med"/>
+                      <a:tailEnd type="none" w="med" len="med"/>
+                    </a:lnT>
+                    <a:lnB w="28575" cap="flat" cmpd="sng" algn="ctr">
+                      <a:solidFill>
+                        <a:schemeClr val="bg1"/>
+                      </a:solidFill>
+                      <a:prstDash val="solid"/>
+                      <a:round/>
+                      <a:headEnd type="none" w="med" len="med"/>
+                      <a:tailEnd type="none" w="med" len="med"/>
+                    </a:lnB>
+                    <a:solidFill>
+                      <a:schemeClr val="accent1">
+                        <a:lumMod val="50000"/>
+                      </a:schemeClr>
+                    </a:solidFill>
+                  </a:tcPr>
+                </a:tc>
+                <a:extLst>
+                  <a:ext uri="{0D108BD9-81ED-4DB2-BD59-A6C34878D82A}">
+                    <a16:rowId xmlns:a16="http://schemas.microsoft.com/office/drawing/2014/main" val="10000"/>
+                  </a:ext>
+                </a:extLst>
+              </a:tr>
+            </a:tbl>
+          </a:graphicData>
+        </a:graphic>
+      </p:graphicFrame>
+      <p:cxnSp>
+        <p:nvCxnSpPr>
+          <p:cNvPr id="75" name="직선 화살표 연결선 74">
+            <a:extLst>
+              <a:ext uri="{FF2B5EF4-FFF2-40B4-BE49-F238E27FC236}">
+                <a16:creationId xmlns:a16="http://schemas.microsoft.com/office/drawing/2014/main" id="{AD3A9799-8684-4BA6-925A-9A4015E98C49}"/>
+              </a:ext>
+            </a:extLst>
+          </p:cNvPr>
+          <p:cNvCxnSpPr>
+            <a:cxnSpLocks/>
+          </p:cNvCxnSpPr>
+          <p:nvPr/>
+        </p:nvCxnSpPr>
+        <p:spPr>
+          <a:xfrm flipV="1">
+            <a:off x="3896721" y="2664142"/>
+            <a:ext cx="0" cy="638730"/>
+          </a:xfrm>
+          <a:prstGeom prst="straightConnector1">
+            <a:avLst/>
+          </a:prstGeom>
+          <a:solidFill>
+            <a:schemeClr val="accent1"/>
+          </a:solidFill>
+          <a:ln w="19050" cap="flat" cmpd="sng" algn="ctr">
+            <a:solidFill>
+              <a:schemeClr val="tx1"/>
+            </a:solidFill>
+            <a:prstDash val="solid"/>
+            <a:round/>
+            <a:headEnd type="triangle" w="sm" len="sm"/>
+            <a:tailEnd type="none" w="sm" len="sm"/>
+          </a:ln>
+          <a:effectLst/>
+        </p:spPr>
+      </p:cxnSp>
+      <p:cxnSp>
+        <p:nvCxnSpPr>
+          <p:cNvPr id="76" name="직선 화살표 연결선 75">
+            <a:extLst>
+              <a:ext uri="{FF2B5EF4-FFF2-40B4-BE49-F238E27FC236}">
+                <a16:creationId xmlns:a16="http://schemas.microsoft.com/office/drawing/2014/main" id="{46963D05-914D-43CD-8D3F-AF59390B0978}"/>
+              </a:ext>
+            </a:extLst>
+          </p:cNvPr>
+          <p:cNvCxnSpPr>
+            <a:cxnSpLocks/>
+          </p:cNvCxnSpPr>
+          <p:nvPr/>
+        </p:nvCxnSpPr>
+        <p:spPr>
+          <a:xfrm flipH="1">
+            <a:off x="2698608" y="3573485"/>
+            <a:ext cx="984262" cy="0"/>
+          </a:xfrm>
+          <a:prstGeom prst="straightConnector1">
+            <a:avLst/>
+          </a:prstGeom>
+          <a:solidFill>
+            <a:schemeClr val="accent1"/>
+          </a:solidFill>
+          <a:ln w="19050" cap="flat" cmpd="sng" algn="ctr">
+            <a:solidFill>
+              <a:schemeClr val="tx1"/>
+            </a:solidFill>
+            <a:prstDash val="solid"/>
+            <a:round/>
+            <a:headEnd type="triangle" w="sm" len="sm"/>
+            <a:tailEnd type="none" w="sm" len="sm"/>
+          </a:ln>
+          <a:effectLst/>
+        </p:spPr>
+      </p:cxnSp>
+      <p:cxnSp>
+        <p:nvCxnSpPr>
+          <p:cNvPr id="77" name="직선 화살표 연결선 76">
+            <a:extLst>
+              <a:ext uri="{FF2B5EF4-FFF2-40B4-BE49-F238E27FC236}">
+                <a16:creationId xmlns:a16="http://schemas.microsoft.com/office/drawing/2014/main" id="{DA6ACCD5-8993-4F0E-AB15-57E013FCEF45}"/>
+              </a:ext>
+            </a:extLst>
+          </p:cNvPr>
+          <p:cNvCxnSpPr>
+            <a:cxnSpLocks/>
+          </p:cNvCxnSpPr>
+          <p:nvPr/>
+        </p:nvCxnSpPr>
+        <p:spPr>
+          <a:xfrm>
+            <a:off x="2698608" y="3699416"/>
+            <a:ext cx="984262" cy="0"/>
+          </a:xfrm>
+          <a:prstGeom prst="straightConnector1">
+            <a:avLst/>
+          </a:prstGeom>
+          <a:solidFill>
+            <a:schemeClr val="accent1"/>
+          </a:solidFill>
+          <a:ln w="19050" cap="flat" cmpd="sng" algn="ctr">
+            <a:solidFill>
+              <a:schemeClr val="tx1"/>
+            </a:solidFill>
+            <a:prstDash val="solid"/>
+            <a:round/>
+            <a:headEnd type="triangle" w="sm" len="sm"/>
+            <a:tailEnd type="none" w="sm" len="sm"/>
+          </a:ln>
+          <a:effectLst/>
+        </p:spPr>
+      </p:cxnSp>
+      <p:cxnSp>
+        <p:nvCxnSpPr>
+          <p:cNvPr id="79" name="직선 화살표 연결선 78">
+            <a:extLst>
+              <a:ext uri="{FF2B5EF4-FFF2-40B4-BE49-F238E27FC236}">
+                <a16:creationId xmlns:a16="http://schemas.microsoft.com/office/drawing/2014/main" id="{9B5C1A78-8AAE-41D9-909E-077E0FD38355}"/>
+              </a:ext>
+            </a:extLst>
+          </p:cNvPr>
+          <p:cNvCxnSpPr>
+            <a:cxnSpLocks/>
+          </p:cNvCxnSpPr>
+          <p:nvPr/>
+        </p:nvCxnSpPr>
+        <p:spPr>
+          <a:xfrm flipH="1" flipV="1">
+            <a:off x="4093752" y="2664142"/>
+            <a:ext cx="1" cy="636878"/>
+          </a:xfrm>
+          <a:prstGeom prst="straightConnector1">
+            <a:avLst/>
+          </a:prstGeom>
+          <a:solidFill>
+            <a:schemeClr val="accent1"/>
+          </a:solidFill>
+          <a:ln w="19050" cap="flat" cmpd="sng" algn="ctr">
+            <a:solidFill>
+              <a:schemeClr val="tx1"/>
+            </a:solidFill>
+            <a:prstDash val="solid"/>
+            <a:round/>
+            <a:headEnd type="triangle" w="sm" len="sm"/>
+            <a:tailEnd type="triangle" w="sm" len="sm"/>
+          </a:ln>
+          <a:effectLst/>
+        </p:spPr>
+      </p:cxnSp>
+      <p:cxnSp>
+        <p:nvCxnSpPr>
+          <p:cNvPr id="80" name="직선 화살표 연결선 79">
+            <a:extLst>
+              <a:ext uri="{FF2B5EF4-FFF2-40B4-BE49-F238E27FC236}">
+                <a16:creationId xmlns:a16="http://schemas.microsoft.com/office/drawing/2014/main" id="{EE31FEEF-134C-4FD0-A7F5-CA0B940741DB}"/>
+              </a:ext>
+            </a:extLst>
+          </p:cNvPr>
+          <p:cNvCxnSpPr>
+            <a:cxnSpLocks/>
+          </p:cNvCxnSpPr>
+          <p:nvPr/>
+        </p:nvCxnSpPr>
+        <p:spPr>
+          <a:xfrm flipH="1" flipV="1">
+            <a:off x="5550300" y="2624813"/>
+            <a:ext cx="1" cy="636878"/>
+          </a:xfrm>
+          <a:prstGeom prst="straightConnector1">
+            <a:avLst/>
+          </a:prstGeom>
+          <a:solidFill>
+            <a:schemeClr val="accent1"/>
+          </a:solidFill>
+          <a:ln w="19050" cap="flat" cmpd="sng" algn="ctr">
+            <a:solidFill>
+              <a:schemeClr val="tx1"/>
+            </a:solidFill>
+            <a:prstDash val="solid"/>
+            <a:round/>
+            <a:headEnd type="triangle" w="sm" len="sm"/>
+            <a:tailEnd type="triangle" w="sm" len="sm"/>
+          </a:ln>
+          <a:effectLst/>
+        </p:spPr>
+      </p:cxnSp>
+      <p:cxnSp>
+        <p:nvCxnSpPr>
+          <p:cNvPr id="81" name="직선 화살표 연결선 80">
+            <a:extLst>
+              <a:ext uri="{FF2B5EF4-FFF2-40B4-BE49-F238E27FC236}">
+                <a16:creationId xmlns:a16="http://schemas.microsoft.com/office/drawing/2014/main" id="{90F607D1-8353-4C68-8400-D4E286EF82C9}"/>
+              </a:ext>
+            </a:extLst>
+          </p:cNvPr>
+          <p:cNvCxnSpPr>
+            <a:cxnSpLocks/>
+          </p:cNvCxnSpPr>
+          <p:nvPr/>
+        </p:nvCxnSpPr>
+        <p:spPr>
+          <a:xfrm flipH="1" flipV="1">
+            <a:off x="4170140" y="4004183"/>
+            <a:ext cx="1" cy="636878"/>
+          </a:xfrm>
+          <a:prstGeom prst="straightConnector1">
+            <a:avLst/>
+          </a:prstGeom>
+          <a:solidFill>
+            <a:schemeClr val="accent1"/>
+          </a:solidFill>
+          <a:ln w="19050" cap="flat" cmpd="sng" algn="ctr">
+            <a:solidFill>
+              <a:schemeClr val="tx1"/>
+            </a:solidFill>
+            <a:prstDash val="solid"/>
+            <a:round/>
+            <a:headEnd type="triangle" w="sm" len="sm"/>
+            <a:tailEnd type="triangle" w="sm" len="sm"/>
+          </a:ln>
+          <a:effectLst/>
+        </p:spPr>
+      </p:cxnSp>
+      <p:cxnSp>
+        <p:nvCxnSpPr>
+          <p:cNvPr id="82" name="직선 화살표 연결선 81">
+            <a:extLst>
+              <a:ext uri="{FF2B5EF4-FFF2-40B4-BE49-F238E27FC236}">
+                <a16:creationId xmlns:a16="http://schemas.microsoft.com/office/drawing/2014/main" id="{F0BC1BA5-1A0B-4D13-B5CD-F14BDC3D465A}"/>
+              </a:ext>
+            </a:extLst>
+          </p:cNvPr>
+          <p:cNvCxnSpPr>
+            <a:cxnSpLocks/>
+          </p:cNvCxnSpPr>
+          <p:nvPr/>
+        </p:nvCxnSpPr>
+        <p:spPr>
+          <a:xfrm flipH="1" flipV="1">
+            <a:off x="5880449" y="4004183"/>
+            <a:ext cx="1" cy="636878"/>
+          </a:xfrm>
+          <a:prstGeom prst="straightConnector1">
+            <a:avLst/>
+          </a:prstGeom>
+          <a:solidFill>
+            <a:schemeClr val="accent1"/>
+          </a:solidFill>
+          <a:ln w="19050" cap="flat" cmpd="sng" algn="ctr">
+            <a:solidFill>
+              <a:schemeClr val="tx1"/>
+            </a:solidFill>
+            <a:prstDash val="solid"/>
+            <a:round/>
+            <a:headEnd type="triangle" w="sm" len="sm"/>
+            <a:tailEnd type="triangle" w="sm" len="sm"/>
+          </a:ln>
+          <a:effectLst/>
+        </p:spPr>
+      </p:cxnSp>
+      <p:cxnSp>
+        <p:nvCxnSpPr>
+          <p:cNvPr id="83" name="직선 화살표 연결선 82">
+            <a:extLst>
+              <a:ext uri="{FF2B5EF4-FFF2-40B4-BE49-F238E27FC236}">
+                <a16:creationId xmlns:a16="http://schemas.microsoft.com/office/drawing/2014/main" id="{D24B0450-6D87-47E9-A757-D56A3741B666}"/>
+              </a:ext>
+            </a:extLst>
+          </p:cNvPr>
+          <p:cNvCxnSpPr>
+            <a:cxnSpLocks/>
+          </p:cNvCxnSpPr>
+          <p:nvPr/>
+        </p:nvCxnSpPr>
+        <p:spPr>
+          <a:xfrm>
+            <a:off x="6269507" y="3652092"/>
+            <a:ext cx="984262" cy="0"/>
+          </a:xfrm>
+          <a:prstGeom prst="straightConnector1">
+            <a:avLst/>
+          </a:prstGeom>
+          <a:solidFill>
+            <a:schemeClr val="accent1"/>
+          </a:solidFill>
+          <a:ln w="19050" cap="flat" cmpd="sng" algn="ctr">
+            <a:solidFill>
+              <a:schemeClr val="tx1"/>
+            </a:solidFill>
+            <a:prstDash val="solid"/>
+            <a:round/>
+            <a:headEnd type="triangle" w="sm" len="sm"/>
+            <a:tailEnd type="none" w="sm" len="sm"/>
+          </a:ln>
+          <a:effectLst/>
+        </p:spPr>
+      </p:cxnSp>
+      <p:graphicFrame>
+        <p:nvGraphicFramePr>
+          <p:cNvPr id="93" name="표 4">
+            <a:extLst>
+              <a:ext uri="{FF2B5EF4-FFF2-40B4-BE49-F238E27FC236}">
+                <a16:creationId xmlns:a16="http://schemas.microsoft.com/office/drawing/2014/main" id="{05F8FB52-777E-472C-97E3-5F97E5844D91}"/>
+              </a:ext>
+            </a:extLst>
+          </p:cNvPr>
+          <p:cNvGraphicFramePr>
+            <a:graphicFrameLocks noGrp="1"/>
+          </p:cNvGraphicFramePr>
+          <p:nvPr>
+            <p:extLst>
+              <p:ext uri="{D42A27DB-BD31-4B8C-83A1-F6EECF244321}">
+                <p14:modId xmlns:p14="http://schemas.microsoft.com/office/powerpoint/2010/main" val="1535708391"/>
+              </p:ext>
+            </p:extLst>
+          </p:nvPr>
+        </p:nvGraphicFramePr>
+        <p:xfrm>
+          <a:off x="1072074" y="3741053"/>
+          <a:ext cx="1356468" cy="431201"/>
+        </p:xfrm>
+        <a:graphic>
+          <a:graphicData uri="http://schemas.openxmlformats.org/drawingml/2006/table">
+            <a:tbl>
+              <a:tblPr firstRow="1" bandRow="1">
+                <a:effectLst>
+                  <a:outerShdw blurRad="50800" dist="38100" dir="2700000" algn="tl" rotWithShape="0">
+                    <a:prstClr val="black">
+                      <a:alpha val="40000"/>
+                    </a:prstClr>
+                  </a:outerShdw>
+                </a:effectLst>
+                <a:tableStyleId>{D03447BB-5D67-496B-8E87-E561075AD55C}</a:tableStyleId>
+              </a:tblPr>
+              <a:tblGrid>
+                <a:gridCol w="1356468">
+                  <a:extLst>
+                    <a:ext uri="{9D8B030D-6E8A-4147-A177-3AD203B41FA5}">
+                      <a16:colId xmlns:a16="http://schemas.microsoft.com/office/drawing/2014/main" val="20000"/>
+                    </a:ext>
+                  </a:extLst>
+                </a:gridCol>
+              </a:tblGrid>
+              <a:tr h="431201">
+                <a:tc>
+                  <a:txBody>
+                    <a:bodyPr/>
+                    <a:lstStyle/>
+                    <a:p>
+                      <a:pPr algn="ctr" latinLnBrk="1">
+                        <a:defRPr/>
+                      </a:pPr>
+                      <a:endParaRPr lang="ko-KR" altLang="en-US" sz="900" dirty="0">
+                        <a:latin typeface="피플폰트 Bold" panose="020B0600000101010101" pitchFamily="50" charset="-127"/>
+                        <a:ea typeface="피플폰트 Bold" panose="020B0600000101010101" pitchFamily="50" charset="-127"/>
+                      </a:endParaRPr>
+                    </a:p>
+                  </a:txBody>
+                  <a:tcPr marL="74146" marR="74146" marT="72245" marB="72245" anchor="ctr">
+                    <a:lnL w="28575" cap="flat" cmpd="sng" algn="ctr">
+                      <a:solidFill>
+                        <a:schemeClr val="bg1"/>
+                      </a:solidFill>
+                      <a:prstDash val="solid"/>
+                      <a:round/>
+                      <a:headEnd type="none" w="med" len="med"/>
+                      <a:tailEnd type="none" w="med" len="med"/>
+                    </a:lnL>
+                    <a:lnR w="28575" cap="flat" cmpd="sng" algn="ctr">
+                      <a:solidFill>
+                        <a:schemeClr val="bg1"/>
+                      </a:solidFill>
+                      <a:prstDash val="solid"/>
+                      <a:round/>
+                      <a:headEnd type="none" w="med" len="med"/>
+                      <a:tailEnd type="none" w="med" len="med"/>
+                    </a:lnR>
+                    <a:lnT w="28575" cap="flat" cmpd="sng" algn="ctr">
+                      <a:solidFill>
+                        <a:schemeClr val="bg1"/>
+                      </a:solidFill>
+                      <a:prstDash val="solid"/>
+                      <a:round/>
+                      <a:headEnd type="none" w="med" len="med"/>
+                      <a:tailEnd type="none" w="med" len="med"/>
+                    </a:lnT>
+                    <a:lnB w="28575" cap="flat" cmpd="sng" algn="ctr">
+                      <a:solidFill>
+                        <a:schemeClr val="bg1"/>
+                      </a:solidFill>
+                      <a:prstDash val="solid"/>
+                      <a:round/>
+                      <a:headEnd type="none" w="med" len="med"/>
+                      <a:tailEnd type="none" w="med" len="med"/>
+                    </a:lnB>
+                    <a:solidFill>
+                      <a:schemeClr val="accent1">
+                        <a:lumMod val="75000"/>
+                      </a:schemeClr>
+                    </a:solidFill>
+                  </a:tcPr>
+                </a:tc>
+                <a:extLst>
+                  <a:ext uri="{0D108BD9-81ED-4DB2-BD59-A6C34878D82A}">
+                    <a16:rowId xmlns:a16="http://schemas.microsoft.com/office/drawing/2014/main" val="10000"/>
+                  </a:ext>
+                </a:extLst>
+              </a:tr>
+            </a:tbl>
+          </a:graphicData>
+        </a:graphic>
+      </p:graphicFrame>
+      <p:graphicFrame>
+        <p:nvGraphicFramePr>
+          <p:cNvPr id="94" name="표 4">
+            <a:extLst>
+              <a:ext uri="{FF2B5EF4-FFF2-40B4-BE49-F238E27FC236}">
+                <a16:creationId xmlns:a16="http://schemas.microsoft.com/office/drawing/2014/main" id="{4547316F-5AA4-4A66-8EE0-AADACDDBF655}"/>
+              </a:ext>
+            </a:extLst>
+          </p:cNvPr>
+          <p:cNvGraphicFramePr>
+            <a:graphicFrameLocks noGrp="1"/>
+          </p:cNvGraphicFramePr>
+          <p:nvPr>
+            <p:extLst>
+              <p:ext uri="{D42A27DB-BD31-4B8C-83A1-F6EECF244321}">
+                <p14:modId xmlns:p14="http://schemas.microsoft.com/office/powerpoint/2010/main" val="3710664750"/>
+              </p:ext>
+            </p:extLst>
+          </p:nvPr>
+        </p:nvGraphicFramePr>
+        <p:xfrm>
+          <a:off x="1072074" y="4252310"/>
+          <a:ext cx="1356468" cy="431201"/>
+        </p:xfrm>
+        <a:graphic>
+          <a:graphicData uri="http://schemas.openxmlformats.org/drawingml/2006/table">
+            <a:tbl>
+              <a:tblPr firstRow="1" bandRow="1">
+                <a:effectLst>
+                  <a:outerShdw blurRad="50800" dist="38100" dir="2700000" algn="tl" rotWithShape="0">
+                    <a:prstClr val="black">
+                      <a:alpha val="40000"/>
+                    </a:prstClr>
+                  </a:outerShdw>
+                </a:effectLst>
+                <a:tableStyleId>{D03447BB-5D67-496B-8E87-E561075AD55C}</a:tableStyleId>
+              </a:tblPr>
+              <a:tblGrid>
+                <a:gridCol w="1356468">
+                  <a:extLst>
+                    <a:ext uri="{9D8B030D-6E8A-4147-A177-3AD203B41FA5}">
+                      <a16:colId xmlns:a16="http://schemas.microsoft.com/office/drawing/2014/main" val="20000"/>
+                    </a:ext>
+                  </a:extLst>
+                </a:gridCol>
+              </a:tblGrid>
+              <a:tr h="431201">
+                <a:tc>
+                  <a:txBody>
+                    <a:bodyPr/>
+                    <a:lstStyle/>
+                    <a:p>
+                      <a:pPr algn="ctr" latinLnBrk="1">
+                        <a:defRPr/>
+                      </a:pPr>
+                      <a:endParaRPr lang="ko-KR" altLang="en-US" sz="900" dirty="0">
+                        <a:latin typeface="피플폰트 Bold" panose="020B0600000101010101" pitchFamily="50" charset="-127"/>
+                        <a:ea typeface="피플폰트 Bold" panose="020B0600000101010101" pitchFamily="50" charset="-127"/>
+                      </a:endParaRPr>
+                    </a:p>
+                  </a:txBody>
+                  <a:tcPr marL="74146" marR="74146" marT="72245" marB="72245" anchor="ctr">
+                    <a:lnL w="28575" cap="flat" cmpd="sng" algn="ctr">
+                      <a:solidFill>
+                        <a:schemeClr val="bg1"/>
+                      </a:solidFill>
+                      <a:prstDash val="solid"/>
+                      <a:round/>
+                      <a:headEnd type="none" w="med" len="med"/>
+                      <a:tailEnd type="none" w="med" len="med"/>
+                    </a:lnL>
+                    <a:lnR w="28575" cap="flat" cmpd="sng" algn="ctr">
+                      <a:solidFill>
+                        <a:schemeClr val="bg1"/>
+                      </a:solidFill>
+                      <a:prstDash val="solid"/>
+                      <a:round/>
+                      <a:headEnd type="none" w="med" len="med"/>
+                      <a:tailEnd type="none" w="med" len="med"/>
+                    </a:lnR>
+                    <a:lnT w="28575" cap="flat" cmpd="sng" algn="ctr">
+                      <a:solidFill>
+                        <a:schemeClr val="bg1"/>
+                      </a:solidFill>
+                      <a:prstDash val="solid"/>
+                      <a:round/>
+                      <a:headEnd type="none" w="med" len="med"/>
+                      <a:tailEnd type="none" w="med" len="med"/>
+                    </a:lnT>
+                    <a:lnB w="28575" cap="flat" cmpd="sng" algn="ctr">
+                      <a:solidFill>
+                        <a:schemeClr val="bg1"/>
+                      </a:solidFill>
+                      <a:prstDash val="solid"/>
+                      <a:round/>
+                      <a:headEnd type="none" w="med" len="med"/>
+                      <a:tailEnd type="none" w="med" len="med"/>
+                    </a:lnB>
+                    <a:solidFill>
+                      <a:srgbClr val="918B8B"/>
+                    </a:solidFill>
+                  </a:tcPr>
+                </a:tc>
+                <a:extLst>
+                  <a:ext uri="{0D108BD9-81ED-4DB2-BD59-A6C34878D82A}">
+                    <a16:rowId xmlns:a16="http://schemas.microsoft.com/office/drawing/2014/main" val="10000"/>
+                  </a:ext>
+                </a:extLst>
+              </a:tr>
+            </a:tbl>
+          </a:graphicData>
+        </a:graphic>
+      </p:graphicFrame>
+      <p:graphicFrame>
+        <p:nvGraphicFramePr>
+          <p:cNvPr id="38" name="표 4">
+            <a:extLst>
+              <a:ext uri="{FF2B5EF4-FFF2-40B4-BE49-F238E27FC236}">
+                <a16:creationId xmlns:a16="http://schemas.microsoft.com/office/drawing/2014/main" id="{BEF05454-7BEA-4C98-AAB6-BABDC46D9B34}"/>
+              </a:ext>
+            </a:extLst>
+          </p:cNvPr>
+          <p:cNvGraphicFramePr>
+            <a:graphicFrameLocks noGrp="1"/>
+          </p:cNvGraphicFramePr>
+          <p:nvPr>
+            <p:extLst>
+              <p:ext uri="{D42A27DB-BD31-4B8C-83A1-F6EECF244321}">
+                <p14:modId xmlns:p14="http://schemas.microsoft.com/office/powerpoint/2010/main" val="1161256177"/>
+              </p:ext>
+            </p:extLst>
+          </p:nvPr>
+        </p:nvGraphicFramePr>
+        <p:xfrm>
+          <a:off x="5050700" y="1667119"/>
+          <a:ext cx="1218808" cy="402531"/>
+        </p:xfrm>
+        <a:graphic>
+          <a:graphicData uri="http://schemas.openxmlformats.org/drawingml/2006/table">
+            <a:tbl>
+              <a:tblPr firstRow="1" bandRow="1">
+                <a:effectLst>
+                  <a:outerShdw blurRad="50800" dist="38100" dir="2700000" algn="tl" rotWithShape="0">
+                    <a:prstClr val="black">
+                      <a:alpha val="40000"/>
+                    </a:prstClr>
+                  </a:outerShdw>
+                </a:effectLst>
+                <a:tableStyleId>{D03447BB-5D67-496B-8E87-E561075AD55C}</a:tableStyleId>
+              </a:tblPr>
+              <a:tblGrid>
+                <a:gridCol w="1218808">
+                  <a:extLst>
+                    <a:ext uri="{9D8B030D-6E8A-4147-A177-3AD203B41FA5}">
+                      <a16:colId xmlns:a16="http://schemas.microsoft.com/office/drawing/2014/main" val="20000"/>
+                    </a:ext>
+                  </a:extLst>
+                </a:gridCol>
+              </a:tblGrid>
+              <a:tr h="402531">
+                <a:tc>
+                  <a:txBody>
+                    <a:bodyPr/>
+                    <a:lstStyle/>
+                    <a:p>
+                      <a:pPr algn="ctr" latinLnBrk="1">
+                        <a:defRPr/>
+                      </a:pPr>
+                      <a:endParaRPr lang="ko-KR" altLang="en-US" sz="1000" dirty="0">
+                        <a:latin typeface="피플폰트 Bold" panose="020B0600000101010101" pitchFamily="50" charset="-127"/>
+                        <a:ea typeface="피플폰트 Bold" panose="020B0600000101010101" pitchFamily="50" charset="-127"/>
+                      </a:endParaRPr>
+                    </a:p>
+                  </a:txBody>
+                  <a:tcPr marL="0" marR="0" marT="0" marB="0" anchor="ctr">
+                    <a:lnL w="28575" cap="flat" cmpd="sng" algn="ctr">
+                      <a:solidFill>
+                        <a:schemeClr val="bg1"/>
+                      </a:solidFill>
+                      <a:prstDash val="solid"/>
+                      <a:round/>
+                      <a:headEnd type="none" w="med" len="med"/>
+                      <a:tailEnd type="none" w="med" len="med"/>
+                    </a:lnL>
+                    <a:lnR w="28575" cap="flat" cmpd="sng" algn="ctr">
+                      <a:solidFill>
+                        <a:schemeClr val="bg1"/>
+                      </a:solidFill>
+                      <a:prstDash val="solid"/>
+                      <a:round/>
+                      <a:headEnd type="none" w="med" len="med"/>
+                      <a:tailEnd type="none" w="med" len="med"/>
+                    </a:lnR>
+                    <a:lnT w="28575" cap="flat" cmpd="sng" algn="ctr">
+                      <a:solidFill>
+                        <a:schemeClr val="bg1"/>
+                      </a:solidFill>
+                      <a:prstDash val="solid"/>
+                      <a:round/>
+                      <a:headEnd type="none" w="med" len="med"/>
+                      <a:tailEnd type="none" w="med" len="med"/>
+                    </a:lnT>
+                    <a:lnB w="28575" cap="flat" cmpd="sng" algn="ctr">
+                      <a:solidFill>
+                        <a:schemeClr val="bg1"/>
+                      </a:solidFill>
+                      <a:prstDash val="solid"/>
+                      <a:round/>
+                      <a:headEnd type="none" w="med" len="med"/>
+                      <a:tailEnd type="none" w="med" len="med"/>
+                    </a:lnB>
+                    <a:solidFill>
+                      <a:srgbClr val="0063A1"/>
+                    </a:solidFill>
+                  </a:tcPr>
+                </a:tc>
+                <a:extLst>
+                  <a:ext uri="{0D108BD9-81ED-4DB2-BD59-A6C34878D82A}">
+                    <a16:rowId xmlns:a16="http://schemas.microsoft.com/office/drawing/2014/main" val="10000"/>
+                  </a:ext>
+                </a:extLst>
+              </a:tr>
+            </a:tbl>
+          </a:graphicData>
+        </a:graphic>
+      </p:graphicFrame>
+      <p:sp>
+        <p:nvSpPr>
+          <p:cNvPr id="2" name="직사각형 1">
+            <a:extLst>
+              <a:ext uri="{FF2B5EF4-FFF2-40B4-BE49-F238E27FC236}">
+                <a16:creationId xmlns:a16="http://schemas.microsoft.com/office/drawing/2014/main" id="{A72E3E17-616D-483C-96AD-53D6C9BE000A}"/>
+              </a:ext>
+            </a:extLst>
+          </p:cNvPr>
+          <p:cNvSpPr/>
+          <p:nvPr/>
+        </p:nvSpPr>
+        <p:spPr>
+          <a:xfrm>
+            <a:off x="7401676" y="3734362"/>
+            <a:ext cx="1319635" cy="2231463"/>
+          </a:xfrm>
+          <a:prstGeom prst="rect">
+            <a:avLst/>
+          </a:prstGeom>
+          <a:solidFill>
+            <a:schemeClr val="accent1">
+              <a:lumMod val="20000"/>
+              <a:lumOff val="80000"/>
+            </a:schemeClr>
+          </a:solidFill>
+          <a:ln w="28575">
+            <a:solidFill>
+              <a:schemeClr val="accent1"/>
+            </a:solidFill>
+            <a:prstDash val="sysDash"/>
+          </a:ln>
+        </p:spPr>
+        <p:style>
+          <a:lnRef idx="2">
+            <a:schemeClr val="accent1">
+              <a:shade val="50000"/>
+            </a:schemeClr>
+          </a:lnRef>
+          <a:fillRef idx="1">
+            <a:schemeClr val="accent1"/>
+          </a:fillRef>
+          <a:effectRef idx="0">
+            <a:schemeClr val="accent1"/>
+          </a:effectRef>
+          <a:fontRef idx="minor">
+            <a:schemeClr val="lt1"/>
+          </a:fontRef>
+        </p:style>
+        <p:txBody>
+          <a:bodyPr rtlCol="0" anchor="ctr"/>
+          <a:lstStyle/>
+          <a:p>
+            <a:pPr algn="ctr"/>
+            <a:endParaRPr lang="ko-KR" altLang="en-US"/>
+          </a:p>
+        </p:txBody>
+      </p:sp>
+      <p:graphicFrame>
+        <p:nvGraphicFramePr>
+          <p:cNvPr id="70" name="표 4">
+            <a:extLst>
+              <a:ext uri="{FF2B5EF4-FFF2-40B4-BE49-F238E27FC236}">
+                <a16:creationId xmlns:a16="http://schemas.microsoft.com/office/drawing/2014/main" id="{BE4E943E-44E6-4994-90F7-525EB56A9277}"/>
+              </a:ext>
+            </a:extLst>
+          </p:cNvPr>
+          <p:cNvGraphicFramePr>
+            <a:graphicFrameLocks noGrp="1"/>
+          </p:cNvGraphicFramePr>
+          <p:nvPr>
+            <p:extLst>
+              <p:ext uri="{D42A27DB-BD31-4B8C-83A1-F6EECF244321}">
+                <p14:modId xmlns:p14="http://schemas.microsoft.com/office/powerpoint/2010/main" val="804395997"/>
+              </p:ext>
+            </p:extLst>
+          </p:nvPr>
+        </p:nvGraphicFramePr>
+        <p:xfrm>
+          <a:off x="7515503" y="3814728"/>
+          <a:ext cx="1091980" cy="634387"/>
+        </p:xfrm>
+        <a:graphic>
+          <a:graphicData uri="http://schemas.openxmlformats.org/drawingml/2006/table">
+            <a:tbl>
+              <a:tblPr firstRow="1" bandRow="1">
+                <a:effectLst>
+                  <a:outerShdw blurRad="50800" dist="38100" dir="2700000" algn="tl" rotWithShape="0">
+                    <a:prstClr val="black">
+                      <a:alpha val="40000"/>
+                    </a:prstClr>
+                  </a:outerShdw>
+                </a:effectLst>
+                <a:tableStyleId>{D03447BB-5D67-496B-8E87-E561075AD55C}</a:tableStyleId>
+              </a:tblPr>
+              <a:tblGrid>
+                <a:gridCol w="1091980">
+                  <a:extLst>
+                    <a:ext uri="{9D8B030D-6E8A-4147-A177-3AD203B41FA5}">
+                      <a16:colId xmlns:a16="http://schemas.microsoft.com/office/drawing/2014/main" val="20000"/>
+                    </a:ext>
+                  </a:extLst>
+                </a:gridCol>
+              </a:tblGrid>
+              <a:tr h="634387">
+                <a:tc>
+                  <a:txBody>
+                    <a:bodyPr/>
+                    <a:lstStyle/>
+                    <a:p>
+                      <a:pPr algn="ctr" latinLnBrk="1">
+                        <a:defRPr/>
+                      </a:pPr>
+                      <a:endParaRPr lang="ko-KR" altLang="en-US" sz="900" dirty="0">
+                        <a:latin typeface="피플폰트 Bold" panose="020B0600000101010101" pitchFamily="50" charset="-127"/>
+                        <a:ea typeface="피플폰트 Bold" panose="020B0600000101010101" pitchFamily="50" charset="-127"/>
+                      </a:endParaRPr>
+                    </a:p>
+                  </a:txBody>
+                  <a:tcPr marL="71302" marR="71302" marT="69474" marB="69474" anchor="ctr">
+                    <a:lnL w="28575" cap="flat" cmpd="sng" algn="ctr">
+                      <a:solidFill>
+                        <a:schemeClr val="bg1"/>
+                      </a:solidFill>
+                      <a:prstDash val="solid"/>
+                      <a:round/>
+                      <a:headEnd type="none" w="med" len="med"/>
+                      <a:tailEnd type="none" w="med" len="med"/>
+                    </a:lnL>
+                    <a:lnR w="28575" cap="flat" cmpd="sng" algn="ctr">
+                      <a:solidFill>
+                        <a:schemeClr val="bg1"/>
+                      </a:solidFill>
+                      <a:prstDash val="solid"/>
+                      <a:round/>
+                      <a:headEnd type="none" w="med" len="med"/>
+                      <a:tailEnd type="none" w="med" len="med"/>
+                    </a:lnR>
+                    <a:lnT w="28575" cap="flat" cmpd="sng" algn="ctr">
+                      <a:solidFill>
+                        <a:schemeClr val="bg1"/>
+                      </a:solidFill>
+                      <a:prstDash val="solid"/>
+                      <a:round/>
+                      <a:headEnd type="none" w="med" len="med"/>
+                      <a:tailEnd type="none" w="med" len="med"/>
+                    </a:lnT>
+                    <a:lnB w="28575" cap="flat" cmpd="sng" algn="ctr">
+                      <a:solidFill>
+                        <a:schemeClr val="bg1"/>
+                      </a:solidFill>
+                      <a:prstDash val="solid"/>
+                      <a:round/>
+                      <a:headEnd type="none" w="med" len="med"/>
+                      <a:tailEnd type="none" w="med" len="med"/>
+                    </a:lnB>
+                    <a:solidFill>
+                      <a:schemeClr val="bg1">
+                        <a:lumMod val="50000"/>
+                      </a:schemeClr>
+                    </a:solidFill>
+                  </a:tcPr>
+                </a:tc>
+                <a:extLst>
+                  <a:ext uri="{0D108BD9-81ED-4DB2-BD59-A6C34878D82A}">
+                    <a16:rowId xmlns:a16="http://schemas.microsoft.com/office/drawing/2014/main" val="10000"/>
+                  </a:ext>
+                </a:extLst>
+              </a:tr>
+            </a:tbl>
+          </a:graphicData>
+        </a:graphic>
+      </p:graphicFrame>
+      <p:graphicFrame>
+        <p:nvGraphicFramePr>
+          <p:cNvPr id="40" name="표 4">
+            <a:extLst>
+              <a:ext uri="{FF2B5EF4-FFF2-40B4-BE49-F238E27FC236}">
+                <a16:creationId xmlns:a16="http://schemas.microsoft.com/office/drawing/2014/main" id="{94DEC467-85BA-43A1-BCD6-A32963B2CADC}"/>
+              </a:ext>
+            </a:extLst>
+          </p:cNvPr>
+          <p:cNvGraphicFramePr>
+            <a:graphicFrameLocks noGrp="1"/>
+          </p:cNvGraphicFramePr>
+          <p:nvPr>
+            <p:extLst>
+              <p:ext uri="{D42A27DB-BD31-4B8C-83A1-F6EECF244321}">
+                <p14:modId xmlns:p14="http://schemas.microsoft.com/office/powerpoint/2010/main" val="1516939096"/>
+              </p:ext>
+            </p:extLst>
+          </p:nvPr>
+        </p:nvGraphicFramePr>
+        <p:xfrm>
+          <a:off x="7515503" y="5284307"/>
+          <a:ext cx="1091980" cy="587267"/>
+        </p:xfrm>
+        <a:graphic>
+          <a:graphicData uri="http://schemas.openxmlformats.org/drawingml/2006/table">
+            <a:tbl>
+              <a:tblPr firstRow="1" bandRow="1">
+                <a:effectLst>
+                  <a:outerShdw blurRad="50800" dist="38100" dir="2700000" algn="tl" rotWithShape="0">
+                    <a:prstClr val="black">
+                      <a:alpha val="40000"/>
+                    </a:prstClr>
+                  </a:outerShdw>
+                </a:effectLst>
+                <a:tableStyleId>{D03447BB-5D67-496B-8E87-E561075AD55C}</a:tableStyleId>
+              </a:tblPr>
+              <a:tblGrid>
+                <a:gridCol w="1091980">
+                  <a:extLst>
+                    <a:ext uri="{9D8B030D-6E8A-4147-A177-3AD203B41FA5}">
+                      <a16:colId xmlns:a16="http://schemas.microsoft.com/office/drawing/2014/main" val="20000"/>
+                    </a:ext>
+                  </a:extLst>
+                </a:gridCol>
+              </a:tblGrid>
+              <a:tr h="287351">
+                <a:tc>
+                  <a:txBody>
+                    <a:bodyPr/>
+                    <a:lstStyle/>
+                    <a:p>
+                      <a:pPr algn="ctr" latinLnBrk="1">
+                        <a:defRPr/>
+                      </a:pPr>
+                      <a:endParaRPr lang="ko-KR" altLang="en-US" sz="1000" dirty="0">
+                        <a:latin typeface="피플폰트 Bold" panose="020B0600000101010101" pitchFamily="50" charset="-127"/>
+                        <a:ea typeface="피플폰트 Bold" panose="020B0600000101010101" pitchFamily="50" charset="-127"/>
+                      </a:endParaRPr>
+                    </a:p>
+                  </a:txBody>
+                  <a:tcPr marL="156067" marR="156067" marT="70939" marB="70939" anchor="ctr">
+                    <a:lnL w="28575" cap="flat" cmpd="sng" algn="ctr">
+                      <a:solidFill>
+                        <a:schemeClr val="bg1"/>
+                      </a:solidFill>
+                      <a:prstDash val="solid"/>
+                      <a:round/>
+                      <a:headEnd type="none" w="med" len="med"/>
+                      <a:tailEnd type="none" w="med" len="med"/>
+                    </a:lnL>
+                    <a:lnR w="28575" cap="flat" cmpd="sng" algn="ctr">
+                      <a:solidFill>
+                        <a:schemeClr val="bg1"/>
+                      </a:solidFill>
+                      <a:prstDash val="solid"/>
+                      <a:round/>
+                      <a:headEnd type="none" w="med" len="med"/>
+                      <a:tailEnd type="none" w="med" len="med"/>
+                    </a:lnR>
+                    <a:lnT w="28575" cap="flat" cmpd="sng" algn="ctr">
+                      <a:solidFill>
+                        <a:schemeClr val="bg1"/>
+                      </a:solidFill>
+                      <a:prstDash val="solid"/>
+                      <a:round/>
+                      <a:headEnd type="none" w="med" len="med"/>
+                      <a:tailEnd type="none" w="med" len="med"/>
+                    </a:lnT>
+                    <a:lnB w="28575" cap="flat" cmpd="sng" algn="ctr">
+                      <a:solidFill>
+                        <a:schemeClr val="bg1"/>
+                      </a:solidFill>
+                      <a:prstDash val="solid"/>
+                      <a:round/>
+                      <a:headEnd type="none" w="med" len="med"/>
+                      <a:tailEnd type="none" w="med" len="med"/>
+                    </a:lnB>
+                    <a:solidFill>
+                      <a:srgbClr val="C00000"/>
+                    </a:solidFill>
+                  </a:tcPr>
+                </a:tc>
+                <a:extLst>
+                  <a:ext uri="{0D108BD9-81ED-4DB2-BD59-A6C34878D82A}">
+                    <a16:rowId xmlns:a16="http://schemas.microsoft.com/office/drawing/2014/main" val="10000"/>
+                  </a:ext>
+                </a:extLst>
+              </a:tr>
+              <a:tr h="292989">
+                <a:tc>
+                  <a:txBody>
+                    <a:bodyPr/>
+                    <a:lstStyle/>
+                    <a:p>
+                      <a:pPr algn="ctr" latinLnBrk="1">
+                        <a:defRPr/>
+                      </a:pPr>
+                      <a:endParaRPr lang="ko-KR" altLang="en-US" sz="1000" b="1" kern="1200" dirty="0">
+                        <a:solidFill>
+                          <a:schemeClr val="tx1"/>
+                        </a:solidFill>
+                        <a:latin typeface="피플폰트 Bold" panose="020B0600000101010101" pitchFamily="50" charset="-127"/>
+                        <a:ea typeface="피플폰트 Bold" panose="020B0600000101010101" pitchFamily="50" charset="-127"/>
+                        <a:cs typeface="+mn-cs"/>
+                      </a:endParaRPr>
+                    </a:p>
+                  </a:txBody>
+                  <a:tcPr marL="0" marR="0" marT="0" marB="0" anchor="ctr">
+                    <a:lnL w="28575" cap="flat" cmpd="sng" algn="ctr">
+                      <a:solidFill>
+                        <a:schemeClr val="bg1"/>
+                      </a:solidFill>
+                      <a:prstDash val="solid"/>
+                      <a:round/>
+                      <a:headEnd type="none" w="med" len="med"/>
+                      <a:tailEnd type="none" w="med" len="med"/>
+                    </a:lnL>
+                    <a:lnR w="28575" cap="flat" cmpd="sng" algn="ctr">
+                      <a:solidFill>
+                        <a:schemeClr val="bg1"/>
+                      </a:solidFill>
+                      <a:prstDash val="solid"/>
+                      <a:round/>
+                      <a:headEnd type="none" w="med" len="med"/>
+                      <a:tailEnd type="none" w="med" len="med"/>
+                    </a:lnR>
+                    <a:lnT w="28575" cap="flat" cmpd="sng" algn="ctr">
+                      <a:solidFill>
+                        <a:schemeClr val="bg1"/>
+                      </a:solidFill>
+                      <a:prstDash val="solid"/>
+                      <a:round/>
+                      <a:headEnd type="none" w="med" len="med"/>
+                      <a:tailEnd type="none" w="med" len="med"/>
+                    </a:lnT>
+                    <a:lnB w="28575" cap="flat" cmpd="sng" algn="ctr">
+                      <a:solidFill>
+                        <a:schemeClr val="bg1"/>
+                      </a:solidFill>
+                      <a:prstDash val="solid"/>
+                      <a:round/>
+                      <a:headEnd type="none" w="med" len="med"/>
+                      <a:tailEnd type="none" w="med" len="med"/>
+                    </a:lnB>
+                    <a:solidFill>
+                      <a:srgbClr val="D9D9D9"/>
+                    </a:solidFill>
+                  </a:tcPr>
+                </a:tc>
+                <a:extLst>
+                  <a:ext uri="{0D108BD9-81ED-4DB2-BD59-A6C34878D82A}">
+                    <a16:rowId xmlns:a16="http://schemas.microsoft.com/office/drawing/2014/main" val="10001"/>
+                  </a:ext>
+                </a:extLst>
+              </a:tr>
+            </a:tbl>
+          </a:graphicData>
+        </a:graphic>
+      </p:graphicFrame>
+      <p:cxnSp>
+        <p:nvCxnSpPr>
+          <p:cNvPr id="42" name="직선 화살표 연결선 41">
+            <a:extLst>
+              <a:ext uri="{FF2B5EF4-FFF2-40B4-BE49-F238E27FC236}">
+                <a16:creationId xmlns:a16="http://schemas.microsoft.com/office/drawing/2014/main" id="{5436B06B-38CA-4D5E-9130-A6308691B66D}"/>
+              </a:ext>
+            </a:extLst>
+          </p:cNvPr>
+          <p:cNvCxnSpPr>
+            <a:cxnSpLocks/>
+          </p:cNvCxnSpPr>
+          <p:nvPr/>
+        </p:nvCxnSpPr>
+        <p:spPr>
+          <a:xfrm flipH="1" flipV="1">
+            <a:off x="8068756" y="4549818"/>
+            <a:ext cx="1" cy="636878"/>
+          </a:xfrm>
+          <a:prstGeom prst="straightConnector1">
+            <a:avLst/>
+          </a:prstGeom>
+          <a:solidFill>
+            <a:schemeClr val="accent1"/>
+          </a:solidFill>
+          <a:ln w="19050" cap="flat" cmpd="sng" algn="ctr">
+            <a:solidFill>
+              <a:schemeClr val="tx1"/>
+            </a:solidFill>
+            <a:prstDash val="solid"/>
+            <a:round/>
+            <a:headEnd type="triangle" w="sm" len="sm"/>
+            <a:tailEnd type="triangle" w="sm" len="sm"/>
+          </a:ln>
+          <a:effectLst/>
+        </p:spPr>
+      </p:cxnSp>
+      <p:sp>
+        <p:nvSpPr>
+          <p:cNvPr id="47" name="텍스트 개체 틀 2">
+            <a:extLst>
+              <a:ext uri="{FF2B5EF4-FFF2-40B4-BE49-F238E27FC236}">
+                <a16:creationId xmlns:a16="http://schemas.microsoft.com/office/drawing/2014/main" id="{1CAACE9D-F737-44F9-B792-E73743F4137B}"/>
+              </a:ext>
+            </a:extLst>
+          </p:cNvPr>
+          <p:cNvSpPr>
+            <a:spLocks noGrp="1"/>
+          </p:cNvSpPr>
+          <p:nvPr>
+            <p:ph type="body" sz="quarter" idx="12"/>
+          </p:nvPr>
+        </p:nvSpPr>
+        <p:spPr>
+          <a:xfrm>
+            <a:off x="393700" y="927000"/>
+            <a:ext cx="7912100" cy="349711"/>
+          </a:xfrm>
+        </p:spPr>
+        <p:txBody>
+          <a:bodyPr vert="horz" wrap="square" lIns="0" tIns="0" rIns="0" bIns="0" rtlCol="0" anchor="ctr">
+            <a:spAutoFit/>
+          </a:bodyPr>
+          <a:lstStyle/>
+          <a:p>
+            <a:pPr>
+              <a:lnSpc>
+                <a:spcPct val="130000"/>
+              </a:lnSpc>
+              <a:spcBef>
+                <a:spcPts val="0"/>
+              </a:spcBef>
+            </a:pPr>
+            <a:r>
+              <a:rPr lang="ko-KR" altLang="en-US" sz="900" dirty="0">
+                <a:latin typeface="피플폰트 Bold" panose="020B0600000101010101" pitchFamily="50" charset="-127"/>
+                <a:ea typeface="피플폰트 Bold" panose="020B0600000101010101" pitchFamily="50" charset="-127"/>
+              </a:rPr>
+              <a:t>본건은</a:t>
+            </a:r>
+            <a:endParaRPr lang="en-US" altLang="ko-KR" sz="900" dirty="0">
+              <a:latin typeface="피플폰트 Bold" panose="020B0600000101010101" pitchFamily="50" charset="-127"/>
+              <a:ea typeface="피플폰트 Bold" panose="020B0600000101010101" pitchFamily="50" charset="-127"/>
+            </a:endParaRPr>
+          </a:p>
+          <a:p>
+            <a:pPr>
+              <a:lnSpc>
+                <a:spcPct val="130000"/>
+              </a:lnSpc>
+              <a:spcBef>
+                <a:spcPts val="0"/>
+              </a:spcBef>
+            </a:pPr>
+            <a:r>
+              <a:rPr lang="ko-KR" altLang="en-US" sz="900" dirty="0">
+                <a:latin typeface="피플폰트 Bold" panose="020B0600000101010101" pitchFamily="50" charset="-127"/>
+                <a:ea typeface="피플폰트 Bold" panose="020B0600000101010101" pitchFamily="50" charset="-127"/>
+              </a:rPr>
+              <a:t>을 담보로 하는 담보대출의 </a:t>
+            </a:r>
+            <a:r>
+              <a:rPr lang="en-US" altLang="ko-KR" sz="900" dirty="0">
+                <a:latin typeface="피플폰트 Bold" panose="020B0600000101010101" pitchFamily="50" charset="-127"/>
+                <a:ea typeface="피플폰트 Bold" panose="020B0600000101010101" pitchFamily="50" charset="-127"/>
+              </a:rPr>
+              <a:t>Tr.</a:t>
+            </a:r>
+            <a:r>
+              <a:rPr lang="ko-KR" altLang="en-US" sz="900" dirty="0">
+                <a:latin typeface="피플폰트 Bold" panose="020B0600000101010101" pitchFamily="50" charset="-127"/>
+                <a:ea typeface="피플폰트 Bold" panose="020B0600000101010101" pitchFamily="50" charset="-127"/>
+              </a:rPr>
+              <a:t>를 기초로 발행하는 사모사채 입니다</a:t>
+            </a:r>
+            <a:r>
+              <a:rPr lang="en-US" altLang="ko-KR" sz="900" dirty="0">
+                <a:latin typeface="피플폰트 Bold" panose="020B0600000101010101" pitchFamily="50" charset="-127"/>
+                <a:ea typeface="피플폰트 Bold" panose="020B0600000101010101" pitchFamily="50" charset="-127"/>
+              </a:rPr>
+              <a:t>.</a:t>
+            </a:r>
+          </a:p>
+        </p:txBody>
+      </p:sp>
+      <p:sp>
+        <p:nvSpPr>
+          <p:cNvPr id="34" name="슬라이드 번호 개체 틀 1">
+            <a:extLst>
+              <a:ext uri="{FF2B5EF4-FFF2-40B4-BE49-F238E27FC236}">
+                <a16:creationId xmlns:a16="http://schemas.microsoft.com/office/drawing/2014/main" id="{E9B3BA0D-EEAE-4E8E-BC9C-5DC1851989FB}"/>
+              </a:ext>
+            </a:extLst>
+          </p:cNvPr>
+          <p:cNvSpPr txBox="1">
+            <a:spLocks/>
+          </p:cNvSpPr>
+          <p:nvPr/>
+        </p:nvSpPr>
+        <p:spPr>
+          <a:xfrm>
+            <a:off x="6567488" y="6576219"/>
+            <a:ext cx="3097212" cy="227169"/>
+          </a:xfrm>
+          <a:prstGeom prst="rect">
+            <a:avLst/>
+          </a:prstGeom>
+        </p:spPr>
+        <p:txBody>
+          <a:bodyPr vert="horz" lIns="91440" tIns="45720" rIns="0" bIns="45720" rtlCol="0" anchor="ctr"/>
+          <a:lstStyle>
+            <a:defPPr>
+              <a:defRPr lang="en-US"/>
+            </a:defPPr>
+            <a:lvl1pPr marL="0" algn="r" defTabSz="457200" rtl="0" eaLnBrk="1" latinLnBrk="0" hangingPunct="1">
+              <a:defRPr sz="800" kern="1200">
+                <a:solidFill>
+                  <a:schemeClr val="tx1">
+                    <a:tint val="75000"/>
+                  </a:schemeClr>
+                </a:solidFill>
+                <a:latin typeface="+mn-ea"/>
+                <a:ea typeface="+mn-ea"/>
+                <a:cs typeface="+mn-cs"/>
+              </a:defRPr>
+            </a:lvl1pPr>
+            <a:lvl2pPr marL="457200" algn="l" defTabSz="457200" rtl="0" eaLnBrk="1" latinLnBrk="0" hangingPunct="1">
+              <a:defRPr sz="1800" kern="1200">
+                <a:solidFill>
+                  <a:schemeClr val="tx1"/>
+                </a:solidFill>
+                <a:latin typeface="+mn-lt"/>
+                <a:ea typeface="+mn-ea"/>
+                <a:cs typeface="+mn-cs"/>
+              </a:defRPr>
+            </a:lvl2pPr>
+            <a:lvl3pPr marL="914400" algn="l" defTabSz="457200" rtl="0" eaLnBrk="1" latinLnBrk="0" hangingPunct="1">
+              <a:defRPr sz="1800" kern="1200">
+                <a:solidFill>
+                  <a:schemeClr val="tx1"/>
+                </a:solidFill>
+                <a:latin typeface="+mn-lt"/>
+                <a:ea typeface="+mn-ea"/>
+                <a:cs typeface="+mn-cs"/>
+              </a:defRPr>
+            </a:lvl3pPr>
+            <a:lvl4pPr marL="1371600" algn="l" defTabSz="457200" rtl="0" eaLnBrk="1" latinLnBrk="0" hangingPunct="1">
+              <a:defRPr sz="1800" kern="1200">
+                <a:solidFill>
+                  <a:schemeClr val="tx1"/>
+                </a:solidFill>
+                <a:latin typeface="+mn-lt"/>
+                <a:ea typeface="+mn-ea"/>
+                <a:cs typeface="+mn-cs"/>
+              </a:defRPr>
+            </a:lvl4pPr>
+            <a:lvl5pPr marL="1828800" algn="l" defTabSz="457200" rtl="0" eaLnBrk="1" latinLnBrk="0" hangingPunct="1">
+              <a:defRPr sz="1800" kern="1200">
+                <a:solidFill>
+                  <a:schemeClr val="tx1"/>
+                </a:solidFill>
+                <a:latin typeface="+mn-lt"/>
+                <a:ea typeface="+mn-ea"/>
+                <a:cs typeface="+mn-cs"/>
+              </a:defRPr>
+            </a:lvl5pPr>
+            <a:lvl6pPr marL="2286000" algn="l" defTabSz="457200" rtl="0" eaLnBrk="1" latinLnBrk="0" hangingPunct="1">
+              <a:defRPr sz="1800" kern="1200">
+                <a:solidFill>
+                  <a:schemeClr val="tx1"/>
+                </a:solidFill>
+                <a:latin typeface="+mn-lt"/>
+                <a:ea typeface="+mn-ea"/>
+                <a:cs typeface="+mn-cs"/>
+              </a:defRPr>
+            </a:lvl6pPr>
+            <a:lvl7pPr marL="2743200" algn="l" defTabSz="457200" rtl="0" eaLnBrk="1" latinLnBrk="0" hangingPunct="1">
+              <a:defRPr sz="1800" kern="1200">
+                <a:solidFill>
+                  <a:schemeClr val="tx1"/>
+                </a:solidFill>
+                <a:latin typeface="+mn-lt"/>
+                <a:ea typeface="+mn-ea"/>
+                <a:cs typeface="+mn-cs"/>
+              </a:defRPr>
+            </a:lvl7pPr>
+            <a:lvl8pPr marL="3200400" algn="l" defTabSz="457200" rtl="0" eaLnBrk="1" latinLnBrk="0" hangingPunct="1">
+              <a:defRPr sz="1800" kern="1200">
+                <a:solidFill>
+                  <a:schemeClr val="tx1"/>
+                </a:solidFill>
+                <a:latin typeface="+mn-lt"/>
+                <a:ea typeface="+mn-ea"/>
+                <a:cs typeface="+mn-cs"/>
+              </a:defRPr>
+            </a:lvl8pPr>
+            <a:lvl9pPr marL="3657600" algn="l" defTabSz="457200" rtl="0" eaLnBrk="1" latinLnBrk="0" hangingPunct="1">
+              <a:defRPr sz="1800" kern="1200">
+                <a:solidFill>
+                  <a:schemeClr val="tx1"/>
+                </a:solidFill>
+                <a:latin typeface="+mn-lt"/>
+                <a:ea typeface="+mn-ea"/>
+                <a:cs typeface="+mn-cs"/>
+              </a:defRPr>
+            </a:lvl9pPr>
+          </a:lstStyle>
+          <a:p>
+            <a:pPr>
+              <a:defRPr/>
+            </a:pPr>
+            <a:r>
+              <a:rPr lang="ko-KR" altLang="en-US" dirty="0">
+                <a:latin typeface="피플폰트 Light" panose="020B0600000101010101" pitchFamily="50" charset="-127"/>
+                <a:ea typeface="피플폰트 Light" panose="020B0600000101010101" pitchFamily="50" charset="-127"/>
+              </a:rPr>
+              <a:t>사업명｜</a:t>
+            </a:r>
+            <a:r>
+              <a:rPr lang="en-US" altLang="ko-KR" dirty="0">
+                <a:latin typeface="피플폰트 Light" panose="020B0600000101010101" pitchFamily="50" charset="-127"/>
+                <a:ea typeface="피플폰트 Light" panose="020B0600000101010101" pitchFamily="50" charset="-127"/>
+              </a:rPr>
+              <a:t>  </a:t>
+            </a:r>
+            <a:fld id="{F3A57096-21A8-44ED-AF94-8A259496D2BE}" type="slidenum">
+              <a:rPr lang="en-US" altLang="en-US" smtClean="0">
+                <a:latin typeface="피플폰트 Light" panose="020B0600000101010101" pitchFamily="50" charset="-127"/>
+                <a:ea typeface="피플폰트 Light" panose="020B0600000101010101" pitchFamily="50" charset="-127"/>
+              </a:rPr>
+              <a:pPr>
+                <a:defRPr/>
+              </a:pPr>
+              <a:t>8</a:t>
+            </a:fld>
+            <a:endParaRPr lang="en-US" altLang="en-US" dirty="0">
+              <a:latin typeface="피플폰트 Light" panose="020B0600000101010101" pitchFamily="50" charset="-127"/>
+              <a:ea typeface="피플폰트 Light" panose="020B0600000101010101" pitchFamily="50" charset="-127"/>
+            </a:endParaRPr>
+          </a:p>
+        </p:txBody>
+      </p:sp>
+    </p:spTree>
+    <p:extLst>
+      <p:ext uri="{BB962C8B-B14F-4D97-AF65-F5344CB8AC3E}">
+        <p14:creationId xmlns:p14="http://schemas.microsoft.com/office/powerpoint/2010/main" val="2199691546"/>
+      </p:ext>
+    </p:extLst>
+  </p:cSld>
+  <p:clrMapOvr>
+    <a:masterClrMapping/>
+  </p:clrMapOvr>
+  <p:transition/>
+</p:sld>
+</file>
+
+<file path=ppt/slides/slide9.xml><?xml version="1.0" encoding="utf-8"?>
+<p:sld xmlns:a="http://schemas.openxmlformats.org/drawingml/2006/main" xmlns:r="http://schemas.openxmlformats.org/officeDocument/2006/relationships" xmlns:p="http://schemas.openxmlformats.org/presentationml/2006/main">
+  <p:cSld>
+    <p:spTree>
+      <p:nvGrpSpPr>
         <p:cNvPr id="1" name=""/>
         <p:cNvGrpSpPr/>
         <p:nvPr/>
@@ -14748,565 +19207,6 @@
     <p:extLst>
       <p:ext uri="{BB962C8B-B14F-4D97-AF65-F5344CB8AC3E}">
         <p14:creationId xmlns:p14="http://schemas.microsoft.com/office/powerpoint/2010/main" val="652223241"/>
-      </p:ext>
-    </p:extLst>
-  </p:cSld>
-  <p:clrMapOvr>
-    <a:masterClrMapping/>
-  </p:clrMapOvr>
-</p:sld>
-</file>
-
-<file path=ppt/slides/slide9.xml><?xml version="1.0" encoding="utf-8"?>
-<p:sld xmlns:a="http://schemas.openxmlformats.org/drawingml/2006/main" xmlns:r="http://schemas.openxmlformats.org/officeDocument/2006/relationships" xmlns:p="http://schemas.openxmlformats.org/presentationml/2006/main">
-  <p:cSld>
-    <p:spTree>
-      <p:nvGrpSpPr>
-        <p:cNvPr id="1" name=""/>
-        <p:cNvGrpSpPr/>
-        <p:nvPr/>
-      </p:nvGrpSpPr>
-      <p:grpSpPr>
-        <a:xfrm>
-          <a:off x="0" y="0"/>
-          <a:ext cx="0" cy="0"/>
-          <a:chOff x="0" y="0"/>
-          <a:chExt cx="0" cy="0"/>
-        </a:xfrm>
-      </p:grpSpPr>
-      <p:pic>
-        <p:nvPicPr>
-          <p:cNvPr id="2" name="그림 1">
-            <a:extLst>
-              <a:ext uri="{FF2B5EF4-FFF2-40B4-BE49-F238E27FC236}">
-                <a16:creationId xmlns:a16="http://schemas.microsoft.com/office/drawing/2014/main" id="{5B4C0DED-FC0A-4276-BB06-0290D081D971}"/>
-              </a:ext>
-            </a:extLst>
-          </p:cNvPr>
-          <p:cNvPicPr>
-            <a:picLocks noChangeAspect="1"/>
-          </p:cNvPicPr>
-          <p:nvPr/>
-        </p:nvPicPr>
-        <p:blipFill rotWithShape="1">
-          <a:blip r:embed="rId2"/>
-          <a:srcRect l="34124" t="35068" r="5643" b="19413"/>
-          <a:stretch/>
-        </p:blipFill>
-        <p:spPr>
-          <a:xfrm>
-            <a:off x="-1" y="4136207"/>
-            <a:ext cx="9906001" cy="2463967"/>
-          </a:xfrm>
-          <a:prstGeom prst="rect">
-            <a:avLst/>
-          </a:prstGeom>
-        </p:spPr>
-      </p:pic>
-      <p:pic>
-        <p:nvPicPr>
-          <p:cNvPr id="17" name="그림 16">
-            <a:extLst>
-              <a:ext uri="{FF2B5EF4-FFF2-40B4-BE49-F238E27FC236}">
-                <a16:creationId xmlns:a16="http://schemas.microsoft.com/office/drawing/2014/main" id="{1DD57231-2B6A-43DF-9ED0-FB2FB86EF23C}"/>
-              </a:ext>
-            </a:extLst>
-          </p:cNvPr>
-          <p:cNvPicPr>
-            <a:picLocks noChangeAspect="1"/>
-          </p:cNvPicPr>
-          <p:nvPr/>
-        </p:nvPicPr>
-        <p:blipFill>
-          <a:blip r:embed="rId3"/>
-          <a:stretch>
-            <a:fillRect/>
-          </a:stretch>
-        </p:blipFill>
-        <p:spPr>
-          <a:xfrm>
-            <a:off x="342423" y="257826"/>
-            <a:ext cx="2665584" cy="213076"/>
-          </a:xfrm>
-          <a:prstGeom prst="rect">
-            <a:avLst/>
-          </a:prstGeom>
-        </p:spPr>
-      </p:pic>
-      <p:sp>
-        <p:nvSpPr>
-          <p:cNvPr id="25" name="타원 24">
-            <a:extLst>
-              <a:ext uri="{FF2B5EF4-FFF2-40B4-BE49-F238E27FC236}">
-                <a16:creationId xmlns:a16="http://schemas.microsoft.com/office/drawing/2014/main" id="{892442E4-BA68-419D-944D-0E981AEF998B}"/>
-              </a:ext>
-            </a:extLst>
-          </p:cNvPr>
-          <p:cNvSpPr/>
-          <p:nvPr/>
-        </p:nvSpPr>
-        <p:spPr>
-          <a:xfrm>
-            <a:off x="6256041" y="2960411"/>
-            <a:ext cx="3132000" cy="3132000"/>
-          </a:xfrm>
-          <a:prstGeom prst="ellipse">
-            <a:avLst/>
-          </a:prstGeom>
-          <a:solidFill>
-            <a:srgbClr val="2E75B6"/>
-          </a:solidFill>
-          <a:ln>
-            <a:noFill/>
-          </a:ln>
-        </p:spPr>
-        <p:style>
-          <a:lnRef idx="2">
-            <a:schemeClr val="accent1">
-              <a:shade val="50000"/>
-            </a:schemeClr>
-          </a:lnRef>
-          <a:fillRef idx="1">
-            <a:schemeClr val="accent1"/>
-          </a:fillRef>
-          <a:effectRef idx="0">
-            <a:schemeClr val="accent1"/>
-          </a:effectRef>
-          <a:fontRef idx="minor">
-            <a:schemeClr val="lt1"/>
-          </a:fontRef>
-        </p:style>
-        <p:txBody>
-          <a:bodyPr rtlCol="0" anchor="ctr"/>
-          <a:lstStyle/>
-          <a:p>
-            <a:pPr algn="ctr"/>
-            <a:endParaRPr lang="ko-KR" altLang="en-US" dirty="0"/>
-          </a:p>
-        </p:txBody>
-      </p:sp>
-      <p:sp>
-        <p:nvSpPr>
-          <p:cNvPr id="26" name="타원 25">
-            <a:extLst>
-              <a:ext uri="{FF2B5EF4-FFF2-40B4-BE49-F238E27FC236}">
-                <a16:creationId xmlns:a16="http://schemas.microsoft.com/office/drawing/2014/main" id="{EB56E101-BCBD-40A4-99F5-D2FDC42CA5A3}"/>
-              </a:ext>
-            </a:extLst>
-          </p:cNvPr>
-          <p:cNvSpPr/>
-          <p:nvPr/>
-        </p:nvSpPr>
-        <p:spPr>
-          <a:xfrm>
-            <a:off x="6479253" y="3164844"/>
-            <a:ext cx="2680631" cy="2723133"/>
-          </a:xfrm>
-          <a:prstGeom prst="ellipse">
-            <a:avLst/>
-          </a:prstGeom>
-          <a:solidFill>
-            <a:srgbClr val="92D050"/>
-          </a:solidFill>
-          <a:ln w="76200">
-            <a:solidFill>
-              <a:schemeClr val="bg1"/>
-            </a:solidFill>
-          </a:ln>
-        </p:spPr>
-        <p:style>
-          <a:lnRef idx="2">
-            <a:schemeClr val="accent1">
-              <a:shade val="50000"/>
-            </a:schemeClr>
-          </a:lnRef>
-          <a:fillRef idx="1">
-            <a:schemeClr val="accent1"/>
-          </a:fillRef>
-          <a:effectRef idx="0">
-            <a:schemeClr val="accent1"/>
-          </a:effectRef>
-          <a:fontRef idx="minor">
-            <a:schemeClr val="lt1"/>
-          </a:fontRef>
-        </p:style>
-        <p:txBody>
-          <a:bodyPr rtlCol="0" anchor="ctr"/>
-          <a:lstStyle/>
-          <a:p>
-            <a:pPr algn="ctr"/>
-            <a:endParaRPr lang="ko-KR" altLang="en-US"/>
-          </a:p>
-        </p:txBody>
-      </p:sp>
-      <p:sp>
-        <p:nvSpPr>
-          <p:cNvPr id="27" name="타원 26">
-            <a:extLst>
-              <a:ext uri="{FF2B5EF4-FFF2-40B4-BE49-F238E27FC236}">
-                <a16:creationId xmlns:a16="http://schemas.microsoft.com/office/drawing/2014/main" id="{3A3FD978-F67F-4F41-A996-C9D3FB06FE38}"/>
-              </a:ext>
-            </a:extLst>
-          </p:cNvPr>
-          <p:cNvSpPr/>
-          <p:nvPr/>
-        </p:nvSpPr>
-        <p:spPr>
-          <a:xfrm>
-            <a:off x="5877822" y="264438"/>
-            <a:ext cx="3492000" cy="3492000"/>
-          </a:xfrm>
-          <a:prstGeom prst="ellipse">
-            <a:avLst/>
-          </a:prstGeom>
-          <a:solidFill>
-            <a:srgbClr val="2E75B6"/>
-          </a:solidFill>
-          <a:ln>
-            <a:noFill/>
-          </a:ln>
-        </p:spPr>
-        <p:style>
-          <a:lnRef idx="2">
-            <a:schemeClr val="accent1">
-              <a:shade val="50000"/>
-            </a:schemeClr>
-          </a:lnRef>
-          <a:fillRef idx="1">
-            <a:schemeClr val="accent1"/>
-          </a:fillRef>
-          <a:effectRef idx="0">
-            <a:schemeClr val="accent1"/>
-          </a:effectRef>
-          <a:fontRef idx="minor">
-            <a:schemeClr val="lt1"/>
-          </a:fontRef>
-        </p:style>
-        <p:txBody>
-          <a:bodyPr rtlCol="0" anchor="ctr"/>
-          <a:lstStyle/>
-          <a:p>
-            <a:pPr algn="ctr"/>
-            <a:endParaRPr lang="ko-KR" altLang="en-US" dirty="0"/>
-          </a:p>
-        </p:txBody>
-      </p:sp>
-      <p:sp>
-        <p:nvSpPr>
-          <p:cNvPr id="28" name="타원 27">
-            <a:extLst>
-              <a:ext uri="{FF2B5EF4-FFF2-40B4-BE49-F238E27FC236}">
-                <a16:creationId xmlns:a16="http://schemas.microsoft.com/office/drawing/2014/main" id="{7442E925-D1CF-4E49-8E1A-6BE23EF6B1EB}"/>
-              </a:ext>
-            </a:extLst>
-          </p:cNvPr>
-          <p:cNvSpPr/>
-          <p:nvPr/>
-        </p:nvSpPr>
-        <p:spPr>
-          <a:xfrm>
-            <a:off x="6146441" y="495050"/>
-            <a:ext cx="2959819" cy="3045868"/>
-          </a:xfrm>
-          <a:prstGeom prst="ellipse">
-            <a:avLst/>
-          </a:prstGeom>
-          <a:solidFill>
-            <a:srgbClr val="92D050"/>
-          </a:solidFill>
-          <a:ln w="76200">
-            <a:solidFill>
-              <a:schemeClr val="bg1"/>
-            </a:solidFill>
-          </a:ln>
-        </p:spPr>
-        <p:style>
-          <a:lnRef idx="2">
-            <a:schemeClr val="accent1">
-              <a:shade val="50000"/>
-            </a:schemeClr>
-          </a:lnRef>
-          <a:fillRef idx="1">
-            <a:schemeClr val="accent1"/>
-          </a:fillRef>
-          <a:effectRef idx="0">
-            <a:schemeClr val="accent1"/>
-          </a:effectRef>
-          <a:fontRef idx="minor">
-            <a:schemeClr val="lt1"/>
-          </a:fontRef>
-        </p:style>
-        <p:txBody>
-          <a:bodyPr rtlCol="0" anchor="ctr"/>
-          <a:lstStyle/>
-          <a:p>
-            <a:pPr algn="ctr"/>
-            <a:endParaRPr lang="ko-KR" altLang="en-US"/>
-          </a:p>
-        </p:txBody>
-      </p:sp>
-      <p:sp>
-        <p:nvSpPr>
-          <p:cNvPr id="29" name="타원 28">
-            <a:extLst>
-              <a:ext uri="{FF2B5EF4-FFF2-40B4-BE49-F238E27FC236}">
-                <a16:creationId xmlns:a16="http://schemas.microsoft.com/office/drawing/2014/main" id="{A9DF0422-9C1C-4D6E-84D9-B33AD0834E5C}"/>
-              </a:ext>
-            </a:extLst>
-          </p:cNvPr>
-          <p:cNvSpPr/>
-          <p:nvPr/>
-        </p:nvSpPr>
-        <p:spPr>
-          <a:xfrm>
-            <a:off x="4893066" y="2222958"/>
-            <a:ext cx="2448000" cy="2448000"/>
-          </a:xfrm>
-          <a:prstGeom prst="ellipse">
-            <a:avLst/>
-          </a:prstGeom>
-          <a:solidFill>
-            <a:srgbClr val="2E75B6"/>
-          </a:solidFill>
-          <a:ln>
-            <a:noFill/>
-          </a:ln>
-        </p:spPr>
-        <p:style>
-          <a:lnRef idx="2">
-            <a:schemeClr val="accent1">
-              <a:shade val="50000"/>
-            </a:schemeClr>
-          </a:lnRef>
-          <a:fillRef idx="1">
-            <a:schemeClr val="accent1"/>
-          </a:fillRef>
-          <a:effectRef idx="0">
-            <a:schemeClr val="accent1"/>
-          </a:effectRef>
-          <a:fontRef idx="minor">
-            <a:schemeClr val="lt1"/>
-          </a:fontRef>
-        </p:style>
-        <p:txBody>
-          <a:bodyPr rtlCol="0" anchor="ctr"/>
-          <a:lstStyle/>
-          <a:p>
-            <a:pPr algn="ctr"/>
-            <a:endParaRPr lang="ko-KR" altLang="en-US" dirty="0"/>
-          </a:p>
-        </p:txBody>
-      </p:sp>
-      <p:sp>
-        <p:nvSpPr>
-          <p:cNvPr id="30" name="타원 29">
-            <a:extLst>
-              <a:ext uri="{FF2B5EF4-FFF2-40B4-BE49-F238E27FC236}">
-                <a16:creationId xmlns:a16="http://schemas.microsoft.com/office/drawing/2014/main" id="{F801DFB0-65D4-4FF3-A4CD-523E0B863A92}"/>
-              </a:ext>
-            </a:extLst>
-          </p:cNvPr>
-          <p:cNvSpPr/>
-          <p:nvPr/>
-        </p:nvSpPr>
-        <p:spPr>
-          <a:xfrm>
-            <a:off x="5091944" y="2395729"/>
-            <a:ext cx="2072556" cy="2085592"/>
-          </a:xfrm>
-          <a:prstGeom prst="ellipse">
-            <a:avLst/>
-          </a:prstGeom>
-          <a:solidFill>
-            <a:srgbClr val="92D050"/>
-          </a:solidFill>
-          <a:ln w="76200">
-            <a:solidFill>
-              <a:schemeClr val="bg1"/>
-            </a:solidFill>
-          </a:ln>
-        </p:spPr>
-        <p:style>
-          <a:lnRef idx="2">
-            <a:schemeClr val="accent1">
-              <a:shade val="50000"/>
-            </a:schemeClr>
-          </a:lnRef>
-          <a:fillRef idx="1">
-            <a:schemeClr val="accent1"/>
-          </a:fillRef>
-          <a:effectRef idx="0">
-            <a:schemeClr val="accent1"/>
-          </a:effectRef>
-          <a:fontRef idx="minor">
-            <a:schemeClr val="lt1"/>
-          </a:fontRef>
-        </p:style>
-        <p:txBody>
-          <a:bodyPr rtlCol="0" anchor="ctr"/>
-          <a:lstStyle/>
-          <a:p>
-            <a:pPr algn="ctr"/>
-            <a:endParaRPr lang="ko-KR" altLang="en-US"/>
-          </a:p>
-        </p:txBody>
-      </p:sp>
-      <p:grpSp>
-        <p:nvGrpSpPr>
-          <p:cNvPr id="32" name="그룹 31">
-            <a:extLst>
-              <a:ext uri="{FF2B5EF4-FFF2-40B4-BE49-F238E27FC236}">
-                <a16:creationId xmlns:a16="http://schemas.microsoft.com/office/drawing/2014/main" id="{25F2CF36-38A3-4A79-B832-57FCCC1929A4}"/>
-              </a:ext>
-            </a:extLst>
-          </p:cNvPr>
-          <p:cNvGrpSpPr/>
-          <p:nvPr/>
-        </p:nvGrpSpPr>
-        <p:grpSpPr>
-          <a:xfrm>
-            <a:off x="1271800" y="3565688"/>
-            <a:ext cx="1230128" cy="338554"/>
-            <a:chOff x="1450226" y="3100952"/>
-            <a:chExt cx="1230128" cy="338554"/>
-          </a:xfrm>
-        </p:grpSpPr>
-        <p:sp>
-          <p:nvSpPr>
-            <p:cNvPr id="33" name="TextBox 32">
-              <a:extLst>
-                <a:ext uri="{FF2B5EF4-FFF2-40B4-BE49-F238E27FC236}">
-                  <a16:creationId xmlns:a16="http://schemas.microsoft.com/office/drawing/2014/main" id="{78E28E92-72BA-4563-8F91-92E4C2566D9F}"/>
-                </a:ext>
-              </a:extLst>
-            </p:cNvPr>
-            <p:cNvSpPr txBox="1"/>
-            <p:nvPr/>
-          </p:nvSpPr>
-          <p:spPr>
-            <a:xfrm>
-              <a:off x="1952270" y="3100952"/>
-              <a:ext cx="728084" cy="338554"/>
-            </a:xfrm>
-            <a:prstGeom prst="rect">
-              <a:avLst/>
-            </a:prstGeom>
-            <a:noFill/>
-          </p:spPr>
-          <p:txBody>
-            <a:bodyPr wrap="none" rtlCol="0">
-              <a:spAutoFit/>
-            </a:bodyPr>
-            <a:lstStyle/>
-            <a:p>
-              <a:r>
-                <a:rPr lang="ko-KR" altLang="en-US" sz="1600" dirty="0">
-                  <a:latin typeface="피플폰트 Bold" panose="020B0600000101010101" pitchFamily="50" charset="-127"/>
-                  <a:ea typeface="피플폰트 Bold" panose="020B0600000101010101" pitchFamily="50" charset="-127"/>
-                </a:rPr>
-                <a:t>소제목</a:t>
-              </a:r>
-            </a:p>
-          </p:txBody>
-        </p:sp>
-        <p:sp>
-          <p:nvSpPr>
-            <p:cNvPr id="34" name="TextBox 33">
-              <a:extLst>
-                <a:ext uri="{FF2B5EF4-FFF2-40B4-BE49-F238E27FC236}">
-                  <a16:creationId xmlns:a16="http://schemas.microsoft.com/office/drawing/2014/main" id="{3899673F-CDEE-4E43-92EC-AB5BC385E734}"/>
-                </a:ext>
-              </a:extLst>
-            </p:cNvPr>
-            <p:cNvSpPr txBox="1"/>
-            <p:nvPr/>
-          </p:nvSpPr>
-          <p:spPr>
-            <a:xfrm>
-              <a:off x="1450226" y="3100952"/>
-              <a:ext cx="444609" cy="338554"/>
-            </a:xfrm>
-            <a:prstGeom prst="rect">
-              <a:avLst/>
-            </a:prstGeom>
-            <a:noFill/>
-          </p:spPr>
-          <p:txBody>
-            <a:bodyPr wrap="none" rtlCol="0">
-              <a:spAutoFit/>
-            </a:bodyPr>
-            <a:lstStyle/>
-            <a:p>
-              <a:r>
-                <a:rPr lang="en-US" altLang="ko-KR" sz="1600" dirty="0">
-                  <a:latin typeface="피플폰트 Bold" panose="020B0600000101010101" pitchFamily="50" charset="-127"/>
-                  <a:ea typeface="피플폰트 Bold" panose="020B0600000101010101" pitchFamily="50" charset="-127"/>
-                </a:rPr>
-                <a:t>4.1</a:t>
-              </a:r>
-            </a:p>
-          </p:txBody>
-        </p:sp>
-      </p:grpSp>
-      <p:sp>
-        <p:nvSpPr>
-          <p:cNvPr id="31" name="TextBox 30">
-            <a:extLst>
-              <a:ext uri="{FF2B5EF4-FFF2-40B4-BE49-F238E27FC236}">
-                <a16:creationId xmlns:a16="http://schemas.microsoft.com/office/drawing/2014/main" id="{A0C7AD87-666B-4DF0-B421-61A74BB13515}"/>
-              </a:ext>
-            </a:extLst>
-          </p:cNvPr>
-          <p:cNvSpPr txBox="1"/>
-          <p:nvPr/>
-        </p:nvSpPr>
-        <p:spPr>
-          <a:xfrm>
-            <a:off x="1169067" y="2953758"/>
-            <a:ext cx="3614399" cy="584775"/>
-          </a:xfrm>
-          <a:prstGeom prst="rect">
-            <a:avLst/>
-          </a:prstGeom>
-          <a:noFill/>
-        </p:spPr>
-        <p:txBody>
-          <a:bodyPr wrap="square" anchor="ctr">
-            <a:spAutoFit/>
-          </a:bodyPr>
-          <a:lstStyle/>
-          <a:p>
-            <a:pPr lvl="0">
-              <a:defRPr/>
-            </a:pPr>
-            <a:r>
-              <a:rPr lang="en-US" altLang="ko-KR" sz="3200" dirty="0">
-                <a:solidFill>
-                  <a:schemeClr val="accent1">
-                    <a:lumMod val="75000"/>
-                  </a:schemeClr>
-                </a:solidFill>
-                <a:latin typeface="피플폰트 Bold" panose="020B0600000101010101" pitchFamily="50" charset="-127"/>
-                <a:ea typeface="피플폰트 Bold" panose="020B0600000101010101" pitchFamily="50" charset="-127"/>
-              </a:rPr>
-              <a:t>04  Appendix</a:t>
-            </a:r>
-            <a:endParaRPr lang="ko-KR" altLang="en-US" sz="3200" dirty="0">
-              <a:solidFill>
-                <a:schemeClr val="accent1">
-                  <a:lumMod val="75000"/>
-                </a:schemeClr>
-              </a:solidFill>
-              <a:latin typeface="피플폰트 Bold" panose="020B0600000101010101" pitchFamily="50" charset="-127"/>
-              <a:ea typeface="피플폰트 Bold" panose="020B0600000101010101" pitchFamily="50" charset="-127"/>
-            </a:endParaRPr>
-          </a:p>
-        </p:txBody>
-      </p:sp>
-    </p:spTree>
-    <p:extLst>
-      <p:ext uri="{BB962C8B-B14F-4D97-AF65-F5344CB8AC3E}">
-        <p14:creationId xmlns:p14="http://schemas.microsoft.com/office/powerpoint/2010/main" val="217085347"/>
       </p:ext>
     </p:extLst>
   </p:cSld>
